--- a/slide/L4_idor_password.pptx
+++ b/slide/L4_idor_password.pptx
@@ -3116,7 +3116,7 @@
             <a:avLst/>
           </a:prstGeom>
           <a:solidFill>
-            <a:srgbClr val="0F2D52"/>
+            <a:srgbClr val="081B33"/>
           </a:solidFill>
           <a:ln>
             <a:noFill/>
@@ -3152,8 +3152,8 @@
         </p:nvSpPr>
         <p:spPr>
           <a:xfrm>
-            <a:off x="0" y="914400"/>
-            <a:ext cx="365760" cy="2286000"/>
+            <a:off x="0" y="0"/>
+            <a:ext cx="12191695" cy="137160"/>
           </a:xfrm>
           <a:prstGeom prst="rect">
             <a:avLst/>
@@ -3189,14 +3189,186 @@
       </p:sp>
       <p:sp>
         <p:nvSpPr>
-          <p:cNvPr id="4" name="TextBox 3"/>
+          <p:cNvPr id="4" name="Oval 3"/>
+          <p:cNvSpPr/>
+          <p:nvPr/>
+        </p:nvSpPr>
+        <p:spPr>
+          <a:xfrm>
+            <a:off x="8686800" y="-914400"/>
+            <a:ext cx="2743200" cy="2743200"/>
+          </a:xfrm>
+          <a:prstGeom prst="ellipse">
+            <a:avLst/>
+          </a:prstGeom>
+          <a:noFill/>
+          <a:ln w="25400">
+            <a:solidFill>
+              <a:srgbClr val="00A0B0"/>
+            </a:solidFill>
+          </a:ln>
+        </p:spPr>
+        <p:style>
+          <a:lnRef idx="1">
+            <a:schemeClr val="accent1"/>
+          </a:lnRef>
+          <a:fillRef idx="3">
+            <a:schemeClr val="accent1"/>
+          </a:fillRef>
+          <a:effectRef idx="2">
+            <a:schemeClr val="accent1"/>
+          </a:effectRef>
+          <a:fontRef idx="minor">
+            <a:schemeClr val="lt1"/>
+          </a:fontRef>
+        </p:style>
+        <p:txBody>
+          <a:bodyPr rtlCol="0" anchor="ctr"/>
+          <a:lstStyle/>
+          <a:p>
+            <a:pPr algn="ctr"/>
+          </a:p>
+        </p:txBody>
+      </p:sp>
+      <p:sp>
+        <p:nvSpPr>
+          <p:cNvPr id="5" name="Oval 4"/>
+          <p:cNvSpPr/>
+          <p:nvPr/>
+        </p:nvSpPr>
+        <p:spPr>
+          <a:xfrm>
+            <a:off x="10515600" y="1371600"/>
+            <a:ext cx="1828800" cy="1828800"/>
+          </a:xfrm>
+          <a:prstGeom prst="ellipse">
+            <a:avLst/>
+          </a:prstGeom>
+          <a:noFill/>
+          <a:ln w="25400">
+            <a:solidFill>
+              <a:srgbClr val="00A0B0"/>
+            </a:solidFill>
+          </a:ln>
+        </p:spPr>
+        <p:style>
+          <a:lnRef idx="1">
+            <a:schemeClr val="accent1"/>
+          </a:lnRef>
+          <a:fillRef idx="3">
+            <a:schemeClr val="accent1"/>
+          </a:fillRef>
+          <a:effectRef idx="2">
+            <a:schemeClr val="accent1"/>
+          </a:effectRef>
+          <a:fontRef idx="minor">
+            <a:schemeClr val="lt1"/>
+          </a:fontRef>
+        </p:style>
+        <p:txBody>
+          <a:bodyPr rtlCol="0" anchor="ctr"/>
+          <a:lstStyle/>
+          <a:p>
+            <a:pPr algn="ctr"/>
+          </a:p>
+        </p:txBody>
+      </p:sp>
+      <p:sp>
+        <p:nvSpPr>
+          <p:cNvPr id="6" name="Oval 5"/>
+          <p:cNvSpPr/>
+          <p:nvPr/>
+        </p:nvSpPr>
+        <p:spPr>
+          <a:xfrm>
+            <a:off x="8458200" y="3429000"/>
+            <a:ext cx="2286000" cy="2286000"/>
+          </a:xfrm>
+          <a:prstGeom prst="ellipse">
+            <a:avLst/>
+          </a:prstGeom>
+          <a:noFill/>
+          <a:ln w="25400">
+            <a:solidFill>
+              <a:srgbClr val="00A0B0"/>
+            </a:solidFill>
+          </a:ln>
+        </p:spPr>
+        <p:style>
+          <a:lnRef idx="1">
+            <a:schemeClr val="accent1"/>
+          </a:lnRef>
+          <a:fillRef idx="3">
+            <a:schemeClr val="accent1"/>
+          </a:fillRef>
+          <a:effectRef idx="2">
+            <a:schemeClr val="accent1"/>
+          </a:effectRef>
+          <a:fontRef idx="minor">
+            <a:schemeClr val="lt1"/>
+          </a:fontRef>
+        </p:style>
+        <p:txBody>
+          <a:bodyPr rtlCol="0" anchor="ctr"/>
+          <a:lstStyle/>
+          <a:p>
+            <a:pPr algn="ctr"/>
+          </a:p>
+        </p:txBody>
+      </p:sp>
+      <p:sp>
+        <p:nvSpPr>
+          <p:cNvPr id="7" name="Rectangle 6"/>
+          <p:cNvSpPr/>
+          <p:nvPr/>
+        </p:nvSpPr>
+        <p:spPr>
+          <a:xfrm>
+            <a:off x="0" y="2286000"/>
+            <a:ext cx="228600" cy="2743200"/>
+          </a:xfrm>
+          <a:prstGeom prst="rect">
+            <a:avLst/>
+          </a:prstGeom>
+          <a:solidFill>
+            <a:srgbClr val="00A0B0"/>
+          </a:solidFill>
+          <a:ln>
+            <a:noFill/>
+          </a:ln>
+        </p:spPr>
+        <p:style>
+          <a:lnRef idx="1">
+            <a:schemeClr val="accent1"/>
+          </a:lnRef>
+          <a:fillRef idx="3">
+            <a:schemeClr val="accent1"/>
+          </a:fillRef>
+          <a:effectRef idx="2">
+            <a:schemeClr val="accent1"/>
+          </a:effectRef>
+          <a:fontRef idx="minor">
+            <a:schemeClr val="lt1"/>
+          </a:fontRef>
+        </p:style>
+        <p:txBody>
+          <a:bodyPr rtlCol="0" anchor="ctr"/>
+          <a:lstStyle/>
+          <a:p>
+            <a:pPr algn="ctr"/>
+          </a:p>
+        </p:txBody>
+      </p:sp>
+      <p:sp>
+        <p:nvSpPr>
+          <p:cNvPr id="8" name="TextBox 7"/>
           <p:cNvSpPr txBox="1"/>
           <p:nvPr/>
         </p:nvSpPr>
         <p:spPr>
           <a:xfrm>
-            <a:off x="731520" y="914400"/>
-            <a:ext cx="10058400" cy="548640"/>
+            <a:off x="548640" y="2286000"/>
+            <a:ext cx="7315200" cy="457200"/>
           </a:xfrm>
           <a:prstGeom prst="rect">
             <a:avLst/>
@@ -3211,7 +3383,7 @@
           <a:p>
             <a:pPr algn="l"/>
             <a:r>
-              <a:rPr sz="1800" b="1" i="0">
+              <a:rPr sz="1600" b="1" i="0">
                 <a:solidFill>
                   <a:srgbClr val="00A0B0"/>
                 </a:solidFill>
@@ -3224,14 +3396,14 @@
       </p:sp>
       <p:sp>
         <p:nvSpPr>
-          <p:cNvPr id="5" name="TextBox 4"/>
+          <p:cNvPr id="9" name="TextBox 8"/>
           <p:cNvSpPr txBox="1"/>
           <p:nvPr/>
         </p:nvSpPr>
         <p:spPr>
           <a:xfrm>
-            <a:off x="731520" y="1554480"/>
-            <a:ext cx="10058400" cy="1828800"/>
+            <a:off x="548640" y="2743200"/>
+            <a:ext cx="10515600" cy="2011680"/>
           </a:xfrm>
           <a:prstGeom prst="rect">
             <a:avLst/>
@@ -3246,7 +3418,7 @@
           <a:p>
             <a:pPr algn="l"/>
             <a:r>
-              <a:rPr sz="5400" b="1" i="0">
+              <a:rPr sz="5600" b="1" i="0">
                 <a:solidFill>
                   <a:srgbClr val="FFFFFF"/>
                 </a:solidFill>
@@ -3259,14 +3431,14 @@
       </p:sp>
       <p:sp>
         <p:nvSpPr>
-          <p:cNvPr id="6" name="TextBox 5"/>
+          <p:cNvPr id="10" name="TextBox 9"/>
           <p:cNvSpPr txBox="1"/>
           <p:nvPr/>
         </p:nvSpPr>
         <p:spPr>
           <a:xfrm>
-            <a:off x="731520" y="3566160"/>
-            <a:ext cx="10058400" cy="1097280"/>
+            <a:off x="548640" y="4572000"/>
+            <a:ext cx="10058400" cy="914400"/>
           </a:xfrm>
           <a:prstGeom prst="rect">
             <a:avLst/>
@@ -3281,27 +3453,107 @@
           <a:p>
             <a:pPr algn="l"/>
             <a:r>
-              <a:rPr sz="2400" b="0" i="1">
+              <a:rPr sz="2200" b="0" i="1">
+                <a:solidFill>
+                  <a:srgbClr val="6FD8E0"/>
+                </a:solidFill>
+                <a:latin typeface="Calibri"/>
+              </a:rPr>
+              <a:t>IDOR, status code, bcrypt — gli errori più costosi</a:t>
+            </a:r>
+          </a:p>
+        </p:txBody>
+      </p:sp>
+      <p:sp>
+        <p:nvSpPr>
+          <p:cNvPr id="11" name="Rounded Rectangle 10"/>
+          <p:cNvSpPr/>
+          <p:nvPr/>
+        </p:nvSpPr>
+        <p:spPr>
+          <a:xfrm>
+            <a:off x="548640" y="5669280"/>
+            <a:ext cx="2011680" cy="411480"/>
+          </a:xfrm>
+          <a:prstGeom prst="roundRect">
+            <a:avLst>
+              <a:gd name="adj" fmla="val 8000"/>
+            </a:avLst>
+          </a:prstGeom>
+          <a:solidFill>
+            <a:srgbClr val="00A0B0"/>
+          </a:solidFill>
+          <a:ln>
+            <a:noFill/>
+          </a:ln>
+        </p:spPr>
+        <p:style>
+          <a:lnRef idx="1">
+            <a:schemeClr val="accent1"/>
+          </a:lnRef>
+          <a:fillRef idx="3">
+            <a:schemeClr val="accent1"/>
+          </a:fillRef>
+          <a:effectRef idx="2">
+            <a:schemeClr val="accent1"/>
+          </a:effectRef>
+          <a:fontRef idx="minor">
+            <a:schemeClr val="lt1"/>
+          </a:fontRef>
+        </p:style>
+        <p:txBody>
+          <a:bodyPr rtlCol="0" anchor="ctr"/>
+          <a:lstStyle/>
+          <a:p>
+            <a:pPr algn="ctr"/>
+          </a:p>
+        </p:txBody>
+      </p:sp>
+      <p:sp>
+        <p:nvSpPr>
+          <p:cNvPr id="12" name="TextBox 11"/>
+          <p:cNvSpPr txBox="1"/>
+          <p:nvPr/>
+        </p:nvSpPr>
+        <p:spPr>
+          <a:xfrm>
+            <a:off x="548640" y="5669280"/>
+            <a:ext cx="2011680" cy="411480"/>
+          </a:xfrm>
+          <a:prstGeom prst="rect">
+            <a:avLst/>
+          </a:prstGeom>
+          <a:noFill/>
+        </p:spPr>
+        <p:txBody>
+          <a:bodyPr wrap="square" lIns="45720" rIns="45720" tIns="18288" bIns="18288" anchor="ctr">
+            <a:spAutoFit/>
+          </a:bodyPr>
+          <a:lstStyle/>
+          <a:p>
+            <a:pPr algn="ctr"/>
+            <a:r>
+              <a:rPr sz="1200" b="1" i="0">
                 <a:solidFill>
                   <a:srgbClr val="FFFFFF"/>
                 </a:solidFill>
                 <a:latin typeface="Calibri"/>
               </a:rPr>
-              <a:t>IDOR, status code, bcrypt — gli errori più costosi</a:t>
-            </a:r>
-          </a:p>
-        </p:txBody>
-      </p:sp>
-      <p:sp>
-        <p:nvSpPr>
-          <p:cNvPr id="7" name="TextBox 6"/>
+              <a:t>⏱  Lezione 4 · 2 ore</a:t>
+            </a:r>
+          </a:p>
+        </p:txBody>
+      </p:sp>
+      <p:sp>
+        <p:nvSpPr>
+          <p:cNvPr id="13" name="TextBox 12"/>
           <p:cNvSpPr txBox="1"/>
           <p:nvPr/>
         </p:nvSpPr>
         <p:spPr>
           <a:xfrm>
-            <a:off x="731520" y="5029200"/>
-            <a:ext cx="10058400" cy="457200"/>
+            <a:off x="548640" y="6263640"/>
+            <a:ext cx="10972800" cy="365760"/>
           </a:xfrm>
           <a:prstGeom prst="rect">
             <a:avLst/>
@@ -3316,83 +3568,13 @@
           <a:p>
             <a:pPr algn="l"/>
             <a:r>
-              <a:rPr sz="1800" b="1" i="0">
-                <a:solidFill>
-                  <a:srgbClr val="00A0B0"/>
-                </a:solidFill>
-                <a:latin typeface="Calibri"/>
-              </a:rPr>
-              <a:t>⏱  Lezione 4 · 2 ore</a:t>
-            </a:r>
-          </a:p>
-        </p:txBody>
-      </p:sp>
-      <p:sp>
-        <p:nvSpPr>
-          <p:cNvPr id="8" name="TextBox 7"/>
-          <p:cNvSpPr txBox="1"/>
-          <p:nvPr/>
-        </p:nvSpPr>
-        <p:spPr>
-          <a:xfrm>
-            <a:off x="731520" y="5943600"/>
-            <a:ext cx="10058400" cy="457200"/>
-          </a:xfrm>
-          <a:prstGeom prst="rect">
-            <a:avLst/>
-          </a:prstGeom>
-          <a:noFill/>
-        </p:spPr>
-        <p:txBody>
-          <a:bodyPr wrap="square" lIns="45720" rIns="45720" tIns="18288" bIns="18288" anchor="t">
-            <a:spAutoFit/>
-          </a:bodyPr>
-          <a:lstStyle/>
-          <a:p>
-            <a:pPr algn="l"/>
-            <a:r>
-              <a:rPr sz="1200" b="0" i="0">
-                <a:solidFill>
-                  <a:srgbClr val="FFFFFF"/>
-                </a:solidFill>
-                <a:latin typeface="Calibri"/>
-              </a:rPr>
-              <a:t>Corso IFTS STEM · Specialista nelle Tecniche di Evoluzione e Manutenzione del Software</a:t>
-            </a:r>
-          </a:p>
-        </p:txBody>
-      </p:sp>
-      <p:sp>
-        <p:nvSpPr>
-          <p:cNvPr id="9" name="TextBox 8"/>
-          <p:cNvSpPr txBox="1"/>
-          <p:nvPr/>
-        </p:nvSpPr>
-        <p:spPr>
-          <a:xfrm>
-            <a:off x="731520" y="6263640"/>
-            <a:ext cx="10058400" cy="365760"/>
-          </a:xfrm>
-          <a:prstGeom prst="rect">
-            <a:avLst/>
-          </a:prstGeom>
-          <a:noFill/>
-        </p:spPr>
-        <p:txBody>
-          <a:bodyPr wrap="square" lIns="45720" rIns="45720" tIns="18288" bIns="18288" anchor="t">
-            <a:spAutoFit/>
-          </a:bodyPr>
-          <a:lstStyle/>
-          <a:p>
-            <a:pPr algn="l"/>
-            <a:r>
-              <a:rPr sz="1100" b="0" i="1">
-                <a:solidFill>
-                  <a:srgbClr val="FFFFFF"/>
-                </a:solidFill>
-                <a:latin typeface="Calibri"/>
-              </a:rPr>
-              <a:t>Ing. Alessandro Manneschi · Anno formativo 2024/2025</a:t>
+              <a:rPr sz="1000" b="0" i="0">
+                <a:solidFill>
+                  <a:srgbClr val="CBD0D8"/>
+                </a:solidFill>
+                <a:latin typeface="Calibri"/>
+              </a:rPr>
+              <a:t>Corso IFTS STEM · Ing. Alessandro Manneschi · 2024/2025</a:t>
             </a:r>
           </a:p>
         </p:txBody>
@@ -3488,54 +3670,35 @@
                 </a:solidFill>
                 <a:latin typeface="Calibri"/>
               </a:rPr>
-              <a:t>Tre operazioni DIVERSE</a:t>
-            </a:r>
-          </a:p>
-        </p:txBody>
-      </p:sp>
-      <p:sp>
-        <p:nvSpPr>
-          <p:cNvPr id="4" name="Rectangle 3"/>
-          <p:cNvSpPr/>
-          <p:nvPr/>
-        </p:nvSpPr>
-        <p:spPr>
-          <a:xfrm>
-            <a:off x="457200" y="1097280"/>
-            <a:ext cx="5486400" cy="640080"/>
-          </a:xfrm>
-          <a:prstGeom prst="rect">
-            <a:avLst/>
-          </a:prstGeom>
-          <a:solidFill>
-            <a:srgbClr val="E63946"/>
-          </a:solidFill>
-          <a:ln>
-            <a:noFill/>
-          </a:ln>
-        </p:spPr>
-        <p:style>
-          <a:lnRef idx="1">
-            <a:schemeClr val="accent1"/>
-          </a:lnRef>
-          <a:fillRef idx="3">
-            <a:schemeClr val="accent1"/>
-          </a:fillRef>
-          <a:effectRef idx="2">
-            <a:schemeClr val="accent1"/>
-          </a:effectRef>
-          <a:fontRef idx="minor">
-            <a:schemeClr val="lt1"/>
-          </a:fontRef>
-        </p:style>
-        <p:txBody>
-          <a:bodyPr rtlCol="0" anchor="ctr"/>
-          <a:lstStyle/>
-          <a:p>
-            <a:pPr algn="ctr"/>
-          </a:p>
-        </p:txBody>
-      </p:sp>
+              <a:t>bcrypt: l'implementazione corretta</a:t>
+            </a:r>
+          </a:p>
+        </p:txBody>
+      </p:sp>
+      <p:pic>
+        <p:nvPicPr>
+          <p:cNvPr id="4" name="Picture 3" descr="cap4_bcrypt.png"/>
+          <p:cNvPicPr>
+            <a:picLocks noChangeAspect="1"/>
+          </p:cNvPicPr>
+          <p:nvPr/>
+        </p:nvPicPr>
+        <p:blipFill>
+          <a:blip r:embed="rId2"/>
+          <a:stretch>
+            <a:fillRect/>
+          </a:stretch>
+        </p:blipFill>
+        <p:spPr>
+          <a:xfrm>
+            <a:off x="640080" y="1097280"/>
+            <a:ext cx="10881360" cy="4572000"/>
+          </a:xfrm>
+          <a:prstGeom prst="rect">
+            <a:avLst/>
+          </a:prstGeom>
+        </p:spPr>
+      </p:pic>
       <p:sp>
         <p:nvSpPr>
           <p:cNvPr id="5" name="TextBox 4"/>
@@ -3544,8 +3707,8 @@
         </p:nvSpPr>
         <p:spPr>
           <a:xfrm>
-            <a:off x="457200" y="1097280"/>
-            <a:ext cx="5486400" cy="640080"/>
+            <a:off x="457200" y="5852160"/>
+            <a:ext cx="11247120" cy="365760"/>
           </a:xfrm>
           <a:prstGeom prst="rect">
             <a:avLst/>
@@ -3553,691 +3716,27 @@
           <a:noFill/>
         </p:spPr>
         <p:txBody>
-          <a:bodyPr wrap="square" lIns="45720" rIns="45720" tIns="18288" bIns="18288" anchor="ctr">
+          <a:bodyPr wrap="square" lIns="45720" rIns="45720" tIns="18288" bIns="18288" anchor="t">
             <a:spAutoFit/>
           </a:bodyPr>
           <a:lstStyle/>
           <a:p>
             <a:pPr algn="ctr"/>
             <a:r>
-              <a:rPr sz="1800" b="1" i="0">
-                <a:solidFill>
-                  <a:srgbClr val="FFFFFF"/>
-                </a:solidFill>
-                <a:latin typeface="Calibri"/>
-              </a:rPr>
-              <a:t>Encoding — NO per password</a:t>
-            </a:r>
-          </a:p>
-        </p:txBody>
-      </p:sp>
-      <p:sp>
-        <p:nvSpPr>
-          <p:cNvPr id="6" name="Rectangle 5"/>
-          <p:cNvSpPr/>
-          <p:nvPr/>
-        </p:nvSpPr>
-        <p:spPr>
-          <a:xfrm>
-            <a:off x="457200" y="1737360"/>
-            <a:ext cx="5486400" cy="4937760"/>
-          </a:xfrm>
-          <a:prstGeom prst="rect">
-            <a:avLst/>
-          </a:prstGeom>
-          <a:solidFill>
-            <a:srgbClr val="F1F4F8"/>
-          </a:solidFill>
-          <a:ln>
-            <a:solidFill>
-              <a:srgbClr val="E63946"/>
-            </a:solidFill>
-          </a:ln>
-        </p:spPr>
-        <p:style>
-          <a:lnRef idx="1">
-            <a:schemeClr val="accent1"/>
-          </a:lnRef>
-          <a:fillRef idx="3">
-            <a:schemeClr val="accent1"/>
-          </a:fillRef>
-          <a:effectRef idx="2">
-            <a:schemeClr val="accent1"/>
-          </a:effectRef>
-          <a:fontRef idx="minor">
-            <a:schemeClr val="lt1"/>
-          </a:fontRef>
-        </p:style>
-        <p:txBody>
-          <a:bodyPr rtlCol="0" anchor="ctr"/>
-          <a:lstStyle/>
-          <a:p>
-            <a:pPr algn="ctr"/>
-          </a:p>
-        </p:txBody>
-      </p:sp>
-      <p:sp>
-        <p:nvSpPr>
-          <p:cNvPr id="7" name="TextBox 6"/>
-          <p:cNvSpPr txBox="1"/>
-          <p:nvPr/>
-        </p:nvSpPr>
-        <p:spPr>
-          <a:xfrm>
-            <a:off x="640080" y="1874519"/>
-            <a:ext cx="5120640" cy="4937760"/>
-          </a:xfrm>
-          <a:prstGeom prst="rect">
-            <a:avLst/>
-          </a:prstGeom>
-          <a:noFill/>
-        </p:spPr>
-        <p:txBody>
-          <a:bodyPr wrap="square">
-            <a:spAutoFit/>
-          </a:bodyPr>
-          <a:lstStyle/>
-          <a:p>
-            <a:pPr>
-              <a:lnSpc>
-                <a:spcPct val="140000"/>
-              </a:lnSpc>
-            </a:pPr>
-            <a:r>
-              <a:rPr sz="1500" b="1">
-                <a:solidFill>
-                  <a:srgbClr val="00A0B0"/>
-                </a:solidFill>
-                <a:latin typeface="Calibri"/>
-              </a:rPr>
-              <a:t>▸  </a:t>
-            </a:r>
-            <a:r>
-              <a:rPr sz="1500">
-                <a:solidFill>
-                  <a:srgbClr val="1A1A2E"/>
-                </a:solidFill>
-                <a:latin typeface="Calibri"/>
-              </a:rPr>
-              <a:t>Base64, URL encoding</a:t>
-            </a:r>
-          </a:p>
-          <a:p>
-            <a:pPr>
-              <a:lnSpc>
-                <a:spcPct val="140000"/>
-              </a:lnSpc>
-            </a:pPr>
-            <a:r>
-              <a:rPr sz="1500" b="1">
-                <a:solidFill>
-                  <a:srgbClr val="00A0B0"/>
-                </a:solidFill>
-                <a:latin typeface="Calibri"/>
-              </a:rPr>
-              <a:t>▸  </a:t>
-            </a:r>
-            <a:r>
-              <a:rPr sz="1500">
-                <a:solidFill>
-                  <a:srgbClr val="1A1A2E"/>
-                </a:solidFill>
-                <a:latin typeface="Calibri"/>
-              </a:rPr>
-              <a:t>Reversibile e banale</a:t>
-            </a:r>
-          </a:p>
-          <a:p>
-            <a:pPr>
-              <a:lnSpc>
-                <a:spcPct val="140000"/>
-              </a:lnSpc>
-            </a:pPr>
-            <a:r>
-              <a:rPr sz="1500" b="1">
-                <a:solidFill>
-                  <a:srgbClr val="00A0B0"/>
-                </a:solidFill>
-                <a:latin typeface="Calibri"/>
-              </a:rPr>
-              <a:t>▸  </a:t>
-            </a:r>
-            <a:r>
-              <a:rPr sz="1500">
-                <a:solidFill>
-                  <a:srgbClr val="1A1A2E"/>
-                </a:solidFill>
-                <a:latin typeface="Calibri"/>
-              </a:rPr>
-              <a:t>Serve solo per il TRASPORTO dati</a:t>
-            </a:r>
-          </a:p>
-          <a:p>
-            <a:pPr>
-              <a:lnSpc>
-                <a:spcPct val="140000"/>
-              </a:lnSpc>
-            </a:pPr>
-            <a:r>
-              <a:rPr sz="1500" b="1">
-                <a:solidFill>
-                  <a:srgbClr val="00A0B0"/>
-                </a:solidFill>
-                <a:latin typeface="Calibri"/>
-              </a:rPr>
-              <a:t>▸  </a:t>
-            </a:r>
-            <a:r>
-              <a:rPr sz="1500">
-                <a:solidFill>
-                  <a:srgbClr val="1A1A2E"/>
-                </a:solidFill>
-                <a:latin typeface="Calibri"/>
-              </a:rPr>
-              <a:t>Non è crittografia</a:t>
-            </a:r>
-          </a:p>
-          <a:p>
-            <a:pPr>
-              <a:lnSpc>
-                <a:spcPct val="140000"/>
-              </a:lnSpc>
-            </a:pPr>
-            <a:r>
-              <a:rPr sz="1500" b="1">
-                <a:solidFill>
-                  <a:srgbClr val="00A0B0"/>
-                </a:solidFill>
-                <a:latin typeface="Calibri"/>
-              </a:rPr>
-              <a:t>▸  </a:t>
-            </a:r>
-            <a:r>
-              <a:rPr sz="1500">
-                <a:solidFill>
-                  <a:srgbClr val="1A1A2E"/>
-                </a:solidFill>
-                <a:latin typeface="Calibri"/>
-              </a:rPr>
-              <a:t/>
-            </a:r>
-          </a:p>
-          <a:p>
-            <a:pPr>
-              <a:lnSpc>
-                <a:spcPct val="140000"/>
-              </a:lnSpc>
-            </a:pPr>
-            <a:r>
-              <a:rPr sz="1500" b="1">
-                <a:solidFill>
-                  <a:srgbClr val="00A0B0"/>
-                </a:solidFill>
-                <a:latin typeface="Calibri"/>
-              </a:rPr>
-              <a:t>▸  </a:t>
-            </a:r>
-            <a:r>
-              <a:rPr sz="1500">
-                <a:solidFill>
-                  <a:srgbClr val="1A1A2E"/>
-                </a:solidFill>
-                <a:latin typeface="Calibri"/>
-              </a:rPr>
-              <a:t>Encryption — NO per password</a:t>
-            </a:r>
-          </a:p>
-          <a:p>
-            <a:pPr>
-              <a:lnSpc>
-                <a:spcPct val="140000"/>
-              </a:lnSpc>
-            </a:pPr>
-            <a:r>
-              <a:rPr sz="1500" b="1">
-                <a:solidFill>
-                  <a:srgbClr val="00A0B0"/>
-                </a:solidFill>
-                <a:latin typeface="Calibri"/>
-              </a:rPr>
-              <a:t>▸  </a:t>
-            </a:r>
-            <a:r>
-              <a:rPr sz="1500">
-                <a:solidFill>
-                  <a:srgbClr val="1A1A2E"/>
-                </a:solidFill>
-                <a:latin typeface="Calibri"/>
-              </a:rPr>
-              <a:t>AES, RSA</a:t>
-            </a:r>
-          </a:p>
-          <a:p>
-            <a:pPr>
-              <a:lnSpc>
-                <a:spcPct val="140000"/>
-              </a:lnSpc>
-            </a:pPr>
-            <a:r>
-              <a:rPr sz="1500" b="1">
-                <a:solidFill>
-                  <a:srgbClr val="00A0B0"/>
-                </a:solidFill>
-                <a:latin typeface="Calibri"/>
-              </a:rPr>
-              <a:t>▸  </a:t>
-            </a:r>
-            <a:r>
-              <a:rPr sz="1500">
-                <a:solidFill>
-                  <a:srgbClr val="1A1A2E"/>
-                </a:solidFill>
-                <a:latin typeface="Calibri"/>
-              </a:rPr>
-              <a:t>Reversibile con CHIAVE</a:t>
-            </a:r>
-          </a:p>
-          <a:p>
-            <a:pPr>
-              <a:lnSpc>
-                <a:spcPct val="140000"/>
-              </a:lnSpc>
-            </a:pPr>
-            <a:r>
-              <a:rPr sz="1500" b="1">
-                <a:solidFill>
-                  <a:srgbClr val="00A0B0"/>
-                </a:solidFill>
-                <a:latin typeface="Calibri"/>
-              </a:rPr>
-              <a:t>▸  </a:t>
-            </a:r>
-            <a:r>
-              <a:rPr sz="1500">
-                <a:solidFill>
-                  <a:srgbClr val="1A1A2E"/>
-                </a:solidFill>
-                <a:latin typeface="Calibri"/>
-              </a:rPr>
-              <a:t>Se rubano la chiave: disastro</a:t>
-            </a:r>
-          </a:p>
-        </p:txBody>
-      </p:sp>
-      <p:sp>
-        <p:nvSpPr>
-          <p:cNvPr id="8" name="Rectangle 7"/>
-          <p:cNvSpPr/>
-          <p:nvPr/>
-        </p:nvSpPr>
-        <p:spPr>
-          <a:xfrm>
-            <a:off x="6217920" y="1097280"/>
-            <a:ext cx="5486400" cy="640080"/>
-          </a:xfrm>
-          <a:prstGeom prst="rect">
-            <a:avLst/>
-          </a:prstGeom>
-          <a:solidFill>
-            <a:srgbClr val="06A77D"/>
-          </a:solidFill>
-          <a:ln>
-            <a:noFill/>
-          </a:ln>
-        </p:spPr>
-        <p:style>
-          <a:lnRef idx="1">
-            <a:schemeClr val="accent1"/>
-          </a:lnRef>
-          <a:fillRef idx="3">
-            <a:schemeClr val="accent1"/>
-          </a:fillRef>
-          <a:effectRef idx="2">
-            <a:schemeClr val="accent1"/>
-          </a:effectRef>
-          <a:fontRef idx="minor">
-            <a:schemeClr val="lt1"/>
-          </a:fontRef>
-        </p:style>
-        <p:txBody>
-          <a:bodyPr rtlCol="0" anchor="ctr"/>
-          <a:lstStyle/>
-          <a:p>
-            <a:pPr algn="ctr"/>
-          </a:p>
-        </p:txBody>
-      </p:sp>
-      <p:sp>
-        <p:nvSpPr>
-          <p:cNvPr id="9" name="TextBox 8"/>
-          <p:cNvSpPr txBox="1"/>
-          <p:nvPr/>
-        </p:nvSpPr>
-        <p:spPr>
-          <a:xfrm>
-            <a:off x="6217920" y="1097280"/>
-            <a:ext cx="5486400" cy="640080"/>
-          </a:xfrm>
-          <a:prstGeom prst="rect">
-            <a:avLst/>
-          </a:prstGeom>
-          <a:noFill/>
-        </p:spPr>
-        <p:txBody>
-          <a:bodyPr wrap="square" lIns="45720" rIns="45720" tIns="18288" bIns="18288" anchor="ctr">
-            <a:spAutoFit/>
-          </a:bodyPr>
-          <a:lstStyle/>
-          <a:p>
-            <a:pPr algn="ctr"/>
-            <a:r>
-              <a:rPr sz="1800" b="1" i="0">
-                <a:solidFill>
-                  <a:srgbClr val="FFFFFF"/>
-                </a:solidFill>
-                <a:latin typeface="Calibri"/>
-              </a:rPr>
-              <a:t>Hashing — SÌ per password</a:t>
-            </a:r>
-          </a:p>
-        </p:txBody>
-      </p:sp>
-      <p:sp>
-        <p:nvSpPr>
-          <p:cNvPr id="10" name="Rectangle 9"/>
-          <p:cNvSpPr/>
-          <p:nvPr/>
-        </p:nvSpPr>
-        <p:spPr>
-          <a:xfrm>
-            <a:off x="6217920" y="1737360"/>
-            <a:ext cx="5486400" cy="4937760"/>
-          </a:xfrm>
-          <a:prstGeom prst="rect">
-            <a:avLst/>
-          </a:prstGeom>
-          <a:solidFill>
-            <a:srgbClr val="F1F4F8"/>
-          </a:solidFill>
-          <a:ln>
-            <a:solidFill>
-              <a:srgbClr val="06A77D"/>
-            </a:solidFill>
-          </a:ln>
-        </p:spPr>
-        <p:style>
-          <a:lnRef idx="1">
-            <a:schemeClr val="accent1"/>
-          </a:lnRef>
-          <a:fillRef idx="3">
-            <a:schemeClr val="accent1"/>
-          </a:fillRef>
-          <a:effectRef idx="2">
-            <a:schemeClr val="accent1"/>
-          </a:effectRef>
-          <a:fontRef idx="minor">
-            <a:schemeClr val="lt1"/>
-          </a:fontRef>
-        </p:style>
-        <p:txBody>
-          <a:bodyPr rtlCol="0" anchor="ctr"/>
-          <a:lstStyle/>
-          <a:p>
-            <a:pPr algn="ctr"/>
-          </a:p>
-        </p:txBody>
-      </p:sp>
-      <p:sp>
-        <p:nvSpPr>
-          <p:cNvPr id="11" name="TextBox 10"/>
-          <p:cNvSpPr txBox="1"/>
-          <p:nvPr/>
-        </p:nvSpPr>
-        <p:spPr>
-          <a:xfrm>
-            <a:off x="6400800" y="1874519"/>
-            <a:ext cx="5120640" cy="4937760"/>
-          </a:xfrm>
-          <a:prstGeom prst="rect">
-            <a:avLst/>
-          </a:prstGeom>
-          <a:noFill/>
-        </p:spPr>
-        <p:txBody>
-          <a:bodyPr wrap="square">
-            <a:spAutoFit/>
-          </a:bodyPr>
-          <a:lstStyle/>
-          <a:p>
-            <a:pPr>
-              <a:lnSpc>
-                <a:spcPct val="140000"/>
-              </a:lnSpc>
-            </a:pPr>
-            <a:r>
-              <a:rPr sz="1500" b="1">
-                <a:solidFill>
-                  <a:srgbClr val="00A0B0"/>
-                </a:solidFill>
-                <a:latin typeface="Calibri"/>
-              </a:rPr>
-              <a:t>▸  </a:t>
-            </a:r>
-            <a:r>
-              <a:rPr sz="1500">
-                <a:solidFill>
-                  <a:srgbClr val="1A1A2E"/>
-                </a:solidFill>
-                <a:latin typeface="Calibri"/>
-              </a:rPr>
-              <a:t>bcrypt, Argon2id, scrypt</a:t>
-            </a:r>
-          </a:p>
-          <a:p>
-            <a:pPr>
-              <a:lnSpc>
-                <a:spcPct val="140000"/>
-              </a:lnSpc>
-            </a:pPr>
-            <a:r>
-              <a:rPr sz="1500" b="1">
-                <a:solidFill>
-                  <a:srgbClr val="00A0B0"/>
-                </a:solidFill>
-                <a:latin typeface="Calibri"/>
-              </a:rPr>
-              <a:t>▸  </a:t>
-            </a:r>
-            <a:r>
-              <a:rPr sz="1500">
-                <a:solidFill>
-                  <a:srgbClr val="1A1A2E"/>
-                </a:solidFill>
-                <a:latin typeface="Calibri"/>
-              </a:rPr>
-              <a:t>NON reversibile</a:t>
-            </a:r>
-          </a:p>
-          <a:p>
-            <a:pPr>
-              <a:lnSpc>
-                <a:spcPct val="140000"/>
-              </a:lnSpc>
-            </a:pPr>
-            <a:r>
-              <a:rPr sz="1500" b="1">
-                <a:solidFill>
-                  <a:srgbClr val="00A0B0"/>
-                </a:solidFill>
-                <a:latin typeface="Calibri"/>
-              </a:rPr>
-              <a:t>▸  </a:t>
-            </a:r>
-            <a:r>
-              <a:rPr sz="1500">
-                <a:solidFill>
-                  <a:srgbClr val="1A1A2E"/>
-                </a:solidFill>
-                <a:latin typeface="Calibri"/>
-              </a:rPr>
-              <a:t>Da hash NON torni alla password</a:t>
-            </a:r>
-          </a:p>
-          <a:p>
-            <a:pPr>
-              <a:lnSpc>
-                <a:spcPct val="140000"/>
-              </a:lnSpc>
-            </a:pPr>
-            <a:r>
-              <a:rPr sz="1500" b="1">
-                <a:solidFill>
-                  <a:srgbClr val="00A0B0"/>
-                </a:solidFill>
-                <a:latin typeface="Calibri"/>
-              </a:rPr>
-              <a:t>▸  </a:t>
-            </a:r>
-            <a:r>
-              <a:rPr sz="1500">
-                <a:solidFill>
-                  <a:srgbClr val="1A1A2E"/>
-                </a:solidFill>
-                <a:latin typeface="Calibri"/>
-              </a:rPr>
-              <a:t>Salt automatico</a:t>
-            </a:r>
-          </a:p>
-          <a:p>
-            <a:pPr>
-              <a:lnSpc>
-                <a:spcPct val="140000"/>
-              </a:lnSpc>
-            </a:pPr>
-            <a:r>
-              <a:rPr sz="1500" b="1">
-                <a:solidFill>
-                  <a:srgbClr val="00A0B0"/>
-                </a:solidFill>
-                <a:latin typeface="Calibri"/>
-              </a:rPr>
-              <a:t>▸  </a:t>
-            </a:r>
-            <a:r>
-              <a:rPr sz="1500">
-                <a:solidFill>
-                  <a:srgbClr val="1A1A2E"/>
-                </a:solidFill>
-                <a:latin typeface="Calibri"/>
-              </a:rPr>
-              <a:t/>
-            </a:r>
-          </a:p>
-          <a:p>
-            <a:pPr>
-              <a:lnSpc>
-                <a:spcPct val="140000"/>
-              </a:lnSpc>
-            </a:pPr>
-            <a:r>
-              <a:rPr sz="1500" b="1">
-                <a:solidFill>
-                  <a:srgbClr val="00A0B0"/>
-                </a:solidFill>
-                <a:latin typeface="Calibri"/>
-              </a:rPr>
-              <a:t>▸  </a:t>
-            </a:r>
-            <a:r>
-              <a:rPr sz="1500">
-                <a:solidFill>
-                  <a:srgbClr val="1A1A2E"/>
-                </a:solidFill>
-                <a:latin typeface="Calibri"/>
-              </a:rPr>
-              <a:t>Work factor configurabile</a:t>
-            </a:r>
-          </a:p>
-          <a:p>
-            <a:pPr>
-              <a:lnSpc>
-                <a:spcPct val="140000"/>
-              </a:lnSpc>
-            </a:pPr>
-            <a:r>
-              <a:rPr sz="1500" b="1">
-                <a:solidFill>
-                  <a:srgbClr val="00A0B0"/>
-                </a:solidFill>
-                <a:latin typeface="Calibri"/>
-              </a:rPr>
-              <a:t>▸  </a:t>
-            </a:r>
-            <a:r>
-              <a:rPr sz="1500">
-                <a:solidFill>
-                  <a:srgbClr val="1A1A2E"/>
-                </a:solidFill>
-                <a:latin typeface="Calibri"/>
-              </a:rPr>
-              <a:t>  bcrypt cost=12 ≈ 250ms</a:t>
-            </a:r>
-          </a:p>
-          <a:p>
-            <a:pPr>
-              <a:lnSpc>
-                <a:spcPct val="140000"/>
-              </a:lnSpc>
-            </a:pPr>
-            <a:r>
-              <a:rPr sz="1500" b="1">
-                <a:solidFill>
-                  <a:srgbClr val="00A0B0"/>
-                </a:solidFill>
-                <a:latin typeface="Calibri"/>
-              </a:rPr>
-              <a:t>▸  </a:t>
-            </a:r>
-            <a:r>
-              <a:rPr sz="1500">
-                <a:solidFill>
-                  <a:srgbClr val="1A1A2E"/>
-                </a:solidFill>
-                <a:latin typeface="Calibri"/>
-              </a:rPr>
-              <a:t>Per l'utente: impercettibile</a:t>
-            </a:r>
-          </a:p>
-          <a:p>
-            <a:pPr>
-              <a:lnSpc>
-                <a:spcPct val="140000"/>
-              </a:lnSpc>
-            </a:pPr>
-            <a:r>
-              <a:rPr sz="1500" b="1">
-                <a:solidFill>
-                  <a:srgbClr val="00A0B0"/>
-                </a:solidFill>
-                <a:latin typeface="Calibri"/>
-              </a:rPr>
-              <a:t>▸  </a:t>
-            </a:r>
-            <a:r>
-              <a:rPr sz="1500">
-                <a:solidFill>
-                  <a:srgbClr val="1A1A2E"/>
-                </a:solidFill>
-                <a:latin typeface="Calibri"/>
-              </a:rPr>
-              <a:t>Per l'attaccante: devastante</a:t>
+              <a:rPr sz="1300" b="0" i="1">
+                <a:solidFill>
+                  <a:srgbClr val="6B7280"/>
+                </a:solidFill>
+                <a:latin typeface="Calibri"/>
+              </a:rPr>
+              <a:t>Una riga di codice. Salt automatico. Cost configurabile.</a:t>
             </a:r>
           </a:p>
         </p:txBody>
       </p:sp>
       <p:cxnSp>
         <p:nvCxnSpPr>
-          <p:cNvPr id="12" name="Connector 11"/>
+          <p:cNvPr id="6" name="Connector 5"/>
           <p:cNvCxnSpPr/>
           <p:nvPr/>
         </p:nvCxnSpPr>
@@ -4272,14 +3771,14 @@
       </p:cxnSp>
       <p:sp>
         <p:nvSpPr>
-          <p:cNvPr id="13" name="TextBox 12"/>
+          <p:cNvPr id="7" name="TextBox 6"/>
           <p:cNvSpPr txBox="1"/>
           <p:nvPr/>
         </p:nvSpPr>
         <p:spPr>
           <a:xfrm>
             <a:off x="457200" y="6473952"/>
-            <a:ext cx="7315200" cy="320040"/>
+            <a:ext cx="7315200" cy="292608"/>
           </a:xfrm>
           <a:prstGeom prst="rect">
             <a:avLst/>
@@ -4300,21 +3799,21 @@
                 </a:solidFill>
                 <a:latin typeface="Calibri"/>
               </a:rPr>
-              <a:t>Secure Coding · Corso IFTS STEM · A. Manneschi</a:t>
-            </a:r>
-          </a:p>
-        </p:txBody>
-      </p:sp>
-      <p:sp>
-        <p:nvSpPr>
-          <p:cNvPr id="14" name="TextBox 13"/>
+              <a:t>Secure Coding · Corso IFTS STEM · A. Manneschi · 2024/2025</a:t>
+            </a:r>
+          </a:p>
+        </p:txBody>
+      </p:sp>
+      <p:sp>
+        <p:nvSpPr>
+          <p:cNvPr id="8" name="TextBox 7"/>
           <p:cNvSpPr txBox="1"/>
           <p:nvPr/>
         </p:nvSpPr>
         <p:spPr>
           <a:xfrm>
             <a:off x="10515600" y="6473952"/>
-            <a:ext cx="1188720" cy="320040"/>
+            <a:ext cx="1188720" cy="292608"/>
           </a:xfrm>
           <a:prstGeom prst="rect">
             <a:avLst/>
@@ -4431,1018 +3930,7 @@
                 </a:solidFill>
                 <a:latin typeface="Calibri"/>
               </a:rPr>
-              <a:t>Perché MD5 e SHA-256 NON vanno per password</a:t>
-            </a:r>
-          </a:p>
-        </p:txBody>
-      </p:sp>
-      <p:sp>
-        <p:nvSpPr>
-          <p:cNvPr id="4" name="TextBox 3"/>
-          <p:cNvSpPr txBox="1"/>
-          <p:nvPr/>
-        </p:nvSpPr>
-        <p:spPr>
-          <a:xfrm>
-            <a:off x="640080" y="1005840"/>
-            <a:ext cx="10972800" cy="5029200"/>
-          </a:xfrm>
-          <a:prstGeom prst="rect">
-            <a:avLst/>
-          </a:prstGeom>
-          <a:noFill/>
-        </p:spPr>
-        <p:txBody>
-          <a:bodyPr wrap="square">
-            <a:spAutoFit/>
-          </a:bodyPr>
-          <a:lstStyle/>
-          <a:p>
-            <a:pPr>
-              <a:lnSpc>
-                <a:spcPct val="150000"/>
-              </a:lnSpc>
-            </a:pPr>
-            <a:r>
-              <a:rPr sz="2000" b="1">
-                <a:solidFill>
-                  <a:srgbClr val="00A0B0"/>
-                </a:solidFill>
-                <a:latin typeface="Calibri"/>
-              </a:rPr>
-              <a:t>▸  </a:t>
-            </a:r>
-            <a:r>
-              <a:rPr sz="2000">
-                <a:solidFill>
-                  <a:srgbClr val="1A1A2E"/>
-                </a:solidFill>
-                <a:latin typeface="Calibri"/>
-              </a:rPr>
-              <a:t>Velocità: SHA-256 su GPU = miliardi/sec</a:t>
-            </a:r>
-          </a:p>
-          <a:p>
-            <a:pPr>
-              <a:lnSpc>
-                <a:spcPct val="150000"/>
-              </a:lnSpc>
-            </a:pPr>
-            <a:r>
-              <a:rPr sz="2000" b="1">
-                <a:solidFill>
-                  <a:srgbClr val="00A0B0"/>
-                </a:solidFill>
-                <a:latin typeface="Calibri"/>
-              </a:rPr>
-              <a:t>▸  </a:t>
-            </a:r>
-            <a:r>
-              <a:rPr sz="2000">
-                <a:solidFill>
-                  <a:srgbClr val="1A1A2E"/>
-                </a:solidFill>
-                <a:latin typeface="Calibri"/>
-              </a:rPr>
-              <a:t>  Rubato il DB, brute force in poche ore</a:t>
-            </a:r>
-          </a:p>
-          <a:p>
-            <a:pPr>
-              <a:lnSpc>
-                <a:spcPct val="150000"/>
-              </a:lnSpc>
-            </a:pPr>
-            <a:r>
-              <a:rPr sz="2000" b="1">
-                <a:solidFill>
-                  <a:srgbClr val="00A0B0"/>
-                </a:solidFill>
-                <a:latin typeface="Calibri"/>
-              </a:rPr>
-              <a:t>▸  </a:t>
-            </a:r>
-            <a:r>
-              <a:rPr sz="2000">
-                <a:solidFill>
-                  <a:srgbClr val="1A1A2E"/>
-                </a:solidFill>
-                <a:latin typeface="Calibri"/>
-              </a:rPr>
-              <a:t/>
-            </a:r>
-          </a:p>
-          <a:p>
-            <a:pPr>
-              <a:lnSpc>
-                <a:spcPct val="150000"/>
-              </a:lnSpc>
-            </a:pPr>
-            <a:r>
-              <a:rPr sz="2000" b="1">
-                <a:solidFill>
-                  <a:srgbClr val="00A0B0"/>
-                </a:solidFill>
-                <a:latin typeface="Calibri"/>
-              </a:rPr>
-              <a:t>▸  </a:t>
-            </a:r>
-            <a:r>
-              <a:rPr sz="2000">
-                <a:solidFill>
-                  <a:srgbClr val="1A1A2E"/>
-                </a:solidFill>
-                <a:latin typeface="Calibri"/>
-              </a:rPr>
-              <a:t>Rainbow tables: senza salt, password identiche → hash identici</a:t>
-            </a:r>
-          </a:p>
-          <a:p>
-            <a:pPr>
-              <a:lnSpc>
-                <a:spcPct val="150000"/>
-              </a:lnSpc>
-            </a:pPr>
-            <a:r>
-              <a:rPr sz="2000" b="1">
-                <a:solidFill>
-                  <a:srgbClr val="00A0B0"/>
-                </a:solidFill>
-                <a:latin typeface="Calibri"/>
-              </a:rPr>
-              <a:t>▸  </a:t>
-            </a:r>
-            <a:r>
-              <a:rPr sz="2000">
-                <a:solidFill>
-                  <a:srgbClr val="1A1A2E"/>
-                </a:solidFill>
-                <a:latin typeface="Calibri"/>
-              </a:rPr>
-              <a:t>  Tabelle pre-calcolate di password comuni</a:t>
-            </a:r>
-          </a:p>
-          <a:p>
-            <a:pPr>
-              <a:lnSpc>
-                <a:spcPct val="150000"/>
-              </a:lnSpc>
-            </a:pPr>
-            <a:r>
-              <a:rPr sz="2000" b="1">
-                <a:solidFill>
-                  <a:srgbClr val="00A0B0"/>
-                </a:solidFill>
-                <a:latin typeface="Calibri"/>
-              </a:rPr>
-              <a:t>▸  </a:t>
-            </a:r>
-            <a:r>
-              <a:rPr sz="2000">
-                <a:solidFill>
-                  <a:srgbClr val="1A1A2E"/>
-                </a:solidFill>
-                <a:latin typeface="Calibri"/>
-              </a:rPr>
-              <a:t/>
-            </a:r>
-          </a:p>
-          <a:p>
-            <a:pPr>
-              <a:lnSpc>
-                <a:spcPct val="150000"/>
-              </a:lnSpc>
-            </a:pPr>
-            <a:r>
-              <a:rPr sz="2000" b="1">
-                <a:solidFill>
-                  <a:srgbClr val="00A0B0"/>
-                </a:solidFill>
-                <a:latin typeface="Calibri"/>
-              </a:rPr>
-              <a:t>▸  </a:t>
-            </a:r>
-            <a:r>
-              <a:rPr sz="2000">
-                <a:solidFill>
-                  <a:srgbClr val="1A1A2E"/>
-                </a:solidFill>
-                <a:latin typeface="Calibri"/>
-              </a:rPr>
-              <a:t>MD5 e SHA-1: collisioni note. Morti definitivamente.</a:t>
-            </a:r>
-          </a:p>
-          <a:p>
-            <a:pPr>
-              <a:lnSpc>
-                <a:spcPct val="150000"/>
-              </a:lnSpc>
-            </a:pPr>
-            <a:r>
-              <a:rPr sz="2000" b="1">
-                <a:solidFill>
-                  <a:srgbClr val="00A0B0"/>
-                </a:solidFill>
-                <a:latin typeface="Calibri"/>
-              </a:rPr>
-              <a:t>▸  </a:t>
-            </a:r>
-            <a:r>
-              <a:rPr sz="2000">
-                <a:solidFill>
-                  <a:srgbClr val="1A1A2E"/>
-                </a:solidFill>
-                <a:latin typeface="Calibri"/>
-              </a:rPr>
-              <a:t/>
-            </a:r>
-          </a:p>
-          <a:p>
-            <a:pPr>
-              <a:lnSpc>
-                <a:spcPct val="150000"/>
-              </a:lnSpc>
-            </a:pPr>
-            <a:r>
-              <a:rPr sz="2000" b="1">
-                <a:solidFill>
-                  <a:srgbClr val="00A0B0"/>
-                </a:solidFill>
-                <a:latin typeface="Calibri"/>
-              </a:rPr>
-              <a:t>▸  </a:t>
-            </a:r>
-            <a:r>
-              <a:rPr sz="2000">
-                <a:solidFill>
-                  <a:srgbClr val="1A1A2E"/>
-                </a:solidFill>
-                <a:latin typeface="Calibri"/>
-              </a:rPr>
-              <a:t>bcrypt e Argon2id sono progettati apposta per essere LENTI</a:t>
-            </a:r>
-          </a:p>
-        </p:txBody>
-      </p:sp>
-      <p:cxnSp>
-        <p:nvCxnSpPr>
-          <p:cNvPr id="5" name="Connector 4"/>
-          <p:cNvCxnSpPr/>
-          <p:nvPr/>
-        </p:nvCxnSpPr>
-        <p:spPr>
-          <a:xfrm>
-            <a:off x="457200" y="6446520"/>
-            <a:ext cx="11274552" cy="0"/>
-          </a:xfrm>
-          <a:prstGeom prst="line">
-            <a:avLst/>
-          </a:prstGeom>
-          <a:ln w="19050">
-            <a:solidFill>
-              <a:srgbClr val="00A0B0"/>
-            </a:solidFill>
-          </a:ln>
-        </p:spPr>
-        <p:style>
-          <a:lnRef idx="2">
-            <a:schemeClr val="accent1"/>
-          </a:lnRef>
-          <a:fillRef idx="0">
-            <a:schemeClr val="accent1"/>
-          </a:fillRef>
-          <a:effectRef idx="1">
-            <a:schemeClr val="accent1"/>
-          </a:effectRef>
-          <a:fontRef idx="minor">
-            <a:schemeClr val="tx1"/>
-          </a:fontRef>
-        </p:style>
-      </p:cxnSp>
-      <p:sp>
-        <p:nvSpPr>
-          <p:cNvPr id="6" name="TextBox 5"/>
-          <p:cNvSpPr txBox="1"/>
-          <p:nvPr/>
-        </p:nvSpPr>
-        <p:spPr>
-          <a:xfrm>
-            <a:off x="457200" y="6473952"/>
-            <a:ext cx="7315200" cy="320040"/>
-          </a:xfrm>
-          <a:prstGeom prst="rect">
-            <a:avLst/>
-          </a:prstGeom>
-          <a:noFill/>
-        </p:spPr>
-        <p:txBody>
-          <a:bodyPr wrap="square" lIns="45720" rIns="45720" tIns="18288" bIns="18288" anchor="t">
-            <a:spAutoFit/>
-          </a:bodyPr>
-          <a:lstStyle/>
-          <a:p>
-            <a:pPr algn="l"/>
-            <a:r>
-              <a:rPr sz="1000" b="0" i="0">
-                <a:solidFill>
-                  <a:srgbClr val="6B7280"/>
-                </a:solidFill>
-                <a:latin typeface="Calibri"/>
-              </a:rPr>
-              <a:t>Secure Coding · Corso IFTS STEM · A. Manneschi</a:t>
-            </a:r>
-          </a:p>
-        </p:txBody>
-      </p:sp>
-      <p:sp>
-        <p:nvSpPr>
-          <p:cNvPr id="7" name="TextBox 6"/>
-          <p:cNvSpPr txBox="1"/>
-          <p:nvPr/>
-        </p:nvSpPr>
-        <p:spPr>
-          <a:xfrm>
-            <a:off x="10515600" y="6473952"/>
-            <a:ext cx="1188720" cy="320040"/>
-          </a:xfrm>
-          <a:prstGeom prst="rect">
-            <a:avLst/>
-          </a:prstGeom>
-          <a:noFill/>
-        </p:spPr>
-        <p:txBody>
-          <a:bodyPr wrap="square" lIns="45720" rIns="45720" tIns="18288" bIns="18288" anchor="t">
-            <a:spAutoFit/>
-          </a:bodyPr>
-          <a:lstStyle/>
-          <a:p>
-            <a:pPr algn="r"/>
-            <a:r>
-              <a:rPr sz="1000" b="1" i="0">
-                <a:solidFill>
-                  <a:srgbClr val="6B7280"/>
-                </a:solidFill>
-                <a:latin typeface="Calibri"/>
-              </a:rPr>
-              <a:t>L4  ·  11/14</a:t>
-            </a:r>
-          </a:p>
-        </p:txBody>
-      </p:sp>
-    </p:spTree>
-  </p:cSld>
-  <p:clrMapOvr>
-    <a:masterClrMapping/>
-  </p:clrMapOvr>
-</p:sld>
-</file>
-
-<file path=ppt/slides/slide12.xml><?xml version="1.0" encoding="utf-8"?>
-<p:sld xmlns:a="http://schemas.openxmlformats.org/drawingml/2006/main" xmlns:p="http://schemas.openxmlformats.org/presentationml/2006/main" xmlns:r="http://schemas.openxmlformats.org/officeDocument/2006/relationships">
-  <p:cSld>
-    <p:spTree>
-      <p:nvGrpSpPr>
-        <p:cNvPr id="1" name=""/>
-        <p:cNvGrpSpPr/>
-        <p:nvPr/>
-      </p:nvGrpSpPr>
-      <p:grpSpPr/>
-      <p:sp>
-        <p:nvSpPr>
-          <p:cNvPr id="2" name="Rectangle 1"/>
-          <p:cNvSpPr/>
-          <p:nvPr/>
-        </p:nvSpPr>
-        <p:spPr>
-          <a:xfrm>
-            <a:off x="0" y="0"/>
-            <a:ext cx="12191695" cy="777240"/>
-          </a:xfrm>
-          <a:prstGeom prst="rect">
-            <a:avLst/>
-          </a:prstGeom>
-          <a:solidFill>
-            <a:srgbClr val="0F2D52"/>
-          </a:solidFill>
-          <a:ln>
-            <a:noFill/>
-          </a:ln>
-        </p:spPr>
-        <p:style>
-          <a:lnRef idx="1">
-            <a:schemeClr val="accent1"/>
-          </a:lnRef>
-          <a:fillRef idx="3">
-            <a:schemeClr val="accent1"/>
-          </a:fillRef>
-          <a:effectRef idx="2">
-            <a:schemeClr val="accent1"/>
-          </a:effectRef>
-          <a:fontRef idx="minor">
-            <a:schemeClr val="lt1"/>
-          </a:fontRef>
-        </p:style>
-        <p:txBody>
-          <a:bodyPr rtlCol="0" anchor="ctr"/>
-          <a:lstStyle/>
-          <a:p>
-            <a:pPr algn="ctr"/>
-          </a:p>
-        </p:txBody>
-      </p:sp>
-      <p:sp>
-        <p:nvSpPr>
-          <p:cNvPr id="3" name="TextBox 2"/>
-          <p:cNvSpPr txBox="1"/>
-          <p:nvPr/>
-        </p:nvSpPr>
-        <p:spPr>
-          <a:xfrm>
-            <a:off x="457200" y="164592"/>
-            <a:ext cx="10058400" cy="502920"/>
-          </a:xfrm>
-          <a:prstGeom prst="rect">
-            <a:avLst/>
-          </a:prstGeom>
-          <a:noFill/>
-        </p:spPr>
-        <p:txBody>
-          <a:bodyPr wrap="square" lIns="45720" rIns="45720" tIns="18288" bIns="18288" anchor="ctr">
-            <a:spAutoFit/>
-          </a:bodyPr>
-          <a:lstStyle/>
-          <a:p>
-            <a:pPr algn="l"/>
-            <a:r>
-              <a:rPr sz="2400" b="1" i="0">
-                <a:solidFill>
-                  <a:srgbClr val="FFFFFF"/>
-                </a:solidFill>
-                <a:latin typeface="Calibri"/>
-              </a:rPr>
-              <a:t>Hashing corretto: bcrypt</a:t>
-            </a:r>
-          </a:p>
-        </p:txBody>
-      </p:sp>
-      <p:sp>
-        <p:nvSpPr>
-          <p:cNvPr id="4" name="Rectangle 3"/>
-          <p:cNvSpPr/>
-          <p:nvPr/>
-        </p:nvSpPr>
-        <p:spPr>
-          <a:xfrm>
-            <a:off x="9875520" y="164592"/>
-            <a:ext cx="2103120" cy="457200"/>
-          </a:xfrm>
-          <a:prstGeom prst="rect">
-            <a:avLst/>
-          </a:prstGeom>
-          <a:solidFill>
-            <a:srgbClr val="06A77D"/>
-          </a:solidFill>
-          <a:ln>
-            <a:noFill/>
-          </a:ln>
-        </p:spPr>
-        <p:style>
-          <a:lnRef idx="1">
-            <a:schemeClr val="accent1"/>
-          </a:lnRef>
-          <a:fillRef idx="3">
-            <a:schemeClr val="accent1"/>
-          </a:fillRef>
-          <a:effectRef idx="2">
-            <a:schemeClr val="accent1"/>
-          </a:effectRef>
-          <a:fontRef idx="minor">
-            <a:schemeClr val="lt1"/>
-          </a:fontRef>
-        </p:style>
-        <p:txBody>
-          <a:bodyPr rtlCol="0" anchor="ctr"/>
-          <a:lstStyle/>
-          <a:p>
-            <a:pPr algn="ctr"/>
-          </a:p>
-        </p:txBody>
-      </p:sp>
-      <p:sp>
-        <p:nvSpPr>
-          <p:cNvPr id="5" name="TextBox 4"/>
-          <p:cNvSpPr txBox="1"/>
-          <p:nvPr/>
-        </p:nvSpPr>
-        <p:spPr>
-          <a:xfrm>
-            <a:off x="9875520" y="182880"/>
-            <a:ext cx="2103120" cy="457200"/>
-          </a:xfrm>
-          <a:prstGeom prst="rect">
-            <a:avLst/>
-          </a:prstGeom>
-          <a:noFill/>
-        </p:spPr>
-        <p:txBody>
-          <a:bodyPr wrap="square" lIns="45720" rIns="45720" tIns="18288" bIns="18288" anchor="ctr">
-            <a:spAutoFit/>
-          </a:bodyPr>
-          <a:lstStyle/>
-          <a:p>
-            <a:pPr algn="ctr"/>
-            <a:r>
-              <a:rPr sz="1200" b="1" i="0">
-                <a:solidFill>
-                  <a:srgbClr val="FFFFFF"/>
-                </a:solidFill>
-                <a:latin typeface="Calibri"/>
-              </a:rPr>
-              <a:t>✅ PYTHON</a:t>
-            </a:r>
-          </a:p>
-        </p:txBody>
-      </p:sp>
-      <p:sp>
-        <p:nvSpPr>
-          <p:cNvPr id="6" name="Rectangle 5"/>
-          <p:cNvSpPr/>
-          <p:nvPr/>
-        </p:nvSpPr>
-        <p:spPr>
-          <a:xfrm>
-            <a:off x="457200" y="1097280"/>
-            <a:ext cx="11247120" cy="4572000"/>
-          </a:xfrm>
-          <a:prstGeom prst="rect">
-            <a:avLst/>
-          </a:prstGeom>
-          <a:solidFill>
-            <a:srgbClr val="F1F4F8"/>
-          </a:solidFill>
-          <a:ln>
-            <a:solidFill>
-              <a:srgbClr val="06A77D"/>
-            </a:solidFill>
-          </a:ln>
-        </p:spPr>
-        <p:style>
-          <a:lnRef idx="1">
-            <a:schemeClr val="accent1"/>
-          </a:lnRef>
-          <a:fillRef idx="3">
-            <a:schemeClr val="accent1"/>
-          </a:fillRef>
-          <a:effectRef idx="2">
-            <a:schemeClr val="accent1"/>
-          </a:effectRef>
-          <a:fontRef idx="minor">
-            <a:schemeClr val="lt1"/>
-          </a:fontRef>
-        </p:style>
-        <p:txBody>
-          <a:bodyPr rtlCol="0" anchor="ctr"/>
-          <a:lstStyle/>
-          <a:p>
-            <a:pPr algn="ctr"/>
-          </a:p>
-        </p:txBody>
-      </p:sp>
-      <p:sp>
-        <p:nvSpPr>
-          <p:cNvPr id="7" name="TextBox 6"/>
-          <p:cNvSpPr txBox="1"/>
-          <p:nvPr/>
-        </p:nvSpPr>
-        <p:spPr>
-          <a:xfrm>
-            <a:off x="640080" y="1280160"/>
-            <a:ext cx="10972800" cy="4206240"/>
-          </a:xfrm>
-          <a:prstGeom prst="rect">
-            <a:avLst/>
-          </a:prstGeom>
-          <a:noFill/>
-        </p:spPr>
-        <p:txBody>
-          <a:bodyPr wrap="square" lIns="45720" rIns="45720" tIns="18288" bIns="18288" anchor="t">
-            <a:spAutoFit/>
-          </a:bodyPr>
-          <a:lstStyle/>
-          <a:p>
-            <a:pPr algn="l"/>
-            <a:r>
-              <a:rPr sz="1400" b="0" i="0">
-                <a:solidFill>
-                  <a:srgbClr val="1A1A2E"/>
-                </a:solidFill>
-                <a:latin typeface="Consolas"/>
-              </a:rPr>
-              <a:t>import bcrypt</a:t>
-            </a:r>
-          </a:p>
-          <a:p>
-            <a:pPr algn="l"/>
-            <a:r>
-              <a:rPr sz="1400" b="0" i="0">
-                <a:solidFill>
-                  <a:srgbClr val="1A1A2E"/>
-                </a:solidFill>
-                <a:latin typeface="Consolas"/>
-              </a:rPr>
-              <a:t/>
-            </a:r>
-          </a:p>
-          <a:p>
-            <a:pPr algn="l"/>
-            <a:r>
-              <a:rPr sz="1400" b="0" i="0">
-                <a:solidFill>
-                  <a:srgbClr val="1A1A2E"/>
-                </a:solidFill>
-                <a:latin typeface="Consolas"/>
-              </a:rPr>
-              <a:t># Hash di una nuova password</a:t>
-            </a:r>
-          </a:p>
-          <a:p>
-            <a:pPr algn="l"/>
-            <a:r>
-              <a:rPr sz="1400" b="0" i="0">
-                <a:solidFill>
-                  <a:srgbClr val="1A1A2E"/>
-                </a:solidFill>
-                <a:latin typeface="Consolas"/>
-              </a:rPr>
-              <a:t>def hash_password(password: str) -&gt; bytes:</a:t>
-            </a:r>
-          </a:p>
-          <a:p>
-            <a:pPr algn="l"/>
-            <a:r>
-              <a:rPr sz="1400" b="0" i="0">
-                <a:solidFill>
-                  <a:srgbClr val="1A1A2E"/>
-                </a:solidFill>
-                <a:latin typeface="Consolas"/>
-              </a:rPr>
-              <a:t>    return bcrypt.hashpw(password.encode("utf-8"),</a:t>
-            </a:r>
-          </a:p>
-          <a:p>
-            <a:pPr algn="l"/>
-            <a:r>
-              <a:rPr sz="1400" b="0" i="0">
-                <a:solidFill>
-                  <a:srgbClr val="1A1A2E"/>
-                </a:solidFill>
-                <a:latin typeface="Consolas"/>
-              </a:rPr>
-              <a:t>                          bcrypt.gensalt(rounds=12))</a:t>
-            </a:r>
-          </a:p>
-          <a:p>
-            <a:pPr algn="l"/>
-            <a:r>
-              <a:rPr sz="1400" b="0" i="0">
-                <a:solidFill>
-                  <a:srgbClr val="1A1A2E"/>
-                </a:solidFill>
-                <a:latin typeface="Consolas"/>
-              </a:rPr>
-              <a:t/>
-            </a:r>
-          </a:p>
-          <a:p>
-            <a:pPr algn="l"/>
-            <a:r>
-              <a:rPr sz="1400" b="0" i="0">
-                <a:solidFill>
-                  <a:srgbClr val="1A1A2E"/>
-                </a:solidFill>
-                <a:latin typeface="Consolas"/>
-              </a:rPr>
-              <a:t># Verifica al login</a:t>
-            </a:r>
-          </a:p>
-          <a:p>
-            <a:pPr algn="l"/>
-            <a:r>
-              <a:rPr sz="1400" b="0" i="0">
-                <a:solidFill>
-                  <a:srgbClr val="1A1A2E"/>
-                </a:solidFill>
-                <a:latin typeface="Consolas"/>
-              </a:rPr>
-              <a:t>def verify_password(password: str, hash_db: bytes) -&gt; bool:</a:t>
-            </a:r>
-          </a:p>
-          <a:p>
-            <a:pPr algn="l"/>
-            <a:r>
-              <a:rPr sz="1400" b="0" i="0">
-                <a:solidFill>
-                  <a:srgbClr val="1A1A2E"/>
-                </a:solidFill>
-                <a:latin typeface="Consolas"/>
-              </a:rPr>
-              <a:t>    return bcrypt.checkpw(password.encode("utf-8"), hash_db)</a:t>
-            </a:r>
-          </a:p>
-          <a:p>
-            <a:pPr algn="l"/>
-            <a:r>
-              <a:rPr sz="1400" b="0" i="0">
-                <a:solidFill>
-                  <a:srgbClr val="1A1A2E"/>
-                </a:solidFill>
-                <a:latin typeface="Consolas"/>
-              </a:rPr>
-              <a:t/>
-            </a:r>
-          </a:p>
-          <a:p>
-            <a:pPr algn="l"/>
-            <a:r>
-              <a:rPr sz="1400" b="0" i="0">
-                <a:solidFill>
-                  <a:srgbClr val="1A1A2E"/>
-                </a:solidFill>
-                <a:latin typeface="Consolas"/>
-              </a:rPr>
-              <a:t># Tre linguaggi, una libreria standard:</a:t>
-            </a:r>
-          </a:p>
-          <a:p>
-            <a:pPr algn="l"/>
-            <a:r>
-              <a:rPr sz="1400" b="0" i="0">
-                <a:solidFill>
-                  <a:srgbClr val="1A1A2E"/>
-                </a:solidFill>
-                <a:latin typeface="Consolas"/>
-              </a:rPr>
-              <a:t># Python: bcrypt</a:t>
-            </a:r>
-          </a:p>
-          <a:p>
-            <a:pPr algn="l"/>
-            <a:r>
-              <a:rPr sz="1400" b="0" i="0">
-                <a:solidFill>
-                  <a:srgbClr val="1A1A2E"/>
-                </a:solidFill>
-                <a:latin typeface="Consolas"/>
-              </a:rPr>
-              <a:t># Java: BCryptPasswordEncoder (Spring Security)</a:t>
-            </a:r>
-          </a:p>
-          <a:p>
-            <a:pPr algn="l"/>
-            <a:r>
-              <a:rPr sz="1400" b="0" i="0">
-                <a:solidFill>
-                  <a:srgbClr val="1A1A2E"/>
-                </a:solidFill>
-                <a:latin typeface="Consolas"/>
-              </a:rPr>
-              <a:t># PHP:   password_hash($pwd, PASSWORD_BCRYPT, ['cost' =&gt; 12])</a:t>
-            </a:r>
-          </a:p>
-        </p:txBody>
-      </p:sp>
-      <p:sp>
-        <p:nvSpPr>
-          <p:cNvPr id="8" name="TextBox 7"/>
-          <p:cNvSpPr txBox="1"/>
-          <p:nvPr/>
-        </p:nvSpPr>
-        <p:spPr>
-          <a:xfrm>
-            <a:off x="457200" y="5852160"/>
-            <a:ext cx="11247120" cy="457200"/>
-          </a:xfrm>
-          <a:prstGeom prst="rect">
-            <a:avLst/>
-          </a:prstGeom>
-          <a:noFill/>
-        </p:spPr>
-        <p:txBody>
-          <a:bodyPr wrap="square" lIns="45720" rIns="45720" tIns="18288" bIns="18288" anchor="t">
-            <a:spAutoFit/>
-          </a:bodyPr>
-          <a:lstStyle/>
-          <a:p>
-            <a:pPr algn="l"/>
-            <a:r>
-              <a:rPr sz="1400" b="1" i="1">
-                <a:solidFill>
-                  <a:srgbClr val="06A77D"/>
-                </a:solidFill>
-                <a:latin typeface="Calibri"/>
-              </a:rPr>
-              <a:t>✓  Una riga di codice. Niente scuse per non usarlo.</a:t>
-            </a:r>
-          </a:p>
-        </p:txBody>
-      </p:sp>
-      <p:cxnSp>
-        <p:nvCxnSpPr>
-          <p:cNvPr id="9" name="Connector 8"/>
-          <p:cNvCxnSpPr/>
-          <p:nvPr/>
-        </p:nvCxnSpPr>
-        <p:spPr>
-          <a:xfrm>
-            <a:off x="457200" y="6446520"/>
-            <a:ext cx="11274552" cy="0"/>
-          </a:xfrm>
-          <a:prstGeom prst="line">
-            <a:avLst/>
-          </a:prstGeom>
-          <a:ln w="19050">
-            <a:solidFill>
-              <a:srgbClr val="00A0B0"/>
-            </a:solidFill>
-          </a:ln>
-        </p:spPr>
-        <p:style>
-          <a:lnRef idx="2">
-            <a:schemeClr val="accent1"/>
-          </a:lnRef>
-          <a:fillRef idx="0">
-            <a:schemeClr val="accent1"/>
-          </a:fillRef>
-          <a:effectRef idx="1">
-            <a:schemeClr val="accent1"/>
-          </a:effectRef>
-          <a:fontRef idx="minor">
-            <a:schemeClr val="tx1"/>
-          </a:fontRef>
-        </p:style>
-      </p:cxnSp>
-      <p:sp>
-        <p:nvSpPr>
-          <p:cNvPr id="10" name="TextBox 9"/>
-          <p:cNvSpPr txBox="1"/>
-          <p:nvPr/>
-        </p:nvSpPr>
-        <p:spPr>
-          <a:xfrm>
-            <a:off x="457200" y="6473952"/>
-            <a:ext cx="7315200" cy="320040"/>
-          </a:xfrm>
-          <a:prstGeom prst="rect">
-            <a:avLst/>
-          </a:prstGeom>
-          <a:noFill/>
-        </p:spPr>
-        <p:txBody>
-          <a:bodyPr wrap="square" lIns="45720" rIns="45720" tIns="18288" bIns="18288" anchor="t">
-            <a:spAutoFit/>
-          </a:bodyPr>
-          <a:lstStyle/>
-          <a:p>
-            <a:pPr algn="l"/>
-            <a:r>
-              <a:rPr sz="1000" b="0" i="0">
-                <a:solidFill>
-                  <a:srgbClr val="6B7280"/>
-                </a:solidFill>
-                <a:latin typeface="Calibri"/>
-              </a:rPr>
-              <a:t>Secure Coding · Corso IFTS STEM · A. Manneschi</a:t>
-            </a:r>
-          </a:p>
-        </p:txBody>
-      </p:sp>
-      <p:sp>
-        <p:nvSpPr>
-          <p:cNvPr id="11" name="TextBox 10"/>
-          <p:cNvSpPr txBox="1"/>
-          <p:nvPr/>
-        </p:nvSpPr>
-        <p:spPr>
-          <a:xfrm>
-            <a:off x="10515600" y="6473952"/>
-            <a:ext cx="1188720" cy="320040"/>
-          </a:xfrm>
-          <a:prstGeom prst="rect">
-            <a:avLst/>
-          </a:prstGeom>
-          <a:noFill/>
-        </p:spPr>
-        <p:txBody>
-          <a:bodyPr wrap="square" lIns="45720" rIns="45720" tIns="18288" bIns="18288" anchor="t">
-            <a:spAutoFit/>
-          </a:bodyPr>
-          <a:lstStyle/>
-          <a:p>
-            <a:pPr algn="r"/>
-            <a:r>
-              <a:rPr sz="1000" b="1" i="0">
-                <a:solidFill>
-                  <a:srgbClr val="6B7280"/>
-                </a:solidFill>
-                <a:latin typeface="Calibri"/>
-              </a:rPr>
-              <a:t>L4  ·  12/14</a:t>
-            </a:r>
-          </a:p>
-        </p:txBody>
-      </p:sp>
-    </p:spTree>
-  </p:cSld>
-  <p:clrMapOvr>
-    <a:masterClrMapping/>
-  </p:clrMapOvr>
-</p:sld>
-</file>
-
-<file path=ppt/slides/slide13.xml><?xml version="1.0" encoding="utf-8"?>
-<p:sld xmlns:a="http://schemas.openxmlformats.org/drawingml/2006/main" xmlns:p="http://schemas.openxmlformats.org/presentationml/2006/main" xmlns:r="http://schemas.openxmlformats.org/officeDocument/2006/relationships">
-  <p:cSld>
-    <p:spTree>
-      <p:nvGrpSpPr>
-        <p:cNvPr id="1" name=""/>
-        <p:cNvGrpSpPr/>
-        <p:nvPr/>
-      </p:nvGrpSpPr>
-      <p:grpSpPr/>
-      <p:sp>
-        <p:nvSpPr>
-          <p:cNvPr id="2" name="Rectangle 1"/>
-          <p:cNvSpPr/>
-          <p:nvPr/>
-        </p:nvSpPr>
-        <p:spPr>
-          <a:xfrm>
-            <a:off x="0" y="0"/>
-            <a:ext cx="12191695" cy="777240"/>
-          </a:xfrm>
-          <a:prstGeom prst="rect">
-            <a:avLst/>
-          </a:prstGeom>
-          <a:solidFill>
-            <a:srgbClr val="0F2D52"/>
-          </a:solidFill>
-          <a:ln>
-            <a:noFill/>
-          </a:ln>
-        </p:spPr>
-        <p:style>
-          <a:lnRef idx="1">
-            <a:schemeClr val="accent1"/>
-          </a:lnRef>
-          <a:fillRef idx="3">
-            <a:schemeClr val="accent1"/>
-          </a:fillRef>
-          <a:effectRef idx="2">
-            <a:schemeClr val="accent1"/>
-          </a:effectRef>
-          <a:fontRef idx="minor">
-            <a:schemeClr val="lt1"/>
-          </a:fontRef>
-        </p:style>
-        <p:txBody>
-          <a:bodyPr rtlCol="0" anchor="ctr"/>
-          <a:lstStyle/>
-          <a:p>
-            <a:pPr algn="ctr"/>
-          </a:p>
-        </p:txBody>
-      </p:sp>
-      <p:sp>
-        <p:nvSpPr>
-          <p:cNvPr id="3" name="TextBox 2"/>
-          <p:cNvSpPr txBox="1"/>
-          <p:nvPr/>
-        </p:nvSpPr>
-        <p:spPr>
-          <a:xfrm>
-            <a:off x="457200" y="164592"/>
-            <a:ext cx="10972800" cy="502920"/>
-          </a:xfrm>
-          <a:prstGeom prst="rect">
-            <a:avLst/>
-          </a:prstGeom>
-          <a:noFill/>
-        </p:spPr>
-        <p:txBody>
-          <a:bodyPr wrap="square" lIns="45720" rIns="45720" tIns="18288" bIns="18288" anchor="ctr">
-            <a:spAutoFit/>
-          </a:bodyPr>
-          <a:lstStyle/>
-          <a:p>
-            <a:pPr algn="l"/>
-            <a:r>
-              <a:rPr sz="2400" b="1" i="0">
-                <a:solidFill>
-                  <a:srgbClr val="FFFFFF"/>
-                </a:solidFill>
-                <a:latin typeface="Calibri"/>
-              </a:rPr>
-              <a:t>Diagnosi visiva: apri il DB e guarda</a:t>
+              <a:t>Diagnosi visiva: apri il DB</a:t>
             </a:r>
           </a:p>
         </p:txBody>
@@ -5457,7 +3945,7 @@
         </p:nvGraphicFramePr>
         <p:xfrm>
           <a:off x="457200" y="1188720"/>
-          <a:ext cx="11247120" cy="5029200"/>
+          <a:ext cx="11247120" cy="4937760"/>
         </p:xfrm>
         <a:graphic>
           <a:graphicData uri="http://schemas.openxmlformats.org/drawingml/2006/table">
@@ -5469,7 +3957,7 @@
                 <a:gridCol w="5623560"/>
                 <a:gridCol w="5623560"/>
               </a:tblGrid>
-              <a:tr h="718457">
+              <a:tr h="705394">
                 <a:tc>
                   <a:txBody>
                     <a:bodyPr/>
@@ -5477,7 +3965,7 @@
                     <a:p>
                       <a:pPr algn="ctr"/>
                       <a:r>
-                        <a:rPr sz="1400" b="1">
+                        <a:rPr sz="1300" b="1">
                           <a:solidFill>
                             <a:srgbClr val="FFFFFF"/>
                           </a:solidFill>
@@ -5500,7 +3988,7 @@
                     <a:p>
                       <a:pPr algn="ctr"/>
                       <a:r>
-                        <a:rPr sz="1400" b="1">
+                        <a:rPr sz="1300" b="1">
                           <a:solidFill>
                             <a:srgbClr val="FFFFFF"/>
                           </a:solidFill>
@@ -5517,21 +4005,20 @@
                   </a:tcPr>
                 </a:tc>
               </a:tr>
-              <a:tr h="718457">
+              <a:tr h="705394">
                 <a:tc>
                   <a:txBody>
                     <a:bodyPr/>
                     <a:lstStyle/>
                     <a:p>
-                      <a:pPr algn="l"/>
                       <a:r>
-                        <a:rPr sz="1200">
+                        <a:rPr sz="1100">
                           <a:solidFill>
                             <a:srgbClr val="1A1A2E"/>
                           </a:solidFill>
                           <a:latin typeface="Calibri"/>
                         </a:rPr>
-                        <a:t>mariopwd (testo leggibile)</a:t>
+                        <a:t>mariopwd (testo)</a:t>
                       </a:r>
                     </a:p>
                   </a:txBody>
@@ -5546,9 +4033,8 @@
                     <a:bodyPr/>
                     <a:lstStyle/>
                     <a:p>
-                      <a:pPr algn="l"/>
                       <a:r>
-                        <a:rPr sz="1200">
+                        <a:rPr sz="1100">
                           <a:solidFill>
                             <a:srgbClr val="1A1A2E"/>
                           </a:solidFill>
@@ -5565,21 +4051,20 @@
                   </a:tcPr>
                 </a:tc>
               </a:tr>
-              <a:tr h="718457">
+              <a:tr h="705394">
                 <a:tc>
                   <a:txBody>
                     <a:bodyPr/>
                     <a:lstStyle/>
                     <a:p>
-                      <a:pPr algn="l"/>
                       <a:r>
-                        <a:rPr sz="1200">
+                        <a:rPr sz="1100">
                           <a:solidFill>
                             <a:srgbClr val="1A1A2E"/>
                           </a:solidFill>
                           <a:latin typeface="Calibri"/>
                         </a:rPr>
-                        <a:t>5f4dcc3b5aa765d61... (32 hex)</a:t>
+                        <a:t>5f4dcc3b5aa765... (32 hex)</a:t>
                       </a:r>
                     </a:p>
                   </a:txBody>
@@ -5594,9 +4079,8 @@
                     <a:bodyPr/>
                     <a:lstStyle/>
                     <a:p>
-                      <a:pPr algn="l"/>
                       <a:r>
-                        <a:rPr sz="1200">
+                        <a:rPr sz="1100">
                           <a:solidFill>
                             <a:srgbClr val="1A1A2E"/>
                           </a:solidFill>
@@ -5613,21 +4097,20 @@
                   </a:tcPr>
                 </a:tc>
               </a:tr>
-              <a:tr h="718457">
+              <a:tr h="705394">
                 <a:tc>
                   <a:txBody>
                     <a:bodyPr/>
                     <a:lstStyle/>
                     <a:p>
-                      <a:pPr algn="l"/>
                       <a:r>
-                        <a:rPr sz="1200">
+                        <a:rPr sz="1100">
                           <a:solidFill>
                             <a:srgbClr val="1A1A2E"/>
                           </a:solidFill>
                           <a:latin typeface="Calibri"/>
                         </a:rPr>
-                        <a:t>5baa61e4c9b93f3f068... (40 hex)</a:t>
+                        <a:t>5baa61e4c9b93f... (40 hex)</a:t>
                       </a:r>
                     </a:p>
                   </a:txBody>
@@ -5642,9 +4125,8 @@
                     <a:bodyPr/>
                     <a:lstStyle/>
                     <a:p>
-                      <a:pPr algn="l"/>
                       <a:r>
-                        <a:rPr sz="1200">
+                        <a:rPr sz="1100">
                           <a:solidFill>
                             <a:srgbClr val="1A1A2E"/>
                           </a:solidFill>
@@ -5661,21 +4143,20 @@
                   </a:tcPr>
                 </a:tc>
               </a:tr>
-              <a:tr h="718457">
+              <a:tr h="705394">
                 <a:tc>
                   <a:txBody>
                     <a:bodyPr/>
                     <a:lstStyle/>
                     <a:p>
-                      <a:pPr algn="l"/>
                       <a:r>
-                        <a:rPr sz="1200">
+                        <a:rPr sz="1100">
                           <a:solidFill>
                             <a:srgbClr val="1A1A2E"/>
                           </a:solidFill>
                           <a:latin typeface="Calibri"/>
                         </a:rPr>
-                        <a:t>e3b0c44298fc1c149... (64 hex)</a:t>
+                        <a:t>e3b0c44298fc1c... (64 hex)</a:t>
                       </a:r>
                     </a:p>
                   </a:txBody>
@@ -5690,9 +4171,8 @@
                     <a:bodyPr/>
                     <a:lstStyle/>
                     <a:p>
-                      <a:pPr algn="l"/>
                       <a:r>
-                        <a:rPr sz="1200">
+                        <a:rPr sz="1100">
                           <a:solidFill>
                             <a:srgbClr val="1A1A2E"/>
                           </a:solidFill>
@@ -5709,21 +4189,20 @@
                   </a:tcPr>
                 </a:tc>
               </a:tr>
-              <a:tr h="718457">
+              <a:tr h="705394">
                 <a:tc>
                   <a:txBody>
                     <a:bodyPr/>
                     <a:lstStyle/>
                     <a:p>
-                      <a:pPr algn="l"/>
                       <a:r>
-                        <a:rPr sz="1200">
+                        <a:rPr sz="1100">
                           <a:solidFill>
                             <a:srgbClr val="1A1A2E"/>
                           </a:solidFill>
                           <a:latin typeface="Calibri"/>
                         </a:rPr>
-                        <a:t>$2b$12$KIXbN... (inizia con $2b$)</a:t>
+                        <a:t>$2b$12$KIXbN...</a:t>
                       </a:r>
                     </a:p>
                   </a:txBody>
@@ -5738,9 +4217,8 @@
                     <a:bodyPr/>
                     <a:lstStyle/>
                     <a:p>
-                      <a:pPr algn="l"/>
                       <a:r>
-                        <a:rPr sz="1200">
+                        <a:rPr sz="1100">
                           <a:solidFill>
                             <a:srgbClr val="1A1A2E"/>
                           </a:solidFill>
@@ -5757,21 +4235,20 @@
                   </a:tcPr>
                 </a:tc>
               </a:tr>
-              <a:tr h="718458">
+              <a:tr h="705396">
                 <a:tc>
                   <a:txBody>
                     <a:bodyPr/>
                     <a:lstStyle/>
                     <a:p>
-                      <a:pPr algn="l"/>
                       <a:r>
-                        <a:rPr sz="1200">
+                        <a:rPr sz="1100">
                           <a:solidFill>
                             <a:srgbClr val="1A1A2E"/>
                           </a:solidFill>
                           <a:latin typeface="Calibri"/>
                         </a:rPr>
-                        <a:t>$argon2id$v=19$m=65536...</a:t>
+                        <a:t>$argon2id$v=19$...</a:t>
                       </a:r>
                     </a:p>
                   </a:txBody>
@@ -5786,9 +4263,8 @@
                     <a:bodyPr/>
                     <a:lstStyle/>
                     <a:p>
-                      <a:pPr algn="l"/>
                       <a:r>
-                        <a:rPr sz="1200">
+                        <a:rPr sz="1100">
                           <a:solidFill>
                             <a:srgbClr val="1A1A2E"/>
                           </a:solidFill>
@@ -5853,7 +4329,7 @@
         <p:spPr>
           <a:xfrm>
             <a:off x="457200" y="6473952"/>
-            <a:ext cx="7315200" cy="320040"/>
+            <a:ext cx="7315200" cy="292608"/>
           </a:xfrm>
           <a:prstGeom prst="rect">
             <a:avLst/>
@@ -5874,7 +4350,7 @@
                 </a:solidFill>
                 <a:latin typeface="Calibri"/>
               </a:rPr>
-              <a:t>Secure Coding · Corso IFTS STEM · A. Manneschi</a:t>
+              <a:t>Secure Coding · Corso IFTS STEM · A. Manneschi · 2024/2025</a:t>
             </a:r>
           </a:p>
         </p:txBody>
@@ -5888,7 +4364,1400 @@
         <p:spPr>
           <a:xfrm>
             <a:off x="10515600" y="6473952"/>
-            <a:ext cx="1188720" cy="320040"/>
+            <a:ext cx="1188720" cy="292608"/>
+          </a:xfrm>
+          <a:prstGeom prst="rect">
+            <a:avLst/>
+          </a:prstGeom>
+          <a:noFill/>
+        </p:spPr>
+        <p:txBody>
+          <a:bodyPr wrap="square" lIns="45720" rIns="45720" tIns="18288" bIns="18288" anchor="t">
+            <a:spAutoFit/>
+          </a:bodyPr>
+          <a:lstStyle/>
+          <a:p>
+            <a:pPr algn="r"/>
+            <a:r>
+              <a:rPr sz="1000" b="1" i="0">
+                <a:solidFill>
+                  <a:srgbClr val="6B7280"/>
+                </a:solidFill>
+                <a:latin typeface="Calibri"/>
+              </a:rPr>
+              <a:t>L4  ·  11/14</a:t>
+            </a:r>
+          </a:p>
+        </p:txBody>
+      </p:sp>
+    </p:spTree>
+  </p:cSld>
+  <p:clrMapOvr>
+    <a:masterClrMapping/>
+  </p:clrMapOvr>
+</p:sld>
+</file>
+
+<file path=ppt/slides/slide12.xml><?xml version="1.0" encoding="utf-8"?>
+<p:sld xmlns:a="http://schemas.openxmlformats.org/drawingml/2006/main" xmlns:p="http://schemas.openxmlformats.org/presentationml/2006/main" xmlns:r="http://schemas.openxmlformats.org/officeDocument/2006/relationships">
+  <p:cSld>
+    <p:spTree>
+      <p:nvGrpSpPr>
+        <p:cNvPr id="1" name=""/>
+        <p:cNvGrpSpPr/>
+        <p:nvPr/>
+      </p:nvGrpSpPr>
+      <p:grpSpPr/>
+      <p:sp>
+        <p:nvSpPr>
+          <p:cNvPr id="2" name="Rectangle 1"/>
+          <p:cNvSpPr/>
+          <p:nvPr/>
+        </p:nvSpPr>
+        <p:spPr>
+          <a:xfrm>
+            <a:off x="0" y="0"/>
+            <a:ext cx="12191695" cy="777240"/>
+          </a:xfrm>
+          <a:prstGeom prst="rect">
+            <a:avLst/>
+          </a:prstGeom>
+          <a:solidFill>
+            <a:srgbClr val="0F2D52"/>
+          </a:solidFill>
+          <a:ln>
+            <a:noFill/>
+          </a:ln>
+        </p:spPr>
+        <p:style>
+          <a:lnRef idx="1">
+            <a:schemeClr val="accent1"/>
+          </a:lnRef>
+          <a:fillRef idx="3">
+            <a:schemeClr val="accent1"/>
+          </a:fillRef>
+          <a:effectRef idx="2">
+            <a:schemeClr val="accent1"/>
+          </a:effectRef>
+          <a:fontRef idx="minor">
+            <a:schemeClr val="lt1"/>
+          </a:fontRef>
+        </p:style>
+        <p:txBody>
+          <a:bodyPr rtlCol="0" anchor="ctr"/>
+          <a:lstStyle/>
+          <a:p>
+            <a:pPr algn="ctr"/>
+          </a:p>
+        </p:txBody>
+      </p:sp>
+      <p:sp>
+        <p:nvSpPr>
+          <p:cNvPr id="3" name="TextBox 2"/>
+          <p:cNvSpPr txBox="1"/>
+          <p:nvPr/>
+        </p:nvSpPr>
+        <p:spPr>
+          <a:xfrm>
+            <a:off x="457200" y="164592"/>
+            <a:ext cx="10972800" cy="502920"/>
+          </a:xfrm>
+          <a:prstGeom prst="rect">
+            <a:avLst/>
+          </a:prstGeom>
+          <a:noFill/>
+        </p:spPr>
+        <p:txBody>
+          <a:bodyPr wrap="square" lIns="45720" rIns="45720" tIns="18288" bIns="18288" anchor="ctr">
+            <a:spAutoFit/>
+          </a:bodyPr>
+          <a:lstStyle/>
+          <a:p>
+            <a:pPr algn="l"/>
+            <a:r>
+              <a:rPr sz="2400" b="1" i="0">
+                <a:solidFill>
+                  <a:srgbClr val="FFFFFF"/>
+                </a:solidFill>
+                <a:latin typeface="Calibri"/>
+              </a:rPr>
+              <a:t>📌  Cosa portare a casa</a:t>
+            </a:r>
+          </a:p>
+        </p:txBody>
+      </p:sp>
+      <p:sp>
+        <p:nvSpPr>
+          <p:cNvPr id="4" name="Oval 3"/>
+          <p:cNvSpPr/>
+          <p:nvPr/>
+        </p:nvSpPr>
+        <p:spPr>
+          <a:xfrm>
+            <a:off x="914400" y="1440180"/>
+            <a:ext cx="777240" cy="777240"/>
+          </a:xfrm>
+          <a:prstGeom prst="ellipse">
+            <a:avLst/>
+          </a:prstGeom>
+          <a:solidFill>
+            <a:srgbClr val="00A0B0"/>
+          </a:solidFill>
+          <a:ln>
+            <a:noFill/>
+          </a:ln>
+        </p:spPr>
+        <p:style>
+          <a:lnRef idx="1">
+            <a:schemeClr val="accent1"/>
+          </a:lnRef>
+          <a:fillRef idx="3">
+            <a:schemeClr val="accent1"/>
+          </a:fillRef>
+          <a:effectRef idx="2">
+            <a:schemeClr val="accent1"/>
+          </a:effectRef>
+          <a:fontRef idx="minor">
+            <a:schemeClr val="lt1"/>
+          </a:fontRef>
+        </p:style>
+        <p:txBody>
+          <a:bodyPr rtlCol="0" anchor="ctr"/>
+          <a:lstStyle/>
+          <a:p>
+            <a:pPr algn="ctr"/>
+          </a:p>
+        </p:txBody>
+      </p:sp>
+      <p:sp>
+        <p:nvSpPr>
+          <p:cNvPr id="5" name="TextBox 4"/>
+          <p:cNvSpPr txBox="1"/>
+          <p:nvPr/>
+        </p:nvSpPr>
+        <p:spPr>
+          <a:xfrm>
+            <a:off x="914400" y="1440180"/>
+            <a:ext cx="777240" cy="777240"/>
+          </a:xfrm>
+          <a:prstGeom prst="rect">
+            <a:avLst/>
+          </a:prstGeom>
+          <a:noFill/>
+        </p:spPr>
+        <p:txBody>
+          <a:bodyPr wrap="square" lIns="45720" rIns="45720" tIns="18288" bIns="18288" anchor="ctr">
+            <a:spAutoFit/>
+          </a:bodyPr>
+          <a:lstStyle/>
+          <a:p>
+            <a:pPr algn="ctr"/>
+            <a:r>
+              <a:rPr sz="2800" b="1" i="0">
+                <a:solidFill>
+                  <a:srgbClr val="FFFFFF"/>
+                </a:solidFill>
+                <a:latin typeface="Calibri"/>
+              </a:rPr>
+              <a:t>1</a:t>
+            </a:r>
+          </a:p>
+        </p:txBody>
+      </p:sp>
+      <p:sp>
+        <p:nvSpPr>
+          <p:cNvPr id="6" name="Rounded Rectangle 5"/>
+          <p:cNvSpPr/>
+          <p:nvPr/>
+        </p:nvSpPr>
+        <p:spPr>
+          <a:xfrm>
+            <a:off x="2011680" y="1440180"/>
+            <a:ext cx="9144000" cy="777240"/>
+          </a:xfrm>
+          <a:prstGeom prst="roundRect">
+            <a:avLst>
+              <a:gd name="adj" fmla="val 8000"/>
+            </a:avLst>
+          </a:prstGeom>
+          <a:solidFill>
+            <a:srgbClr val="FBFBFD"/>
+          </a:solidFill>
+          <a:ln w="19050">
+            <a:solidFill>
+              <a:srgbClr val="00A0B0"/>
+            </a:solidFill>
+          </a:ln>
+        </p:spPr>
+        <p:style>
+          <a:lnRef idx="1">
+            <a:schemeClr val="accent1"/>
+          </a:lnRef>
+          <a:fillRef idx="3">
+            <a:schemeClr val="accent1"/>
+          </a:fillRef>
+          <a:effectRef idx="2">
+            <a:schemeClr val="accent1"/>
+          </a:effectRef>
+          <a:fontRef idx="minor">
+            <a:schemeClr val="lt1"/>
+          </a:fontRef>
+        </p:style>
+        <p:txBody>
+          <a:bodyPr rtlCol="0" anchor="ctr"/>
+          <a:lstStyle/>
+          <a:p>
+            <a:pPr algn="ctr"/>
+          </a:p>
+        </p:txBody>
+      </p:sp>
+      <p:sp>
+        <p:nvSpPr>
+          <p:cNvPr id="7" name="TextBox 6"/>
+          <p:cNvSpPr txBox="1"/>
+          <p:nvPr/>
+        </p:nvSpPr>
+        <p:spPr>
+          <a:xfrm>
+            <a:off x="2286000" y="1440180"/>
+            <a:ext cx="8686800" cy="777240"/>
+          </a:xfrm>
+          <a:prstGeom prst="rect">
+            <a:avLst/>
+          </a:prstGeom>
+          <a:noFill/>
+        </p:spPr>
+        <p:txBody>
+          <a:bodyPr wrap="square" lIns="45720" rIns="45720" tIns="18288" bIns="18288" anchor="ctr">
+            <a:spAutoFit/>
+          </a:bodyPr>
+          <a:lstStyle/>
+          <a:p>
+            <a:pPr algn="l"/>
+            <a:r>
+              <a:rPr sz="1800" b="0" i="0">
+                <a:solidFill>
+                  <a:srgbClr val="1A1A2E"/>
+                </a:solidFill>
+                <a:latin typeface="Calibri"/>
+              </a:rPr>
+              <a:t>Authn ≠ Authz — sono due cose diverse</a:t>
+            </a:r>
+          </a:p>
+        </p:txBody>
+      </p:sp>
+      <p:sp>
+        <p:nvSpPr>
+          <p:cNvPr id="8" name="Oval 7"/>
+          <p:cNvSpPr/>
+          <p:nvPr/>
+        </p:nvSpPr>
+        <p:spPr>
+          <a:xfrm>
+            <a:off x="914400" y="2354580"/>
+            <a:ext cx="777240" cy="777240"/>
+          </a:xfrm>
+          <a:prstGeom prst="ellipse">
+            <a:avLst/>
+          </a:prstGeom>
+          <a:solidFill>
+            <a:srgbClr val="00A0B0"/>
+          </a:solidFill>
+          <a:ln>
+            <a:noFill/>
+          </a:ln>
+        </p:spPr>
+        <p:style>
+          <a:lnRef idx="1">
+            <a:schemeClr val="accent1"/>
+          </a:lnRef>
+          <a:fillRef idx="3">
+            <a:schemeClr val="accent1"/>
+          </a:fillRef>
+          <a:effectRef idx="2">
+            <a:schemeClr val="accent1"/>
+          </a:effectRef>
+          <a:fontRef idx="minor">
+            <a:schemeClr val="lt1"/>
+          </a:fontRef>
+        </p:style>
+        <p:txBody>
+          <a:bodyPr rtlCol="0" anchor="ctr"/>
+          <a:lstStyle/>
+          <a:p>
+            <a:pPr algn="ctr"/>
+          </a:p>
+        </p:txBody>
+      </p:sp>
+      <p:sp>
+        <p:nvSpPr>
+          <p:cNvPr id="9" name="TextBox 8"/>
+          <p:cNvSpPr txBox="1"/>
+          <p:nvPr/>
+        </p:nvSpPr>
+        <p:spPr>
+          <a:xfrm>
+            <a:off x="914400" y="2354580"/>
+            <a:ext cx="777240" cy="777240"/>
+          </a:xfrm>
+          <a:prstGeom prst="rect">
+            <a:avLst/>
+          </a:prstGeom>
+          <a:noFill/>
+        </p:spPr>
+        <p:txBody>
+          <a:bodyPr wrap="square" lIns="45720" rIns="45720" tIns="18288" bIns="18288" anchor="ctr">
+            <a:spAutoFit/>
+          </a:bodyPr>
+          <a:lstStyle/>
+          <a:p>
+            <a:pPr algn="ctr"/>
+            <a:r>
+              <a:rPr sz="2800" b="1" i="0">
+                <a:solidFill>
+                  <a:srgbClr val="FFFFFF"/>
+                </a:solidFill>
+                <a:latin typeface="Calibri"/>
+              </a:rPr>
+              <a:t>2</a:t>
+            </a:r>
+          </a:p>
+        </p:txBody>
+      </p:sp>
+      <p:sp>
+        <p:nvSpPr>
+          <p:cNvPr id="10" name="Rounded Rectangle 9"/>
+          <p:cNvSpPr/>
+          <p:nvPr/>
+        </p:nvSpPr>
+        <p:spPr>
+          <a:xfrm>
+            <a:off x="2011680" y="2354580"/>
+            <a:ext cx="9144000" cy="777240"/>
+          </a:xfrm>
+          <a:prstGeom prst="roundRect">
+            <a:avLst>
+              <a:gd name="adj" fmla="val 8000"/>
+            </a:avLst>
+          </a:prstGeom>
+          <a:solidFill>
+            <a:srgbClr val="FBFBFD"/>
+          </a:solidFill>
+          <a:ln w="19050">
+            <a:solidFill>
+              <a:srgbClr val="00A0B0"/>
+            </a:solidFill>
+          </a:ln>
+        </p:spPr>
+        <p:style>
+          <a:lnRef idx="1">
+            <a:schemeClr val="accent1"/>
+          </a:lnRef>
+          <a:fillRef idx="3">
+            <a:schemeClr val="accent1"/>
+          </a:fillRef>
+          <a:effectRef idx="2">
+            <a:schemeClr val="accent1"/>
+          </a:effectRef>
+          <a:fontRef idx="minor">
+            <a:schemeClr val="lt1"/>
+          </a:fontRef>
+        </p:style>
+        <p:txBody>
+          <a:bodyPr rtlCol="0" anchor="ctr"/>
+          <a:lstStyle/>
+          <a:p>
+            <a:pPr algn="ctr"/>
+          </a:p>
+        </p:txBody>
+      </p:sp>
+      <p:sp>
+        <p:nvSpPr>
+          <p:cNvPr id="11" name="TextBox 10"/>
+          <p:cNvSpPr txBox="1"/>
+          <p:nvPr/>
+        </p:nvSpPr>
+        <p:spPr>
+          <a:xfrm>
+            <a:off x="2286000" y="2354580"/>
+            <a:ext cx="8686800" cy="777240"/>
+          </a:xfrm>
+          <a:prstGeom prst="rect">
+            <a:avLst/>
+          </a:prstGeom>
+          <a:noFill/>
+        </p:spPr>
+        <p:txBody>
+          <a:bodyPr wrap="square" lIns="45720" rIns="45720" tIns="18288" bIns="18288" anchor="ctr">
+            <a:spAutoFit/>
+          </a:bodyPr>
+          <a:lstStyle/>
+          <a:p>
+            <a:pPr algn="l"/>
+            <a:r>
+              <a:rPr sz="1800" b="0" i="0">
+                <a:solidFill>
+                  <a:srgbClr val="1A1A2E"/>
+                </a:solidFill>
+                <a:latin typeface="Calibri"/>
+              </a:rPr>
+              <a:t>IDOR: caso reale italiano, 100k€ di multa</a:t>
+            </a:r>
+          </a:p>
+        </p:txBody>
+      </p:sp>
+      <p:sp>
+        <p:nvSpPr>
+          <p:cNvPr id="12" name="Oval 11"/>
+          <p:cNvSpPr/>
+          <p:nvPr/>
+        </p:nvSpPr>
+        <p:spPr>
+          <a:xfrm>
+            <a:off x="914400" y="3268980"/>
+            <a:ext cx="777240" cy="777240"/>
+          </a:xfrm>
+          <a:prstGeom prst="ellipse">
+            <a:avLst/>
+          </a:prstGeom>
+          <a:solidFill>
+            <a:srgbClr val="00A0B0"/>
+          </a:solidFill>
+          <a:ln>
+            <a:noFill/>
+          </a:ln>
+        </p:spPr>
+        <p:style>
+          <a:lnRef idx="1">
+            <a:schemeClr val="accent1"/>
+          </a:lnRef>
+          <a:fillRef idx="3">
+            <a:schemeClr val="accent1"/>
+          </a:fillRef>
+          <a:effectRef idx="2">
+            <a:schemeClr val="accent1"/>
+          </a:effectRef>
+          <a:fontRef idx="minor">
+            <a:schemeClr val="lt1"/>
+          </a:fontRef>
+        </p:style>
+        <p:txBody>
+          <a:bodyPr rtlCol="0" anchor="ctr"/>
+          <a:lstStyle/>
+          <a:p>
+            <a:pPr algn="ctr"/>
+          </a:p>
+        </p:txBody>
+      </p:sp>
+      <p:sp>
+        <p:nvSpPr>
+          <p:cNvPr id="13" name="TextBox 12"/>
+          <p:cNvSpPr txBox="1"/>
+          <p:nvPr/>
+        </p:nvSpPr>
+        <p:spPr>
+          <a:xfrm>
+            <a:off x="914400" y="3268980"/>
+            <a:ext cx="777240" cy="777240"/>
+          </a:xfrm>
+          <a:prstGeom prst="rect">
+            <a:avLst/>
+          </a:prstGeom>
+          <a:noFill/>
+        </p:spPr>
+        <p:txBody>
+          <a:bodyPr wrap="square" lIns="45720" rIns="45720" tIns="18288" bIns="18288" anchor="ctr">
+            <a:spAutoFit/>
+          </a:bodyPr>
+          <a:lstStyle/>
+          <a:p>
+            <a:pPr algn="ctr"/>
+            <a:r>
+              <a:rPr sz="2800" b="1" i="0">
+                <a:solidFill>
+                  <a:srgbClr val="FFFFFF"/>
+                </a:solidFill>
+                <a:latin typeface="Calibri"/>
+              </a:rPr>
+              <a:t>3</a:t>
+            </a:r>
+          </a:p>
+        </p:txBody>
+      </p:sp>
+      <p:sp>
+        <p:nvSpPr>
+          <p:cNvPr id="14" name="Rounded Rectangle 13"/>
+          <p:cNvSpPr/>
+          <p:nvPr/>
+        </p:nvSpPr>
+        <p:spPr>
+          <a:xfrm>
+            <a:off x="2011680" y="3268980"/>
+            <a:ext cx="9144000" cy="777240"/>
+          </a:xfrm>
+          <a:prstGeom prst="roundRect">
+            <a:avLst>
+              <a:gd name="adj" fmla="val 8000"/>
+            </a:avLst>
+          </a:prstGeom>
+          <a:solidFill>
+            <a:srgbClr val="FBFBFD"/>
+          </a:solidFill>
+          <a:ln w="19050">
+            <a:solidFill>
+              <a:srgbClr val="00A0B0"/>
+            </a:solidFill>
+          </a:ln>
+        </p:spPr>
+        <p:style>
+          <a:lnRef idx="1">
+            <a:schemeClr val="accent1"/>
+          </a:lnRef>
+          <a:fillRef idx="3">
+            <a:schemeClr val="accent1"/>
+          </a:fillRef>
+          <a:effectRef idx="2">
+            <a:schemeClr val="accent1"/>
+          </a:effectRef>
+          <a:fontRef idx="minor">
+            <a:schemeClr val="lt1"/>
+          </a:fontRef>
+        </p:style>
+        <p:txBody>
+          <a:bodyPr rtlCol="0" anchor="ctr"/>
+          <a:lstStyle/>
+          <a:p>
+            <a:pPr algn="ctr"/>
+          </a:p>
+        </p:txBody>
+      </p:sp>
+      <p:sp>
+        <p:nvSpPr>
+          <p:cNvPr id="15" name="TextBox 14"/>
+          <p:cNvSpPr txBox="1"/>
+          <p:nvPr/>
+        </p:nvSpPr>
+        <p:spPr>
+          <a:xfrm>
+            <a:off x="2286000" y="3268980"/>
+            <a:ext cx="8686800" cy="777240"/>
+          </a:xfrm>
+          <a:prstGeom prst="rect">
+            <a:avLst/>
+          </a:prstGeom>
+          <a:noFill/>
+        </p:spPr>
+        <p:txBody>
+          <a:bodyPr wrap="square" lIns="45720" rIns="45720" tIns="18288" bIns="18288" anchor="ctr">
+            <a:spAutoFit/>
+          </a:bodyPr>
+          <a:lstStyle/>
+          <a:p>
+            <a:pPr algn="l"/>
+            <a:r>
+              <a:rPr sz="1800" b="0" i="0">
+                <a:solidFill>
+                  <a:srgbClr val="1A1A2E"/>
+                </a:solidFill>
+                <a:latin typeface="Calibri"/>
+              </a:rPr>
+              <a:t>401 = non autenticato, 403 = non autorizzato</a:t>
+            </a:r>
+          </a:p>
+        </p:txBody>
+      </p:sp>
+      <p:sp>
+        <p:nvSpPr>
+          <p:cNvPr id="16" name="Oval 15"/>
+          <p:cNvSpPr/>
+          <p:nvPr/>
+        </p:nvSpPr>
+        <p:spPr>
+          <a:xfrm>
+            <a:off x="914400" y="4183380"/>
+            <a:ext cx="777240" cy="777240"/>
+          </a:xfrm>
+          <a:prstGeom prst="ellipse">
+            <a:avLst/>
+          </a:prstGeom>
+          <a:solidFill>
+            <a:srgbClr val="00A0B0"/>
+          </a:solidFill>
+          <a:ln>
+            <a:noFill/>
+          </a:ln>
+        </p:spPr>
+        <p:style>
+          <a:lnRef idx="1">
+            <a:schemeClr val="accent1"/>
+          </a:lnRef>
+          <a:fillRef idx="3">
+            <a:schemeClr val="accent1"/>
+          </a:fillRef>
+          <a:effectRef idx="2">
+            <a:schemeClr val="accent1"/>
+          </a:effectRef>
+          <a:fontRef idx="minor">
+            <a:schemeClr val="lt1"/>
+          </a:fontRef>
+        </p:style>
+        <p:txBody>
+          <a:bodyPr rtlCol="0" anchor="ctr"/>
+          <a:lstStyle/>
+          <a:p>
+            <a:pPr algn="ctr"/>
+          </a:p>
+        </p:txBody>
+      </p:sp>
+      <p:sp>
+        <p:nvSpPr>
+          <p:cNvPr id="17" name="TextBox 16"/>
+          <p:cNvSpPr txBox="1"/>
+          <p:nvPr/>
+        </p:nvSpPr>
+        <p:spPr>
+          <a:xfrm>
+            <a:off x="914400" y="4183380"/>
+            <a:ext cx="777240" cy="777240"/>
+          </a:xfrm>
+          <a:prstGeom prst="rect">
+            <a:avLst/>
+          </a:prstGeom>
+          <a:noFill/>
+        </p:spPr>
+        <p:txBody>
+          <a:bodyPr wrap="square" lIns="45720" rIns="45720" tIns="18288" bIns="18288" anchor="ctr">
+            <a:spAutoFit/>
+          </a:bodyPr>
+          <a:lstStyle/>
+          <a:p>
+            <a:pPr algn="ctr"/>
+            <a:r>
+              <a:rPr sz="2800" b="1" i="0">
+                <a:solidFill>
+                  <a:srgbClr val="FFFFFF"/>
+                </a:solidFill>
+                <a:latin typeface="Calibri"/>
+              </a:rPr>
+              <a:t>4</a:t>
+            </a:r>
+          </a:p>
+        </p:txBody>
+      </p:sp>
+      <p:sp>
+        <p:nvSpPr>
+          <p:cNvPr id="18" name="Rounded Rectangle 17"/>
+          <p:cNvSpPr/>
+          <p:nvPr/>
+        </p:nvSpPr>
+        <p:spPr>
+          <a:xfrm>
+            <a:off x="2011680" y="4183380"/>
+            <a:ext cx="9144000" cy="777240"/>
+          </a:xfrm>
+          <a:prstGeom prst="roundRect">
+            <a:avLst>
+              <a:gd name="adj" fmla="val 8000"/>
+            </a:avLst>
+          </a:prstGeom>
+          <a:solidFill>
+            <a:srgbClr val="FBFBFD"/>
+          </a:solidFill>
+          <a:ln w="19050">
+            <a:solidFill>
+              <a:srgbClr val="00A0B0"/>
+            </a:solidFill>
+          </a:ln>
+        </p:spPr>
+        <p:style>
+          <a:lnRef idx="1">
+            <a:schemeClr val="accent1"/>
+          </a:lnRef>
+          <a:fillRef idx="3">
+            <a:schemeClr val="accent1"/>
+          </a:fillRef>
+          <a:effectRef idx="2">
+            <a:schemeClr val="accent1"/>
+          </a:effectRef>
+          <a:fontRef idx="minor">
+            <a:schemeClr val="lt1"/>
+          </a:fontRef>
+        </p:style>
+        <p:txBody>
+          <a:bodyPr rtlCol="0" anchor="ctr"/>
+          <a:lstStyle/>
+          <a:p>
+            <a:pPr algn="ctr"/>
+          </a:p>
+        </p:txBody>
+      </p:sp>
+      <p:sp>
+        <p:nvSpPr>
+          <p:cNvPr id="19" name="TextBox 18"/>
+          <p:cNvSpPr txBox="1"/>
+          <p:nvPr/>
+        </p:nvSpPr>
+        <p:spPr>
+          <a:xfrm>
+            <a:off x="2286000" y="4183380"/>
+            <a:ext cx="8686800" cy="777240"/>
+          </a:xfrm>
+          <a:prstGeom prst="rect">
+            <a:avLst/>
+          </a:prstGeom>
+          <a:noFill/>
+        </p:spPr>
+        <p:txBody>
+          <a:bodyPr wrap="square" lIns="45720" rIns="45720" tIns="18288" bIns="18288" anchor="ctr">
+            <a:spAutoFit/>
+          </a:bodyPr>
+          <a:lstStyle/>
+          <a:p>
+            <a:pPr algn="l"/>
+            <a:r>
+              <a:rPr sz="1800" b="0" i="0">
+                <a:solidFill>
+                  <a:srgbClr val="1A1A2E"/>
+                </a:solidFill>
+                <a:latin typeface="Calibri"/>
+              </a:rPr>
+              <a:t>Mai MD5/SHA per password — usa bcrypt o Argon2id</a:t>
+            </a:r>
+          </a:p>
+        </p:txBody>
+      </p:sp>
+      <p:sp>
+        <p:nvSpPr>
+          <p:cNvPr id="20" name="Oval 19"/>
+          <p:cNvSpPr/>
+          <p:nvPr/>
+        </p:nvSpPr>
+        <p:spPr>
+          <a:xfrm>
+            <a:off x="914400" y="5097780"/>
+            <a:ext cx="777240" cy="777240"/>
+          </a:xfrm>
+          <a:prstGeom prst="ellipse">
+            <a:avLst/>
+          </a:prstGeom>
+          <a:solidFill>
+            <a:srgbClr val="00A0B0"/>
+          </a:solidFill>
+          <a:ln>
+            <a:noFill/>
+          </a:ln>
+        </p:spPr>
+        <p:style>
+          <a:lnRef idx="1">
+            <a:schemeClr val="accent1"/>
+          </a:lnRef>
+          <a:fillRef idx="3">
+            <a:schemeClr val="accent1"/>
+          </a:fillRef>
+          <a:effectRef idx="2">
+            <a:schemeClr val="accent1"/>
+          </a:effectRef>
+          <a:fontRef idx="minor">
+            <a:schemeClr val="lt1"/>
+          </a:fontRef>
+        </p:style>
+        <p:txBody>
+          <a:bodyPr rtlCol="0" anchor="ctr"/>
+          <a:lstStyle/>
+          <a:p>
+            <a:pPr algn="ctr"/>
+          </a:p>
+        </p:txBody>
+      </p:sp>
+      <p:sp>
+        <p:nvSpPr>
+          <p:cNvPr id="21" name="TextBox 20"/>
+          <p:cNvSpPr txBox="1"/>
+          <p:nvPr/>
+        </p:nvSpPr>
+        <p:spPr>
+          <a:xfrm>
+            <a:off x="914400" y="5097780"/>
+            <a:ext cx="777240" cy="777240"/>
+          </a:xfrm>
+          <a:prstGeom prst="rect">
+            <a:avLst/>
+          </a:prstGeom>
+          <a:noFill/>
+        </p:spPr>
+        <p:txBody>
+          <a:bodyPr wrap="square" lIns="45720" rIns="45720" tIns="18288" bIns="18288" anchor="ctr">
+            <a:spAutoFit/>
+          </a:bodyPr>
+          <a:lstStyle/>
+          <a:p>
+            <a:pPr algn="ctr"/>
+            <a:r>
+              <a:rPr sz="2800" b="1" i="0">
+                <a:solidFill>
+                  <a:srgbClr val="FFFFFF"/>
+                </a:solidFill>
+                <a:latin typeface="Calibri"/>
+              </a:rPr>
+              <a:t>5</a:t>
+            </a:r>
+          </a:p>
+        </p:txBody>
+      </p:sp>
+      <p:sp>
+        <p:nvSpPr>
+          <p:cNvPr id="22" name="Rounded Rectangle 21"/>
+          <p:cNvSpPr/>
+          <p:nvPr/>
+        </p:nvSpPr>
+        <p:spPr>
+          <a:xfrm>
+            <a:off x="2011680" y="5097780"/>
+            <a:ext cx="9144000" cy="777240"/>
+          </a:xfrm>
+          <a:prstGeom prst="roundRect">
+            <a:avLst>
+              <a:gd name="adj" fmla="val 8000"/>
+            </a:avLst>
+          </a:prstGeom>
+          <a:solidFill>
+            <a:srgbClr val="FBFBFD"/>
+          </a:solidFill>
+          <a:ln w="19050">
+            <a:solidFill>
+              <a:srgbClr val="00A0B0"/>
+            </a:solidFill>
+          </a:ln>
+        </p:spPr>
+        <p:style>
+          <a:lnRef idx="1">
+            <a:schemeClr val="accent1"/>
+          </a:lnRef>
+          <a:fillRef idx="3">
+            <a:schemeClr val="accent1"/>
+          </a:fillRef>
+          <a:effectRef idx="2">
+            <a:schemeClr val="accent1"/>
+          </a:effectRef>
+          <a:fontRef idx="minor">
+            <a:schemeClr val="lt1"/>
+          </a:fontRef>
+        </p:style>
+        <p:txBody>
+          <a:bodyPr rtlCol="0" anchor="ctr"/>
+          <a:lstStyle/>
+          <a:p>
+            <a:pPr algn="ctr"/>
+          </a:p>
+        </p:txBody>
+      </p:sp>
+      <p:sp>
+        <p:nvSpPr>
+          <p:cNvPr id="23" name="TextBox 22"/>
+          <p:cNvSpPr txBox="1"/>
+          <p:nvPr/>
+        </p:nvSpPr>
+        <p:spPr>
+          <a:xfrm>
+            <a:off x="2286000" y="5097780"/>
+            <a:ext cx="8686800" cy="777240"/>
+          </a:xfrm>
+          <a:prstGeom prst="rect">
+            <a:avLst/>
+          </a:prstGeom>
+          <a:noFill/>
+        </p:spPr>
+        <p:txBody>
+          <a:bodyPr wrap="square" lIns="45720" rIns="45720" tIns="18288" bIns="18288" anchor="ctr">
+            <a:spAutoFit/>
+          </a:bodyPr>
+          <a:lstStyle/>
+          <a:p>
+            <a:pPr algn="l"/>
+            <a:r>
+              <a:rPr sz="1800" b="0" i="0">
+                <a:solidFill>
+                  <a:srgbClr val="1A1A2E"/>
+                </a:solidFill>
+                <a:latin typeface="Calibri"/>
+              </a:rPr>
+              <a:t>Apri il DB con DB Browser: il visivo è dirimente</a:t>
+            </a:r>
+          </a:p>
+        </p:txBody>
+      </p:sp>
+      <p:cxnSp>
+        <p:nvCxnSpPr>
+          <p:cNvPr id="24" name="Connector 23"/>
+          <p:cNvCxnSpPr/>
+          <p:nvPr/>
+        </p:nvCxnSpPr>
+        <p:spPr>
+          <a:xfrm>
+            <a:off x="457200" y="6446520"/>
+            <a:ext cx="11274552" cy="0"/>
+          </a:xfrm>
+          <a:prstGeom prst="line">
+            <a:avLst/>
+          </a:prstGeom>
+          <a:ln w="19050">
+            <a:solidFill>
+              <a:srgbClr val="00A0B0"/>
+            </a:solidFill>
+          </a:ln>
+        </p:spPr>
+        <p:style>
+          <a:lnRef idx="2">
+            <a:schemeClr val="accent1"/>
+          </a:lnRef>
+          <a:fillRef idx="0">
+            <a:schemeClr val="accent1"/>
+          </a:fillRef>
+          <a:effectRef idx="1">
+            <a:schemeClr val="accent1"/>
+          </a:effectRef>
+          <a:fontRef idx="minor">
+            <a:schemeClr val="tx1"/>
+          </a:fontRef>
+        </p:style>
+      </p:cxnSp>
+      <p:sp>
+        <p:nvSpPr>
+          <p:cNvPr id="25" name="TextBox 24"/>
+          <p:cNvSpPr txBox="1"/>
+          <p:nvPr/>
+        </p:nvSpPr>
+        <p:spPr>
+          <a:xfrm>
+            <a:off x="457200" y="6473952"/>
+            <a:ext cx="7315200" cy="292608"/>
+          </a:xfrm>
+          <a:prstGeom prst="rect">
+            <a:avLst/>
+          </a:prstGeom>
+          <a:noFill/>
+        </p:spPr>
+        <p:txBody>
+          <a:bodyPr wrap="square" lIns="45720" rIns="45720" tIns="18288" bIns="18288" anchor="t">
+            <a:spAutoFit/>
+          </a:bodyPr>
+          <a:lstStyle/>
+          <a:p>
+            <a:pPr algn="l"/>
+            <a:r>
+              <a:rPr sz="1000" b="0" i="0">
+                <a:solidFill>
+                  <a:srgbClr val="6B7280"/>
+                </a:solidFill>
+                <a:latin typeface="Calibri"/>
+              </a:rPr>
+              <a:t>Secure Coding · Corso IFTS STEM · A. Manneschi · 2024/2025</a:t>
+            </a:r>
+          </a:p>
+        </p:txBody>
+      </p:sp>
+      <p:sp>
+        <p:nvSpPr>
+          <p:cNvPr id="26" name="TextBox 25"/>
+          <p:cNvSpPr txBox="1"/>
+          <p:nvPr/>
+        </p:nvSpPr>
+        <p:spPr>
+          <a:xfrm>
+            <a:off x="10515600" y="6473952"/>
+            <a:ext cx="1188720" cy="292608"/>
+          </a:xfrm>
+          <a:prstGeom prst="rect">
+            <a:avLst/>
+          </a:prstGeom>
+          <a:noFill/>
+        </p:spPr>
+        <p:txBody>
+          <a:bodyPr wrap="square" lIns="45720" rIns="45720" tIns="18288" bIns="18288" anchor="t">
+            <a:spAutoFit/>
+          </a:bodyPr>
+          <a:lstStyle/>
+          <a:p>
+            <a:pPr algn="r"/>
+            <a:r>
+              <a:rPr sz="1000" b="1" i="0">
+                <a:solidFill>
+                  <a:srgbClr val="6B7280"/>
+                </a:solidFill>
+                <a:latin typeface="Calibri"/>
+              </a:rPr>
+              <a:t>L4  ·  12/14</a:t>
+            </a:r>
+          </a:p>
+        </p:txBody>
+      </p:sp>
+    </p:spTree>
+  </p:cSld>
+  <p:clrMapOvr>
+    <a:masterClrMapping/>
+  </p:clrMapOvr>
+</p:sld>
+</file>
+
+<file path=ppt/slides/slide13.xml><?xml version="1.0" encoding="utf-8"?>
+<p:sld xmlns:a="http://schemas.openxmlformats.org/drawingml/2006/main" xmlns:p="http://schemas.openxmlformats.org/presentationml/2006/main" xmlns:r="http://schemas.openxmlformats.org/officeDocument/2006/relationships">
+  <p:cSld>
+    <p:spTree>
+      <p:nvGrpSpPr>
+        <p:cNvPr id="1" name=""/>
+        <p:cNvGrpSpPr/>
+        <p:nvPr/>
+      </p:nvGrpSpPr>
+      <p:grpSpPr/>
+      <p:sp>
+        <p:nvSpPr>
+          <p:cNvPr id="2" name="Rectangle 1"/>
+          <p:cNvSpPr/>
+          <p:nvPr/>
+        </p:nvSpPr>
+        <p:spPr>
+          <a:xfrm>
+            <a:off x="0" y="0"/>
+            <a:ext cx="4114800" cy="6858000"/>
+          </a:xfrm>
+          <a:prstGeom prst="rect">
+            <a:avLst/>
+          </a:prstGeom>
+          <a:solidFill>
+            <a:srgbClr val="081B33"/>
+          </a:solidFill>
+          <a:ln>
+            <a:noFill/>
+          </a:ln>
+        </p:spPr>
+        <p:style>
+          <a:lnRef idx="1">
+            <a:schemeClr val="accent1"/>
+          </a:lnRef>
+          <a:fillRef idx="3">
+            <a:schemeClr val="accent1"/>
+          </a:fillRef>
+          <a:effectRef idx="2">
+            <a:schemeClr val="accent1"/>
+          </a:effectRef>
+          <a:fontRef idx="minor">
+            <a:schemeClr val="lt1"/>
+          </a:fontRef>
+        </p:style>
+        <p:txBody>
+          <a:bodyPr rtlCol="0" anchor="ctr"/>
+          <a:lstStyle/>
+          <a:p>
+            <a:pPr algn="ctr"/>
+          </a:p>
+        </p:txBody>
+      </p:sp>
+      <p:sp>
+        <p:nvSpPr>
+          <p:cNvPr id="3" name="Rectangle 2"/>
+          <p:cNvSpPr/>
+          <p:nvPr/>
+        </p:nvSpPr>
+        <p:spPr>
+          <a:xfrm>
+            <a:off x="4114800" y="0"/>
+            <a:ext cx="8046720" cy="6858000"/>
+          </a:xfrm>
+          <a:prstGeom prst="rect">
+            <a:avLst/>
+          </a:prstGeom>
+          <a:solidFill>
+            <a:srgbClr val="F1F4F8"/>
+          </a:solidFill>
+          <a:ln>
+            <a:noFill/>
+          </a:ln>
+        </p:spPr>
+        <p:style>
+          <a:lnRef idx="1">
+            <a:schemeClr val="accent1"/>
+          </a:lnRef>
+          <a:fillRef idx="3">
+            <a:schemeClr val="accent1"/>
+          </a:fillRef>
+          <a:effectRef idx="2">
+            <a:schemeClr val="accent1"/>
+          </a:effectRef>
+          <a:fontRef idx="minor">
+            <a:schemeClr val="lt1"/>
+          </a:fontRef>
+        </p:style>
+        <p:txBody>
+          <a:bodyPr rtlCol="0" anchor="ctr"/>
+          <a:lstStyle/>
+          <a:p>
+            <a:pPr algn="ctr"/>
+          </a:p>
+        </p:txBody>
+      </p:sp>
+      <p:sp>
+        <p:nvSpPr>
+          <p:cNvPr id="4" name="Rectangle 3"/>
+          <p:cNvSpPr/>
+          <p:nvPr/>
+        </p:nvSpPr>
+        <p:spPr>
+          <a:xfrm>
+            <a:off x="4114800" y="0"/>
+            <a:ext cx="137160" cy="6858000"/>
+          </a:xfrm>
+          <a:prstGeom prst="rect">
+            <a:avLst/>
+          </a:prstGeom>
+          <a:solidFill>
+            <a:srgbClr val="00A0B0"/>
+          </a:solidFill>
+          <a:ln>
+            <a:noFill/>
+          </a:ln>
+        </p:spPr>
+        <p:style>
+          <a:lnRef idx="1">
+            <a:schemeClr val="accent1"/>
+          </a:lnRef>
+          <a:fillRef idx="3">
+            <a:schemeClr val="accent1"/>
+          </a:fillRef>
+          <a:effectRef idx="2">
+            <a:schemeClr val="accent1"/>
+          </a:effectRef>
+          <a:fontRef idx="minor">
+            <a:schemeClr val="lt1"/>
+          </a:fontRef>
+        </p:style>
+        <p:txBody>
+          <a:bodyPr rtlCol="0" anchor="ctr"/>
+          <a:lstStyle/>
+          <a:p>
+            <a:pPr algn="ctr"/>
+          </a:p>
+        </p:txBody>
+      </p:sp>
+      <p:sp>
+        <p:nvSpPr>
+          <p:cNvPr id="5" name="TextBox 4"/>
+          <p:cNvSpPr txBox="1"/>
+          <p:nvPr/>
+        </p:nvSpPr>
+        <p:spPr>
+          <a:xfrm>
+            <a:off x="274320" y="2103120"/>
+            <a:ext cx="3657600" cy="2286000"/>
+          </a:xfrm>
+          <a:prstGeom prst="rect">
+            <a:avLst/>
+          </a:prstGeom>
+          <a:noFill/>
+        </p:spPr>
+        <p:txBody>
+          <a:bodyPr wrap="square" lIns="45720" rIns="45720" tIns="18288" bIns="18288" anchor="t">
+            <a:spAutoFit/>
+          </a:bodyPr>
+          <a:lstStyle/>
+          <a:p>
+            <a:pPr algn="ctr"/>
+            <a:r>
+              <a:rPr sz="17000" b="1" i="0">
+                <a:solidFill>
+                  <a:srgbClr val="00A0B0"/>
+                </a:solidFill>
+                <a:latin typeface="Calibri"/>
+              </a:rPr>
+              <a:t>03</a:t>
+            </a:r>
+          </a:p>
+        </p:txBody>
+      </p:sp>
+      <p:sp>
+        <p:nvSpPr>
+          <p:cNvPr id="6" name="TextBox 5"/>
+          <p:cNvSpPr txBox="1"/>
+          <p:nvPr/>
+        </p:nvSpPr>
+        <p:spPr>
+          <a:xfrm>
+            <a:off x="274320" y="4572000"/>
+            <a:ext cx="3657600" cy="457200"/>
+          </a:xfrm>
+          <a:prstGeom prst="rect">
+            <a:avLst/>
+          </a:prstGeom>
+          <a:noFill/>
+        </p:spPr>
+        <p:txBody>
+          <a:bodyPr wrap="square" lIns="45720" rIns="45720" tIns="18288" bIns="18288" anchor="t">
+            <a:spAutoFit/>
+          </a:bodyPr>
+          <a:lstStyle/>
+          <a:p>
+            <a:pPr algn="ctr"/>
+            <a:r>
+              <a:rPr sz="2000" b="1" i="0">
+                <a:solidFill>
+                  <a:srgbClr val="6FD8E0"/>
+                </a:solidFill>
+                <a:latin typeface="Calibri"/>
+              </a:rPr>
+              <a:t>PARTE</a:t>
+            </a:r>
+          </a:p>
+        </p:txBody>
+      </p:sp>
+      <p:sp>
+        <p:nvSpPr>
+          <p:cNvPr id="7" name="TextBox 6"/>
+          <p:cNvSpPr txBox="1"/>
+          <p:nvPr/>
+        </p:nvSpPr>
+        <p:spPr>
+          <a:xfrm>
+            <a:off x="4572000" y="2286000"/>
+            <a:ext cx="7315200" cy="1645920"/>
+          </a:xfrm>
+          <a:prstGeom prst="rect">
+            <a:avLst/>
+          </a:prstGeom>
+          <a:noFill/>
+        </p:spPr>
+        <p:txBody>
+          <a:bodyPr wrap="square" lIns="45720" rIns="45720" tIns="18288" bIns="18288" anchor="t">
+            <a:spAutoFit/>
+          </a:bodyPr>
+          <a:lstStyle/>
+          <a:p>
+            <a:pPr algn="l"/>
+            <a:r>
+              <a:rPr sz="4400" b="1" i="0">
+                <a:solidFill>
+                  <a:srgbClr val="0F2D52"/>
+                </a:solidFill>
+                <a:latin typeface="Calibri"/>
+              </a:rPr>
+              <a:t>Laboratorio</a:t>
+            </a:r>
+          </a:p>
+        </p:txBody>
+      </p:sp>
+      <p:sp>
+        <p:nvSpPr>
+          <p:cNvPr id="8" name="TextBox 7"/>
+          <p:cNvSpPr txBox="1"/>
+          <p:nvPr/>
+        </p:nvSpPr>
+        <p:spPr>
+          <a:xfrm>
+            <a:off x="4572000" y="3931920"/>
+            <a:ext cx="7315200" cy="1828800"/>
+          </a:xfrm>
+          <a:prstGeom prst="rect">
+            <a:avLst/>
+          </a:prstGeom>
+          <a:noFill/>
+        </p:spPr>
+        <p:txBody>
+          <a:bodyPr wrap="square" lIns="45720" rIns="45720" tIns="18288" bIns="18288" anchor="t">
+            <a:spAutoFit/>
+          </a:bodyPr>
+          <a:lstStyle/>
+          <a:p>
+            <a:pPr algn="l"/>
+            <a:r>
+              <a:rPr sz="1800" b="0" i="1">
+                <a:solidFill>
+                  <a:srgbClr val="6B7280"/>
+                </a:solidFill>
+                <a:latin typeface="Calibri"/>
+              </a:rPr>
+              <a:t>Aggiungere ownership check e migrare a bcrypt</a:t>
+            </a:r>
+          </a:p>
+        </p:txBody>
+      </p:sp>
+      <p:cxnSp>
+        <p:nvCxnSpPr>
+          <p:cNvPr id="9" name="Connector 8"/>
+          <p:cNvCxnSpPr/>
+          <p:nvPr/>
+        </p:nvCxnSpPr>
+        <p:spPr>
+          <a:xfrm>
+            <a:off x="457200" y="6446520"/>
+            <a:ext cx="11274552" cy="0"/>
+          </a:xfrm>
+          <a:prstGeom prst="line">
+            <a:avLst/>
+          </a:prstGeom>
+          <a:ln w="19050">
+            <a:solidFill>
+              <a:srgbClr val="00A0B0"/>
+            </a:solidFill>
+          </a:ln>
+        </p:spPr>
+        <p:style>
+          <a:lnRef idx="2">
+            <a:schemeClr val="accent1"/>
+          </a:lnRef>
+          <a:fillRef idx="0">
+            <a:schemeClr val="accent1"/>
+          </a:fillRef>
+          <a:effectRef idx="1">
+            <a:schemeClr val="accent1"/>
+          </a:effectRef>
+          <a:fontRef idx="minor">
+            <a:schemeClr val="tx1"/>
+          </a:fontRef>
+        </p:style>
+      </p:cxnSp>
+      <p:sp>
+        <p:nvSpPr>
+          <p:cNvPr id="10" name="TextBox 9"/>
+          <p:cNvSpPr txBox="1"/>
+          <p:nvPr/>
+        </p:nvSpPr>
+        <p:spPr>
+          <a:xfrm>
+            <a:off x="457200" y="6473952"/>
+            <a:ext cx="7315200" cy="292608"/>
+          </a:xfrm>
+          <a:prstGeom prst="rect">
+            <a:avLst/>
+          </a:prstGeom>
+          <a:noFill/>
+        </p:spPr>
+        <p:txBody>
+          <a:bodyPr wrap="square" lIns="45720" rIns="45720" tIns="18288" bIns="18288" anchor="t">
+            <a:spAutoFit/>
+          </a:bodyPr>
+          <a:lstStyle/>
+          <a:p>
+            <a:pPr algn="l"/>
+            <a:r>
+              <a:rPr sz="1000" b="0" i="0">
+                <a:solidFill>
+                  <a:srgbClr val="6B7280"/>
+                </a:solidFill>
+                <a:latin typeface="Calibri"/>
+              </a:rPr>
+              <a:t>Secure Coding · Corso IFTS STEM · A. Manneschi · 2024/2025</a:t>
+            </a:r>
+          </a:p>
+        </p:txBody>
+      </p:sp>
+      <p:sp>
+        <p:nvSpPr>
+          <p:cNvPr id="11" name="TextBox 10"/>
+          <p:cNvSpPr txBox="1"/>
+          <p:nvPr/>
+        </p:nvSpPr>
+        <p:spPr>
+          <a:xfrm>
+            <a:off x="10515600" y="6473952"/>
+            <a:ext cx="1188720" cy="292608"/>
           </a:xfrm>
           <a:prstGeom prst="rect">
             <a:avLst/>
@@ -5947,7 +5816,7 @@
             <a:avLst/>
           </a:prstGeom>
           <a:solidFill>
-            <a:srgbClr val="0F2D52"/>
+            <a:srgbClr val="081B33"/>
           </a:solidFill>
           <a:ln>
             <a:noFill/>
@@ -5983,11 +5852,247 @@
         </p:nvSpPr>
         <p:spPr>
           <a:xfrm>
-            <a:off x="8686800" y="457200"/>
-            <a:ext cx="3200400" cy="3200400"/>
+            <a:off x="8915400" y="228600"/>
+            <a:ext cx="2286000" cy="2286000"/>
           </a:xfrm>
           <a:prstGeom prst="ellipse">
             <a:avLst/>
+          </a:prstGeom>
+          <a:noFill/>
+          <a:ln w="25400">
+            <a:solidFill>
+              <a:srgbClr val="00A0B0"/>
+            </a:solidFill>
+          </a:ln>
+        </p:spPr>
+        <p:style>
+          <a:lnRef idx="1">
+            <a:schemeClr val="accent1"/>
+          </a:lnRef>
+          <a:fillRef idx="3">
+            <a:schemeClr val="accent1"/>
+          </a:fillRef>
+          <a:effectRef idx="2">
+            <a:schemeClr val="accent1"/>
+          </a:effectRef>
+          <a:fontRef idx="minor">
+            <a:schemeClr val="lt1"/>
+          </a:fontRef>
+        </p:style>
+        <p:txBody>
+          <a:bodyPr rtlCol="0" anchor="ctr"/>
+          <a:lstStyle/>
+          <a:p>
+            <a:pPr algn="ctr"/>
+          </a:p>
+        </p:txBody>
+      </p:sp>
+      <p:sp>
+        <p:nvSpPr>
+          <p:cNvPr id="4" name="Oval 3"/>
+          <p:cNvSpPr/>
+          <p:nvPr/>
+        </p:nvSpPr>
+        <p:spPr>
+          <a:xfrm>
+            <a:off x="10149840" y="3749040"/>
+            <a:ext cx="1645920" cy="1645920"/>
+          </a:xfrm>
+          <a:prstGeom prst="ellipse">
+            <a:avLst/>
+          </a:prstGeom>
+          <a:noFill/>
+          <a:ln w="25400">
+            <a:solidFill>
+              <a:srgbClr val="00A0B0"/>
+            </a:solidFill>
+          </a:ln>
+        </p:spPr>
+        <p:style>
+          <a:lnRef idx="1">
+            <a:schemeClr val="accent1"/>
+          </a:lnRef>
+          <a:fillRef idx="3">
+            <a:schemeClr val="accent1"/>
+          </a:fillRef>
+          <a:effectRef idx="2">
+            <a:schemeClr val="accent1"/>
+          </a:effectRef>
+          <a:fontRef idx="minor">
+            <a:schemeClr val="lt1"/>
+          </a:fontRef>
+        </p:style>
+        <p:txBody>
+          <a:bodyPr rtlCol="0" anchor="ctr"/>
+          <a:lstStyle/>
+          <a:p>
+            <a:pPr algn="ctr"/>
+          </a:p>
+        </p:txBody>
+      </p:sp>
+      <p:sp>
+        <p:nvSpPr>
+          <p:cNvPr id="5" name="Oval 4"/>
+          <p:cNvSpPr/>
+          <p:nvPr/>
+        </p:nvSpPr>
+        <p:spPr>
+          <a:xfrm>
+            <a:off x="685800" y="4800600"/>
+            <a:ext cx="1371600" cy="1371600"/>
+          </a:xfrm>
+          <a:prstGeom prst="ellipse">
+            <a:avLst/>
+          </a:prstGeom>
+          <a:noFill/>
+          <a:ln w="25400">
+            <a:solidFill>
+              <a:srgbClr val="00A0B0"/>
+            </a:solidFill>
+          </a:ln>
+        </p:spPr>
+        <p:style>
+          <a:lnRef idx="1">
+            <a:schemeClr val="accent1"/>
+          </a:lnRef>
+          <a:fillRef idx="3">
+            <a:schemeClr val="accent1"/>
+          </a:fillRef>
+          <a:effectRef idx="2">
+            <a:schemeClr val="accent1"/>
+          </a:effectRef>
+          <a:fontRef idx="minor">
+            <a:schemeClr val="lt1"/>
+          </a:fontRef>
+        </p:style>
+        <p:txBody>
+          <a:bodyPr rtlCol="0" anchor="ctr"/>
+          <a:lstStyle/>
+          <a:p>
+            <a:pPr algn="ctr"/>
+          </a:p>
+        </p:txBody>
+      </p:sp>
+      <p:sp>
+        <p:nvSpPr>
+          <p:cNvPr id="6" name="TextBox 5"/>
+          <p:cNvSpPr txBox="1"/>
+          <p:nvPr/>
+        </p:nvSpPr>
+        <p:spPr>
+          <a:xfrm>
+            <a:off x="731520" y="1371600"/>
+            <a:ext cx="10058400" cy="2286000"/>
+          </a:xfrm>
+          <a:prstGeom prst="rect">
+            <a:avLst/>
+          </a:prstGeom>
+          <a:noFill/>
+        </p:spPr>
+        <p:txBody>
+          <a:bodyPr wrap="square" lIns="45720" rIns="45720" tIns="18288" bIns="18288" anchor="t">
+            <a:spAutoFit/>
+          </a:bodyPr>
+          <a:lstStyle/>
+          <a:p>
+            <a:pPr algn="l"/>
+            <a:r>
+              <a:rPr sz="11000" b="1" i="0">
+                <a:solidFill>
+                  <a:srgbClr val="FFFFFF"/>
+                </a:solidFill>
+                <a:latin typeface="Calibri"/>
+              </a:rPr>
+              <a:t>Domande?</a:t>
+            </a:r>
+          </a:p>
+        </p:txBody>
+      </p:sp>
+      <p:cxnSp>
+        <p:nvCxnSpPr>
+          <p:cNvPr id="7" name="Connector 6"/>
+          <p:cNvCxnSpPr/>
+          <p:nvPr/>
+        </p:nvCxnSpPr>
+        <p:spPr>
+          <a:xfrm>
+            <a:off x="731520" y="3840480"/>
+            <a:ext cx="2926080" cy="0"/>
+          </a:xfrm>
+          <a:prstGeom prst="line">
+            <a:avLst/>
+          </a:prstGeom>
+          <a:ln w="50800">
+            <a:solidFill>
+              <a:srgbClr val="00A0B0"/>
+            </a:solidFill>
+          </a:ln>
+        </p:spPr>
+        <p:style>
+          <a:lnRef idx="2">
+            <a:schemeClr val="accent1"/>
+          </a:lnRef>
+          <a:fillRef idx="0">
+            <a:schemeClr val="accent1"/>
+          </a:fillRef>
+          <a:effectRef idx="1">
+            <a:schemeClr val="accent1"/>
+          </a:effectRef>
+          <a:fontRef idx="minor">
+            <a:schemeClr val="tx1"/>
+          </a:fontRef>
+        </p:style>
+      </p:cxnSp>
+      <p:sp>
+        <p:nvSpPr>
+          <p:cNvPr id="8" name="TextBox 7"/>
+          <p:cNvSpPr txBox="1"/>
+          <p:nvPr/>
+        </p:nvSpPr>
+        <p:spPr>
+          <a:xfrm>
+            <a:off x="731520" y="4114800"/>
+            <a:ext cx="10058400" cy="457200"/>
+          </a:xfrm>
+          <a:prstGeom prst="rect">
+            <a:avLst/>
+          </a:prstGeom>
+          <a:noFill/>
+        </p:spPr>
+        <p:txBody>
+          <a:bodyPr wrap="square" lIns="45720" rIns="45720" tIns="18288" bIns="18288" anchor="t">
+            <a:spAutoFit/>
+          </a:bodyPr>
+          <a:lstStyle/>
+          <a:p>
+            <a:pPr algn="l"/>
+            <a:r>
+              <a:rPr sz="2000" b="1" i="0">
+                <a:solidFill>
+                  <a:srgbClr val="00A0B0"/>
+                </a:solidFill>
+                <a:latin typeface="Calibri"/>
+              </a:rPr>
+              <a:t>Riepilogo · Q&amp;A · Discussione</a:t>
+            </a:r>
+          </a:p>
+        </p:txBody>
+      </p:sp>
+      <p:sp>
+        <p:nvSpPr>
+          <p:cNvPr id="9" name="Rounded Rectangle 8"/>
+          <p:cNvSpPr/>
+          <p:nvPr/>
+        </p:nvSpPr>
+        <p:spPr>
+          <a:xfrm>
+            <a:off x="731520" y="5029200"/>
+            <a:ext cx="10058400" cy="914400"/>
+          </a:xfrm>
+          <a:prstGeom prst="roundRect">
+            <a:avLst>
+              <a:gd name="adj" fmla="val 8000"/>
+            </a:avLst>
           </a:prstGeom>
           <a:solidFill>
             <a:srgbClr val="00A0B0"/>
@@ -6020,49 +6125,14 @@
       </p:sp>
       <p:sp>
         <p:nvSpPr>
-          <p:cNvPr id="4" name="TextBox 3"/>
+          <p:cNvPr id="10" name="TextBox 9"/>
           <p:cNvSpPr txBox="1"/>
           <p:nvPr/>
         </p:nvSpPr>
         <p:spPr>
           <a:xfrm>
-            <a:off x="731520" y="1645920"/>
-            <a:ext cx="7315200" cy="2286000"/>
-          </a:xfrm>
-          <a:prstGeom prst="rect">
-            <a:avLst/>
-          </a:prstGeom>
-          <a:noFill/>
-        </p:spPr>
-        <p:txBody>
-          <a:bodyPr wrap="square" lIns="45720" rIns="45720" tIns="18288" bIns="18288" anchor="t">
-            <a:spAutoFit/>
-          </a:bodyPr>
-          <a:lstStyle/>
-          <a:p>
-            <a:pPr algn="l"/>
-            <a:r>
-              <a:rPr sz="8800" b="1" i="0">
-                <a:solidFill>
-                  <a:srgbClr val="FFFFFF"/>
-                </a:solidFill>
-                <a:latin typeface="Calibri"/>
-              </a:rPr>
-              <a:t>Domande?</a:t>
-            </a:r>
-          </a:p>
-        </p:txBody>
-      </p:sp>
-      <p:sp>
-        <p:nvSpPr>
-          <p:cNvPr id="5" name="TextBox 4"/>
-          <p:cNvSpPr txBox="1"/>
-          <p:nvPr/>
-        </p:nvSpPr>
-        <p:spPr>
-          <a:xfrm>
-            <a:off x="8686800" y="457200"/>
-            <a:ext cx="3200400" cy="3200400"/>
+            <a:off x="1005840" y="5029200"/>
+            <a:ext cx="9784080" cy="914400"/>
           </a:xfrm>
           <a:prstGeom prst="rect">
             <a:avLst/>
@@ -6075,79 +6145,9 @@
           </a:bodyPr>
           <a:lstStyle/>
           <a:p>
-            <a:pPr algn="ctr"/>
-            <a:r>
-              <a:rPr sz="18000" b="1" i="0">
-                <a:solidFill>
-                  <a:srgbClr val="FFFFFF"/>
-                </a:solidFill>
-                <a:latin typeface="Calibri"/>
-              </a:rPr>
-              <a:t>?</a:t>
-            </a:r>
-          </a:p>
-        </p:txBody>
-      </p:sp>
-      <p:sp>
-        <p:nvSpPr>
-          <p:cNvPr id="6" name="TextBox 5"/>
-          <p:cNvSpPr txBox="1"/>
-          <p:nvPr/>
-        </p:nvSpPr>
-        <p:spPr>
-          <a:xfrm>
-            <a:off x="731520" y="4114800"/>
-            <a:ext cx="10058400" cy="457200"/>
-          </a:xfrm>
-          <a:prstGeom prst="rect">
-            <a:avLst/>
-          </a:prstGeom>
-          <a:noFill/>
-        </p:spPr>
-        <p:txBody>
-          <a:bodyPr wrap="square" lIns="45720" rIns="45720" tIns="18288" bIns="18288" anchor="t">
-            <a:spAutoFit/>
-          </a:bodyPr>
-          <a:lstStyle/>
-          <a:p>
             <a:pPr algn="l"/>
             <a:r>
-              <a:rPr sz="2200" b="1" i="0">
-                <a:solidFill>
-                  <a:srgbClr val="00A0B0"/>
-                </a:solidFill>
-                <a:latin typeface="Calibri"/>
-              </a:rPr>
-              <a:t>Cosa portarti via:</a:t>
-            </a:r>
-          </a:p>
-        </p:txBody>
-      </p:sp>
-      <p:sp>
-        <p:nvSpPr>
-          <p:cNvPr id="7" name="TextBox 6"/>
-          <p:cNvSpPr txBox="1"/>
-          <p:nvPr/>
-        </p:nvSpPr>
-        <p:spPr>
-          <a:xfrm>
-            <a:off x="731520" y="5303520"/>
-            <a:ext cx="10058400" cy="548640"/>
-          </a:xfrm>
-          <a:prstGeom prst="rect">
-            <a:avLst/>
-          </a:prstGeom>
-          <a:noFill/>
-        </p:spPr>
-        <p:txBody>
-          <a:bodyPr wrap="square" lIns="45720" rIns="45720" tIns="18288" bIns="18288" anchor="t">
-            <a:spAutoFit/>
-          </a:bodyPr>
-          <a:lstStyle/>
-          <a:p>
-            <a:pPr algn="l"/>
-            <a:r>
-              <a:rPr sz="1800" b="0" i="1">
+              <a:rPr sz="1800" b="1" i="1">
                 <a:solidFill>
                   <a:srgbClr val="FFFFFF"/>
                 </a:solidFill>
@@ -6160,7 +6160,7 @@
       </p:sp>
       <p:cxnSp>
         <p:nvCxnSpPr>
-          <p:cNvPr id="8" name="Connector 7"/>
+          <p:cNvPr id="11" name="Connector 10"/>
           <p:cNvCxnSpPr/>
           <p:nvPr/>
         </p:nvCxnSpPr>
@@ -6195,14 +6195,14 @@
       </p:cxnSp>
       <p:sp>
         <p:nvSpPr>
-          <p:cNvPr id="9" name="TextBox 8"/>
+          <p:cNvPr id="12" name="TextBox 11"/>
           <p:cNvSpPr txBox="1"/>
           <p:nvPr/>
         </p:nvSpPr>
         <p:spPr>
           <a:xfrm>
             <a:off x="457200" y="6473952"/>
-            <a:ext cx="7315200" cy="320040"/>
+            <a:ext cx="7315200" cy="292608"/>
           </a:xfrm>
           <a:prstGeom prst="rect">
             <a:avLst/>
@@ -6223,21 +6223,21 @@
                 </a:solidFill>
                 <a:latin typeface="Calibri"/>
               </a:rPr>
-              <a:t>Secure Coding · Corso IFTS STEM · A. Manneschi</a:t>
-            </a:r>
-          </a:p>
-        </p:txBody>
-      </p:sp>
-      <p:sp>
-        <p:nvSpPr>
-          <p:cNvPr id="10" name="TextBox 9"/>
+              <a:t>Secure Coding · Corso IFTS STEM · A. Manneschi · 2024/2025</a:t>
+            </a:r>
+          </a:p>
+        </p:txBody>
+      </p:sp>
+      <p:sp>
+        <p:nvSpPr>
+          <p:cNvPr id="13" name="TextBox 12"/>
           <p:cNvSpPr txBox="1"/>
           <p:nvPr/>
         </p:nvSpPr>
         <p:spPr>
           <a:xfrm>
             <a:off x="10515600" y="6473952"/>
-            <a:ext cx="1188720" cy="320040"/>
+            <a:ext cx="1188720" cy="292608"/>
           </a:xfrm>
           <a:prstGeom prst="rect">
             <a:avLst/>
@@ -6354,7 +6354,7 @@
                 </a:solidFill>
                 <a:latin typeface="Calibri"/>
               </a:rPr>
-              <a:t>Obiettivi</a:t>
+              <a:t>🎯  Obiettivi della lezione</a:t>
             </a:r>
           </a:p>
         </p:txBody>
@@ -6367,8 +6367,8 @@
         </p:nvSpPr>
         <p:spPr>
           <a:xfrm>
-            <a:off x="640080" y="1005840"/>
-            <a:ext cx="10972800" cy="5029200"/>
+            <a:off x="457200" y="914400"/>
+            <a:ext cx="2286000" cy="2286000"/>
           </a:xfrm>
           <a:prstGeom prst="rect">
             <a:avLst/>
@@ -6376,27 +6376,162 @@
           <a:noFill/>
         </p:spPr>
         <p:txBody>
-          <a:bodyPr wrap="square">
+          <a:bodyPr wrap="square" lIns="45720" rIns="45720" tIns="18288" bIns="18288" anchor="t">
             <a:spAutoFit/>
           </a:bodyPr>
           <a:lstStyle/>
           <a:p>
-            <a:pPr>
-              <a:lnSpc>
-                <a:spcPct val="150000"/>
-              </a:lnSpc>
-            </a:pPr>
-            <a:r>
-              <a:rPr sz="2000" b="1">
+            <a:pPr algn="l"/>
+            <a:r>
+              <a:rPr sz="18000" b="1" i="0">
+                <a:solidFill>
+                  <a:srgbClr val="F1F4F8"/>
+                </a:solidFill>
+                <a:latin typeface="Calibri"/>
+              </a:rPr>
+              <a:t>05</a:t>
+            </a:r>
+          </a:p>
+        </p:txBody>
+      </p:sp>
+      <p:sp>
+        <p:nvSpPr>
+          <p:cNvPr id="5" name="TextBox 4"/>
+          <p:cNvSpPr txBox="1"/>
+          <p:nvPr/>
+        </p:nvSpPr>
+        <p:spPr>
+          <a:xfrm>
+            <a:off x="457200" y="3200400"/>
+            <a:ext cx="2286000" cy="457200"/>
+          </a:xfrm>
+          <a:prstGeom prst="rect">
+            <a:avLst/>
+          </a:prstGeom>
+          <a:noFill/>
+        </p:spPr>
+        <p:txBody>
+          <a:bodyPr wrap="square" lIns="45720" rIns="45720" tIns="18288" bIns="18288" anchor="t">
+            <a:spAutoFit/>
+          </a:bodyPr>
+          <a:lstStyle/>
+          <a:p>
+            <a:pPr algn="l"/>
+            <a:r>
+              <a:rPr sz="1800" b="1" i="1">
                 <a:solidFill>
                   <a:srgbClr val="00A0B0"/>
                 </a:solidFill>
                 <a:latin typeface="Calibri"/>
               </a:rPr>
-              <a:t>▸  </a:t>
-            </a:r>
-            <a:r>
-              <a:rPr sz="2000">
+              <a:t>obiettivi</a:t>
+            </a:r>
+          </a:p>
+        </p:txBody>
+      </p:sp>
+      <p:sp>
+        <p:nvSpPr>
+          <p:cNvPr id="6" name="Oval 5"/>
+          <p:cNvSpPr/>
+          <p:nvPr/>
+        </p:nvSpPr>
+        <p:spPr>
+          <a:xfrm>
+            <a:off x="3200400" y="1188720"/>
+            <a:ext cx="548640" cy="548640"/>
+          </a:xfrm>
+          <a:prstGeom prst="ellipse">
+            <a:avLst/>
+          </a:prstGeom>
+          <a:solidFill>
+            <a:srgbClr val="00A0B0"/>
+          </a:solidFill>
+          <a:ln>
+            <a:noFill/>
+          </a:ln>
+        </p:spPr>
+        <p:style>
+          <a:lnRef idx="1">
+            <a:schemeClr val="accent1"/>
+          </a:lnRef>
+          <a:fillRef idx="3">
+            <a:schemeClr val="accent1"/>
+          </a:fillRef>
+          <a:effectRef idx="2">
+            <a:schemeClr val="accent1"/>
+          </a:effectRef>
+          <a:fontRef idx="minor">
+            <a:schemeClr val="lt1"/>
+          </a:fontRef>
+        </p:style>
+        <p:txBody>
+          <a:bodyPr rtlCol="0" anchor="ctr"/>
+          <a:lstStyle/>
+          <a:p>
+            <a:pPr algn="ctr"/>
+          </a:p>
+        </p:txBody>
+      </p:sp>
+      <p:sp>
+        <p:nvSpPr>
+          <p:cNvPr id="7" name="TextBox 6"/>
+          <p:cNvSpPr txBox="1"/>
+          <p:nvPr/>
+        </p:nvSpPr>
+        <p:spPr>
+          <a:xfrm>
+            <a:off x="3200400" y="1188720"/>
+            <a:ext cx="548640" cy="548640"/>
+          </a:xfrm>
+          <a:prstGeom prst="rect">
+            <a:avLst/>
+          </a:prstGeom>
+          <a:noFill/>
+        </p:spPr>
+        <p:txBody>
+          <a:bodyPr wrap="square" lIns="45720" rIns="45720" tIns="18288" bIns="18288" anchor="ctr">
+            <a:spAutoFit/>
+          </a:bodyPr>
+          <a:lstStyle/>
+          <a:p>
+            <a:pPr algn="ctr"/>
+            <a:r>
+              <a:rPr sz="1600" b="1" i="0">
+                <a:solidFill>
+                  <a:srgbClr val="FFFFFF"/>
+                </a:solidFill>
+                <a:latin typeface="Calibri"/>
+              </a:rPr>
+              <a:t>1</a:t>
+            </a:r>
+          </a:p>
+        </p:txBody>
+      </p:sp>
+      <p:sp>
+        <p:nvSpPr>
+          <p:cNvPr id="8" name="TextBox 7"/>
+          <p:cNvSpPr txBox="1"/>
+          <p:nvPr/>
+        </p:nvSpPr>
+        <p:spPr>
+          <a:xfrm>
+            <a:off x="4023360" y="1261872"/>
+            <a:ext cx="7772400" cy="548640"/>
+          </a:xfrm>
+          <a:prstGeom prst="rect">
+            <a:avLst/>
+          </a:prstGeom>
+          <a:noFill/>
+        </p:spPr>
+        <p:txBody>
+          <a:bodyPr wrap="square" lIns="45720" rIns="45720" tIns="18288" bIns="18288" anchor="ctr">
+            <a:spAutoFit/>
+          </a:bodyPr>
+          <a:lstStyle/>
+          <a:p>
+            <a:pPr algn="l"/>
+            <a:r>
+              <a:rPr sz="1600" b="0" i="0">
                 <a:solidFill>
                   <a:srgbClr val="1A1A2E"/>
                 </a:solidFill>
@@ -6405,48 +6540,224 @@
               <a:t>Distinguere autenticazione da autorizzazione</a:t>
             </a:r>
           </a:p>
-          <a:p>
-            <a:pPr>
-              <a:lnSpc>
-                <a:spcPct val="150000"/>
-              </a:lnSpc>
-            </a:pPr>
-            <a:r>
-              <a:rPr sz="2000" b="1">
-                <a:solidFill>
-                  <a:srgbClr val="00A0B0"/>
-                </a:solidFill>
-                <a:latin typeface="Calibri"/>
-              </a:rPr>
-              <a:t>▸  </a:t>
-            </a:r>
-            <a:r>
-              <a:rPr sz="2000">
+        </p:txBody>
+      </p:sp>
+      <p:sp>
+        <p:nvSpPr>
+          <p:cNvPr id="9" name="Oval 8"/>
+          <p:cNvSpPr/>
+          <p:nvPr/>
+        </p:nvSpPr>
+        <p:spPr>
+          <a:xfrm>
+            <a:off x="3200400" y="1965960"/>
+            <a:ext cx="548640" cy="548640"/>
+          </a:xfrm>
+          <a:prstGeom prst="ellipse">
+            <a:avLst/>
+          </a:prstGeom>
+          <a:solidFill>
+            <a:srgbClr val="00A0B0"/>
+          </a:solidFill>
+          <a:ln>
+            <a:noFill/>
+          </a:ln>
+        </p:spPr>
+        <p:style>
+          <a:lnRef idx="1">
+            <a:schemeClr val="accent1"/>
+          </a:lnRef>
+          <a:fillRef idx="3">
+            <a:schemeClr val="accent1"/>
+          </a:fillRef>
+          <a:effectRef idx="2">
+            <a:schemeClr val="accent1"/>
+          </a:effectRef>
+          <a:fontRef idx="minor">
+            <a:schemeClr val="lt1"/>
+          </a:fontRef>
+        </p:style>
+        <p:txBody>
+          <a:bodyPr rtlCol="0" anchor="ctr"/>
+          <a:lstStyle/>
+          <a:p>
+            <a:pPr algn="ctr"/>
+          </a:p>
+        </p:txBody>
+      </p:sp>
+      <p:sp>
+        <p:nvSpPr>
+          <p:cNvPr id="10" name="TextBox 9"/>
+          <p:cNvSpPr txBox="1"/>
+          <p:nvPr/>
+        </p:nvSpPr>
+        <p:spPr>
+          <a:xfrm>
+            <a:off x="3200400" y="1965960"/>
+            <a:ext cx="548640" cy="548640"/>
+          </a:xfrm>
+          <a:prstGeom prst="rect">
+            <a:avLst/>
+          </a:prstGeom>
+          <a:noFill/>
+        </p:spPr>
+        <p:txBody>
+          <a:bodyPr wrap="square" lIns="45720" rIns="45720" tIns="18288" bIns="18288" anchor="ctr">
+            <a:spAutoFit/>
+          </a:bodyPr>
+          <a:lstStyle/>
+          <a:p>
+            <a:pPr algn="ctr"/>
+            <a:r>
+              <a:rPr sz="1600" b="1" i="0">
+                <a:solidFill>
+                  <a:srgbClr val="FFFFFF"/>
+                </a:solidFill>
+                <a:latin typeface="Calibri"/>
+              </a:rPr>
+              <a:t>2</a:t>
+            </a:r>
+          </a:p>
+        </p:txBody>
+      </p:sp>
+      <p:sp>
+        <p:nvSpPr>
+          <p:cNvPr id="11" name="TextBox 10"/>
+          <p:cNvSpPr txBox="1"/>
+          <p:nvPr/>
+        </p:nvSpPr>
+        <p:spPr>
+          <a:xfrm>
+            <a:off x="4023360" y="2039112"/>
+            <a:ext cx="7772400" cy="548640"/>
+          </a:xfrm>
+          <a:prstGeom prst="rect">
+            <a:avLst/>
+          </a:prstGeom>
+          <a:noFill/>
+        </p:spPr>
+        <p:txBody>
+          <a:bodyPr wrap="square" lIns="45720" rIns="45720" tIns="18288" bIns="18288" anchor="ctr">
+            <a:spAutoFit/>
+          </a:bodyPr>
+          <a:lstStyle/>
+          <a:p>
+            <a:pPr algn="l"/>
+            <a:r>
+              <a:rPr sz="1600" b="0" i="0">
                 <a:solidFill>
                   <a:srgbClr val="1A1A2E"/>
                 </a:solidFill>
                 <a:latin typeface="Calibri"/>
               </a:rPr>
-              <a:t>Riconoscere e correggere un IDOR (Broken Access Control)</a:t>
-            </a:r>
-          </a:p>
-          <a:p>
-            <a:pPr>
-              <a:lnSpc>
-                <a:spcPct val="150000"/>
-              </a:lnSpc>
-            </a:pPr>
-            <a:r>
-              <a:rPr sz="2000" b="1">
-                <a:solidFill>
-                  <a:srgbClr val="00A0B0"/>
-                </a:solidFill>
-                <a:latin typeface="Calibri"/>
-              </a:rPr>
-              <a:t>▸  </a:t>
-            </a:r>
-            <a:r>
-              <a:rPr sz="2000">
+              <a:t>Riconoscere e correggere un IDOR</a:t>
+            </a:r>
+          </a:p>
+        </p:txBody>
+      </p:sp>
+      <p:sp>
+        <p:nvSpPr>
+          <p:cNvPr id="12" name="Oval 11"/>
+          <p:cNvSpPr/>
+          <p:nvPr/>
+        </p:nvSpPr>
+        <p:spPr>
+          <a:xfrm>
+            <a:off x="3200400" y="2743200"/>
+            <a:ext cx="548640" cy="548640"/>
+          </a:xfrm>
+          <a:prstGeom prst="ellipse">
+            <a:avLst/>
+          </a:prstGeom>
+          <a:solidFill>
+            <a:srgbClr val="00A0B0"/>
+          </a:solidFill>
+          <a:ln>
+            <a:noFill/>
+          </a:ln>
+        </p:spPr>
+        <p:style>
+          <a:lnRef idx="1">
+            <a:schemeClr val="accent1"/>
+          </a:lnRef>
+          <a:fillRef idx="3">
+            <a:schemeClr val="accent1"/>
+          </a:fillRef>
+          <a:effectRef idx="2">
+            <a:schemeClr val="accent1"/>
+          </a:effectRef>
+          <a:fontRef idx="minor">
+            <a:schemeClr val="lt1"/>
+          </a:fontRef>
+        </p:style>
+        <p:txBody>
+          <a:bodyPr rtlCol="0" anchor="ctr"/>
+          <a:lstStyle/>
+          <a:p>
+            <a:pPr algn="ctr"/>
+          </a:p>
+        </p:txBody>
+      </p:sp>
+      <p:sp>
+        <p:nvSpPr>
+          <p:cNvPr id="13" name="TextBox 12"/>
+          <p:cNvSpPr txBox="1"/>
+          <p:nvPr/>
+        </p:nvSpPr>
+        <p:spPr>
+          <a:xfrm>
+            <a:off x="3200400" y="2743200"/>
+            <a:ext cx="548640" cy="548640"/>
+          </a:xfrm>
+          <a:prstGeom prst="rect">
+            <a:avLst/>
+          </a:prstGeom>
+          <a:noFill/>
+        </p:spPr>
+        <p:txBody>
+          <a:bodyPr wrap="square" lIns="45720" rIns="45720" tIns="18288" bIns="18288" anchor="ctr">
+            <a:spAutoFit/>
+          </a:bodyPr>
+          <a:lstStyle/>
+          <a:p>
+            <a:pPr algn="ctr"/>
+            <a:r>
+              <a:rPr sz="1600" b="1" i="0">
+                <a:solidFill>
+                  <a:srgbClr val="FFFFFF"/>
+                </a:solidFill>
+                <a:latin typeface="Calibri"/>
+              </a:rPr>
+              <a:t>3</a:t>
+            </a:r>
+          </a:p>
+        </p:txBody>
+      </p:sp>
+      <p:sp>
+        <p:nvSpPr>
+          <p:cNvPr id="14" name="TextBox 13"/>
+          <p:cNvSpPr txBox="1"/>
+          <p:nvPr/>
+        </p:nvSpPr>
+        <p:spPr>
+          <a:xfrm>
+            <a:off x="4023360" y="2816352"/>
+            <a:ext cx="7772400" cy="548640"/>
+          </a:xfrm>
+          <a:prstGeom prst="rect">
+            <a:avLst/>
+          </a:prstGeom>
+          <a:noFill/>
+        </p:spPr>
+        <p:txBody>
+          <a:bodyPr wrap="square" lIns="45720" rIns="45720" tIns="18288" bIns="18288" anchor="ctr">
+            <a:spAutoFit/>
+          </a:bodyPr>
+          <a:lstStyle/>
+          <a:p>
+            <a:pPr algn="l"/>
+            <a:r>
+              <a:rPr sz="1600" b="0" i="0">
                 <a:solidFill>
                   <a:srgbClr val="1A1A2E"/>
                 </a:solidFill>
@@ -6455,23 +6766,111 @@
               <a:t>Usare correttamente status code 401, 403, 404</a:t>
             </a:r>
           </a:p>
-          <a:p>
-            <a:pPr>
-              <a:lnSpc>
-                <a:spcPct val="150000"/>
-              </a:lnSpc>
-            </a:pPr>
-            <a:r>
-              <a:rPr sz="2000" b="1">
-                <a:solidFill>
-                  <a:srgbClr val="00A0B0"/>
-                </a:solidFill>
-                <a:latin typeface="Calibri"/>
-              </a:rPr>
-              <a:t>▸  </a:t>
-            </a:r>
-            <a:r>
-              <a:rPr sz="2000">
+        </p:txBody>
+      </p:sp>
+      <p:sp>
+        <p:nvSpPr>
+          <p:cNvPr id="15" name="Oval 14"/>
+          <p:cNvSpPr/>
+          <p:nvPr/>
+        </p:nvSpPr>
+        <p:spPr>
+          <a:xfrm>
+            <a:off x="3200400" y="3520440"/>
+            <a:ext cx="548640" cy="548640"/>
+          </a:xfrm>
+          <a:prstGeom prst="ellipse">
+            <a:avLst/>
+          </a:prstGeom>
+          <a:solidFill>
+            <a:srgbClr val="00A0B0"/>
+          </a:solidFill>
+          <a:ln>
+            <a:noFill/>
+          </a:ln>
+        </p:spPr>
+        <p:style>
+          <a:lnRef idx="1">
+            <a:schemeClr val="accent1"/>
+          </a:lnRef>
+          <a:fillRef idx="3">
+            <a:schemeClr val="accent1"/>
+          </a:fillRef>
+          <a:effectRef idx="2">
+            <a:schemeClr val="accent1"/>
+          </a:effectRef>
+          <a:fontRef idx="minor">
+            <a:schemeClr val="lt1"/>
+          </a:fontRef>
+        </p:style>
+        <p:txBody>
+          <a:bodyPr rtlCol="0" anchor="ctr"/>
+          <a:lstStyle/>
+          <a:p>
+            <a:pPr algn="ctr"/>
+          </a:p>
+        </p:txBody>
+      </p:sp>
+      <p:sp>
+        <p:nvSpPr>
+          <p:cNvPr id="16" name="TextBox 15"/>
+          <p:cNvSpPr txBox="1"/>
+          <p:nvPr/>
+        </p:nvSpPr>
+        <p:spPr>
+          <a:xfrm>
+            <a:off x="3200400" y="3520440"/>
+            <a:ext cx="548640" cy="548640"/>
+          </a:xfrm>
+          <a:prstGeom prst="rect">
+            <a:avLst/>
+          </a:prstGeom>
+          <a:noFill/>
+        </p:spPr>
+        <p:txBody>
+          <a:bodyPr wrap="square" lIns="45720" rIns="45720" tIns="18288" bIns="18288" anchor="ctr">
+            <a:spAutoFit/>
+          </a:bodyPr>
+          <a:lstStyle/>
+          <a:p>
+            <a:pPr algn="ctr"/>
+            <a:r>
+              <a:rPr sz="1600" b="1" i="0">
+                <a:solidFill>
+                  <a:srgbClr val="FFFFFF"/>
+                </a:solidFill>
+                <a:latin typeface="Calibri"/>
+              </a:rPr>
+              <a:t>4</a:t>
+            </a:r>
+          </a:p>
+        </p:txBody>
+      </p:sp>
+      <p:sp>
+        <p:nvSpPr>
+          <p:cNvPr id="17" name="TextBox 16"/>
+          <p:cNvSpPr txBox="1"/>
+          <p:nvPr/>
+        </p:nvSpPr>
+        <p:spPr>
+          <a:xfrm>
+            <a:off x="4023360" y="3593592"/>
+            <a:ext cx="7772400" cy="548640"/>
+          </a:xfrm>
+          <a:prstGeom prst="rect">
+            <a:avLst/>
+          </a:prstGeom>
+          <a:noFill/>
+        </p:spPr>
+        <p:txBody>
+          <a:bodyPr wrap="square" lIns="45720" rIns="45720" tIns="18288" bIns="18288" anchor="ctr">
+            <a:spAutoFit/>
+          </a:bodyPr>
+          <a:lstStyle/>
+          <a:p>
+            <a:pPr algn="l"/>
+            <a:r>
+              <a:rPr sz="1600" b="0" i="0">
                 <a:solidFill>
                   <a:srgbClr val="1A1A2E"/>
                 </a:solidFill>
@@ -6480,36 +6879,124 @@
               <a:t>Capire perché MD5/SHA NON vanno per password</a:t>
             </a:r>
           </a:p>
-          <a:p>
-            <a:pPr>
-              <a:lnSpc>
-                <a:spcPct val="150000"/>
-              </a:lnSpc>
-            </a:pPr>
-            <a:r>
-              <a:rPr sz="2000" b="1">
-                <a:solidFill>
-                  <a:srgbClr val="00A0B0"/>
-                </a:solidFill>
-                <a:latin typeface="Calibri"/>
-              </a:rPr>
-              <a:t>▸  </a:t>
-            </a:r>
-            <a:r>
-              <a:rPr sz="2000">
+        </p:txBody>
+      </p:sp>
+      <p:sp>
+        <p:nvSpPr>
+          <p:cNvPr id="18" name="Oval 17"/>
+          <p:cNvSpPr/>
+          <p:nvPr/>
+        </p:nvSpPr>
+        <p:spPr>
+          <a:xfrm>
+            <a:off x="3200400" y="4297680"/>
+            <a:ext cx="548640" cy="548640"/>
+          </a:xfrm>
+          <a:prstGeom prst="ellipse">
+            <a:avLst/>
+          </a:prstGeom>
+          <a:solidFill>
+            <a:srgbClr val="00A0B0"/>
+          </a:solidFill>
+          <a:ln>
+            <a:noFill/>
+          </a:ln>
+        </p:spPr>
+        <p:style>
+          <a:lnRef idx="1">
+            <a:schemeClr val="accent1"/>
+          </a:lnRef>
+          <a:fillRef idx="3">
+            <a:schemeClr val="accent1"/>
+          </a:fillRef>
+          <a:effectRef idx="2">
+            <a:schemeClr val="accent1"/>
+          </a:effectRef>
+          <a:fontRef idx="minor">
+            <a:schemeClr val="lt1"/>
+          </a:fontRef>
+        </p:style>
+        <p:txBody>
+          <a:bodyPr rtlCol="0" anchor="ctr"/>
+          <a:lstStyle/>
+          <a:p>
+            <a:pPr algn="ctr"/>
+          </a:p>
+        </p:txBody>
+      </p:sp>
+      <p:sp>
+        <p:nvSpPr>
+          <p:cNvPr id="19" name="TextBox 18"/>
+          <p:cNvSpPr txBox="1"/>
+          <p:nvPr/>
+        </p:nvSpPr>
+        <p:spPr>
+          <a:xfrm>
+            <a:off x="3200400" y="4297680"/>
+            <a:ext cx="548640" cy="548640"/>
+          </a:xfrm>
+          <a:prstGeom prst="rect">
+            <a:avLst/>
+          </a:prstGeom>
+          <a:noFill/>
+        </p:spPr>
+        <p:txBody>
+          <a:bodyPr wrap="square" lIns="45720" rIns="45720" tIns="18288" bIns="18288" anchor="ctr">
+            <a:spAutoFit/>
+          </a:bodyPr>
+          <a:lstStyle/>
+          <a:p>
+            <a:pPr algn="ctr"/>
+            <a:r>
+              <a:rPr sz="1600" b="1" i="0">
+                <a:solidFill>
+                  <a:srgbClr val="FFFFFF"/>
+                </a:solidFill>
+                <a:latin typeface="Calibri"/>
+              </a:rPr>
+              <a:t>5</a:t>
+            </a:r>
+          </a:p>
+        </p:txBody>
+      </p:sp>
+      <p:sp>
+        <p:nvSpPr>
+          <p:cNvPr id="20" name="TextBox 19"/>
+          <p:cNvSpPr txBox="1"/>
+          <p:nvPr/>
+        </p:nvSpPr>
+        <p:spPr>
+          <a:xfrm>
+            <a:off x="4023360" y="4370832"/>
+            <a:ext cx="7772400" cy="548640"/>
+          </a:xfrm>
+          <a:prstGeom prst="rect">
+            <a:avLst/>
+          </a:prstGeom>
+          <a:noFill/>
+        </p:spPr>
+        <p:txBody>
+          <a:bodyPr wrap="square" lIns="45720" rIns="45720" tIns="18288" bIns="18288" anchor="ctr">
+            <a:spAutoFit/>
+          </a:bodyPr>
+          <a:lstStyle/>
+          <a:p>
+            <a:pPr algn="l"/>
+            <a:r>
+              <a:rPr sz="1600" b="0" i="0">
                 <a:solidFill>
                   <a:srgbClr val="1A1A2E"/>
                 </a:solidFill>
                 <a:latin typeface="Calibri"/>
               </a:rPr>
-              <a:t>Hashare correttamente con bcrypt (o Argon2id)</a:t>
+              <a:t>Hashare correttamente con bcrypt</a:t>
             </a:r>
           </a:p>
         </p:txBody>
       </p:sp>
       <p:cxnSp>
         <p:nvCxnSpPr>
-          <p:cNvPr id="5" name="Connector 4"/>
+          <p:cNvPr id="21" name="Connector 20"/>
           <p:cNvCxnSpPr/>
           <p:nvPr/>
         </p:nvCxnSpPr>
@@ -6544,14 +7031,14 @@
       </p:cxnSp>
       <p:sp>
         <p:nvSpPr>
-          <p:cNvPr id="6" name="TextBox 5"/>
+          <p:cNvPr id="22" name="TextBox 21"/>
           <p:cNvSpPr txBox="1"/>
           <p:nvPr/>
         </p:nvSpPr>
         <p:spPr>
           <a:xfrm>
             <a:off x="457200" y="6473952"/>
-            <a:ext cx="7315200" cy="320040"/>
+            <a:ext cx="7315200" cy="292608"/>
           </a:xfrm>
           <a:prstGeom prst="rect">
             <a:avLst/>
@@ -6572,21 +7059,21 @@
                 </a:solidFill>
                 <a:latin typeface="Calibri"/>
               </a:rPr>
-              <a:t>Secure Coding · Corso IFTS STEM · A. Manneschi</a:t>
-            </a:r>
-          </a:p>
-        </p:txBody>
-      </p:sp>
-      <p:sp>
-        <p:nvSpPr>
-          <p:cNvPr id="7" name="TextBox 6"/>
+              <a:t>Secure Coding · Corso IFTS STEM · A. Manneschi · 2024/2025</a:t>
+            </a:r>
+          </a:p>
+        </p:txBody>
+      </p:sp>
+      <p:sp>
+        <p:nvSpPr>
+          <p:cNvPr id="23" name="TextBox 22"/>
           <p:cNvSpPr txBox="1"/>
           <p:nvPr/>
         </p:nvSpPr>
         <p:spPr>
           <a:xfrm>
             <a:off x="10515600" y="6473952"/>
-            <a:ext cx="1188720" cy="320040"/>
+            <a:ext cx="1188720" cy="292608"/>
           </a:xfrm>
           <a:prstGeom prst="rect">
             <a:avLst/>
@@ -6703,24 +7190,26 @@
                 </a:solidFill>
                 <a:latin typeface="Calibri"/>
               </a:rPr>
-              <a:t>Authn vs Authz</a:t>
-            </a:r>
-          </a:p>
-        </p:txBody>
-      </p:sp>
-      <p:sp>
-        <p:nvSpPr>
-          <p:cNvPr id="4" name="Rectangle 3"/>
+              <a:t>Authentication vs Authorization</a:t>
+            </a:r>
+          </a:p>
+        </p:txBody>
+      </p:sp>
+      <p:sp>
+        <p:nvSpPr>
+          <p:cNvPr id="4" name="Rounded Rectangle 3"/>
           <p:cNvSpPr/>
           <p:nvPr/>
         </p:nvSpPr>
         <p:spPr>
           <a:xfrm>
-            <a:off x="457200" y="1097280"/>
+            <a:off x="457200" y="1051560"/>
             <a:ext cx="5486400" cy="640080"/>
           </a:xfrm>
-          <a:prstGeom prst="rect">
-            <a:avLst/>
+          <a:prstGeom prst="roundRect">
+            <a:avLst>
+              <a:gd name="adj" fmla="val 8000"/>
+            </a:avLst>
           </a:prstGeom>
           <a:solidFill>
             <a:srgbClr val="00A0B0"/>
@@ -6759,7 +7248,7 @@
         </p:nvSpPr>
         <p:spPr>
           <a:xfrm>
-            <a:off x="457200" y="1097280"/>
+            <a:off x="457200" y="1051560"/>
             <a:ext cx="5486400" cy="640080"/>
           </a:xfrm>
           <a:prstGeom prst="rect">
@@ -6781,29 +7270,31 @@
                 </a:solidFill>
                 <a:latin typeface="Calibri"/>
               </a:rPr>
-              <a:t>AUTHENTICATION (authn)</a:t>
-            </a:r>
-          </a:p>
-        </p:txBody>
-      </p:sp>
-      <p:sp>
-        <p:nvSpPr>
-          <p:cNvPr id="6" name="Rectangle 5"/>
+              <a:t>AUTHN — sei tu?</a:t>
+            </a:r>
+          </a:p>
+        </p:txBody>
+      </p:sp>
+      <p:sp>
+        <p:nvSpPr>
+          <p:cNvPr id="6" name="Rounded Rectangle 5"/>
           <p:cNvSpPr/>
           <p:nvPr/>
         </p:nvSpPr>
         <p:spPr>
           <a:xfrm>
             <a:off x="457200" y="1737360"/>
-            <a:ext cx="5486400" cy="4937760"/>
-          </a:xfrm>
-          <a:prstGeom prst="rect">
-            <a:avLst/>
+            <a:ext cx="5486400" cy="4572000"/>
+          </a:xfrm>
+          <a:prstGeom prst="roundRect">
+            <a:avLst>
+              <a:gd name="adj" fmla="val 8000"/>
+            </a:avLst>
           </a:prstGeom>
           <a:solidFill>
-            <a:srgbClr val="F1F4F8"/>
+            <a:srgbClr val="FBFBFD"/>
           </a:solidFill>
-          <a:ln>
+          <a:ln w="25400">
             <a:solidFill>
               <a:srgbClr val="00A0B0"/>
             </a:solidFill>
@@ -6840,7 +7331,7 @@
         <p:spPr>
           <a:xfrm>
             <a:off x="640080" y="1874519"/>
-            <a:ext cx="5120640" cy="4937760"/>
+            <a:ext cx="5120640" cy="4572000"/>
           </a:xfrm>
           <a:prstGeom prst="rect">
             <a:avLst/>
@@ -6855,8 +7346,11 @@
           <a:p>
             <a:pPr>
               <a:lnSpc>
-                <a:spcPct val="140000"/>
+                <a:spcPct val="150000"/>
               </a:lnSpc>
+              <a:spcAft>
+                <a:spcPts val="400"/>
+              </a:spcAft>
             </a:pPr>
             <a:r>
               <a:rPr sz="1500" b="1">
@@ -6874,14 +7368,17 @@
                 </a:solidFill>
                 <a:latin typeface="Calibri"/>
               </a:rPr>
-              <a:t>Chi sei?</a:t>
+              <a:t>Si verifica al LOGIN</a:t>
             </a:r>
           </a:p>
           <a:p>
             <a:pPr>
               <a:lnSpc>
-                <a:spcPct val="140000"/>
+                <a:spcPct val="150000"/>
               </a:lnSpc>
+              <a:spcAft>
+                <a:spcPts val="400"/>
+              </a:spcAft>
             </a:pPr>
             <a:r>
               <a:rPr sz="1500" b="1">
@@ -6899,14 +7396,17 @@
                 </a:solidFill>
                 <a:latin typeface="Calibri"/>
               </a:rPr>
-              <a:t>Si verifica al LOGIN</a:t>
+              <a:t>Username + password</a:t>
             </a:r>
           </a:p>
           <a:p>
             <a:pPr>
               <a:lnSpc>
-                <a:spcPct val="140000"/>
+                <a:spcPct val="150000"/>
               </a:lnSpc>
+              <a:spcAft>
+                <a:spcPts val="400"/>
+              </a:spcAft>
             </a:pPr>
             <a:r>
               <a:rPr sz="1500" b="1">
@@ -6924,14 +7424,17 @@
                 </a:solidFill>
                 <a:latin typeface="Calibri"/>
               </a:rPr>
-              <a:t>Username + password</a:t>
+              <a:t>Token, MFA</a:t>
             </a:r>
           </a:p>
           <a:p>
             <a:pPr>
               <a:lnSpc>
-                <a:spcPct val="140000"/>
+                <a:spcPct val="150000"/>
               </a:lnSpc>
+              <a:spcAft>
+                <a:spcPts val="400"/>
+              </a:spcAft>
             </a:pPr>
             <a:r>
               <a:rPr sz="1500" b="1">
@@ -6949,14 +7452,17 @@
                 </a:solidFill>
                 <a:latin typeface="Calibri"/>
               </a:rPr>
-              <a:t>Token, MFA</a:t>
+              <a:t>Esempio: 'sei Mario, ok'</a:t>
             </a:r>
           </a:p>
           <a:p>
             <a:pPr>
               <a:lnSpc>
-                <a:spcPct val="140000"/>
+                <a:spcPct val="150000"/>
               </a:lnSpc>
+              <a:spcAft>
+                <a:spcPts val="400"/>
+              </a:spcAft>
             </a:pPr>
             <a:r>
               <a:rPr sz="1500" b="1">
@@ -6974,24 +7480,82 @@
                 </a:solidFill>
                 <a:latin typeface="Calibri"/>
               </a:rPr>
-              <a:t>Esempio: 'sei Mario, ok'</a:t>
-            </a:r>
-          </a:p>
-        </p:txBody>
-      </p:sp>
-      <p:sp>
-        <p:nvSpPr>
-          <p:cNvPr id="8" name="Rectangle 7"/>
+              <a:t/>
+            </a:r>
+          </a:p>
+          <a:p>
+            <a:pPr>
+              <a:lnSpc>
+                <a:spcPct val="150000"/>
+              </a:lnSpc>
+              <a:spcAft>
+                <a:spcPts val="400"/>
+              </a:spcAft>
+            </a:pPr>
+            <a:r>
+              <a:rPr sz="1500" b="1">
+                <a:solidFill>
+                  <a:srgbClr val="00A0B0"/>
+                </a:solidFill>
+                <a:latin typeface="Calibri"/>
+              </a:rPr>
+              <a:t>▸  </a:t>
+            </a:r>
+            <a:r>
+              <a:rPr sz="1500">
+                <a:solidFill>
+                  <a:srgbClr val="1A1A2E"/>
+                </a:solidFill>
+                <a:latin typeface="Calibri"/>
+              </a:rPr>
+              <a:t>Errore tipico:</a:t>
+            </a:r>
+          </a:p>
+          <a:p>
+            <a:pPr>
+              <a:lnSpc>
+                <a:spcPct val="150000"/>
+              </a:lnSpc>
+              <a:spcAft>
+                <a:spcPts val="400"/>
+              </a:spcAft>
+            </a:pPr>
+            <a:r>
+              <a:rPr sz="1500" b="1">
+                <a:solidFill>
+                  <a:srgbClr val="00A0B0"/>
+                </a:solidFill>
+                <a:latin typeface="Calibri"/>
+              </a:rPr>
+              <a:t>▸  </a:t>
+            </a:r>
+            <a:r>
+              <a:rPr sz="1500">
+                <a:solidFill>
+                  <a:srgbClr val="1A1A2E"/>
+                </a:solidFill>
+                <a:latin typeface="Calibri"/>
+              </a:rPr>
+              <a:t>login con password rubata</a:t>
+            </a:r>
+          </a:p>
+        </p:txBody>
+      </p:sp>
+      <p:sp>
+        <p:nvSpPr>
+          <p:cNvPr id="8" name="Rounded Rectangle 7"/>
           <p:cNvSpPr/>
           <p:nvPr/>
         </p:nvSpPr>
         <p:spPr>
           <a:xfrm>
-            <a:off x="6217920" y="1097280"/>
+            <a:off x="6217920" y="1051560"/>
             <a:ext cx="5486400" cy="640080"/>
           </a:xfrm>
-          <a:prstGeom prst="rect">
-            <a:avLst/>
+          <a:prstGeom prst="roundRect">
+            <a:avLst>
+              <a:gd name="adj" fmla="val 8000"/>
+            </a:avLst>
           </a:prstGeom>
           <a:solidFill>
             <a:srgbClr val="0F2D52"/>
@@ -7030,7 +7594,7 @@
         </p:nvSpPr>
         <p:spPr>
           <a:xfrm>
-            <a:off x="6217920" y="1097280"/>
+            <a:off x="6217920" y="1051560"/>
             <a:ext cx="5486400" cy="640080"/>
           </a:xfrm>
           <a:prstGeom prst="rect">
@@ -7052,29 +7616,31 @@
                 </a:solidFill>
                 <a:latin typeface="Calibri"/>
               </a:rPr>
-              <a:t>AUTHORIZATION (authz)</a:t>
-            </a:r>
-          </a:p>
-        </p:txBody>
-      </p:sp>
-      <p:sp>
-        <p:nvSpPr>
-          <p:cNvPr id="10" name="Rectangle 9"/>
+              <a:t>AUTHZ — cosa puoi fare?</a:t>
+            </a:r>
+          </a:p>
+        </p:txBody>
+      </p:sp>
+      <p:sp>
+        <p:nvSpPr>
+          <p:cNvPr id="10" name="Rounded Rectangle 9"/>
           <p:cNvSpPr/>
           <p:nvPr/>
         </p:nvSpPr>
         <p:spPr>
           <a:xfrm>
             <a:off x="6217920" y="1737360"/>
-            <a:ext cx="5486400" cy="4937760"/>
-          </a:xfrm>
-          <a:prstGeom prst="rect">
-            <a:avLst/>
+            <a:ext cx="5486400" cy="4572000"/>
+          </a:xfrm>
+          <a:prstGeom prst="roundRect">
+            <a:avLst>
+              <a:gd name="adj" fmla="val 8000"/>
+            </a:avLst>
           </a:prstGeom>
           <a:solidFill>
-            <a:srgbClr val="F1F4F8"/>
+            <a:srgbClr val="FBFBFD"/>
           </a:solidFill>
-          <a:ln>
+          <a:ln w="25400">
             <a:solidFill>
               <a:srgbClr val="0F2D52"/>
             </a:solidFill>
@@ -7111,7 +7677,7 @@
         <p:spPr>
           <a:xfrm>
             <a:off x="6400800" y="1874519"/>
-            <a:ext cx="5120640" cy="4937760"/>
+            <a:ext cx="5120640" cy="4572000"/>
           </a:xfrm>
           <a:prstGeom prst="rect">
             <a:avLst/>
@@ -7126,13 +7692,16 @@
           <a:p>
             <a:pPr>
               <a:lnSpc>
-                <a:spcPct val="140000"/>
+                <a:spcPct val="150000"/>
               </a:lnSpc>
+              <a:spcAft>
+                <a:spcPts val="400"/>
+              </a:spcAft>
             </a:pPr>
             <a:r>
               <a:rPr sz="1500" b="1">
                 <a:solidFill>
-                  <a:srgbClr val="00A0B0"/>
+                  <a:srgbClr val="0F2D52"/>
                 </a:solidFill>
                 <a:latin typeface="Calibri"/>
               </a:rPr>
@@ -7145,19 +7714,22 @@
                 </a:solidFill>
                 <a:latin typeface="Calibri"/>
               </a:rPr>
-              <a:t>Cosa puoi fare?</a:t>
+              <a:t>Si verifica a OGNI richiesta</a:t>
             </a:r>
           </a:p>
           <a:p>
             <a:pPr>
               <a:lnSpc>
-                <a:spcPct val="140000"/>
+                <a:spcPct val="150000"/>
               </a:lnSpc>
+              <a:spcAft>
+                <a:spcPts val="400"/>
+              </a:spcAft>
             </a:pPr>
             <a:r>
               <a:rPr sz="1500" b="1">
                 <a:solidFill>
-                  <a:srgbClr val="00A0B0"/>
+                  <a:srgbClr val="0F2D52"/>
                 </a:solidFill>
                 <a:latin typeface="Calibri"/>
               </a:rPr>
@@ -7170,19 +7742,22 @@
                 </a:solidFill>
                 <a:latin typeface="Calibri"/>
               </a:rPr>
-              <a:t>Si verifica a OGNI richiesta</a:t>
+              <a:t>Ruoli, permessi</a:t>
             </a:r>
           </a:p>
           <a:p>
             <a:pPr>
               <a:lnSpc>
-                <a:spcPct val="140000"/>
+                <a:spcPct val="150000"/>
               </a:lnSpc>
+              <a:spcAft>
+                <a:spcPts val="400"/>
+              </a:spcAft>
             </a:pPr>
             <a:r>
               <a:rPr sz="1500" b="1">
                 <a:solidFill>
-                  <a:srgbClr val="00A0B0"/>
+                  <a:srgbClr val="0F2D52"/>
                 </a:solidFill>
                 <a:latin typeface="Calibri"/>
               </a:rPr>
@@ -7195,19 +7770,22 @@
                 </a:solidFill>
                 <a:latin typeface="Calibri"/>
               </a:rPr>
-              <a:t>Ruoli, permessi</a:t>
+              <a:t>Ownership check</a:t>
             </a:r>
           </a:p>
           <a:p>
             <a:pPr>
               <a:lnSpc>
-                <a:spcPct val="140000"/>
+                <a:spcPct val="150000"/>
               </a:lnSpc>
+              <a:spcAft>
+                <a:spcPts val="400"/>
+              </a:spcAft>
             </a:pPr>
             <a:r>
               <a:rPr sz="1500" b="1">
                 <a:solidFill>
-                  <a:srgbClr val="00A0B0"/>
+                  <a:srgbClr val="0F2D52"/>
                 </a:solidFill>
                 <a:latin typeface="Calibri"/>
               </a:rPr>
@@ -7220,19 +7798,22 @@
                 </a:solidFill>
                 <a:latin typeface="Calibri"/>
               </a:rPr>
-              <a:t>Ownership check</a:t>
+              <a:t>Esempio: 'Mario può vedere fattura 42?'</a:t>
             </a:r>
           </a:p>
           <a:p>
             <a:pPr>
               <a:lnSpc>
-                <a:spcPct val="140000"/>
+                <a:spcPct val="150000"/>
               </a:lnSpc>
+              <a:spcAft>
+                <a:spcPts val="400"/>
+              </a:spcAft>
             </a:pPr>
             <a:r>
               <a:rPr sz="1500" b="1">
                 <a:solidFill>
-                  <a:srgbClr val="00A0B0"/>
+                  <a:srgbClr val="0F2D52"/>
                 </a:solidFill>
                 <a:latin typeface="Calibri"/>
               </a:rPr>
@@ -7245,7 +7826,63 @@
                 </a:solidFill>
                 <a:latin typeface="Calibri"/>
               </a:rPr>
-              <a:t>Esempio: 'Mario può vedere la fattura 42?'</a:t>
+              <a:t/>
+            </a:r>
+          </a:p>
+          <a:p>
+            <a:pPr>
+              <a:lnSpc>
+                <a:spcPct val="150000"/>
+              </a:lnSpc>
+              <a:spcAft>
+                <a:spcPts val="400"/>
+              </a:spcAft>
+            </a:pPr>
+            <a:r>
+              <a:rPr sz="1500" b="1">
+                <a:solidFill>
+                  <a:srgbClr val="0F2D52"/>
+                </a:solidFill>
+                <a:latin typeface="Calibri"/>
+              </a:rPr>
+              <a:t>▸  </a:t>
+            </a:r>
+            <a:r>
+              <a:rPr sz="1500">
+                <a:solidFill>
+                  <a:srgbClr val="1A1A2E"/>
+                </a:solidFill>
+                <a:latin typeface="Calibri"/>
+              </a:rPr>
+              <a:t>Errore tipico:</a:t>
+            </a:r>
+          </a:p>
+          <a:p>
+            <a:pPr>
+              <a:lnSpc>
+                <a:spcPct val="150000"/>
+              </a:lnSpc>
+              <a:spcAft>
+                <a:spcPts val="400"/>
+              </a:spcAft>
+            </a:pPr>
+            <a:r>
+              <a:rPr sz="1500" b="1">
+                <a:solidFill>
+                  <a:srgbClr val="0F2D52"/>
+                </a:solidFill>
+                <a:latin typeface="Calibri"/>
+              </a:rPr>
+              <a:t>▸  </a:t>
+            </a:r>
+            <a:r>
+              <a:rPr sz="1500">
+                <a:solidFill>
+                  <a:srgbClr val="1A1A2E"/>
+                </a:solidFill>
+                <a:latin typeface="Calibri"/>
+              </a:rPr>
+              <a:t>IDOR — vedi dati di altri</a:t>
             </a:r>
           </a:p>
         </p:txBody>
@@ -7294,7 +7931,7 @@
         <p:spPr>
           <a:xfrm>
             <a:off x="457200" y="6473952"/>
-            <a:ext cx="7315200" cy="320040"/>
+            <a:ext cx="7315200" cy="292608"/>
           </a:xfrm>
           <a:prstGeom prst="rect">
             <a:avLst/>
@@ -7315,7 +7952,7 @@
                 </a:solidFill>
                 <a:latin typeface="Calibri"/>
               </a:rPr>
-              <a:t>Secure Coding · Corso IFTS STEM · A. Manneschi</a:t>
+              <a:t>Secure Coding · Corso IFTS STEM · A. Manneschi · 2024/2025</a:t>
             </a:r>
           </a:p>
         </p:txBody>
@@ -7329,7 +7966,7 @@
         <p:spPr>
           <a:xfrm>
             <a:off x="10515600" y="6473952"/>
-            <a:ext cx="1188720" cy="320040"/>
+            <a:ext cx="1188720" cy="292608"/>
           </a:xfrm>
           <a:prstGeom prst="rect">
             <a:avLst/>
@@ -7382,13 +8019,13 @@
         <p:spPr>
           <a:xfrm>
             <a:off x="0" y="0"/>
-            <a:ext cx="2286000" cy="6858000"/>
+            <a:ext cx="4114800" cy="6858000"/>
           </a:xfrm>
           <a:prstGeom prst="rect">
             <a:avLst/>
           </a:prstGeom>
           <a:solidFill>
-            <a:srgbClr val="0F2D52"/>
+            <a:srgbClr val="081B33"/>
           </a:solidFill>
           <a:ln>
             <a:noFill/>
@@ -7418,14 +8055,100 @@
       </p:sp>
       <p:sp>
         <p:nvSpPr>
-          <p:cNvPr id="3" name="TextBox 2"/>
+          <p:cNvPr id="3" name="Rectangle 2"/>
+          <p:cNvSpPr/>
+          <p:nvPr/>
+        </p:nvSpPr>
+        <p:spPr>
+          <a:xfrm>
+            <a:off x="4114800" y="0"/>
+            <a:ext cx="8046720" cy="6858000"/>
+          </a:xfrm>
+          <a:prstGeom prst="rect">
+            <a:avLst/>
+          </a:prstGeom>
+          <a:solidFill>
+            <a:srgbClr val="F1F4F8"/>
+          </a:solidFill>
+          <a:ln>
+            <a:noFill/>
+          </a:ln>
+        </p:spPr>
+        <p:style>
+          <a:lnRef idx="1">
+            <a:schemeClr val="accent1"/>
+          </a:lnRef>
+          <a:fillRef idx="3">
+            <a:schemeClr val="accent1"/>
+          </a:fillRef>
+          <a:effectRef idx="2">
+            <a:schemeClr val="accent1"/>
+          </a:effectRef>
+          <a:fontRef idx="minor">
+            <a:schemeClr val="lt1"/>
+          </a:fontRef>
+        </p:style>
+        <p:txBody>
+          <a:bodyPr rtlCol="0" anchor="ctr"/>
+          <a:lstStyle/>
+          <a:p>
+            <a:pPr algn="ctr"/>
+          </a:p>
+        </p:txBody>
+      </p:sp>
+      <p:sp>
+        <p:nvSpPr>
+          <p:cNvPr id="4" name="Rectangle 3"/>
+          <p:cNvSpPr/>
+          <p:nvPr/>
+        </p:nvSpPr>
+        <p:spPr>
+          <a:xfrm>
+            <a:off x="4114800" y="0"/>
+            <a:ext cx="137160" cy="6858000"/>
+          </a:xfrm>
+          <a:prstGeom prst="rect">
+            <a:avLst/>
+          </a:prstGeom>
+          <a:solidFill>
+            <a:srgbClr val="00A0B0"/>
+          </a:solidFill>
+          <a:ln>
+            <a:noFill/>
+          </a:ln>
+        </p:spPr>
+        <p:style>
+          <a:lnRef idx="1">
+            <a:schemeClr val="accent1"/>
+          </a:lnRef>
+          <a:fillRef idx="3">
+            <a:schemeClr val="accent1"/>
+          </a:fillRef>
+          <a:effectRef idx="2">
+            <a:schemeClr val="accent1"/>
+          </a:effectRef>
+          <a:fontRef idx="minor">
+            <a:schemeClr val="lt1"/>
+          </a:fontRef>
+        </p:style>
+        <p:txBody>
+          <a:bodyPr rtlCol="0" anchor="ctr"/>
+          <a:lstStyle/>
+          <a:p>
+            <a:pPr algn="ctr"/>
+          </a:p>
+        </p:txBody>
+      </p:sp>
+      <p:sp>
+        <p:nvSpPr>
+          <p:cNvPr id="5" name="TextBox 4"/>
           <p:cNvSpPr txBox="1"/>
           <p:nvPr/>
         </p:nvSpPr>
         <p:spPr>
           <a:xfrm>
-            <a:off x="274320" y="2286000"/>
-            <a:ext cx="1828800" cy="1828800"/>
+            <a:off x="274320" y="2103120"/>
+            <a:ext cx="3657600" cy="2286000"/>
           </a:xfrm>
           <a:prstGeom prst="rect">
             <a:avLst/>
@@ -7440,7 +8163,7 @@
           <a:p>
             <a:pPr algn="ctr"/>
             <a:r>
-              <a:rPr sz="12000" b="1" i="0">
+              <a:rPr sz="17000" b="1" i="0">
                 <a:solidFill>
                   <a:srgbClr val="00A0B0"/>
                 </a:solidFill>
@@ -7453,14 +8176,14 @@
       </p:sp>
       <p:sp>
         <p:nvSpPr>
-          <p:cNvPr id="4" name="TextBox 3"/>
+          <p:cNvPr id="6" name="TextBox 5"/>
           <p:cNvSpPr txBox="1"/>
           <p:nvPr/>
         </p:nvSpPr>
         <p:spPr>
           <a:xfrm>
-            <a:off x="2743200" y="2560320"/>
-            <a:ext cx="8961120" cy="1371600"/>
+            <a:off x="274320" y="4572000"/>
+            <a:ext cx="3657600" cy="457200"/>
           </a:xfrm>
           <a:prstGeom prst="rect">
             <a:avLst/>
@@ -7473,29 +8196,29 @@
           </a:bodyPr>
           <a:lstStyle/>
           <a:p>
-            <a:pPr algn="l"/>
-            <a:r>
-              <a:rPr sz="4200" b="1" i="0">
-                <a:solidFill>
-                  <a:srgbClr val="0F2D52"/>
-                </a:solidFill>
-                <a:latin typeface="Calibri"/>
-              </a:rPr>
-              <a:t>IDOR</a:t>
-            </a:r>
-          </a:p>
-        </p:txBody>
-      </p:sp>
-      <p:sp>
-        <p:nvSpPr>
-          <p:cNvPr id="5" name="TextBox 4"/>
+            <a:pPr algn="ctr"/>
+            <a:r>
+              <a:rPr sz="2000" b="1" i="0">
+                <a:solidFill>
+                  <a:srgbClr val="6FD8E0"/>
+                </a:solidFill>
+                <a:latin typeface="Calibri"/>
+              </a:rPr>
+              <a:t>PARTE</a:t>
+            </a:r>
+          </a:p>
+        </p:txBody>
+      </p:sp>
+      <p:sp>
+        <p:nvSpPr>
+          <p:cNvPr id="7" name="TextBox 6"/>
           <p:cNvSpPr txBox="1"/>
           <p:nvPr/>
         </p:nvSpPr>
         <p:spPr>
           <a:xfrm>
-            <a:off x="2743200" y="3931920"/>
-            <a:ext cx="8961120" cy="1828800"/>
+            <a:off x="4572000" y="2286000"/>
+            <a:ext cx="7315200" cy="1645920"/>
           </a:xfrm>
           <a:prstGeom prst="rect">
             <a:avLst/>
@@ -7510,20 +8233,55 @@
           <a:p>
             <a:pPr algn="l"/>
             <a:r>
+              <a:rPr sz="4400" b="1" i="0">
+                <a:solidFill>
+                  <a:srgbClr val="0F2D52"/>
+                </a:solidFill>
+                <a:latin typeface="Calibri"/>
+              </a:rPr>
+              <a:t>IDOR</a:t>
+            </a:r>
+          </a:p>
+        </p:txBody>
+      </p:sp>
+      <p:sp>
+        <p:nvSpPr>
+          <p:cNvPr id="8" name="TextBox 7"/>
+          <p:cNvSpPr txBox="1"/>
+          <p:nvPr/>
+        </p:nvSpPr>
+        <p:spPr>
+          <a:xfrm>
+            <a:off x="4572000" y="3931920"/>
+            <a:ext cx="7315200" cy="1828800"/>
+          </a:xfrm>
+          <a:prstGeom prst="rect">
+            <a:avLst/>
+          </a:prstGeom>
+          <a:noFill/>
+        </p:spPr>
+        <p:txBody>
+          <a:bodyPr wrap="square" lIns="45720" rIns="45720" tIns="18288" bIns="18288" anchor="t">
+            <a:spAutoFit/>
+          </a:bodyPr>
+          <a:lstStyle/>
+          <a:p>
+            <a:pPr algn="l"/>
+            <a:r>
               <a:rPr sz="1800" b="0" i="1">
                 <a:solidFill>
                   <a:srgbClr val="6B7280"/>
                 </a:solidFill>
                 <a:latin typeface="Calibri"/>
               </a:rPr>
-              <a:t>Insecure Direct Object Reference — la vulnerabilità #1 web (OWASP A01)</a:t>
+              <a:t>Insecure Direct Object Reference (OWASP A01)</a:t>
             </a:r>
           </a:p>
         </p:txBody>
       </p:sp>
       <p:cxnSp>
         <p:nvCxnSpPr>
-          <p:cNvPr id="6" name="Connector 5"/>
+          <p:cNvPr id="9" name="Connector 8"/>
           <p:cNvCxnSpPr/>
           <p:nvPr/>
         </p:nvCxnSpPr>
@@ -7558,14 +8316,14 @@
       </p:cxnSp>
       <p:sp>
         <p:nvSpPr>
-          <p:cNvPr id="7" name="TextBox 6"/>
+          <p:cNvPr id="10" name="TextBox 9"/>
           <p:cNvSpPr txBox="1"/>
           <p:nvPr/>
         </p:nvSpPr>
         <p:spPr>
           <a:xfrm>
             <a:off x="457200" y="6473952"/>
-            <a:ext cx="7315200" cy="320040"/>
+            <a:ext cx="7315200" cy="292608"/>
           </a:xfrm>
           <a:prstGeom prst="rect">
             <a:avLst/>
@@ -7586,21 +8344,21 @@
                 </a:solidFill>
                 <a:latin typeface="Calibri"/>
               </a:rPr>
-              <a:t>Secure Coding · Corso IFTS STEM · A. Manneschi</a:t>
-            </a:r>
-          </a:p>
-        </p:txBody>
-      </p:sp>
-      <p:sp>
-        <p:nvSpPr>
-          <p:cNvPr id="8" name="TextBox 7"/>
+              <a:t>Secure Coding · Corso IFTS STEM · A. Manneschi · 2024/2025</a:t>
+            </a:r>
+          </a:p>
+        </p:txBody>
+      </p:sp>
+      <p:sp>
+        <p:nvSpPr>
+          <p:cNvPr id="11" name="TextBox 10"/>
           <p:cNvSpPr txBox="1"/>
           <p:nvPr/>
         </p:nvSpPr>
         <p:spPr>
           <a:xfrm>
             <a:off x="10515600" y="6473952"/>
-            <a:ext cx="1188720" cy="320040"/>
+            <a:ext cx="1188720" cy="292608"/>
           </a:xfrm>
           <a:prstGeom prst="rect">
             <a:avLst/>
@@ -7696,7 +8454,7 @@
         <p:spPr>
           <a:xfrm>
             <a:off x="457200" y="164592"/>
-            <a:ext cx="10058400" cy="502920"/>
+            <a:ext cx="10972800" cy="502920"/>
           </a:xfrm>
           <a:prstGeom prst="rect">
             <a:avLst/>
@@ -7717,54 +8475,35 @@
                 </a:solidFill>
                 <a:latin typeface="Calibri"/>
               </a:rPr>
-              <a:t>Codice vulnerabile IDOR</a:t>
-            </a:r>
-          </a:p>
-        </p:txBody>
-      </p:sp>
-      <p:sp>
-        <p:nvSpPr>
-          <p:cNvPr id="4" name="Rectangle 3"/>
-          <p:cNvSpPr/>
-          <p:nvPr/>
-        </p:nvSpPr>
-        <p:spPr>
-          <a:xfrm>
-            <a:off x="9875520" y="164592"/>
-            <a:ext cx="2103120" cy="457200"/>
-          </a:xfrm>
-          <a:prstGeom prst="rect">
-            <a:avLst/>
-          </a:prstGeom>
-          <a:solidFill>
-            <a:srgbClr val="E63946"/>
-          </a:solidFill>
-          <a:ln>
-            <a:noFill/>
-          </a:ln>
-        </p:spPr>
-        <p:style>
-          <a:lnRef idx="1">
-            <a:schemeClr val="accent1"/>
-          </a:lnRef>
-          <a:fillRef idx="3">
-            <a:schemeClr val="accent1"/>
-          </a:fillRef>
-          <a:effectRef idx="2">
-            <a:schemeClr val="accent1"/>
-          </a:effectRef>
-          <a:fontRef idx="minor">
-            <a:schemeClr val="lt1"/>
-          </a:fontRef>
-        </p:style>
-        <p:txBody>
-          <a:bodyPr rtlCol="0" anchor="ctr"/>
-          <a:lstStyle/>
-          <a:p>
-            <a:pPr algn="ctr"/>
-          </a:p>
-        </p:txBody>
-      </p:sp>
+              <a:t>Soluzione: ownership check</a:t>
+            </a:r>
+          </a:p>
+        </p:txBody>
+      </p:sp>
+      <p:pic>
+        <p:nvPicPr>
+          <p:cNvPr id="4" name="Picture 3" descr="cap4_idor_safe.png"/>
+          <p:cNvPicPr>
+            <a:picLocks noChangeAspect="1"/>
+          </p:cNvPicPr>
+          <p:nvPr/>
+        </p:nvPicPr>
+        <p:blipFill>
+          <a:blip r:embed="rId2"/>
+          <a:stretch>
+            <a:fillRect/>
+          </a:stretch>
+        </p:blipFill>
+        <p:spPr>
+          <a:xfrm>
+            <a:off x="640080" y="1097280"/>
+            <a:ext cx="10881360" cy="4572000"/>
+          </a:xfrm>
+          <a:prstGeom prst="rect">
+            <a:avLst/>
+          </a:prstGeom>
+        </p:spPr>
+      </p:pic>
       <p:sp>
         <p:nvSpPr>
           <p:cNvPr id="5" name="TextBox 4"/>
@@ -7773,88 +8512,8 @@
         </p:nvSpPr>
         <p:spPr>
           <a:xfrm>
-            <a:off x="9875520" y="182880"/>
-            <a:ext cx="2103120" cy="457200"/>
-          </a:xfrm>
-          <a:prstGeom prst="rect">
-            <a:avLst/>
-          </a:prstGeom>
-          <a:noFill/>
-        </p:spPr>
-        <p:txBody>
-          <a:bodyPr wrap="square" lIns="45720" rIns="45720" tIns="18288" bIns="18288" anchor="ctr">
-            <a:spAutoFit/>
-          </a:bodyPr>
-          <a:lstStyle/>
-          <a:p>
-            <a:pPr algn="ctr"/>
-            <a:r>
-              <a:rPr sz="1200" b="1" i="0">
-                <a:solidFill>
-                  <a:srgbClr val="FFFFFF"/>
-                </a:solidFill>
-                <a:latin typeface="Calibri"/>
-              </a:rPr>
-              <a:t>🚩 ANTI-PATTERN</a:t>
-            </a:r>
-          </a:p>
-        </p:txBody>
-      </p:sp>
-      <p:sp>
-        <p:nvSpPr>
-          <p:cNvPr id="6" name="Rectangle 5"/>
-          <p:cNvSpPr/>
-          <p:nvPr/>
-        </p:nvSpPr>
-        <p:spPr>
-          <a:xfrm>
-            <a:off x="457200" y="1097280"/>
-            <a:ext cx="11247120" cy="4572000"/>
-          </a:xfrm>
-          <a:prstGeom prst="rect">
-            <a:avLst/>
-          </a:prstGeom>
-          <a:solidFill>
-            <a:srgbClr val="F1F4F8"/>
-          </a:solidFill>
-          <a:ln>
-            <a:solidFill>
-              <a:srgbClr val="E63946"/>
-            </a:solidFill>
-          </a:ln>
-        </p:spPr>
-        <p:style>
-          <a:lnRef idx="1">
-            <a:schemeClr val="accent1"/>
-          </a:lnRef>
-          <a:fillRef idx="3">
-            <a:schemeClr val="accent1"/>
-          </a:fillRef>
-          <a:effectRef idx="2">
-            <a:schemeClr val="accent1"/>
-          </a:effectRef>
-          <a:fontRef idx="minor">
-            <a:schemeClr val="lt1"/>
-          </a:fontRef>
-        </p:style>
-        <p:txBody>
-          <a:bodyPr rtlCol="0" anchor="ctr"/>
-          <a:lstStyle/>
-          <a:p>
-            <a:pPr algn="ctr"/>
-          </a:p>
-        </p:txBody>
-      </p:sp>
-      <p:sp>
-        <p:nvSpPr>
-          <p:cNvPr id="7" name="TextBox 6"/>
-          <p:cNvSpPr txBox="1"/>
-          <p:nvPr/>
-        </p:nvSpPr>
-        <p:spPr>
-          <a:xfrm>
-            <a:off x="640080" y="1280160"/>
-            <a:ext cx="10972800" cy="4206240"/>
+            <a:off x="457200" y="5852160"/>
+            <a:ext cx="11247120" cy="365760"/>
           </a:xfrm>
           <a:prstGeom prst="rect">
             <a:avLst/>
@@ -7867,177 +8526,22 @@
           </a:bodyPr>
           <a:lstStyle/>
           <a:p>
-            <a:pPr algn="l"/>
-            <a:r>
-              <a:rPr sz="1400" b="0" i="0">
-                <a:solidFill>
-                  <a:srgbClr val="1A1A2E"/>
-                </a:solidFill>
-                <a:latin typeface="Consolas"/>
-              </a:rPr>
-              <a:t>@app.route("/fattura/&lt;int:fid&gt;")</a:t>
-            </a:r>
-          </a:p>
-          <a:p>
-            <a:pPr algn="l"/>
-            <a:r>
-              <a:rPr sz="1400" b="0" i="0">
-                <a:solidFill>
-                  <a:srgbClr val="1A1A2E"/>
-                </a:solidFill>
-                <a:latin typeface="Consolas"/>
-              </a:rPr>
-              <a:t>@login_required</a:t>
-            </a:r>
-          </a:p>
-          <a:p>
-            <a:pPr algn="l"/>
-            <a:r>
-              <a:rPr sz="1400" b="0" i="0">
-                <a:solidFill>
-                  <a:srgbClr val="1A1A2E"/>
-                </a:solidFill>
-                <a:latin typeface="Consolas"/>
-              </a:rPr>
-              <a:t>def fattura(fid):</a:t>
-            </a:r>
-          </a:p>
-          <a:p>
-            <a:pPr algn="l"/>
-            <a:r>
-              <a:rPr sz="1400" b="0" i="0">
-                <a:solidFill>
-                  <a:srgbClr val="1A1A2E"/>
-                </a:solidFill>
-                <a:latin typeface="Consolas"/>
-              </a:rPr>
-              <a:t>    f = Fattura.query.get(fid)</a:t>
-            </a:r>
-          </a:p>
-          <a:p>
-            <a:pPr algn="l"/>
-            <a:r>
-              <a:rPr sz="1400" b="0" i="0">
-                <a:solidFill>
-                  <a:srgbClr val="1A1A2E"/>
-                </a:solidFill>
-                <a:latin typeface="Consolas"/>
-              </a:rPr>
-              <a:t>    return render_template("fattura.html", fattura=f)</a:t>
-            </a:r>
-          </a:p>
-          <a:p>
-            <a:pPr algn="l"/>
-            <a:r>
-              <a:rPr sz="1400" b="0" i="0">
-                <a:solidFill>
-                  <a:srgbClr val="1A1A2E"/>
-                </a:solidFill>
-                <a:latin typeface="Consolas"/>
-              </a:rPr>
-              <a:t/>
-            </a:r>
-          </a:p>
-          <a:p>
-            <a:pPr algn="l"/>
-            <a:r>
-              <a:rPr sz="1400" b="0" i="0">
-                <a:solidFill>
-                  <a:srgbClr val="1A1A2E"/>
-                </a:solidFill>
-                <a:latin typeface="Consolas"/>
-              </a:rPr>
-              <a:t># Alice è loggata, vede /fattura/42 (sua)</a:t>
-            </a:r>
-          </a:p>
-          <a:p>
-            <a:pPr algn="l"/>
-            <a:r>
-              <a:rPr sz="1400" b="0" i="0">
-                <a:solidFill>
-                  <a:srgbClr val="1A1A2E"/>
-                </a:solidFill>
-                <a:latin typeface="Consolas"/>
-              </a:rPr>
-              <a:t># Cambia URL: /fattura/43 → vede la fattura di Bob</a:t>
-            </a:r>
-          </a:p>
-          <a:p>
-            <a:pPr algn="l"/>
-            <a:r>
-              <a:rPr sz="1400" b="0" i="0">
-                <a:solidFill>
-                  <a:srgbClr val="1A1A2E"/>
-                </a:solidFill>
-                <a:latin typeface="Consolas"/>
-              </a:rPr>
-              <a:t># Con uno script: /fattura/1, 2, 3, ... → ESFILTRA tutto il DB fatturazione</a:t>
-            </a:r>
-          </a:p>
-          <a:p>
-            <a:pPr algn="l"/>
-            <a:r>
-              <a:rPr sz="1400" b="0" i="0">
-                <a:solidFill>
-                  <a:srgbClr val="1A1A2E"/>
-                </a:solidFill>
-                <a:latin typeface="Consolas"/>
-              </a:rPr>
-              <a:t/>
-            </a:r>
-          </a:p>
-          <a:p>
-            <a:pPr algn="l"/>
-            <a:r>
-              <a:rPr sz="1400" b="0" i="0">
-                <a:solidFill>
-                  <a:srgbClr val="1A1A2E"/>
-                </a:solidFill>
-                <a:latin typeface="Consolas"/>
-              </a:rPr>
-              <a:t># @login_required c'è... ma manca l'OWNERSHIP CHECK</a:t>
-            </a:r>
-          </a:p>
-        </p:txBody>
-      </p:sp>
-      <p:sp>
-        <p:nvSpPr>
-          <p:cNvPr id="8" name="TextBox 7"/>
-          <p:cNvSpPr txBox="1"/>
-          <p:nvPr/>
-        </p:nvSpPr>
-        <p:spPr>
-          <a:xfrm>
-            <a:off x="457200" y="5852160"/>
-            <a:ext cx="11247120" cy="457200"/>
-          </a:xfrm>
-          <a:prstGeom prst="rect">
-            <a:avLst/>
-          </a:prstGeom>
-          <a:noFill/>
-        </p:spPr>
-        <p:txBody>
-          <a:bodyPr wrap="square" lIns="45720" rIns="45720" tIns="18288" bIns="18288" anchor="t">
-            <a:spAutoFit/>
-          </a:bodyPr>
-          <a:lstStyle/>
-          <a:p>
-            <a:pPr algn="l"/>
-            <a:r>
-              <a:rPr sz="1400" b="1" i="1">
-                <a:solidFill>
-                  <a:srgbClr val="E63946"/>
-                </a:solidFill>
-                <a:latin typeface="Calibri"/>
-              </a:rPr>
-              <a:t>⚠  Una sola riga di controllo mancante = data breach completo</a:t>
+            <a:pPr algn="ctr"/>
+            <a:r>
+              <a:rPr sz="1300" b="0" i="1">
+                <a:solidFill>
+                  <a:srgbClr val="6B7280"/>
+                </a:solidFill>
+                <a:latin typeface="Calibri"/>
+              </a:rPr>
+              <a:t>filter_by(owner_id=...) è la riga che evita una multa da 100k€</a:t>
             </a:r>
           </a:p>
         </p:txBody>
       </p:sp>
       <p:cxnSp>
         <p:nvCxnSpPr>
-          <p:cNvPr id="9" name="Connector 8"/>
+          <p:cNvPr id="6" name="Connector 5"/>
           <p:cNvCxnSpPr/>
           <p:nvPr/>
         </p:nvCxnSpPr>
@@ -8072,14 +8576,14 @@
       </p:cxnSp>
       <p:sp>
         <p:nvSpPr>
-          <p:cNvPr id="10" name="TextBox 9"/>
+          <p:cNvPr id="7" name="TextBox 6"/>
           <p:cNvSpPr txBox="1"/>
           <p:nvPr/>
         </p:nvSpPr>
         <p:spPr>
           <a:xfrm>
             <a:off x="457200" y="6473952"/>
-            <a:ext cx="7315200" cy="320040"/>
+            <a:ext cx="7315200" cy="292608"/>
           </a:xfrm>
           <a:prstGeom prst="rect">
             <a:avLst/>
@@ -8100,21 +8604,21 @@
                 </a:solidFill>
                 <a:latin typeface="Calibri"/>
               </a:rPr>
-              <a:t>Secure Coding · Corso IFTS STEM · A. Manneschi</a:t>
-            </a:r>
-          </a:p>
-        </p:txBody>
-      </p:sp>
-      <p:sp>
-        <p:nvSpPr>
-          <p:cNvPr id="11" name="TextBox 10"/>
+              <a:t>Secure Coding · Corso IFTS STEM · A. Manneschi · 2024/2025</a:t>
+            </a:r>
+          </a:p>
+        </p:txBody>
+      </p:sp>
+      <p:sp>
+        <p:nvSpPr>
+          <p:cNvPr id="8" name="TextBox 7"/>
           <p:cNvSpPr txBox="1"/>
           <p:nvPr/>
         </p:nvSpPr>
         <p:spPr>
           <a:xfrm>
             <a:off x="10515600" y="6473952"/>
-            <a:ext cx="1188720" cy="320040"/>
+            <a:ext cx="1188720" cy="292608"/>
           </a:xfrm>
           <a:prstGeom prst="rect">
             <a:avLst/>
@@ -8231,981 +8735,6 @@
                 </a:solidFill>
                 <a:latin typeface="Calibri"/>
               </a:rPr>
-              <a:t>Caso italiano — 100.000€ di multa</a:t>
-            </a:r>
-          </a:p>
-        </p:txBody>
-      </p:sp>
-      <p:sp>
-        <p:nvSpPr>
-          <p:cNvPr id="4" name="TextBox 3"/>
-          <p:cNvSpPr txBox="1"/>
-          <p:nvPr/>
-        </p:nvSpPr>
-        <p:spPr>
-          <a:xfrm>
-            <a:off x="640080" y="1005840"/>
-            <a:ext cx="10972800" cy="5029200"/>
-          </a:xfrm>
-          <a:prstGeom prst="rect">
-            <a:avLst/>
-          </a:prstGeom>
-          <a:noFill/>
-        </p:spPr>
-        <p:txBody>
-          <a:bodyPr wrap="square">
-            <a:spAutoFit/>
-          </a:bodyPr>
-          <a:lstStyle/>
-          <a:p>
-            <a:pPr>
-              <a:lnSpc>
-                <a:spcPct val="150000"/>
-              </a:lnSpc>
-            </a:pPr>
-            <a:r>
-              <a:rPr sz="2000" b="1">
-                <a:solidFill>
-                  <a:srgbClr val="00A0B0"/>
-                </a:solidFill>
-                <a:latin typeface="Calibri"/>
-              </a:rPr>
-              <a:t>▸  </a:t>
-            </a:r>
-            <a:r>
-              <a:rPr sz="2000">
-                <a:solidFill>
-                  <a:srgbClr val="1A1A2E"/>
-                </a:solidFill>
-                <a:latin typeface="Calibri"/>
-              </a:rPr>
-              <a:t>2022, e-commerce italiano</a:t>
-            </a:r>
-          </a:p>
-          <a:p>
-            <a:pPr>
-              <a:lnSpc>
-                <a:spcPct val="150000"/>
-              </a:lnSpc>
-            </a:pPr>
-            <a:r>
-              <a:rPr sz="2000" b="1">
-                <a:solidFill>
-                  <a:srgbClr val="00A0B0"/>
-                </a:solidFill>
-                <a:latin typeface="Calibri"/>
-              </a:rPr>
-              <a:t>▸  </a:t>
-            </a:r>
-            <a:r>
-              <a:rPr sz="2000">
-                <a:solidFill>
-                  <a:srgbClr val="1A1A2E"/>
-                </a:solidFill>
-                <a:latin typeface="Calibri"/>
-              </a:rPr>
-              <a:t>URL /ordine/&lt;id&gt; non protetti</a:t>
-            </a:r>
-          </a:p>
-          <a:p>
-            <a:pPr>
-              <a:lnSpc>
-                <a:spcPct val="150000"/>
-              </a:lnSpc>
-            </a:pPr>
-            <a:r>
-              <a:rPr sz="2000" b="1">
-                <a:solidFill>
-                  <a:srgbClr val="00A0B0"/>
-                </a:solidFill>
-                <a:latin typeface="Calibri"/>
-              </a:rPr>
-              <a:t>▸  </a:t>
-            </a:r>
-            <a:r>
-              <a:rPr sz="2000">
-                <a:solidFill>
-                  <a:srgbClr val="1A1A2E"/>
-                </a:solidFill>
-                <a:latin typeface="Calibri"/>
-              </a:rPr>
-              <a:t>Cambiando l'ID → ordini di altri clienti</a:t>
-            </a:r>
-          </a:p>
-          <a:p>
-            <a:pPr>
-              <a:lnSpc>
-                <a:spcPct val="150000"/>
-              </a:lnSpc>
-            </a:pPr>
-            <a:r>
-              <a:rPr sz="2000" b="1">
-                <a:solidFill>
-                  <a:srgbClr val="00A0B0"/>
-                </a:solidFill>
-                <a:latin typeface="Calibri"/>
-              </a:rPr>
-              <a:t>▸  </a:t>
-            </a:r>
-            <a:r>
-              <a:rPr sz="2000">
-                <a:solidFill>
-                  <a:srgbClr val="1A1A2E"/>
-                </a:solidFill>
-                <a:latin typeface="Calibri"/>
-              </a:rPr>
-              <a:t>  Con indirizzi, prodotti, importi, IBAN</a:t>
-            </a:r>
-          </a:p>
-          <a:p>
-            <a:pPr>
-              <a:lnSpc>
-                <a:spcPct val="150000"/>
-              </a:lnSpc>
-            </a:pPr>
-            <a:r>
-              <a:rPr sz="2000" b="1">
-                <a:solidFill>
-                  <a:srgbClr val="00A0B0"/>
-                </a:solidFill>
-                <a:latin typeface="Calibri"/>
-              </a:rPr>
-              <a:t>▸  </a:t>
-            </a:r>
-            <a:r>
-              <a:rPr sz="2000">
-                <a:solidFill>
-                  <a:srgbClr val="1A1A2E"/>
-                </a:solidFill>
-                <a:latin typeface="Calibri"/>
-              </a:rPr>
-              <a:t/>
-            </a:r>
-          </a:p>
-          <a:p>
-            <a:pPr>
-              <a:lnSpc>
-                <a:spcPct val="150000"/>
-              </a:lnSpc>
-            </a:pPr>
-            <a:r>
-              <a:rPr sz="2000" b="1">
-                <a:solidFill>
-                  <a:srgbClr val="00A0B0"/>
-                </a:solidFill>
-                <a:latin typeface="Calibri"/>
-              </a:rPr>
-              <a:t>▸  </a:t>
-            </a:r>
-            <a:r>
-              <a:rPr sz="2000">
-                <a:solidFill>
-                  <a:srgbClr val="1A1A2E"/>
-                </a:solidFill>
-                <a:latin typeface="Calibri"/>
-              </a:rPr>
-              <a:t>Sanzione Garante Privacy: ~100.000€</a:t>
-            </a:r>
-          </a:p>
-          <a:p>
-            <a:pPr>
-              <a:lnSpc>
-                <a:spcPct val="150000"/>
-              </a:lnSpc>
-            </a:pPr>
-            <a:r>
-              <a:rPr sz="2000" b="1">
-                <a:solidFill>
-                  <a:srgbClr val="00A0B0"/>
-                </a:solidFill>
-                <a:latin typeface="Calibri"/>
-              </a:rPr>
-              <a:t>▸  </a:t>
-            </a:r>
-            <a:r>
-              <a:rPr sz="2000">
-                <a:solidFill>
-                  <a:srgbClr val="1A1A2E"/>
-                </a:solidFill>
-                <a:latin typeface="Calibri"/>
-              </a:rPr>
-              <a:t>GDPR Art. 25 (Privacy by Design) + Art. 32 (sicurezza)</a:t>
-            </a:r>
-          </a:p>
-          <a:p>
-            <a:pPr>
-              <a:lnSpc>
-                <a:spcPct val="150000"/>
-              </a:lnSpc>
-            </a:pPr>
-            <a:r>
-              <a:rPr sz="2000" b="1">
-                <a:solidFill>
-                  <a:srgbClr val="00A0B0"/>
-                </a:solidFill>
-                <a:latin typeface="Calibri"/>
-              </a:rPr>
-              <a:t>▸  </a:t>
-            </a:r>
-            <a:r>
-              <a:rPr sz="2000">
-                <a:solidFill>
-                  <a:srgbClr val="1A1A2E"/>
-                </a:solidFill>
-                <a:latin typeface="Calibri"/>
-              </a:rPr>
-              <a:t/>
-            </a:r>
-          </a:p>
-          <a:p>
-            <a:pPr>
-              <a:lnSpc>
-                <a:spcPct val="150000"/>
-              </a:lnSpc>
-            </a:pPr>
-            <a:r>
-              <a:rPr sz="2000" b="1">
-                <a:solidFill>
-                  <a:srgbClr val="00A0B0"/>
-                </a:solidFill>
-                <a:latin typeface="Calibri"/>
-              </a:rPr>
-              <a:t>▸  </a:t>
-            </a:r>
-            <a:r>
-              <a:rPr sz="2000">
-                <a:solidFill>
-                  <a:srgbClr val="1A1A2E"/>
-                </a:solidFill>
-                <a:latin typeface="Calibri"/>
-              </a:rPr>
-              <a:t>Una sola riga avrebbe evitato tutto questo</a:t>
-            </a:r>
-          </a:p>
-        </p:txBody>
-      </p:sp>
-      <p:cxnSp>
-        <p:nvCxnSpPr>
-          <p:cNvPr id="5" name="Connector 4"/>
-          <p:cNvCxnSpPr/>
-          <p:nvPr/>
-        </p:nvCxnSpPr>
-        <p:spPr>
-          <a:xfrm>
-            <a:off x="457200" y="6446520"/>
-            <a:ext cx="11274552" cy="0"/>
-          </a:xfrm>
-          <a:prstGeom prst="line">
-            <a:avLst/>
-          </a:prstGeom>
-          <a:ln w="19050">
-            <a:solidFill>
-              <a:srgbClr val="00A0B0"/>
-            </a:solidFill>
-          </a:ln>
-        </p:spPr>
-        <p:style>
-          <a:lnRef idx="2">
-            <a:schemeClr val="accent1"/>
-          </a:lnRef>
-          <a:fillRef idx="0">
-            <a:schemeClr val="accent1"/>
-          </a:fillRef>
-          <a:effectRef idx="1">
-            <a:schemeClr val="accent1"/>
-          </a:effectRef>
-          <a:fontRef idx="minor">
-            <a:schemeClr val="tx1"/>
-          </a:fontRef>
-        </p:style>
-      </p:cxnSp>
-      <p:sp>
-        <p:nvSpPr>
-          <p:cNvPr id="6" name="TextBox 5"/>
-          <p:cNvSpPr txBox="1"/>
-          <p:nvPr/>
-        </p:nvSpPr>
-        <p:spPr>
-          <a:xfrm>
-            <a:off x="457200" y="6473952"/>
-            <a:ext cx="7315200" cy="320040"/>
-          </a:xfrm>
-          <a:prstGeom prst="rect">
-            <a:avLst/>
-          </a:prstGeom>
-          <a:noFill/>
-        </p:spPr>
-        <p:txBody>
-          <a:bodyPr wrap="square" lIns="45720" rIns="45720" tIns="18288" bIns="18288" anchor="t">
-            <a:spAutoFit/>
-          </a:bodyPr>
-          <a:lstStyle/>
-          <a:p>
-            <a:pPr algn="l"/>
-            <a:r>
-              <a:rPr sz="1000" b="0" i="0">
-                <a:solidFill>
-                  <a:srgbClr val="6B7280"/>
-                </a:solidFill>
-                <a:latin typeface="Calibri"/>
-              </a:rPr>
-              <a:t>Secure Coding · Corso IFTS STEM · A. Manneschi</a:t>
-            </a:r>
-          </a:p>
-        </p:txBody>
-      </p:sp>
-      <p:sp>
-        <p:nvSpPr>
-          <p:cNvPr id="7" name="TextBox 6"/>
-          <p:cNvSpPr txBox="1"/>
-          <p:nvPr/>
-        </p:nvSpPr>
-        <p:spPr>
-          <a:xfrm>
-            <a:off x="10515600" y="6473952"/>
-            <a:ext cx="1188720" cy="320040"/>
-          </a:xfrm>
-          <a:prstGeom prst="rect">
-            <a:avLst/>
-          </a:prstGeom>
-          <a:noFill/>
-        </p:spPr>
-        <p:txBody>
-          <a:bodyPr wrap="square" lIns="45720" rIns="45720" tIns="18288" bIns="18288" anchor="t">
-            <a:spAutoFit/>
-          </a:bodyPr>
-          <a:lstStyle/>
-          <a:p>
-            <a:pPr algn="r"/>
-            <a:r>
-              <a:rPr sz="1000" b="1" i="0">
-                <a:solidFill>
-                  <a:srgbClr val="6B7280"/>
-                </a:solidFill>
-                <a:latin typeface="Calibri"/>
-              </a:rPr>
-              <a:t>L4  ·  6/14</a:t>
-            </a:r>
-          </a:p>
-        </p:txBody>
-      </p:sp>
-    </p:spTree>
-  </p:cSld>
-  <p:clrMapOvr>
-    <a:masterClrMapping/>
-  </p:clrMapOvr>
-</p:sld>
-</file>
-
-<file path=ppt/slides/slide7.xml><?xml version="1.0" encoding="utf-8"?>
-<p:sld xmlns:a="http://schemas.openxmlformats.org/drawingml/2006/main" xmlns:p="http://schemas.openxmlformats.org/presentationml/2006/main" xmlns:r="http://schemas.openxmlformats.org/officeDocument/2006/relationships">
-  <p:cSld>
-    <p:spTree>
-      <p:nvGrpSpPr>
-        <p:cNvPr id="1" name=""/>
-        <p:cNvGrpSpPr/>
-        <p:nvPr/>
-      </p:nvGrpSpPr>
-      <p:grpSpPr/>
-      <p:sp>
-        <p:nvSpPr>
-          <p:cNvPr id="2" name="Rectangle 1"/>
-          <p:cNvSpPr/>
-          <p:nvPr/>
-        </p:nvSpPr>
-        <p:spPr>
-          <a:xfrm>
-            <a:off x="0" y="0"/>
-            <a:ext cx="12191695" cy="777240"/>
-          </a:xfrm>
-          <a:prstGeom prst="rect">
-            <a:avLst/>
-          </a:prstGeom>
-          <a:solidFill>
-            <a:srgbClr val="0F2D52"/>
-          </a:solidFill>
-          <a:ln>
-            <a:noFill/>
-          </a:ln>
-        </p:spPr>
-        <p:style>
-          <a:lnRef idx="1">
-            <a:schemeClr val="accent1"/>
-          </a:lnRef>
-          <a:fillRef idx="3">
-            <a:schemeClr val="accent1"/>
-          </a:fillRef>
-          <a:effectRef idx="2">
-            <a:schemeClr val="accent1"/>
-          </a:effectRef>
-          <a:fontRef idx="minor">
-            <a:schemeClr val="lt1"/>
-          </a:fontRef>
-        </p:style>
-        <p:txBody>
-          <a:bodyPr rtlCol="0" anchor="ctr"/>
-          <a:lstStyle/>
-          <a:p>
-            <a:pPr algn="ctr"/>
-          </a:p>
-        </p:txBody>
-      </p:sp>
-      <p:sp>
-        <p:nvSpPr>
-          <p:cNvPr id="3" name="TextBox 2"/>
-          <p:cNvSpPr txBox="1"/>
-          <p:nvPr/>
-        </p:nvSpPr>
-        <p:spPr>
-          <a:xfrm>
-            <a:off x="457200" y="164592"/>
-            <a:ext cx="10058400" cy="502920"/>
-          </a:xfrm>
-          <a:prstGeom prst="rect">
-            <a:avLst/>
-          </a:prstGeom>
-          <a:noFill/>
-        </p:spPr>
-        <p:txBody>
-          <a:bodyPr wrap="square" lIns="45720" rIns="45720" tIns="18288" bIns="18288" anchor="ctr">
-            <a:spAutoFit/>
-          </a:bodyPr>
-          <a:lstStyle/>
-          <a:p>
-            <a:pPr algn="l"/>
-            <a:r>
-              <a:rPr sz="2400" b="1" i="0">
-                <a:solidFill>
-                  <a:srgbClr val="FFFFFF"/>
-                </a:solidFill>
-                <a:latin typeface="Calibri"/>
-              </a:rPr>
-              <a:t>La correzione: ownership check</a:t>
-            </a:r>
-          </a:p>
-        </p:txBody>
-      </p:sp>
-      <p:sp>
-        <p:nvSpPr>
-          <p:cNvPr id="4" name="Rectangle 3"/>
-          <p:cNvSpPr/>
-          <p:nvPr/>
-        </p:nvSpPr>
-        <p:spPr>
-          <a:xfrm>
-            <a:off x="9875520" y="164592"/>
-            <a:ext cx="2103120" cy="457200"/>
-          </a:xfrm>
-          <a:prstGeom prst="rect">
-            <a:avLst/>
-          </a:prstGeom>
-          <a:solidFill>
-            <a:srgbClr val="06A77D"/>
-          </a:solidFill>
-          <a:ln>
-            <a:noFill/>
-          </a:ln>
-        </p:spPr>
-        <p:style>
-          <a:lnRef idx="1">
-            <a:schemeClr val="accent1"/>
-          </a:lnRef>
-          <a:fillRef idx="3">
-            <a:schemeClr val="accent1"/>
-          </a:fillRef>
-          <a:effectRef idx="2">
-            <a:schemeClr val="accent1"/>
-          </a:effectRef>
-          <a:fontRef idx="minor">
-            <a:schemeClr val="lt1"/>
-          </a:fontRef>
-        </p:style>
-        <p:txBody>
-          <a:bodyPr rtlCol="0" anchor="ctr"/>
-          <a:lstStyle/>
-          <a:p>
-            <a:pPr algn="ctr"/>
-          </a:p>
-        </p:txBody>
-      </p:sp>
-      <p:sp>
-        <p:nvSpPr>
-          <p:cNvPr id="5" name="TextBox 4"/>
-          <p:cNvSpPr txBox="1"/>
-          <p:nvPr/>
-        </p:nvSpPr>
-        <p:spPr>
-          <a:xfrm>
-            <a:off x="9875520" y="182880"/>
-            <a:ext cx="2103120" cy="457200"/>
-          </a:xfrm>
-          <a:prstGeom prst="rect">
-            <a:avLst/>
-          </a:prstGeom>
-          <a:noFill/>
-        </p:spPr>
-        <p:txBody>
-          <a:bodyPr wrap="square" lIns="45720" rIns="45720" tIns="18288" bIns="18288" anchor="ctr">
-            <a:spAutoFit/>
-          </a:bodyPr>
-          <a:lstStyle/>
-          <a:p>
-            <a:pPr algn="ctr"/>
-            <a:r>
-              <a:rPr sz="1200" b="1" i="0">
-                <a:solidFill>
-                  <a:srgbClr val="FFFFFF"/>
-                </a:solidFill>
-                <a:latin typeface="Calibri"/>
-              </a:rPr>
-              <a:t>✅ PYTHON</a:t>
-            </a:r>
-          </a:p>
-        </p:txBody>
-      </p:sp>
-      <p:sp>
-        <p:nvSpPr>
-          <p:cNvPr id="6" name="Rectangle 5"/>
-          <p:cNvSpPr/>
-          <p:nvPr/>
-        </p:nvSpPr>
-        <p:spPr>
-          <a:xfrm>
-            <a:off x="457200" y="1097280"/>
-            <a:ext cx="11247120" cy="4572000"/>
-          </a:xfrm>
-          <a:prstGeom prst="rect">
-            <a:avLst/>
-          </a:prstGeom>
-          <a:solidFill>
-            <a:srgbClr val="F1F4F8"/>
-          </a:solidFill>
-          <a:ln>
-            <a:solidFill>
-              <a:srgbClr val="06A77D"/>
-            </a:solidFill>
-          </a:ln>
-        </p:spPr>
-        <p:style>
-          <a:lnRef idx="1">
-            <a:schemeClr val="accent1"/>
-          </a:lnRef>
-          <a:fillRef idx="3">
-            <a:schemeClr val="accent1"/>
-          </a:fillRef>
-          <a:effectRef idx="2">
-            <a:schemeClr val="accent1"/>
-          </a:effectRef>
-          <a:fontRef idx="minor">
-            <a:schemeClr val="lt1"/>
-          </a:fontRef>
-        </p:style>
-        <p:txBody>
-          <a:bodyPr rtlCol="0" anchor="ctr"/>
-          <a:lstStyle/>
-          <a:p>
-            <a:pPr algn="ctr"/>
-          </a:p>
-        </p:txBody>
-      </p:sp>
-      <p:sp>
-        <p:nvSpPr>
-          <p:cNvPr id="7" name="TextBox 6"/>
-          <p:cNvSpPr txBox="1"/>
-          <p:nvPr/>
-        </p:nvSpPr>
-        <p:spPr>
-          <a:xfrm>
-            <a:off x="640080" y="1280160"/>
-            <a:ext cx="10972800" cy="4206240"/>
-          </a:xfrm>
-          <a:prstGeom prst="rect">
-            <a:avLst/>
-          </a:prstGeom>
-          <a:noFill/>
-        </p:spPr>
-        <p:txBody>
-          <a:bodyPr wrap="square" lIns="45720" rIns="45720" tIns="18288" bIns="18288" anchor="t">
-            <a:spAutoFit/>
-          </a:bodyPr>
-          <a:lstStyle/>
-          <a:p>
-            <a:pPr algn="l"/>
-            <a:r>
-              <a:rPr sz="1400" b="0" i="0">
-                <a:solidFill>
-                  <a:srgbClr val="1A1A2E"/>
-                </a:solidFill>
-                <a:latin typeface="Consolas"/>
-              </a:rPr>
-              <a:t>@app.route("/fattura/&lt;int:fid&gt;")</a:t>
-            </a:r>
-          </a:p>
-          <a:p>
-            <a:pPr algn="l"/>
-            <a:r>
-              <a:rPr sz="1400" b="0" i="0">
-                <a:solidFill>
-                  <a:srgbClr val="1A1A2E"/>
-                </a:solidFill>
-                <a:latin typeface="Consolas"/>
-              </a:rPr>
-              <a:t>@login_required</a:t>
-            </a:r>
-          </a:p>
-          <a:p>
-            <a:pPr algn="l"/>
-            <a:r>
-              <a:rPr sz="1400" b="0" i="0">
-                <a:solidFill>
-                  <a:srgbClr val="1A1A2E"/>
-                </a:solidFill>
-                <a:latin typeface="Consolas"/>
-              </a:rPr>
-              <a:t>def fattura(fid):</a:t>
-            </a:r>
-          </a:p>
-          <a:p>
-            <a:pPr algn="l"/>
-            <a:r>
-              <a:rPr sz="1400" b="0" i="0">
-                <a:solidFill>
-                  <a:srgbClr val="1A1A2E"/>
-                </a:solidFill>
-                <a:latin typeface="Consolas"/>
-              </a:rPr>
-              <a:t>    f = Fattura.query.filter_by(</a:t>
-            </a:r>
-          </a:p>
-          <a:p>
-            <a:pPr algn="l"/>
-            <a:r>
-              <a:rPr sz="1400" b="0" i="0">
-                <a:solidFill>
-                  <a:srgbClr val="1A1A2E"/>
-                </a:solidFill>
-                <a:latin typeface="Consolas"/>
-              </a:rPr>
-              <a:t>        id=fid,</a:t>
-            </a:r>
-          </a:p>
-          <a:p>
-            <a:pPr algn="l"/>
-            <a:r>
-              <a:rPr sz="1400" b="0" i="0">
-                <a:solidFill>
-                  <a:srgbClr val="1A1A2E"/>
-                </a:solidFill>
-                <a:latin typeface="Consolas"/>
-              </a:rPr>
-              <a:t>        owner_id=session["user_id"]</a:t>
-            </a:r>
-          </a:p>
-          <a:p>
-            <a:pPr algn="l"/>
-            <a:r>
-              <a:rPr sz="1400" b="0" i="0">
-                <a:solidFill>
-                  <a:srgbClr val="1A1A2E"/>
-                </a:solidFill>
-                <a:latin typeface="Consolas"/>
-              </a:rPr>
-              <a:t>    ).first_or_404()</a:t>
-            </a:r>
-          </a:p>
-          <a:p>
-            <a:pPr algn="l"/>
-            <a:r>
-              <a:rPr sz="1400" b="0" i="0">
-                <a:solidFill>
-                  <a:srgbClr val="1A1A2E"/>
-                </a:solidFill>
-                <a:latin typeface="Consolas"/>
-              </a:rPr>
-              <a:t>    return render_template("fattura.html", fattura=f)</a:t>
-            </a:r>
-          </a:p>
-          <a:p>
-            <a:pPr algn="l"/>
-            <a:r>
-              <a:rPr sz="1400" b="0" i="0">
-                <a:solidFill>
-                  <a:srgbClr val="1A1A2E"/>
-                </a:solidFill>
-                <a:latin typeface="Consolas"/>
-              </a:rPr>
-              <a:t/>
-            </a:r>
-          </a:p>
-          <a:p>
-            <a:pPr algn="l"/>
-            <a:r>
-              <a:rPr sz="1400" b="0" i="0">
-                <a:solidFill>
-                  <a:srgbClr val="1A1A2E"/>
-                </a:solidFill>
-                <a:latin typeface="Consolas"/>
-              </a:rPr>
-              <a:t># Pattern alternativo, più pulito:</a:t>
-            </a:r>
-          </a:p>
-          <a:p>
-            <a:pPr algn="l"/>
-            <a:r>
-              <a:rPr sz="1400" b="0" i="0">
-                <a:solidFill>
-                  <a:srgbClr val="1A1A2E"/>
-                </a:solidFill>
-                <a:latin typeface="Consolas"/>
-              </a:rPr>
-              <a:t># Filtri direttamente per owner. Se la fattura non esiste</a:t>
-            </a:r>
-          </a:p>
-          <a:p>
-            <a:pPr algn="l"/>
-            <a:r>
-              <a:rPr sz="1400" b="0" i="0">
-                <a:solidFill>
-                  <a:srgbClr val="1A1A2E"/>
-                </a:solidFill>
-                <a:latin typeface="Consolas"/>
-              </a:rPr>
-              <a:t># O non è dell'utente: 404. Meno error-prone.</a:t>
-            </a:r>
-          </a:p>
-        </p:txBody>
-      </p:sp>
-      <p:sp>
-        <p:nvSpPr>
-          <p:cNvPr id="8" name="TextBox 7"/>
-          <p:cNvSpPr txBox="1"/>
-          <p:nvPr/>
-        </p:nvSpPr>
-        <p:spPr>
-          <a:xfrm>
-            <a:off x="457200" y="5852160"/>
-            <a:ext cx="11247120" cy="457200"/>
-          </a:xfrm>
-          <a:prstGeom prst="rect">
-            <a:avLst/>
-          </a:prstGeom>
-          <a:noFill/>
-        </p:spPr>
-        <p:txBody>
-          <a:bodyPr wrap="square" lIns="45720" rIns="45720" tIns="18288" bIns="18288" anchor="t">
-            <a:spAutoFit/>
-          </a:bodyPr>
-          <a:lstStyle/>
-          <a:p>
-            <a:pPr algn="l"/>
-            <a:r>
-              <a:rPr sz="1400" b="1" i="1">
-                <a:solidFill>
-                  <a:srgbClr val="06A77D"/>
-                </a:solidFill>
-                <a:latin typeface="Calibri"/>
-              </a:rPr>
-              <a:t>✓  filter_by(owner_id=...) è la chiave. Memorizzalo.</a:t>
-            </a:r>
-          </a:p>
-        </p:txBody>
-      </p:sp>
-      <p:cxnSp>
-        <p:nvCxnSpPr>
-          <p:cNvPr id="9" name="Connector 8"/>
-          <p:cNvCxnSpPr/>
-          <p:nvPr/>
-        </p:nvCxnSpPr>
-        <p:spPr>
-          <a:xfrm>
-            <a:off x="457200" y="6446520"/>
-            <a:ext cx="11274552" cy="0"/>
-          </a:xfrm>
-          <a:prstGeom prst="line">
-            <a:avLst/>
-          </a:prstGeom>
-          <a:ln w="19050">
-            <a:solidFill>
-              <a:srgbClr val="00A0B0"/>
-            </a:solidFill>
-          </a:ln>
-        </p:spPr>
-        <p:style>
-          <a:lnRef idx="2">
-            <a:schemeClr val="accent1"/>
-          </a:lnRef>
-          <a:fillRef idx="0">
-            <a:schemeClr val="accent1"/>
-          </a:fillRef>
-          <a:effectRef idx="1">
-            <a:schemeClr val="accent1"/>
-          </a:effectRef>
-          <a:fontRef idx="minor">
-            <a:schemeClr val="tx1"/>
-          </a:fontRef>
-        </p:style>
-      </p:cxnSp>
-      <p:sp>
-        <p:nvSpPr>
-          <p:cNvPr id="10" name="TextBox 9"/>
-          <p:cNvSpPr txBox="1"/>
-          <p:nvPr/>
-        </p:nvSpPr>
-        <p:spPr>
-          <a:xfrm>
-            <a:off x="457200" y="6473952"/>
-            <a:ext cx="7315200" cy="320040"/>
-          </a:xfrm>
-          <a:prstGeom prst="rect">
-            <a:avLst/>
-          </a:prstGeom>
-          <a:noFill/>
-        </p:spPr>
-        <p:txBody>
-          <a:bodyPr wrap="square" lIns="45720" rIns="45720" tIns="18288" bIns="18288" anchor="t">
-            <a:spAutoFit/>
-          </a:bodyPr>
-          <a:lstStyle/>
-          <a:p>
-            <a:pPr algn="l"/>
-            <a:r>
-              <a:rPr sz="1000" b="0" i="0">
-                <a:solidFill>
-                  <a:srgbClr val="6B7280"/>
-                </a:solidFill>
-                <a:latin typeface="Calibri"/>
-              </a:rPr>
-              <a:t>Secure Coding · Corso IFTS STEM · A. Manneschi</a:t>
-            </a:r>
-          </a:p>
-        </p:txBody>
-      </p:sp>
-      <p:sp>
-        <p:nvSpPr>
-          <p:cNvPr id="11" name="TextBox 10"/>
-          <p:cNvSpPr txBox="1"/>
-          <p:nvPr/>
-        </p:nvSpPr>
-        <p:spPr>
-          <a:xfrm>
-            <a:off x="10515600" y="6473952"/>
-            <a:ext cx="1188720" cy="320040"/>
-          </a:xfrm>
-          <a:prstGeom prst="rect">
-            <a:avLst/>
-          </a:prstGeom>
-          <a:noFill/>
-        </p:spPr>
-        <p:txBody>
-          <a:bodyPr wrap="square" lIns="45720" rIns="45720" tIns="18288" bIns="18288" anchor="t">
-            <a:spAutoFit/>
-          </a:bodyPr>
-          <a:lstStyle/>
-          <a:p>
-            <a:pPr algn="r"/>
-            <a:r>
-              <a:rPr sz="1000" b="1" i="0">
-                <a:solidFill>
-                  <a:srgbClr val="6B7280"/>
-                </a:solidFill>
-                <a:latin typeface="Calibri"/>
-              </a:rPr>
-              <a:t>L4  ·  7/14</a:t>
-            </a:r>
-          </a:p>
-        </p:txBody>
-      </p:sp>
-    </p:spTree>
-  </p:cSld>
-  <p:clrMapOvr>
-    <a:masterClrMapping/>
-  </p:clrMapOvr>
-</p:sld>
-</file>
-
-<file path=ppt/slides/slide8.xml><?xml version="1.0" encoding="utf-8"?>
-<p:sld xmlns:a="http://schemas.openxmlformats.org/drawingml/2006/main" xmlns:p="http://schemas.openxmlformats.org/presentationml/2006/main" xmlns:r="http://schemas.openxmlformats.org/officeDocument/2006/relationships">
-  <p:cSld>
-    <p:spTree>
-      <p:nvGrpSpPr>
-        <p:cNvPr id="1" name=""/>
-        <p:cNvGrpSpPr/>
-        <p:nvPr/>
-      </p:nvGrpSpPr>
-      <p:grpSpPr/>
-      <p:sp>
-        <p:nvSpPr>
-          <p:cNvPr id="2" name="Rectangle 1"/>
-          <p:cNvSpPr/>
-          <p:nvPr/>
-        </p:nvSpPr>
-        <p:spPr>
-          <a:xfrm>
-            <a:off x="0" y="0"/>
-            <a:ext cx="12191695" cy="777240"/>
-          </a:xfrm>
-          <a:prstGeom prst="rect">
-            <a:avLst/>
-          </a:prstGeom>
-          <a:solidFill>
-            <a:srgbClr val="0F2D52"/>
-          </a:solidFill>
-          <a:ln>
-            <a:noFill/>
-          </a:ln>
-        </p:spPr>
-        <p:style>
-          <a:lnRef idx="1">
-            <a:schemeClr val="accent1"/>
-          </a:lnRef>
-          <a:fillRef idx="3">
-            <a:schemeClr val="accent1"/>
-          </a:fillRef>
-          <a:effectRef idx="2">
-            <a:schemeClr val="accent1"/>
-          </a:effectRef>
-          <a:fontRef idx="minor">
-            <a:schemeClr val="lt1"/>
-          </a:fontRef>
-        </p:style>
-        <p:txBody>
-          <a:bodyPr rtlCol="0" anchor="ctr"/>
-          <a:lstStyle/>
-          <a:p>
-            <a:pPr algn="ctr"/>
-          </a:p>
-        </p:txBody>
-      </p:sp>
-      <p:sp>
-        <p:nvSpPr>
-          <p:cNvPr id="3" name="TextBox 2"/>
-          <p:cNvSpPr txBox="1"/>
-          <p:nvPr/>
-        </p:nvSpPr>
-        <p:spPr>
-          <a:xfrm>
-            <a:off x="457200" y="164592"/>
-            <a:ext cx="10972800" cy="502920"/>
-          </a:xfrm>
-          <a:prstGeom prst="rect">
-            <a:avLst/>
-          </a:prstGeom>
-          <a:noFill/>
-        </p:spPr>
-        <p:txBody>
-          <a:bodyPr wrap="square" lIns="45720" rIns="45720" tIns="18288" bIns="18288" anchor="ctr">
-            <a:spAutoFit/>
-          </a:bodyPr>
-          <a:lstStyle/>
-          <a:p>
-            <a:pPr algn="l"/>
-            <a:r>
-              <a:rPr sz="2400" b="1" i="0">
-                <a:solidFill>
-                  <a:srgbClr val="FFFFFF"/>
-                </a:solidFill>
-                <a:latin typeface="Calibri"/>
-              </a:rPr>
               <a:t>Status code: 401 vs 403 vs 404</a:t>
             </a:r>
           </a:p>
@@ -9221,7 +8750,7 @@
         </p:nvGraphicFramePr>
         <p:xfrm>
           <a:off x="457200" y="1188720"/>
-          <a:ext cx="11247120" cy="5029200"/>
+          <a:ext cx="11247120" cy="4937760"/>
         </p:xfrm>
         <a:graphic>
           <a:graphicData uri="http://schemas.openxmlformats.org/drawingml/2006/table">
@@ -9234,7 +8763,7 @@
                 <a:gridCol w="3749040"/>
                 <a:gridCol w="3749040"/>
               </a:tblGrid>
-              <a:tr h="1257300">
+              <a:tr h="1234440">
                 <a:tc>
                   <a:txBody>
                     <a:bodyPr/>
@@ -9242,7 +8771,7 @@
                     <a:p>
                       <a:pPr algn="ctr"/>
                       <a:r>
-                        <a:rPr sz="1400" b="1">
+                        <a:rPr sz="1300" b="1">
                           <a:solidFill>
                             <a:srgbClr val="FFFFFF"/>
                           </a:solidFill>
@@ -9265,7 +8794,7 @@
                     <a:p>
                       <a:pPr algn="ctr"/>
                       <a:r>
-                        <a:rPr sz="1400" b="1">
+                        <a:rPr sz="1300" b="1">
                           <a:solidFill>
                             <a:srgbClr val="FFFFFF"/>
                           </a:solidFill>
@@ -9288,7 +8817,7 @@
                     <a:p>
                       <a:pPr algn="ctr"/>
                       <a:r>
-                        <a:rPr sz="1400" b="1">
+                        <a:rPr sz="1300" b="1">
                           <a:solidFill>
                             <a:srgbClr val="FFFFFF"/>
                           </a:solidFill>
@@ -9305,15 +8834,14 @@
                   </a:tcPr>
                 </a:tc>
               </a:tr>
-              <a:tr h="1257300">
+              <a:tr h="1234440">
                 <a:tc>
                   <a:txBody>
                     <a:bodyPr/>
                     <a:lstStyle/>
                     <a:p>
-                      <a:pPr algn="l"/>
                       <a:r>
-                        <a:rPr sz="1200">
+                        <a:rPr sz="1100">
                           <a:solidFill>
                             <a:srgbClr val="1A1A2E"/>
                           </a:solidFill>
@@ -9334,9 +8862,8 @@
                     <a:bodyPr/>
                     <a:lstStyle/>
                     <a:p>
-                      <a:pPr algn="l"/>
                       <a:r>
-                        <a:rPr sz="1200">
+                        <a:rPr sz="1100">
                           <a:solidFill>
                             <a:srgbClr val="1A1A2E"/>
                           </a:solidFill>
@@ -9357,9 +8884,8 @@
                     <a:bodyPr/>
                     <a:lstStyle/>
                     <a:p>
-                      <a:pPr algn="l"/>
                       <a:r>
-                        <a:rPr sz="1200">
+                        <a:rPr sz="1100">
                           <a:solidFill>
                             <a:srgbClr val="1A1A2E"/>
                           </a:solidFill>
@@ -9376,15 +8902,14 @@
                   </a:tcPr>
                 </a:tc>
               </a:tr>
-              <a:tr h="1257300">
+              <a:tr h="1234440">
                 <a:tc>
                   <a:txBody>
                     <a:bodyPr/>
                     <a:lstStyle/>
                     <a:p>
-                      <a:pPr algn="l"/>
                       <a:r>
-                        <a:rPr sz="1200">
+                        <a:rPr sz="1100">
                           <a:solidFill>
                             <a:srgbClr val="1A1A2E"/>
                           </a:solidFill>
@@ -9405,9 +8930,8 @@
                     <a:bodyPr/>
                     <a:lstStyle/>
                     <a:p>
-                      <a:pPr algn="l"/>
                       <a:r>
-                        <a:rPr sz="1200">
+                        <a:rPr sz="1100">
                           <a:solidFill>
                             <a:srgbClr val="1A1A2E"/>
                           </a:solidFill>
@@ -9428,15 +8952,14 @@
                     <a:bodyPr/>
                     <a:lstStyle/>
                     <a:p>
-                      <a:pPr algn="l"/>
                       <a:r>
-                        <a:rPr sz="1200">
+                        <a:rPr sz="1100">
                           <a:solidFill>
                             <a:srgbClr val="1A1A2E"/>
                           </a:solidFill>
                           <a:latin typeface="Calibri"/>
                         </a:rPr>
-                        <a:t>User normale prova /admin</a:t>
+                        <a:t>User normale → /admin</a:t>
                       </a:r>
                     </a:p>
                   </a:txBody>
@@ -9447,15 +8970,14 @@
                   </a:tcPr>
                 </a:tc>
               </a:tr>
-              <a:tr h="1257300">
+              <a:tr h="1234440">
                 <a:tc>
                   <a:txBody>
                     <a:bodyPr/>
                     <a:lstStyle/>
                     <a:p>
-                      <a:pPr algn="l"/>
                       <a:r>
-                        <a:rPr sz="1200">
+                        <a:rPr sz="1100">
                           <a:solidFill>
                             <a:srgbClr val="1A1A2E"/>
                           </a:solidFill>
@@ -9476,9 +8998,8 @@
                     <a:bodyPr/>
                     <a:lstStyle/>
                     <a:p>
-                      <a:pPr algn="l"/>
                       <a:r>
-                        <a:rPr sz="1200">
+                        <a:rPr sz="1100">
                           <a:solidFill>
                             <a:srgbClr val="1A1A2E"/>
                           </a:solidFill>
@@ -9499,9 +9020,8 @@
                     <a:bodyPr/>
                     <a:lstStyle/>
                     <a:p>
-                      <a:pPr algn="l"/>
                       <a:r>
-                        <a:rPr sz="1200">
+                        <a:rPr sz="1100">
                           <a:solidFill>
                             <a:srgbClr val="1A1A2E"/>
                           </a:solidFill>
@@ -9566,7 +9086,7 @@
         <p:spPr>
           <a:xfrm>
             <a:off x="457200" y="6473952"/>
-            <a:ext cx="7315200" cy="320040"/>
+            <a:ext cx="7315200" cy="292608"/>
           </a:xfrm>
           <a:prstGeom prst="rect">
             <a:avLst/>
@@ -9587,7 +9107,7 @@
                 </a:solidFill>
                 <a:latin typeface="Calibri"/>
               </a:rPr>
-              <a:t>Secure Coding · Corso IFTS STEM · A. Manneschi</a:t>
+              <a:t>Secure Coding · Corso IFTS STEM · A. Manneschi · 2024/2025</a:t>
             </a:r>
           </a:p>
         </p:txBody>
@@ -9601,7 +9121,1320 @@
         <p:spPr>
           <a:xfrm>
             <a:off x="10515600" y="6473952"/>
-            <a:ext cx="1188720" cy="320040"/>
+            <a:ext cx="1188720" cy="292608"/>
+          </a:xfrm>
+          <a:prstGeom prst="rect">
+            <a:avLst/>
+          </a:prstGeom>
+          <a:noFill/>
+        </p:spPr>
+        <p:txBody>
+          <a:bodyPr wrap="square" lIns="45720" rIns="45720" tIns="18288" bIns="18288" anchor="t">
+            <a:spAutoFit/>
+          </a:bodyPr>
+          <a:lstStyle/>
+          <a:p>
+            <a:pPr algn="r"/>
+            <a:r>
+              <a:rPr sz="1000" b="1" i="0">
+                <a:solidFill>
+                  <a:srgbClr val="6B7280"/>
+                </a:solidFill>
+                <a:latin typeface="Calibri"/>
+              </a:rPr>
+              <a:t>L4  ·  6/14</a:t>
+            </a:r>
+          </a:p>
+        </p:txBody>
+      </p:sp>
+    </p:spTree>
+  </p:cSld>
+  <p:clrMapOvr>
+    <a:masterClrMapping/>
+  </p:clrMapOvr>
+</p:sld>
+</file>
+
+<file path=ppt/slides/slide7.xml><?xml version="1.0" encoding="utf-8"?>
+<p:sld xmlns:a="http://schemas.openxmlformats.org/drawingml/2006/main" xmlns:p="http://schemas.openxmlformats.org/presentationml/2006/main" xmlns:r="http://schemas.openxmlformats.org/officeDocument/2006/relationships">
+  <p:cSld>
+    <p:spTree>
+      <p:nvGrpSpPr>
+        <p:cNvPr id="1" name=""/>
+        <p:cNvGrpSpPr/>
+        <p:nvPr/>
+      </p:nvGrpSpPr>
+      <p:grpSpPr/>
+      <p:sp>
+        <p:nvSpPr>
+          <p:cNvPr id="2" name="Rectangle 1"/>
+          <p:cNvSpPr/>
+          <p:nvPr/>
+        </p:nvSpPr>
+        <p:spPr>
+          <a:xfrm>
+            <a:off x="0" y="0"/>
+            <a:ext cx="4114800" cy="6858000"/>
+          </a:xfrm>
+          <a:prstGeom prst="rect">
+            <a:avLst/>
+          </a:prstGeom>
+          <a:solidFill>
+            <a:srgbClr val="081B33"/>
+          </a:solidFill>
+          <a:ln>
+            <a:noFill/>
+          </a:ln>
+        </p:spPr>
+        <p:style>
+          <a:lnRef idx="1">
+            <a:schemeClr val="accent1"/>
+          </a:lnRef>
+          <a:fillRef idx="3">
+            <a:schemeClr val="accent1"/>
+          </a:fillRef>
+          <a:effectRef idx="2">
+            <a:schemeClr val="accent1"/>
+          </a:effectRef>
+          <a:fontRef idx="minor">
+            <a:schemeClr val="lt1"/>
+          </a:fontRef>
+        </p:style>
+        <p:txBody>
+          <a:bodyPr rtlCol="0" anchor="ctr"/>
+          <a:lstStyle/>
+          <a:p>
+            <a:pPr algn="ctr"/>
+          </a:p>
+        </p:txBody>
+      </p:sp>
+      <p:sp>
+        <p:nvSpPr>
+          <p:cNvPr id="3" name="Rectangle 2"/>
+          <p:cNvSpPr/>
+          <p:nvPr/>
+        </p:nvSpPr>
+        <p:spPr>
+          <a:xfrm>
+            <a:off x="4114800" y="0"/>
+            <a:ext cx="8046720" cy="6858000"/>
+          </a:xfrm>
+          <a:prstGeom prst="rect">
+            <a:avLst/>
+          </a:prstGeom>
+          <a:solidFill>
+            <a:srgbClr val="F1F4F8"/>
+          </a:solidFill>
+          <a:ln>
+            <a:noFill/>
+          </a:ln>
+        </p:spPr>
+        <p:style>
+          <a:lnRef idx="1">
+            <a:schemeClr val="accent1"/>
+          </a:lnRef>
+          <a:fillRef idx="3">
+            <a:schemeClr val="accent1"/>
+          </a:fillRef>
+          <a:effectRef idx="2">
+            <a:schemeClr val="accent1"/>
+          </a:effectRef>
+          <a:fontRef idx="minor">
+            <a:schemeClr val="lt1"/>
+          </a:fontRef>
+        </p:style>
+        <p:txBody>
+          <a:bodyPr rtlCol="0" anchor="ctr"/>
+          <a:lstStyle/>
+          <a:p>
+            <a:pPr algn="ctr"/>
+          </a:p>
+        </p:txBody>
+      </p:sp>
+      <p:sp>
+        <p:nvSpPr>
+          <p:cNvPr id="4" name="Rectangle 3"/>
+          <p:cNvSpPr/>
+          <p:nvPr/>
+        </p:nvSpPr>
+        <p:spPr>
+          <a:xfrm>
+            <a:off x="4114800" y="0"/>
+            <a:ext cx="137160" cy="6858000"/>
+          </a:xfrm>
+          <a:prstGeom prst="rect">
+            <a:avLst/>
+          </a:prstGeom>
+          <a:solidFill>
+            <a:srgbClr val="00A0B0"/>
+          </a:solidFill>
+          <a:ln>
+            <a:noFill/>
+          </a:ln>
+        </p:spPr>
+        <p:style>
+          <a:lnRef idx="1">
+            <a:schemeClr val="accent1"/>
+          </a:lnRef>
+          <a:fillRef idx="3">
+            <a:schemeClr val="accent1"/>
+          </a:fillRef>
+          <a:effectRef idx="2">
+            <a:schemeClr val="accent1"/>
+          </a:effectRef>
+          <a:fontRef idx="minor">
+            <a:schemeClr val="lt1"/>
+          </a:fontRef>
+        </p:style>
+        <p:txBody>
+          <a:bodyPr rtlCol="0" anchor="ctr"/>
+          <a:lstStyle/>
+          <a:p>
+            <a:pPr algn="ctr"/>
+          </a:p>
+        </p:txBody>
+      </p:sp>
+      <p:sp>
+        <p:nvSpPr>
+          <p:cNvPr id="5" name="TextBox 4"/>
+          <p:cNvSpPr txBox="1"/>
+          <p:nvPr/>
+        </p:nvSpPr>
+        <p:spPr>
+          <a:xfrm>
+            <a:off x="274320" y="2103120"/>
+            <a:ext cx="3657600" cy="2286000"/>
+          </a:xfrm>
+          <a:prstGeom prst="rect">
+            <a:avLst/>
+          </a:prstGeom>
+          <a:noFill/>
+        </p:spPr>
+        <p:txBody>
+          <a:bodyPr wrap="square" lIns="45720" rIns="45720" tIns="18288" bIns="18288" anchor="t">
+            <a:spAutoFit/>
+          </a:bodyPr>
+          <a:lstStyle/>
+          <a:p>
+            <a:pPr algn="ctr"/>
+            <a:r>
+              <a:rPr sz="17000" b="1" i="0">
+                <a:solidFill>
+                  <a:srgbClr val="00A0B0"/>
+                </a:solidFill>
+                <a:latin typeface="Calibri"/>
+              </a:rPr>
+              <a:t>02</a:t>
+            </a:r>
+          </a:p>
+        </p:txBody>
+      </p:sp>
+      <p:sp>
+        <p:nvSpPr>
+          <p:cNvPr id="6" name="TextBox 5"/>
+          <p:cNvSpPr txBox="1"/>
+          <p:nvPr/>
+        </p:nvSpPr>
+        <p:spPr>
+          <a:xfrm>
+            <a:off x="274320" y="4572000"/>
+            <a:ext cx="3657600" cy="457200"/>
+          </a:xfrm>
+          <a:prstGeom prst="rect">
+            <a:avLst/>
+          </a:prstGeom>
+          <a:noFill/>
+        </p:spPr>
+        <p:txBody>
+          <a:bodyPr wrap="square" lIns="45720" rIns="45720" tIns="18288" bIns="18288" anchor="t">
+            <a:spAutoFit/>
+          </a:bodyPr>
+          <a:lstStyle/>
+          <a:p>
+            <a:pPr algn="ctr"/>
+            <a:r>
+              <a:rPr sz="2000" b="1" i="0">
+                <a:solidFill>
+                  <a:srgbClr val="6FD8E0"/>
+                </a:solidFill>
+                <a:latin typeface="Calibri"/>
+              </a:rPr>
+              <a:t>PARTE</a:t>
+            </a:r>
+          </a:p>
+        </p:txBody>
+      </p:sp>
+      <p:sp>
+        <p:nvSpPr>
+          <p:cNvPr id="7" name="TextBox 6"/>
+          <p:cNvSpPr txBox="1"/>
+          <p:nvPr/>
+        </p:nvSpPr>
+        <p:spPr>
+          <a:xfrm>
+            <a:off x="4572000" y="2286000"/>
+            <a:ext cx="7315200" cy="1645920"/>
+          </a:xfrm>
+          <a:prstGeom prst="rect">
+            <a:avLst/>
+          </a:prstGeom>
+          <a:noFill/>
+        </p:spPr>
+        <p:txBody>
+          <a:bodyPr wrap="square" lIns="45720" rIns="45720" tIns="18288" bIns="18288" anchor="t">
+            <a:spAutoFit/>
+          </a:bodyPr>
+          <a:lstStyle/>
+          <a:p>
+            <a:pPr algn="l"/>
+            <a:r>
+              <a:rPr sz="4400" b="1" i="0">
+                <a:solidFill>
+                  <a:srgbClr val="0F2D52"/>
+                </a:solidFill>
+                <a:latin typeface="Calibri"/>
+              </a:rPr>
+              <a:t>Password hashing</a:t>
+            </a:r>
+          </a:p>
+        </p:txBody>
+      </p:sp>
+      <p:sp>
+        <p:nvSpPr>
+          <p:cNvPr id="8" name="TextBox 7"/>
+          <p:cNvSpPr txBox="1"/>
+          <p:nvPr/>
+        </p:nvSpPr>
+        <p:spPr>
+          <a:xfrm>
+            <a:off x="4572000" y="3931920"/>
+            <a:ext cx="7315200" cy="1828800"/>
+          </a:xfrm>
+          <a:prstGeom prst="rect">
+            <a:avLst/>
+          </a:prstGeom>
+          <a:noFill/>
+        </p:spPr>
+        <p:txBody>
+          <a:bodyPr wrap="square" lIns="45720" rIns="45720" tIns="18288" bIns="18288" anchor="t">
+            <a:spAutoFit/>
+          </a:bodyPr>
+          <a:lstStyle/>
+          <a:p>
+            <a:pPr algn="l"/>
+            <a:r>
+              <a:rPr sz="1800" b="0" i="1">
+                <a:solidFill>
+                  <a:srgbClr val="6B7280"/>
+                </a:solidFill>
+                <a:latin typeface="Calibri"/>
+              </a:rPr>
+              <a:t>Encoding ≠ Hashing ≠ Encryption — la differenza fondamentale</a:t>
+            </a:r>
+          </a:p>
+        </p:txBody>
+      </p:sp>
+      <p:cxnSp>
+        <p:nvCxnSpPr>
+          <p:cNvPr id="9" name="Connector 8"/>
+          <p:cNvCxnSpPr/>
+          <p:nvPr/>
+        </p:nvCxnSpPr>
+        <p:spPr>
+          <a:xfrm>
+            <a:off x="457200" y="6446520"/>
+            <a:ext cx="11274552" cy="0"/>
+          </a:xfrm>
+          <a:prstGeom prst="line">
+            <a:avLst/>
+          </a:prstGeom>
+          <a:ln w="19050">
+            <a:solidFill>
+              <a:srgbClr val="00A0B0"/>
+            </a:solidFill>
+          </a:ln>
+        </p:spPr>
+        <p:style>
+          <a:lnRef idx="2">
+            <a:schemeClr val="accent1"/>
+          </a:lnRef>
+          <a:fillRef idx="0">
+            <a:schemeClr val="accent1"/>
+          </a:fillRef>
+          <a:effectRef idx="1">
+            <a:schemeClr val="accent1"/>
+          </a:effectRef>
+          <a:fontRef idx="minor">
+            <a:schemeClr val="tx1"/>
+          </a:fontRef>
+        </p:style>
+      </p:cxnSp>
+      <p:sp>
+        <p:nvSpPr>
+          <p:cNvPr id="10" name="TextBox 9"/>
+          <p:cNvSpPr txBox="1"/>
+          <p:nvPr/>
+        </p:nvSpPr>
+        <p:spPr>
+          <a:xfrm>
+            <a:off x="457200" y="6473952"/>
+            <a:ext cx="7315200" cy="292608"/>
+          </a:xfrm>
+          <a:prstGeom prst="rect">
+            <a:avLst/>
+          </a:prstGeom>
+          <a:noFill/>
+        </p:spPr>
+        <p:txBody>
+          <a:bodyPr wrap="square" lIns="45720" rIns="45720" tIns="18288" bIns="18288" anchor="t">
+            <a:spAutoFit/>
+          </a:bodyPr>
+          <a:lstStyle/>
+          <a:p>
+            <a:pPr algn="l"/>
+            <a:r>
+              <a:rPr sz="1000" b="0" i="0">
+                <a:solidFill>
+                  <a:srgbClr val="6B7280"/>
+                </a:solidFill>
+                <a:latin typeface="Calibri"/>
+              </a:rPr>
+              <a:t>Secure Coding · Corso IFTS STEM · A. Manneschi · 2024/2025</a:t>
+            </a:r>
+          </a:p>
+        </p:txBody>
+      </p:sp>
+      <p:sp>
+        <p:nvSpPr>
+          <p:cNvPr id="11" name="TextBox 10"/>
+          <p:cNvSpPr txBox="1"/>
+          <p:nvPr/>
+        </p:nvSpPr>
+        <p:spPr>
+          <a:xfrm>
+            <a:off x="10515600" y="6473952"/>
+            <a:ext cx="1188720" cy="292608"/>
+          </a:xfrm>
+          <a:prstGeom prst="rect">
+            <a:avLst/>
+          </a:prstGeom>
+          <a:noFill/>
+        </p:spPr>
+        <p:txBody>
+          <a:bodyPr wrap="square" lIns="45720" rIns="45720" tIns="18288" bIns="18288" anchor="t">
+            <a:spAutoFit/>
+          </a:bodyPr>
+          <a:lstStyle/>
+          <a:p>
+            <a:pPr algn="r"/>
+            <a:r>
+              <a:rPr sz="1000" b="1" i="0">
+                <a:solidFill>
+                  <a:srgbClr val="6B7280"/>
+                </a:solidFill>
+                <a:latin typeface="Calibri"/>
+              </a:rPr>
+              <a:t>L4  ·  7/14</a:t>
+            </a:r>
+          </a:p>
+        </p:txBody>
+      </p:sp>
+    </p:spTree>
+  </p:cSld>
+  <p:clrMapOvr>
+    <a:masterClrMapping/>
+  </p:clrMapOvr>
+</p:sld>
+</file>
+
+<file path=ppt/slides/slide8.xml><?xml version="1.0" encoding="utf-8"?>
+<p:sld xmlns:a="http://schemas.openxmlformats.org/drawingml/2006/main" xmlns:p="http://schemas.openxmlformats.org/presentationml/2006/main" xmlns:r="http://schemas.openxmlformats.org/officeDocument/2006/relationships">
+  <p:cSld>
+    <p:spTree>
+      <p:nvGrpSpPr>
+        <p:cNvPr id="1" name=""/>
+        <p:cNvGrpSpPr/>
+        <p:nvPr/>
+      </p:nvGrpSpPr>
+      <p:grpSpPr/>
+      <p:sp>
+        <p:nvSpPr>
+          <p:cNvPr id="2" name="Rectangle 1"/>
+          <p:cNvSpPr/>
+          <p:nvPr/>
+        </p:nvSpPr>
+        <p:spPr>
+          <a:xfrm>
+            <a:off x="0" y="0"/>
+            <a:ext cx="12191695" cy="777240"/>
+          </a:xfrm>
+          <a:prstGeom prst="rect">
+            <a:avLst/>
+          </a:prstGeom>
+          <a:solidFill>
+            <a:srgbClr val="0F2D52"/>
+          </a:solidFill>
+          <a:ln>
+            <a:noFill/>
+          </a:ln>
+        </p:spPr>
+        <p:style>
+          <a:lnRef idx="1">
+            <a:schemeClr val="accent1"/>
+          </a:lnRef>
+          <a:fillRef idx="3">
+            <a:schemeClr val="accent1"/>
+          </a:fillRef>
+          <a:effectRef idx="2">
+            <a:schemeClr val="accent1"/>
+          </a:effectRef>
+          <a:fontRef idx="minor">
+            <a:schemeClr val="lt1"/>
+          </a:fontRef>
+        </p:style>
+        <p:txBody>
+          <a:bodyPr rtlCol="0" anchor="ctr"/>
+          <a:lstStyle/>
+          <a:p>
+            <a:pPr algn="ctr"/>
+          </a:p>
+        </p:txBody>
+      </p:sp>
+      <p:sp>
+        <p:nvSpPr>
+          <p:cNvPr id="3" name="TextBox 2"/>
+          <p:cNvSpPr txBox="1"/>
+          <p:nvPr/>
+        </p:nvSpPr>
+        <p:spPr>
+          <a:xfrm>
+            <a:off x="457200" y="164592"/>
+            <a:ext cx="10972800" cy="502920"/>
+          </a:xfrm>
+          <a:prstGeom prst="rect">
+            <a:avLst/>
+          </a:prstGeom>
+          <a:noFill/>
+        </p:spPr>
+        <p:txBody>
+          <a:bodyPr wrap="square" lIns="45720" rIns="45720" tIns="18288" bIns="18288" anchor="ctr">
+            <a:spAutoFit/>
+          </a:bodyPr>
+          <a:lstStyle/>
+          <a:p>
+            <a:pPr algn="l"/>
+            <a:r>
+              <a:rPr sz="2400" b="1" i="0">
+                <a:solidFill>
+                  <a:srgbClr val="FFFFFF"/>
+                </a:solidFill>
+                <a:latin typeface="Calibri"/>
+              </a:rPr>
+              <a:t>Tre operazioni DIVERSE</a:t>
+            </a:r>
+          </a:p>
+        </p:txBody>
+      </p:sp>
+      <p:sp>
+        <p:nvSpPr>
+          <p:cNvPr id="4" name="Rounded Rectangle 3"/>
+          <p:cNvSpPr/>
+          <p:nvPr/>
+        </p:nvSpPr>
+        <p:spPr>
+          <a:xfrm>
+            <a:off x="457200" y="1051560"/>
+            <a:ext cx="5486400" cy="640080"/>
+          </a:xfrm>
+          <a:prstGeom prst="roundRect">
+            <a:avLst>
+              <a:gd name="adj" fmla="val 8000"/>
+            </a:avLst>
+          </a:prstGeom>
+          <a:solidFill>
+            <a:srgbClr val="E63946"/>
+          </a:solidFill>
+          <a:ln>
+            <a:noFill/>
+          </a:ln>
+        </p:spPr>
+        <p:style>
+          <a:lnRef idx="1">
+            <a:schemeClr val="accent1"/>
+          </a:lnRef>
+          <a:fillRef idx="3">
+            <a:schemeClr val="accent1"/>
+          </a:fillRef>
+          <a:effectRef idx="2">
+            <a:schemeClr val="accent1"/>
+          </a:effectRef>
+          <a:fontRef idx="minor">
+            <a:schemeClr val="lt1"/>
+          </a:fontRef>
+        </p:style>
+        <p:txBody>
+          <a:bodyPr rtlCol="0" anchor="ctr"/>
+          <a:lstStyle/>
+          <a:p>
+            <a:pPr algn="ctr"/>
+          </a:p>
+        </p:txBody>
+      </p:sp>
+      <p:sp>
+        <p:nvSpPr>
+          <p:cNvPr id="5" name="TextBox 4"/>
+          <p:cNvSpPr txBox="1"/>
+          <p:nvPr/>
+        </p:nvSpPr>
+        <p:spPr>
+          <a:xfrm>
+            <a:off x="457200" y="1051560"/>
+            <a:ext cx="5486400" cy="640080"/>
+          </a:xfrm>
+          <a:prstGeom prst="rect">
+            <a:avLst/>
+          </a:prstGeom>
+          <a:noFill/>
+        </p:spPr>
+        <p:txBody>
+          <a:bodyPr wrap="square" lIns="45720" rIns="45720" tIns="18288" bIns="18288" anchor="ctr">
+            <a:spAutoFit/>
+          </a:bodyPr>
+          <a:lstStyle/>
+          <a:p>
+            <a:pPr algn="ctr"/>
+            <a:r>
+              <a:rPr sz="1800" b="1" i="0">
+                <a:solidFill>
+                  <a:srgbClr val="FFFFFF"/>
+                </a:solidFill>
+                <a:latin typeface="Calibri"/>
+              </a:rPr>
+              <a:t>❌ NO per password</a:t>
+            </a:r>
+          </a:p>
+        </p:txBody>
+      </p:sp>
+      <p:sp>
+        <p:nvSpPr>
+          <p:cNvPr id="6" name="Rounded Rectangle 5"/>
+          <p:cNvSpPr/>
+          <p:nvPr/>
+        </p:nvSpPr>
+        <p:spPr>
+          <a:xfrm>
+            <a:off x="457200" y="1737360"/>
+            <a:ext cx="5486400" cy="4572000"/>
+          </a:xfrm>
+          <a:prstGeom prst="roundRect">
+            <a:avLst>
+              <a:gd name="adj" fmla="val 8000"/>
+            </a:avLst>
+          </a:prstGeom>
+          <a:solidFill>
+            <a:srgbClr val="FBFBFD"/>
+          </a:solidFill>
+          <a:ln w="25400">
+            <a:solidFill>
+              <a:srgbClr val="E63946"/>
+            </a:solidFill>
+          </a:ln>
+        </p:spPr>
+        <p:style>
+          <a:lnRef idx="1">
+            <a:schemeClr val="accent1"/>
+          </a:lnRef>
+          <a:fillRef idx="3">
+            <a:schemeClr val="accent1"/>
+          </a:fillRef>
+          <a:effectRef idx="2">
+            <a:schemeClr val="accent1"/>
+          </a:effectRef>
+          <a:fontRef idx="minor">
+            <a:schemeClr val="lt1"/>
+          </a:fontRef>
+        </p:style>
+        <p:txBody>
+          <a:bodyPr rtlCol="0" anchor="ctr"/>
+          <a:lstStyle/>
+          <a:p>
+            <a:pPr algn="ctr"/>
+          </a:p>
+        </p:txBody>
+      </p:sp>
+      <p:sp>
+        <p:nvSpPr>
+          <p:cNvPr id="7" name="TextBox 6"/>
+          <p:cNvSpPr txBox="1"/>
+          <p:nvPr/>
+        </p:nvSpPr>
+        <p:spPr>
+          <a:xfrm>
+            <a:off x="640080" y="1874519"/>
+            <a:ext cx="5120640" cy="4572000"/>
+          </a:xfrm>
+          <a:prstGeom prst="rect">
+            <a:avLst/>
+          </a:prstGeom>
+          <a:noFill/>
+        </p:spPr>
+        <p:txBody>
+          <a:bodyPr wrap="square">
+            <a:spAutoFit/>
+          </a:bodyPr>
+          <a:lstStyle/>
+          <a:p>
+            <a:pPr>
+              <a:lnSpc>
+                <a:spcPct val="150000"/>
+              </a:lnSpc>
+              <a:spcAft>
+                <a:spcPts val="400"/>
+              </a:spcAft>
+            </a:pPr>
+            <a:r>
+              <a:rPr sz="1500" b="1">
+                <a:solidFill>
+                  <a:srgbClr val="E63946"/>
+                </a:solidFill>
+                <a:latin typeface="Calibri"/>
+              </a:rPr>
+              <a:t>▸  </a:t>
+            </a:r>
+            <a:r>
+              <a:rPr sz="1500">
+                <a:solidFill>
+                  <a:srgbClr val="1A1A2E"/>
+                </a:solidFill>
+                <a:latin typeface="Calibri"/>
+              </a:rPr>
+              <a:t>ENCODING (Base64)</a:t>
+            </a:r>
+          </a:p>
+          <a:p>
+            <a:pPr>
+              <a:lnSpc>
+                <a:spcPct val="150000"/>
+              </a:lnSpc>
+              <a:spcAft>
+                <a:spcPts val="400"/>
+              </a:spcAft>
+            </a:pPr>
+            <a:r>
+              <a:rPr sz="1500" b="1">
+                <a:solidFill>
+                  <a:srgbClr val="E63946"/>
+                </a:solidFill>
+                <a:latin typeface="Calibri"/>
+              </a:rPr>
+              <a:t>▸  </a:t>
+            </a:r>
+            <a:r>
+              <a:rPr sz="1500">
+                <a:solidFill>
+                  <a:srgbClr val="1A1A2E"/>
+                </a:solidFill>
+                <a:latin typeface="Calibri"/>
+              </a:rPr>
+              <a:t>  Reversibile, banale</a:t>
+            </a:r>
+          </a:p>
+          <a:p>
+            <a:pPr>
+              <a:lnSpc>
+                <a:spcPct val="150000"/>
+              </a:lnSpc>
+              <a:spcAft>
+                <a:spcPts val="400"/>
+              </a:spcAft>
+            </a:pPr>
+            <a:r>
+              <a:rPr sz="1500" b="1">
+                <a:solidFill>
+                  <a:srgbClr val="E63946"/>
+                </a:solidFill>
+                <a:latin typeface="Calibri"/>
+              </a:rPr>
+              <a:t>▸  </a:t>
+            </a:r>
+            <a:r>
+              <a:rPr sz="1500">
+                <a:solidFill>
+                  <a:srgbClr val="1A1A2E"/>
+                </a:solidFill>
+                <a:latin typeface="Calibri"/>
+              </a:rPr>
+              <a:t>  Serve per trasporto</a:t>
+            </a:r>
+          </a:p>
+          <a:p>
+            <a:pPr>
+              <a:lnSpc>
+                <a:spcPct val="150000"/>
+              </a:lnSpc>
+              <a:spcAft>
+                <a:spcPts val="400"/>
+              </a:spcAft>
+            </a:pPr>
+            <a:r>
+              <a:rPr sz="1500" b="1">
+                <a:solidFill>
+                  <a:srgbClr val="E63946"/>
+                </a:solidFill>
+                <a:latin typeface="Calibri"/>
+              </a:rPr>
+              <a:t>▸  </a:t>
+            </a:r>
+            <a:r>
+              <a:rPr sz="1500">
+                <a:solidFill>
+                  <a:srgbClr val="1A1A2E"/>
+                </a:solidFill>
+                <a:latin typeface="Calibri"/>
+              </a:rPr>
+              <a:t/>
+            </a:r>
+          </a:p>
+          <a:p>
+            <a:pPr>
+              <a:lnSpc>
+                <a:spcPct val="150000"/>
+              </a:lnSpc>
+              <a:spcAft>
+                <a:spcPts val="400"/>
+              </a:spcAft>
+            </a:pPr>
+            <a:r>
+              <a:rPr sz="1500" b="1">
+                <a:solidFill>
+                  <a:srgbClr val="E63946"/>
+                </a:solidFill>
+                <a:latin typeface="Calibri"/>
+              </a:rPr>
+              <a:t>▸  </a:t>
+            </a:r>
+            <a:r>
+              <a:rPr sz="1500">
+                <a:solidFill>
+                  <a:srgbClr val="1A1A2E"/>
+                </a:solidFill>
+                <a:latin typeface="Calibri"/>
+              </a:rPr>
+              <a:t>ENCRYPTION (AES)</a:t>
+            </a:r>
+          </a:p>
+          <a:p>
+            <a:pPr>
+              <a:lnSpc>
+                <a:spcPct val="150000"/>
+              </a:lnSpc>
+              <a:spcAft>
+                <a:spcPts val="400"/>
+              </a:spcAft>
+            </a:pPr>
+            <a:r>
+              <a:rPr sz="1500" b="1">
+                <a:solidFill>
+                  <a:srgbClr val="E63946"/>
+                </a:solidFill>
+                <a:latin typeface="Calibri"/>
+              </a:rPr>
+              <a:t>▸  </a:t>
+            </a:r>
+            <a:r>
+              <a:rPr sz="1500">
+                <a:solidFill>
+                  <a:srgbClr val="1A1A2E"/>
+                </a:solidFill>
+                <a:latin typeface="Calibri"/>
+              </a:rPr>
+              <a:t>  Reversibile con chiave</a:t>
+            </a:r>
+          </a:p>
+          <a:p>
+            <a:pPr>
+              <a:lnSpc>
+                <a:spcPct val="150000"/>
+              </a:lnSpc>
+              <a:spcAft>
+                <a:spcPts val="400"/>
+              </a:spcAft>
+            </a:pPr>
+            <a:r>
+              <a:rPr sz="1500" b="1">
+                <a:solidFill>
+                  <a:srgbClr val="E63946"/>
+                </a:solidFill>
+                <a:latin typeface="Calibri"/>
+              </a:rPr>
+              <a:t>▸  </a:t>
+            </a:r>
+            <a:r>
+              <a:rPr sz="1500">
+                <a:solidFill>
+                  <a:srgbClr val="1A1A2E"/>
+                </a:solidFill>
+                <a:latin typeface="Calibri"/>
+              </a:rPr>
+              <a:t>  Se rubano chiave: disastro</a:t>
+            </a:r>
+          </a:p>
+        </p:txBody>
+      </p:sp>
+      <p:sp>
+        <p:nvSpPr>
+          <p:cNvPr id="8" name="Rounded Rectangle 7"/>
+          <p:cNvSpPr/>
+          <p:nvPr/>
+        </p:nvSpPr>
+        <p:spPr>
+          <a:xfrm>
+            <a:off x="6217920" y="1051560"/>
+            <a:ext cx="5486400" cy="640080"/>
+          </a:xfrm>
+          <a:prstGeom prst="roundRect">
+            <a:avLst>
+              <a:gd name="adj" fmla="val 8000"/>
+            </a:avLst>
+          </a:prstGeom>
+          <a:solidFill>
+            <a:srgbClr val="06A77D"/>
+          </a:solidFill>
+          <a:ln>
+            <a:noFill/>
+          </a:ln>
+        </p:spPr>
+        <p:style>
+          <a:lnRef idx="1">
+            <a:schemeClr val="accent1"/>
+          </a:lnRef>
+          <a:fillRef idx="3">
+            <a:schemeClr val="accent1"/>
+          </a:fillRef>
+          <a:effectRef idx="2">
+            <a:schemeClr val="accent1"/>
+          </a:effectRef>
+          <a:fontRef idx="minor">
+            <a:schemeClr val="lt1"/>
+          </a:fontRef>
+        </p:style>
+        <p:txBody>
+          <a:bodyPr rtlCol="0" anchor="ctr"/>
+          <a:lstStyle/>
+          <a:p>
+            <a:pPr algn="ctr"/>
+          </a:p>
+        </p:txBody>
+      </p:sp>
+      <p:sp>
+        <p:nvSpPr>
+          <p:cNvPr id="9" name="TextBox 8"/>
+          <p:cNvSpPr txBox="1"/>
+          <p:nvPr/>
+        </p:nvSpPr>
+        <p:spPr>
+          <a:xfrm>
+            <a:off x="6217920" y="1051560"/>
+            <a:ext cx="5486400" cy="640080"/>
+          </a:xfrm>
+          <a:prstGeom prst="rect">
+            <a:avLst/>
+          </a:prstGeom>
+          <a:noFill/>
+        </p:spPr>
+        <p:txBody>
+          <a:bodyPr wrap="square" lIns="45720" rIns="45720" tIns="18288" bIns="18288" anchor="ctr">
+            <a:spAutoFit/>
+          </a:bodyPr>
+          <a:lstStyle/>
+          <a:p>
+            <a:pPr algn="ctr"/>
+            <a:r>
+              <a:rPr sz="1800" b="1" i="0">
+                <a:solidFill>
+                  <a:srgbClr val="FFFFFF"/>
+                </a:solidFill>
+                <a:latin typeface="Calibri"/>
+              </a:rPr>
+              <a:t>✅ SÌ per password</a:t>
+            </a:r>
+          </a:p>
+        </p:txBody>
+      </p:sp>
+      <p:sp>
+        <p:nvSpPr>
+          <p:cNvPr id="10" name="Rounded Rectangle 9"/>
+          <p:cNvSpPr/>
+          <p:nvPr/>
+        </p:nvSpPr>
+        <p:spPr>
+          <a:xfrm>
+            <a:off x="6217920" y="1737360"/>
+            <a:ext cx="5486400" cy="4572000"/>
+          </a:xfrm>
+          <a:prstGeom prst="roundRect">
+            <a:avLst>
+              <a:gd name="adj" fmla="val 8000"/>
+            </a:avLst>
+          </a:prstGeom>
+          <a:solidFill>
+            <a:srgbClr val="FBFBFD"/>
+          </a:solidFill>
+          <a:ln w="25400">
+            <a:solidFill>
+              <a:srgbClr val="06A77D"/>
+            </a:solidFill>
+          </a:ln>
+        </p:spPr>
+        <p:style>
+          <a:lnRef idx="1">
+            <a:schemeClr val="accent1"/>
+          </a:lnRef>
+          <a:fillRef idx="3">
+            <a:schemeClr val="accent1"/>
+          </a:fillRef>
+          <a:effectRef idx="2">
+            <a:schemeClr val="accent1"/>
+          </a:effectRef>
+          <a:fontRef idx="minor">
+            <a:schemeClr val="lt1"/>
+          </a:fontRef>
+        </p:style>
+        <p:txBody>
+          <a:bodyPr rtlCol="0" anchor="ctr"/>
+          <a:lstStyle/>
+          <a:p>
+            <a:pPr algn="ctr"/>
+          </a:p>
+        </p:txBody>
+      </p:sp>
+      <p:sp>
+        <p:nvSpPr>
+          <p:cNvPr id="11" name="TextBox 10"/>
+          <p:cNvSpPr txBox="1"/>
+          <p:nvPr/>
+        </p:nvSpPr>
+        <p:spPr>
+          <a:xfrm>
+            <a:off x="6400800" y="1874519"/>
+            <a:ext cx="5120640" cy="4572000"/>
+          </a:xfrm>
+          <a:prstGeom prst="rect">
+            <a:avLst/>
+          </a:prstGeom>
+          <a:noFill/>
+        </p:spPr>
+        <p:txBody>
+          <a:bodyPr wrap="square">
+            <a:spAutoFit/>
+          </a:bodyPr>
+          <a:lstStyle/>
+          <a:p>
+            <a:pPr>
+              <a:lnSpc>
+                <a:spcPct val="150000"/>
+              </a:lnSpc>
+              <a:spcAft>
+                <a:spcPts val="400"/>
+              </a:spcAft>
+            </a:pPr>
+            <a:r>
+              <a:rPr sz="1500" b="1">
+                <a:solidFill>
+                  <a:srgbClr val="06A77D"/>
+                </a:solidFill>
+                <a:latin typeface="Calibri"/>
+              </a:rPr>
+              <a:t>▸  </a:t>
+            </a:r>
+            <a:r>
+              <a:rPr sz="1500">
+                <a:solidFill>
+                  <a:srgbClr val="1A1A2E"/>
+                </a:solidFill>
+                <a:latin typeface="Calibri"/>
+              </a:rPr>
+              <a:t>HASHING (bcrypt, Argon2id)</a:t>
+            </a:r>
+          </a:p>
+          <a:p>
+            <a:pPr>
+              <a:lnSpc>
+                <a:spcPct val="150000"/>
+              </a:lnSpc>
+              <a:spcAft>
+                <a:spcPts val="400"/>
+              </a:spcAft>
+            </a:pPr>
+            <a:r>
+              <a:rPr sz="1500" b="1">
+                <a:solidFill>
+                  <a:srgbClr val="06A77D"/>
+                </a:solidFill>
+                <a:latin typeface="Calibri"/>
+              </a:rPr>
+              <a:t>▸  </a:t>
+            </a:r>
+            <a:r>
+              <a:rPr sz="1500">
+                <a:solidFill>
+                  <a:srgbClr val="1A1A2E"/>
+                </a:solidFill>
+                <a:latin typeface="Calibri"/>
+              </a:rPr>
+              <a:t>  NON reversibile</a:t>
+            </a:r>
+          </a:p>
+          <a:p>
+            <a:pPr>
+              <a:lnSpc>
+                <a:spcPct val="150000"/>
+              </a:lnSpc>
+              <a:spcAft>
+                <a:spcPts val="400"/>
+              </a:spcAft>
+            </a:pPr>
+            <a:r>
+              <a:rPr sz="1500" b="1">
+                <a:solidFill>
+                  <a:srgbClr val="06A77D"/>
+                </a:solidFill>
+                <a:latin typeface="Calibri"/>
+              </a:rPr>
+              <a:t>▸  </a:t>
+            </a:r>
+            <a:r>
+              <a:rPr sz="1500">
+                <a:solidFill>
+                  <a:srgbClr val="1A1A2E"/>
+                </a:solidFill>
+                <a:latin typeface="Calibri"/>
+              </a:rPr>
+              <a:t>  Salt automatico</a:t>
+            </a:r>
+          </a:p>
+          <a:p>
+            <a:pPr>
+              <a:lnSpc>
+                <a:spcPct val="150000"/>
+              </a:lnSpc>
+              <a:spcAft>
+                <a:spcPts val="400"/>
+              </a:spcAft>
+            </a:pPr>
+            <a:r>
+              <a:rPr sz="1500" b="1">
+                <a:solidFill>
+                  <a:srgbClr val="06A77D"/>
+                </a:solidFill>
+                <a:latin typeface="Calibri"/>
+              </a:rPr>
+              <a:t>▸  </a:t>
+            </a:r>
+            <a:r>
+              <a:rPr sz="1500">
+                <a:solidFill>
+                  <a:srgbClr val="1A1A2E"/>
+                </a:solidFill>
+                <a:latin typeface="Calibri"/>
+              </a:rPr>
+              <a:t>  Work factor lento</a:t>
+            </a:r>
+          </a:p>
+          <a:p>
+            <a:pPr>
+              <a:lnSpc>
+                <a:spcPct val="150000"/>
+              </a:lnSpc>
+              <a:spcAft>
+                <a:spcPts val="400"/>
+              </a:spcAft>
+            </a:pPr>
+            <a:r>
+              <a:rPr sz="1500" b="1">
+                <a:solidFill>
+                  <a:srgbClr val="06A77D"/>
+                </a:solidFill>
+                <a:latin typeface="Calibri"/>
+              </a:rPr>
+              <a:t>▸  </a:t>
+            </a:r>
+            <a:r>
+              <a:rPr sz="1500">
+                <a:solidFill>
+                  <a:srgbClr val="1A1A2E"/>
+                </a:solidFill>
+                <a:latin typeface="Calibri"/>
+              </a:rPr>
+              <a:t/>
+            </a:r>
+          </a:p>
+          <a:p>
+            <a:pPr>
+              <a:lnSpc>
+                <a:spcPct val="150000"/>
+              </a:lnSpc>
+              <a:spcAft>
+                <a:spcPts val="400"/>
+              </a:spcAft>
+            </a:pPr>
+            <a:r>
+              <a:rPr sz="1500" b="1">
+                <a:solidFill>
+                  <a:srgbClr val="06A77D"/>
+                </a:solidFill>
+                <a:latin typeface="Calibri"/>
+              </a:rPr>
+              <a:t>▸  </a:t>
+            </a:r>
+            <a:r>
+              <a:rPr sz="1500">
+                <a:solidFill>
+                  <a:srgbClr val="1A1A2E"/>
+                </a:solidFill>
+                <a:latin typeface="Calibri"/>
+              </a:rPr>
+              <a:t>  bcrypt cost=12 ≈ 250ms</a:t>
+            </a:r>
+          </a:p>
+          <a:p>
+            <a:pPr>
+              <a:lnSpc>
+                <a:spcPct val="150000"/>
+              </a:lnSpc>
+              <a:spcAft>
+                <a:spcPts val="400"/>
+              </a:spcAft>
+            </a:pPr>
+            <a:r>
+              <a:rPr sz="1500" b="1">
+                <a:solidFill>
+                  <a:srgbClr val="06A77D"/>
+                </a:solidFill>
+                <a:latin typeface="Calibri"/>
+              </a:rPr>
+              <a:t>▸  </a:t>
+            </a:r>
+            <a:r>
+              <a:rPr sz="1500">
+                <a:solidFill>
+                  <a:srgbClr val="1A1A2E"/>
+                </a:solidFill>
+                <a:latin typeface="Calibri"/>
+              </a:rPr>
+              <a:t>  Utente: impercettibile</a:t>
+            </a:r>
+          </a:p>
+          <a:p>
+            <a:pPr>
+              <a:lnSpc>
+                <a:spcPct val="150000"/>
+              </a:lnSpc>
+              <a:spcAft>
+                <a:spcPts val="400"/>
+              </a:spcAft>
+            </a:pPr>
+            <a:r>
+              <a:rPr sz="1500" b="1">
+                <a:solidFill>
+                  <a:srgbClr val="06A77D"/>
+                </a:solidFill>
+                <a:latin typeface="Calibri"/>
+              </a:rPr>
+              <a:t>▸  </a:t>
+            </a:r>
+            <a:r>
+              <a:rPr sz="1500">
+                <a:solidFill>
+                  <a:srgbClr val="1A1A2E"/>
+                </a:solidFill>
+                <a:latin typeface="Calibri"/>
+              </a:rPr>
+              <a:t>  Attaccante: devastante</a:t>
+            </a:r>
+          </a:p>
+        </p:txBody>
+      </p:sp>
+      <p:cxnSp>
+        <p:nvCxnSpPr>
+          <p:cNvPr id="12" name="Connector 11"/>
+          <p:cNvCxnSpPr/>
+          <p:nvPr/>
+        </p:nvCxnSpPr>
+        <p:spPr>
+          <a:xfrm>
+            <a:off x="457200" y="6446520"/>
+            <a:ext cx="11274552" cy="0"/>
+          </a:xfrm>
+          <a:prstGeom prst="line">
+            <a:avLst/>
+          </a:prstGeom>
+          <a:ln w="19050">
+            <a:solidFill>
+              <a:srgbClr val="00A0B0"/>
+            </a:solidFill>
+          </a:ln>
+        </p:spPr>
+        <p:style>
+          <a:lnRef idx="2">
+            <a:schemeClr val="accent1"/>
+          </a:lnRef>
+          <a:fillRef idx="0">
+            <a:schemeClr val="accent1"/>
+          </a:fillRef>
+          <a:effectRef idx="1">
+            <a:schemeClr val="accent1"/>
+          </a:effectRef>
+          <a:fontRef idx="minor">
+            <a:schemeClr val="tx1"/>
+          </a:fontRef>
+        </p:style>
+      </p:cxnSp>
+      <p:sp>
+        <p:nvSpPr>
+          <p:cNvPr id="13" name="TextBox 12"/>
+          <p:cNvSpPr txBox="1"/>
+          <p:nvPr/>
+        </p:nvSpPr>
+        <p:spPr>
+          <a:xfrm>
+            <a:off x="457200" y="6473952"/>
+            <a:ext cx="7315200" cy="292608"/>
+          </a:xfrm>
+          <a:prstGeom prst="rect">
+            <a:avLst/>
+          </a:prstGeom>
+          <a:noFill/>
+        </p:spPr>
+        <p:txBody>
+          <a:bodyPr wrap="square" lIns="45720" rIns="45720" tIns="18288" bIns="18288" anchor="t">
+            <a:spAutoFit/>
+          </a:bodyPr>
+          <a:lstStyle/>
+          <a:p>
+            <a:pPr algn="l"/>
+            <a:r>
+              <a:rPr sz="1000" b="0" i="0">
+                <a:solidFill>
+                  <a:srgbClr val="6B7280"/>
+                </a:solidFill>
+                <a:latin typeface="Calibri"/>
+              </a:rPr>
+              <a:t>Secure Coding · Corso IFTS STEM · A. Manneschi · 2024/2025</a:t>
+            </a:r>
+          </a:p>
+        </p:txBody>
+      </p:sp>
+      <p:sp>
+        <p:nvSpPr>
+          <p:cNvPr id="14" name="TextBox 13"/>
+          <p:cNvSpPr txBox="1"/>
+          <p:nvPr/>
+        </p:nvSpPr>
+        <p:spPr>
+          <a:xfrm>
+            <a:off x="10515600" y="6473952"/>
+            <a:ext cx="1188720" cy="292608"/>
           </a:xfrm>
           <a:prstGeom prst="rect">
             <a:avLst/>
@@ -9654,7 +10487,7 @@
         <p:spPr>
           <a:xfrm>
             <a:off x="0" y="0"/>
-            <a:ext cx="2286000" cy="6858000"/>
+            <a:ext cx="12191695" cy="777240"/>
           </a:xfrm>
           <a:prstGeom prst="rect">
             <a:avLst/>
@@ -9696,8 +10529,8 @@
         </p:nvSpPr>
         <p:spPr>
           <a:xfrm>
-            <a:off x="274320" y="2286000"/>
-            <a:ext cx="1828800" cy="1828800"/>
+            <a:off x="457200" y="164592"/>
+            <a:ext cx="10972800" cy="502920"/>
           </a:xfrm>
           <a:prstGeom prst="rect">
             <a:avLst/>
@@ -9705,20 +10538,20 @@
           <a:noFill/>
         </p:spPr>
         <p:txBody>
-          <a:bodyPr wrap="square" lIns="45720" rIns="45720" tIns="18288" bIns="18288" anchor="t">
+          <a:bodyPr wrap="square" lIns="45720" rIns="45720" tIns="18288" bIns="18288" anchor="ctr">
             <a:spAutoFit/>
           </a:bodyPr>
           <a:lstStyle/>
           <a:p>
-            <a:pPr algn="ctr"/>
-            <a:r>
-              <a:rPr sz="12000" b="1" i="0">
-                <a:solidFill>
-                  <a:srgbClr val="00A0B0"/>
-                </a:solidFill>
-                <a:latin typeface="Calibri"/>
-              </a:rPr>
-              <a:t>02</a:t>
+            <a:pPr algn="l"/>
+            <a:r>
+              <a:rPr sz="2400" b="1" i="0">
+                <a:solidFill>
+                  <a:srgbClr val="FFFFFF"/>
+                </a:solidFill>
+                <a:latin typeface="Calibri"/>
+              </a:rPr>
+              <a:t>⏱  Perché MD5/SHA-256 NON vanno</a:t>
             </a:r>
           </a:p>
         </p:txBody>
@@ -9731,8 +10564,8 @@
         </p:nvSpPr>
         <p:spPr>
           <a:xfrm>
-            <a:off x="2743200" y="2560320"/>
-            <a:ext cx="8961120" cy="1371600"/>
+            <a:off x="640080" y="1097280"/>
+            <a:ext cx="10972800" cy="5029200"/>
           </a:xfrm>
           <a:prstGeom prst="rect">
             <a:avLst/>
@@ -9740,62 +10573,267 @@
           <a:noFill/>
         </p:spPr>
         <p:txBody>
-          <a:bodyPr wrap="square" lIns="45720" rIns="45720" tIns="18288" bIns="18288" anchor="t">
+          <a:bodyPr wrap="square">
             <a:spAutoFit/>
           </a:bodyPr>
           <a:lstStyle/>
           <a:p>
-            <a:pPr algn="l"/>
-            <a:r>
-              <a:rPr sz="4200" b="1" i="0">
-                <a:solidFill>
-                  <a:srgbClr val="0F2D52"/>
-                </a:solidFill>
-                <a:latin typeface="Calibri"/>
-              </a:rPr>
-              <a:t>Password hashing</a:t>
-            </a:r>
-          </a:p>
-        </p:txBody>
-      </p:sp>
-      <p:sp>
-        <p:nvSpPr>
-          <p:cNvPr id="5" name="TextBox 4"/>
-          <p:cNvSpPr txBox="1"/>
-          <p:nvPr/>
-        </p:nvSpPr>
-        <p:spPr>
-          <a:xfrm>
-            <a:off x="2743200" y="3931920"/>
-            <a:ext cx="8961120" cy="1828800"/>
-          </a:xfrm>
-          <a:prstGeom prst="rect">
-            <a:avLst/>
-          </a:prstGeom>
-          <a:noFill/>
-        </p:spPr>
-        <p:txBody>
-          <a:bodyPr wrap="square" lIns="45720" rIns="45720" tIns="18288" bIns="18288" anchor="t">
-            <a:spAutoFit/>
-          </a:bodyPr>
-          <a:lstStyle/>
-          <a:p>
-            <a:pPr algn="l"/>
-            <a:r>
-              <a:rPr sz="1800" b="0" i="1">
-                <a:solidFill>
-                  <a:srgbClr val="6B7280"/>
-                </a:solidFill>
-                <a:latin typeface="Calibri"/>
-              </a:rPr>
-              <a:t>Encoding ≠ Hashing ≠ Encryption — la differenza che cambia tutto</a:t>
+            <a:pPr>
+              <a:lnSpc>
+                <a:spcPct val="150000"/>
+              </a:lnSpc>
+              <a:spcAft>
+                <a:spcPts val="400"/>
+              </a:spcAft>
+            </a:pPr>
+            <a:r>
+              <a:rPr sz="2000" b="1">
+                <a:solidFill>
+                  <a:srgbClr val="00A0B0"/>
+                </a:solidFill>
+                <a:latin typeface="Calibri"/>
+              </a:rPr>
+              <a:t>▸  </a:t>
+            </a:r>
+            <a:r>
+              <a:rPr sz="2000">
+                <a:solidFill>
+                  <a:srgbClr val="1A1A2E"/>
+                </a:solidFill>
+                <a:latin typeface="Calibri"/>
+              </a:rPr>
+              <a:t>Velocità: SHA-256 su GPU = miliardi/secondo</a:t>
+            </a:r>
+          </a:p>
+          <a:p>
+            <a:pPr>
+              <a:lnSpc>
+                <a:spcPct val="150000"/>
+              </a:lnSpc>
+              <a:spcAft>
+                <a:spcPts val="400"/>
+              </a:spcAft>
+            </a:pPr>
+            <a:r>
+              <a:rPr sz="2000" b="1">
+                <a:solidFill>
+                  <a:srgbClr val="00A0B0"/>
+                </a:solidFill>
+                <a:latin typeface="Calibri"/>
+              </a:rPr>
+              <a:t>▸  </a:t>
+            </a:r>
+            <a:r>
+              <a:rPr sz="2000">
+                <a:solidFill>
+                  <a:srgbClr val="1A1A2E"/>
+                </a:solidFill>
+                <a:latin typeface="Calibri"/>
+              </a:rPr>
+              <a:t>  Rubato il DB, brute force in poche ore</a:t>
+            </a:r>
+          </a:p>
+          <a:p>
+            <a:pPr>
+              <a:lnSpc>
+                <a:spcPct val="150000"/>
+              </a:lnSpc>
+              <a:spcAft>
+                <a:spcPts val="400"/>
+              </a:spcAft>
+            </a:pPr>
+            <a:r>
+              <a:rPr sz="2000" b="1">
+                <a:solidFill>
+                  <a:srgbClr val="00A0B0"/>
+                </a:solidFill>
+                <a:latin typeface="Calibri"/>
+              </a:rPr>
+              <a:t>▸  </a:t>
+            </a:r>
+            <a:r>
+              <a:rPr sz="2000">
+                <a:solidFill>
+                  <a:srgbClr val="1A1A2E"/>
+                </a:solidFill>
+                <a:latin typeface="Calibri"/>
+              </a:rPr>
+              <a:t/>
+            </a:r>
+          </a:p>
+          <a:p>
+            <a:pPr>
+              <a:lnSpc>
+                <a:spcPct val="150000"/>
+              </a:lnSpc>
+              <a:spcAft>
+                <a:spcPts val="400"/>
+              </a:spcAft>
+            </a:pPr>
+            <a:r>
+              <a:rPr sz="2000" b="1">
+                <a:solidFill>
+                  <a:srgbClr val="00A0B0"/>
+                </a:solidFill>
+                <a:latin typeface="Calibri"/>
+              </a:rPr>
+              <a:t>▸  </a:t>
+            </a:r>
+            <a:r>
+              <a:rPr sz="2000">
+                <a:solidFill>
+                  <a:srgbClr val="1A1A2E"/>
+                </a:solidFill>
+                <a:latin typeface="Calibri"/>
+              </a:rPr>
+              <a:t>Rainbow tables: senza salt, password identiche → hash identici</a:t>
+            </a:r>
+          </a:p>
+          <a:p>
+            <a:pPr>
+              <a:lnSpc>
+                <a:spcPct val="150000"/>
+              </a:lnSpc>
+              <a:spcAft>
+                <a:spcPts val="400"/>
+              </a:spcAft>
+            </a:pPr>
+            <a:r>
+              <a:rPr sz="2000" b="1">
+                <a:solidFill>
+                  <a:srgbClr val="00A0B0"/>
+                </a:solidFill>
+                <a:latin typeface="Calibri"/>
+              </a:rPr>
+              <a:t>▸  </a:t>
+            </a:r>
+            <a:r>
+              <a:rPr sz="2000">
+                <a:solidFill>
+                  <a:srgbClr val="1A1A2E"/>
+                </a:solidFill>
+                <a:latin typeface="Calibri"/>
+              </a:rPr>
+              <a:t>  Tabelle pre-calcolate di password comuni</a:t>
+            </a:r>
+          </a:p>
+          <a:p>
+            <a:pPr>
+              <a:lnSpc>
+                <a:spcPct val="150000"/>
+              </a:lnSpc>
+              <a:spcAft>
+                <a:spcPts val="400"/>
+              </a:spcAft>
+            </a:pPr>
+            <a:r>
+              <a:rPr sz="2000" b="1">
+                <a:solidFill>
+                  <a:srgbClr val="00A0B0"/>
+                </a:solidFill>
+                <a:latin typeface="Calibri"/>
+              </a:rPr>
+              <a:t>▸  </a:t>
+            </a:r>
+            <a:r>
+              <a:rPr sz="2000">
+                <a:solidFill>
+                  <a:srgbClr val="1A1A2E"/>
+                </a:solidFill>
+                <a:latin typeface="Calibri"/>
+              </a:rPr>
+              <a:t/>
+            </a:r>
+          </a:p>
+          <a:p>
+            <a:pPr>
+              <a:lnSpc>
+                <a:spcPct val="150000"/>
+              </a:lnSpc>
+              <a:spcAft>
+                <a:spcPts val="400"/>
+              </a:spcAft>
+            </a:pPr>
+            <a:r>
+              <a:rPr sz="2000" b="1">
+                <a:solidFill>
+                  <a:srgbClr val="00A0B0"/>
+                </a:solidFill>
+                <a:latin typeface="Calibri"/>
+              </a:rPr>
+              <a:t>▸  </a:t>
+            </a:r>
+            <a:r>
+              <a:rPr sz="2000">
+                <a:solidFill>
+                  <a:srgbClr val="1A1A2E"/>
+                </a:solidFill>
+                <a:latin typeface="Calibri"/>
+              </a:rPr>
+              <a:t>MD5 e SHA-1: collisioni note. Morti definitivamente.</a:t>
+            </a:r>
+          </a:p>
+          <a:p>
+            <a:pPr>
+              <a:lnSpc>
+                <a:spcPct val="150000"/>
+              </a:lnSpc>
+              <a:spcAft>
+                <a:spcPts val="400"/>
+              </a:spcAft>
+            </a:pPr>
+            <a:r>
+              <a:rPr sz="2000" b="1">
+                <a:solidFill>
+                  <a:srgbClr val="00A0B0"/>
+                </a:solidFill>
+                <a:latin typeface="Calibri"/>
+              </a:rPr>
+              <a:t>▸  </a:t>
+            </a:r>
+            <a:r>
+              <a:rPr sz="2000">
+                <a:solidFill>
+                  <a:srgbClr val="1A1A2E"/>
+                </a:solidFill>
+                <a:latin typeface="Calibri"/>
+              </a:rPr>
+              <a:t/>
+            </a:r>
+          </a:p>
+          <a:p>
+            <a:pPr>
+              <a:lnSpc>
+                <a:spcPct val="150000"/>
+              </a:lnSpc>
+              <a:spcAft>
+                <a:spcPts val="400"/>
+              </a:spcAft>
+            </a:pPr>
+            <a:r>
+              <a:rPr sz="2000" b="1">
+                <a:solidFill>
+                  <a:srgbClr val="00A0B0"/>
+                </a:solidFill>
+                <a:latin typeface="Calibri"/>
+              </a:rPr>
+              <a:t>▸  </a:t>
+            </a:r>
+            <a:r>
+              <a:rPr sz="2000">
+                <a:solidFill>
+                  <a:srgbClr val="1A1A2E"/>
+                </a:solidFill>
+                <a:latin typeface="Calibri"/>
+              </a:rPr>
+              <a:t>bcrypt e Argon2id sono progettati apposta per essere LENTI</a:t>
             </a:r>
           </a:p>
         </p:txBody>
       </p:sp>
       <p:cxnSp>
         <p:nvCxnSpPr>
-          <p:cNvPr id="6" name="Connector 5"/>
+          <p:cNvPr id="5" name="Connector 4"/>
           <p:cNvCxnSpPr/>
           <p:nvPr/>
         </p:nvCxnSpPr>
@@ -9830,14 +10868,14 @@
       </p:cxnSp>
       <p:sp>
         <p:nvSpPr>
-          <p:cNvPr id="7" name="TextBox 6"/>
+          <p:cNvPr id="6" name="TextBox 5"/>
           <p:cNvSpPr txBox="1"/>
           <p:nvPr/>
         </p:nvSpPr>
         <p:spPr>
           <a:xfrm>
             <a:off x="457200" y="6473952"/>
-            <a:ext cx="7315200" cy="320040"/>
+            <a:ext cx="7315200" cy="292608"/>
           </a:xfrm>
           <a:prstGeom prst="rect">
             <a:avLst/>
@@ -9858,21 +10896,21 @@
                 </a:solidFill>
                 <a:latin typeface="Calibri"/>
               </a:rPr>
-              <a:t>Secure Coding · Corso IFTS STEM · A. Manneschi</a:t>
-            </a:r>
-          </a:p>
-        </p:txBody>
-      </p:sp>
-      <p:sp>
-        <p:nvSpPr>
-          <p:cNvPr id="8" name="TextBox 7"/>
+              <a:t>Secure Coding · Corso IFTS STEM · A. Manneschi · 2024/2025</a:t>
+            </a:r>
+          </a:p>
+        </p:txBody>
+      </p:sp>
+      <p:sp>
+        <p:nvSpPr>
+          <p:cNvPr id="7" name="TextBox 6"/>
           <p:cNvSpPr txBox="1"/>
           <p:nvPr/>
         </p:nvSpPr>
         <p:spPr>
           <a:xfrm>
             <a:off x="10515600" y="6473952"/>
-            <a:ext cx="1188720" cy="320040"/>
+            <a:ext cx="1188720" cy="292608"/>
           </a:xfrm>
           <a:prstGeom prst="rect">
             <a:avLst/>

--- a/slide/L4_idor_password.pptx
+++ b/slide/L4_idor_password.pptx
@@ -19,6 +19,7 @@
     <p:sldId id="267" r:id="rId18"/>
     <p:sldId id="268" r:id="rId19"/>
     <p:sldId id="269" r:id="rId20"/>
+    <p:sldId id="270" r:id="rId21"/>
   </p:sldIdLst>
   <p:sldSz cx="12191695" cy="6858000" type="screen4x3"/>
   <p:notesSz cx="6858000" cy="9144000"/>
@@ -3670,45 +3671,21 @@
                 </a:solidFill>
                 <a:latin typeface="Calibri"/>
               </a:rPr>
-              <a:t>bcrypt: l'implementazione corretta</a:t>
-            </a:r>
-          </a:p>
-        </p:txBody>
-      </p:sp>
-      <p:pic>
-        <p:nvPicPr>
-          <p:cNvPr id="4" name="Picture 3" descr="cap4_bcrypt.png"/>
-          <p:cNvPicPr>
-            <a:picLocks noChangeAspect="1"/>
-          </p:cNvPicPr>
-          <p:nvPr/>
-        </p:nvPicPr>
-        <p:blipFill>
-          <a:blip r:embed="rId2"/>
-          <a:stretch>
-            <a:fillRect/>
-          </a:stretch>
-        </p:blipFill>
+              <a:t>⏱  Perché MD5/SHA-256 NON vanno</a:t>
+            </a:r>
+          </a:p>
+        </p:txBody>
+      </p:sp>
+      <p:sp>
+        <p:nvSpPr>
+          <p:cNvPr id="4" name="TextBox 3"/>
+          <p:cNvSpPr txBox="1"/>
+          <p:nvPr/>
+        </p:nvSpPr>
         <p:spPr>
           <a:xfrm>
             <a:off x="640080" y="1097280"/>
-            <a:ext cx="10881360" cy="4572000"/>
-          </a:xfrm>
-          <a:prstGeom prst="rect">
-            <a:avLst/>
-          </a:prstGeom>
-        </p:spPr>
-      </p:pic>
-      <p:sp>
-        <p:nvSpPr>
-          <p:cNvPr id="5" name="TextBox 4"/>
-          <p:cNvSpPr txBox="1"/>
-          <p:nvPr/>
-        </p:nvSpPr>
-        <p:spPr>
-          <a:xfrm>
-            <a:off x="457200" y="5852160"/>
-            <a:ext cx="11247120" cy="365760"/>
+            <a:ext cx="10972800" cy="5029200"/>
           </a:xfrm>
           <a:prstGeom prst="rect">
             <a:avLst/>
@@ -3716,27 +3693,267 @@
           <a:noFill/>
         </p:spPr>
         <p:txBody>
-          <a:bodyPr wrap="square" lIns="45720" rIns="45720" tIns="18288" bIns="18288" anchor="t">
+          <a:bodyPr wrap="square">
             <a:spAutoFit/>
           </a:bodyPr>
           <a:lstStyle/>
           <a:p>
-            <a:pPr algn="ctr"/>
-            <a:r>
-              <a:rPr sz="1300" b="0" i="1">
-                <a:solidFill>
-                  <a:srgbClr val="6B7280"/>
-                </a:solidFill>
-                <a:latin typeface="Calibri"/>
-              </a:rPr>
-              <a:t>Una riga di codice. Salt automatico. Cost configurabile.</a:t>
+            <a:pPr>
+              <a:lnSpc>
+                <a:spcPct val="150000"/>
+              </a:lnSpc>
+              <a:spcAft>
+                <a:spcPts val="400"/>
+              </a:spcAft>
+            </a:pPr>
+            <a:r>
+              <a:rPr sz="2000" b="1">
+                <a:solidFill>
+                  <a:srgbClr val="00A0B0"/>
+                </a:solidFill>
+                <a:latin typeface="Calibri"/>
+              </a:rPr>
+              <a:t>▸  </a:t>
+            </a:r>
+            <a:r>
+              <a:rPr sz="2000">
+                <a:solidFill>
+                  <a:srgbClr val="1A1A2E"/>
+                </a:solidFill>
+                <a:latin typeface="Calibri"/>
+              </a:rPr>
+              <a:t>Velocità: SHA-256 su GPU = miliardi/secondo</a:t>
+            </a:r>
+          </a:p>
+          <a:p>
+            <a:pPr>
+              <a:lnSpc>
+                <a:spcPct val="150000"/>
+              </a:lnSpc>
+              <a:spcAft>
+                <a:spcPts val="400"/>
+              </a:spcAft>
+            </a:pPr>
+            <a:r>
+              <a:rPr sz="2000" b="1">
+                <a:solidFill>
+                  <a:srgbClr val="00A0B0"/>
+                </a:solidFill>
+                <a:latin typeface="Calibri"/>
+              </a:rPr>
+              <a:t>▸  </a:t>
+            </a:r>
+            <a:r>
+              <a:rPr sz="2000">
+                <a:solidFill>
+                  <a:srgbClr val="1A1A2E"/>
+                </a:solidFill>
+                <a:latin typeface="Calibri"/>
+              </a:rPr>
+              <a:t>  Rubato il DB, brute force in poche ore</a:t>
+            </a:r>
+          </a:p>
+          <a:p>
+            <a:pPr>
+              <a:lnSpc>
+                <a:spcPct val="150000"/>
+              </a:lnSpc>
+              <a:spcAft>
+                <a:spcPts val="400"/>
+              </a:spcAft>
+            </a:pPr>
+            <a:r>
+              <a:rPr sz="2000" b="1">
+                <a:solidFill>
+                  <a:srgbClr val="00A0B0"/>
+                </a:solidFill>
+                <a:latin typeface="Calibri"/>
+              </a:rPr>
+              <a:t>▸  </a:t>
+            </a:r>
+            <a:r>
+              <a:rPr sz="2000">
+                <a:solidFill>
+                  <a:srgbClr val="1A1A2E"/>
+                </a:solidFill>
+                <a:latin typeface="Calibri"/>
+              </a:rPr>
+              <a:t/>
+            </a:r>
+          </a:p>
+          <a:p>
+            <a:pPr>
+              <a:lnSpc>
+                <a:spcPct val="150000"/>
+              </a:lnSpc>
+              <a:spcAft>
+                <a:spcPts val="400"/>
+              </a:spcAft>
+            </a:pPr>
+            <a:r>
+              <a:rPr sz="2000" b="1">
+                <a:solidFill>
+                  <a:srgbClr val="00A0B0"/>
+                </a:solidFill>
+                <a:latin typeface="Calibri"/>
+              </a:rPr>
+              <a:t>▸  </a:t>
+            </a:r>
+            <a:r>
+              <a:rPr sz="2000">
+                <a:solidFill>
+                  <a:srgbClr val="1A1A2E"/>
+                </a:solidFill>
+                <a:latin typeface="Calibri"/>
+              </a:rPr>
+              <a:t>Rainbow tables: senza salt, password identiche → hash identici</a:t>
+            </a:r>
+          </a:p>
+          <a:p>
+            <a:pPr>
+              <a:lnSpc>
+                <a:spcPct val="150000"/>
+              </a:lnSpc>
+              <a:spcAft>
+                <a:spcPts val="400"/>
+              </a:spcAft>
+            </a:pPr>
+            <a:r>
+              <a:rPr sz="2000" b="1">
+                <a:solidFill>
+                  <a:srgbClr val="00A0B0"/>
+                </a:solidFill>
+                <a:latin typeface="Calibri"/>
+              </a:rPr>
+              <a:t>▸  </a:t>
+            </a:r>
+            <a:r>
+              <a:rPr sz="2000">
+                <a:solidFill>
+                  <a:srgbClr val="1A1A2E"/>
+                </a:solidFill>
+                <a:latin typeface="Calibri"/>
+              </a:rPr>
+              <a:t>  Tabelle pre-calcolate di password comuni</a:t>
+            </a:r>
+          </a:p>
+          <a:p>
+            <a:pPr>
+              <a:lnSpc>
+                <a:spcPct val="150000"/>
+              </a:lnSpc>
+              <a:spcAft>
+                <a:spcPts val="400"/>
+              </a:spcAft>
+            </a:pPr>
+            <a:r>
+              <a:rPr sz="2000" b="1">
+                <a:solidFill>
+                  <a:srgbClr val="00A0B0"/>
+                </a:solidFill>
+                <a:latin typeface="Calibri"/>
+              </a:rPr>
+              <a:t>▸  </a:t>
+            </a:r>
+            <a:r>
+              <a:rPr sz="2000">
+                <a:solidFill>
+                  <a:srgbClr val="1A1A2E"/>
+                </a:solidFill>
+                <a:latin typeface="Calibri"/>
+              </a:rPr>
+              <a:t/>
+            </a:r>
+          </a:p>
+          <a:p>
+            <a:pPr>
+              <a:lnSpc>
+                <a:spcPct val="150000"/>
+              </a:lnSpc>
+              <a:spcAft>
+                <a:spcPts val="400"/>
+              </a:spcAft>
+            </a:pPr>
+            <a:r>
+              <a:rPr sz="2000" b="1">
+                <a:solidFill>
+                  <a:srgbClr val="00A0B0"/>
+                </a:solidFill>
+                <a:latin typeface="Calibri"/>
+              </a:rPr>
+              <a:t>▸  </a:t>
+            </a:r>
+            <a:r>
+              <a:rPr sz="2000">
+                <a:solidFill>
+                  <a:srgbClr val="1A1A2E"/>
+                </a:solidFill>
+                <a:latin typeface="Calibri"/>
+              </a:rPr>
+              <a:t>MD5 e SHA-1: collisioni note. Morti definitivamente.</a:t>
+            </a:r>
+          </a:p>
+          <a:p>
+            <a:pPr>
+              <a:lnSpc>
+                <a:spcPct val="150000"/>
+              </a:lnSpc>
+              <a:spcAft>
+                <a:spcPts val="400"/>
+              </a:spcAft>
+            </a:pPr>
+            <a:r>
+              <a:rPr sz="2000" b="1">
+                <a:solidFill>
+                  <a:srgbClr val="00A0B0"/>
+                </a:solidFill>
+                <a:latin typeface="Calibri"/>
+              </a:rPr>
+              <a:t>▸  </a:t>
+            </a:r>
+            <a:r>
+              <a:rPr sz="2000">
+                <a:solidFill>
+                  <a:srgbClr val="1A1A2E"/>
+                </a:solidFill>
+                <a:latin typeface="Calibri"/>
+              </a:rPr>
+              <a:t/>
+            </a:r>
+          </a:p>
+          <a:p>
+            <a:pPr>
+              <a:lnSpc>
+                <a:spcPct val="150000"/>
+              </a:lnSpc>
+              <a:spcAft>
+                <a:spcPts val="400"/>
+              </a:spcAft>
+            </a:pPr>
+            <a:r>
+              <a:rPr sz="2000" b="1">
+                <a:solidFill>
+                  <a:srgbClr val="00A0B0"/>
+                </a:solidFill>
+                <a:latin typeface="Calibri"/>
+              </a:rPr>
+              <a:t>▸  </a:t>
+            </a:r>
+            <a:r>
+              <a:rPr sz="2000">
+                <a:solidFill>
+                  <a:srgbClr val="1A1A2E"/>
+                </a:solidFill>
+                <a:latin typeface="Calibri"/>
+              </a:rPr>
+              <a:t>bcrypt e Argon2id sono progettati apposta per essere LENTI</a:t>
             </a:r>
           </a:p>
         </p:txBody>
       </p:sp>
       <p:cxnSp>
         <p:nvCxnSpPr>
-          <p:cNvPr id="6" name="Connector 5"/>
+          <p:cNvPr id="5" name="Connector 4"/>
           <p:cNvCxnSpPr/>
           <p:nvPr/>
         </p:nvCxnSpPr>
@@ -3771,7 +3988,7 @@
       </p:cxnSp>
       <p:sp>
         <p:nvSpPr>
-          <p:cNvPr id="7" name="TextBox 6"/>
+          <p:cNvPr id="6" name="TextBox 5"/>
           <p:cNvSpPr txBox="1"/>
           <p:nvPr/>
         </p:nvSpPr>
@@ -3806,7 +4023,7 @@
       </p:sp>
       <p:sp>
         <p:nvSpPr>
-          <p:cNvPr id="8" name="TextBox 7"/>
+          <p:cNvPr id="7" name="TextBox 6"/>
           <p:cNvSpPr txBox="1"/>
           <p:nvPr/>
         </p:nvSpPr>
@@ -3834,7 +4051,7 @@
                 </a:solidFill>
                 <a:latin typeface="Calibri"/>
               </a:rPr>
-              <a:t>L4  ·  10/14</a:t>
+              <a:t>L4  ·  10/15</a:t>
             </a:r>
           </a:p>
         </p:txBody>
@@ -3848,6 +4065,266 @@
 </file>
 
 <file path=ppt/slides/slide11.xml><?xml version="1.0" encoding="utf-8"?>
+<p:sld xmlns:a="http://schemas.openxmlformats.org/drawingml/2006/main" xmlns:p="http://schemas.openxmlformats.org/presentationml/2006/main" xmlns:r="http://schemas.openxmlformats.org/officeDocument/2006/relationships">
+  <p:cSld>
+    <p:spTree>
+      <p:nvGrpSpPr>
+        <p:cNvPr id="1" name=""/>
+        <p:cNvGrpSpPr/>
+        <p:nvPr/>
+      </p:nvGrpSpPr>
+      <p:grpSpPr/>
+      <p:sp>
+        <p:nvSpPr>
+          <p:cNvPr id="2" name="Rectangle 1"/>
+          <p:cNvSpPr/>
+          <p:nvPr/>
+        </p:nvSpPr>
+        <p:spPr>
+          <a:xfrm>
+            <a:off x="0" y="0"/>
+            <a:ext cx="12191695" cy="777240"/>
+          </a:xfrm>
+          <a:prstGeom prst="rect">
+            <a:avLst/>
+          </a:prstGeom>
+          <a:solidFill>
+            <a:srgbClr val="0F2D52"/>
+          </a:solidFill>
+          <a:ln>
+            <a:noFill/>
+          </a:ln>
+        </p:spPr>
+        <p:style>
+          <a:lnRef idx="1">
+            <a:schemeClr val="accent1"/>
+          </a:lnRef>
+          <a:fillRef idx="3">
+            <a:schemeClr val="accent1"/>
+          </a:fillRef>
+          <a:effectRef idx="2">
+            <a:schemeClr val="accent1"/>
+          </a:effectRef>
+          <a:fontRef idx="minor">
+            <a:schemeClr val="lt1"/>
+          </a:fontRef>
+        </p:style>
+        <p:txBody>
+          <a:bodyPr rtlCol="0" anchor="ctr"/>
+          <a:lstStyle/>
+          <a:p>
+            <a:pPr algn="ctr"/>
+          </a:p>
+        </p:txBody>
+      </p:sp>
+      <p:sp>
+        <p:nvSpPr>
+          <p:cNvPr id="3" name="TextBox 2"/>
+          <p:cNvSpPr txBox="1"/>
+          <p:nvPr/>
+        </p:nvSpPr>
+        <p:spPr>
+          <a:xfrm>
+            <a:off x="457200" y="164592"/>
+            <a:ext cx="10972800" cy="502920"/>
+          </a:xfrm>
+          <a:prstGeom prst="rect">
+            <a:avLst/>
+          </a:prstGeom>
+          <a:noFill/>
+        </p:spPr>
+        <p:txBody>
+          <a:bodyPr wrap="square" lIns="45720" rIns="45720" tIns="18288" bIns="18288" anchor="ctr">
+            <a:spAutoFit/>
+          </a:bodyPr>
+          <a:lstStyle/>
+          <a:p>
+            <a:pPr algn="l"/>
+            <a:r>
+              <a:rPr sz="2400" b="1" i="0">
+                <a:solidFill>
+                  <a:srgbClr val="FFFFFF"/>
+                </a:solidFill>
+                <a:latin typeface="Calibri"/>
+              </a:rPr>
+              <a:t>bcrypt: l'implementazione corretta</a:t>
+            </a:r>
+          </a:p>
+        </p:txBody>
+      </p:sp>
+      <p:pic>
+        <p:nvPicPr>
+          <p:cNvPr id="4" name="Picture 3" descr="cap4_bcrypt.png"/>
+          <p:cNvPicPr>
+            <a:picLocks noChangeAspect="1"/>
+          </p:cNvPicPr>
+          <p:nvPr/>
+        </p:nvPicPr>
+        <p:blipFill>
+          <a:blip r:embed="rId2"/>
+          <a:stretch>
+            <a:fillRect/>
+          </a:stretch>
+        </p:blipFill>
+        <p:spPr>
+          <a:xfrm>
+            <a:off x="640080" y="1097280"/>
+            <a:ext cx="10881360" cy="4572000"/>
+          </a:xfrm>
+          <a:prstGeom prst="rect">
+            <a:avLst/>
+          </a:prstGeom>
+        </p:spPr>
+      </p:pic>
+      <p:sp>
+        <p:nvSpPr>
+          <p:cNvPr id="5" name="TextBox 4"/>
+          <p:cNvSpPr txBox="1"/>
+          <p:nvPr/>
+        </p:nvSpPr>
+        <p:spPr>
+          <a:xfrm>
+            <a:off x="457200" y="5852160"/>
+            <a:ext cx="11247120" cy="365760"/>
+          </a:xfrm>
+          <a:prstGeom prst="rect">
+            <a:avLst/>
+          </a:prstGeom>
+          <a:noFill/>
+        </p:spPr>
+        <p:txBody>
+          <a:bodyPr wrap="square" lIns="45720" rIns="45720" tIns="18288" bIns="18288" anchor="t">
+            <a:spAutoFit/>
+          </a:bodyPr>
+          <a:lstStyle/>
+          <a:p>
+            <a:pPr algn="ctr"/>
+            <a:r>
+              <a:rPr sz="1300" b="0" i="1">
+                <a:solidFill>
+                  <a:srgbClr val="6B7280"/>
+                </a:solidFill>
+                <a:latin typeface="Calibri"/>
+              </a:rPr>
+              <a:t>Una riga di codice. Salt automatico. Cost configurabile.</a:t>
+            </a:r>
+          </a:p>
+        </p:txBody>
+      </p:sp>
+      <p:cxnSp>
+        <p:nvCxnSpPr>
+          <p:cNvPr id="6" name="Connector 5"/>
+          <p:cNvCxnSpPr/>
+          <p:nvPr/>
+        </p:nvCxnSpPr>
+        <p:spPr>
+          <a:xfrm>
+            <a:off x="457200" y="6446520"/>
+            <a:ext cx="11274552" cy="0"/>
+          </a:xfrm>
+          <a:prstGeom prst="line">
+            <a:avLst/>
+          </a:prstGeom>
+          <a:ln w="19050">
+            <a:solidFill>
+              <a:srgbClr val="00A0B0"/>
+            </a:solidFill>
+          </a:ln>
+        </p:spPr>
+        <p:style>
+          <a:lnRef idx="2">
+            <a:schemeClr val="accent1"/>
+          </a:lnRef>
+          <a:fillRef idx="0">
+            <a:schemeClr val="accent1"/>
+          </a:fillRef>
+          <a:effectRef idx="1">
+            <a:schemeClr val="accent1"/>
+          </a:effectRef>
+          <a:fontRef idx="minor">
+            <a:schemeClr val="tx1"/>
+          </a:fontRef>
+        </p:style>
+      </p:cxnSp>
+      <p:sp>
+        <p:nvSpPr>
+          <p:cNvPr id="7" name="TextBox 6"/>
+          <p:cNvSpPr txBox="1"/>
+          <p:nvPr/>
+        </p:nvSpPr>
+        <p:spPr>
+          <a:xfrm>
+            <a:off x="457200" y="6473952"/>
+            <a:ext cx="7315200" cy="292608"/>
+          </a:xfrm>
+          <a:prstGeom prst="rect">
+            <a:avLst/>
+          </a:prstGeom>
+          <a:noFill/>
+        </p:spPr>
+        <p:txBody>
+          <a:bodyPr wrap="square" lIns="45720" rIns="45720" tIns="18288" bIns="18288" anchor="t">
+            <a:spAutoFit/>
+          </a:bodyPr>
+          <a:lstStyle/>
+          <a:p>
+            <a:pPr algn="l"/>
+            <a:r>
+              <a:rPr sz="1000" b="0" i="0">
+                <a:solidFill>
+                  <a:srgbClr val="6B7280"/>
+                </a:solidFill>
+                <a:latin typeface="Calibri"/>
+              </a:rPr>
+              <a:t>Secure Coding · Corso IFTS STEM · A. Manneschi · 2024/2025</a:t>
+            </a:r>
+          </a:p>
+        </p:txBody>
+      </p:sp>
+      <p:sp>
+        <p:nvSpPr>
+          <p:cNvPr id="8" name="TextBox 7"/>
+          <p:cNvSpPr txBox="1"/>
+          <p:nvPr/>
+        </p:nvSpPr>
+        <p:spPr>
+          <a:xfrm>
+            <a:off x="10515600" y="6473952"/>
+            <a:ext cx="1188720" cy="292608"/>
+          </a:xfrm>
+          <a:prstGeom prst="rect">
+            <a:avLst/>
+          </a:prstGeom>
+          <a:noFill/>
+        </p:spPr>
+        <p:txBody>
+          <a:bodyPr wrap="square" lIns="45720" rIns="45720" tIns="18288" bIns="18288" anchor="t">
+            <a:spAutoFit/>
+          </a:bodyPr>
+          <a:lstStyle/>
+          <a:p>
+            <a:pPr algn="r"/>
+            <a:r>
+              <a:rPr sz="1000" b="1" i="0">
+                <a:solidFill>
+                  <a:srgbClr val="6B7280"/>
+                </a:solidFill>
+                <a:latin typeface="Calibri"/>
+              </a:rPr>
+              <a:t>L4  ·  11/15</a:t>
+            </a:r>
+          </a:p>
+        </p:txBody>
+      </p:sp>
+    </p:spTree>
+  </p:cSld>
+  <p:clrMapOvr>
+    <a:masterClrMapping/>
+  </p:clrMapOvr>
+</p:sld>
+</file>
+
+<file path=ppt/slides/slide12.xml><?xml version="1.0" encoding="utf-8"?>
 <p:sld xmlns:a="http://schemas.openxmlformats.org/drawingml/2006/main" xmlns:p="http://schemas.openxmlformats.org/presentationml/2006/main" xmlns:r="http://schemas.openxmlformats.org/officeDocument/2006/relationships">
   <p:cSld>
     <p:spTree>
@@ -4385,1008 +4862,7 @@
                 </a:solidFill>
                 <a:latin typeface="Calibri"/>
               </a:rPr>
-              <a:t>L4  ·  11/14</a:t>
-            </a:r>
-          </a:p>
-        </p:txBody>
-      </p:sp>
-    </p:spTree>
-  </p:cSld>
-  <p:clrMapOvr>
-    <a:masterClrMapping/>
-  </p:clrMapOvr>
-</p:sld>
-</file>
-
-<file path=ppt/slides/slide12.xml><?xml version="1.0" encoding="utf-8"?>
-<p:sld xmlns:a="http://schemas.openxmlformats.org/drawingml/2006/main" xmlns:p="http://schemas.openxmlformats.org/presentationml/2006/main" xmlns:r="http://schemas.openxmlformats.org/officeDocument/2006/relationships">
-  <p:cSld>
-    <p:spTree>
-      <p:nvGrpSpPr>
-        <p:cNvPr id="1" name=""/>
-        <p:cNvGrpSpPr/>
-        <p:nvPr/>
-      </p:nvGrpSpPr>
-      <p:grpSpPr/>
-      <p:sp>
-        <p:nvSpPr>
-          <p:cNvPr id="2" name="Rectangle 1"/>
-          <p:cNvSpPr/>
-          <p:nvPr/>
-        </p:nvSpPr>
-        <p:spPr>
-          <a:xfrm>
-            <a:off x="0" y="0"/>
-            <a:ext cx="12191695" cy="777240"/>
-          </a:xfrm>
-          <a:prstGeom prst="rect">
-            <a:avLst/>
-          </a:prstGeom>
-          <a:solidFill>
-            <a:srgbClr val="0F2D52"/>
-          </a:solidFill>
-          <a:ln>
-            <a:noFill/>
-          </a:ln>
-        </p:spPr>
-        <p:style>
-          <a:lnRef idx="1">
-            <a:schemeClr val="accent1"/>
-          </a:lnRef>
-          <a:fillRef idx="3">
-            <a:schemeClr val="accent1"/>
-          </a:fillRef>
-          <a:effectRef idx="2">
-            <a:schemeClr val="accent1"/>
-          </a:effectRef>
-          <a:fontRef idx="minor">
-            <a:schemeClr val="lt1"/>
-          </a:fontRef>
-        </p:style>
-        <p:txBody>
-          <a:bodyPr rtlCol="0" anchor="ctr"/>
-          <a:lstStyle/>
-          <a:p>
-            <a:pPr algn="ctr"/>
-          </a:p>
-        </p:txBody>
-      </p:sp>
-      <p:sp>
-        <p:nvSpPr>
-          <p:cNvPr id="3" name="TextBox 2"/>
-          <p:cNvSpPr txBox="1"/>
-          <p:nvPr/>
-        </p:nvSpPr>
-        <p:spPr>
-          <a:xfrm>
-            <a:off x="457200" y="164592"/>
-            <a:ext cx="10972800" cy="502920"/>
-          </a:xfrm>
-          <a:prstGeom prst="rect">
-            <a:avLst/>
-          </a:prstGeom>
-          <a:noFill/>
-        </p:spPr>
-        <p:txBody>
-          <a:bodyPr wrap="square" lIns="45720" rIns="45720" tIns="18288" bIns="18288" anchor="ctr">
-            <a:spAutoFit/>
-          </a:bodyPr>
-          <a:lstStyle/>
-          <a:p>
-            <a:pPr algn="l"/>
-            <a:r>
-              <a:rPr sz="2400" b="1" i="0">
-                <a:solidFill>
-                  <a:srgbClr val="FFFFFF"/>
-                </a:solidFill>
-                <a:latin typeface="Calibri"/>
-              </a:rPr>
-              <a:t>📌  Cosa portare a casa</a:t>
-            </a:r>
-          </a:p>
-        </p:txBody>
-      </p:sp>
-      <p:sp>
-        <p:nvSpPr>
-          <p:cNvPr id="4" name="Oval 3"/>
-          <p:cNvSpPr/>
-          <p:nvPr/>
-        </p:nvSpPr>
-        <p:spPr>
-          <a:xfrm>
-            <a:off x="914400" y="1440180"/>
-            <a:ext cx="777240" cy="777240"/>
-          </a:xfrm>
-          <a:prstGeom prst="ellipse">
-            <a:avLst/>
-          </a:prstGeom>
-          <a:solidFill>
-            <a:srgbClr val="00A0B0"/>
-          </a:solidFill>
-          <a:ln>
-            <a:noFill/>
-          </a:ln>
-        </p:spPr>
-        <p:style>
-          <a:lnRef idx="1">
-            <a:schemeClr val="accent1"/>
-          </a:lnRef>
-          <a:fillRef idx="3">
-            <a:schemeClr val="accent1"/>
-          </a:fillRef>
-          <a:effectRef idx="2">
-            <a:schemeClr val="accent1"/>
-          </a:effectRef>
-          <a:fontRef idx="minor">
-            <a:schemeClr val="lt1"/>
-          </a:fontRef>
-        </p:style>
-        <p:txBody>
-          <a:bodyPr rtlCol="0" anchor="ctr"/>
-          <a:lstStyle/>
-          <a:p>
-            <a:pPr algn="ctr"/>
-          </a:p>
-        </p:txBody>
-      </p:sp>
-      <p:sp>
-        <p:nvSpPr>
-          <p:cNvPr id="5" name="TextBox 4"/>
-          <p:cNvSpPr txBox="1"/>
-          <p:nvPr/>
-        </p:nvSpPr>
-        <p:spPr>
-          <a:xfrm>
-            <a:off x="914400" y="1440180"/>
-            <a:ext cx="777240" cy="777240"/>
-          </a:xfrm>
-          <a:prstGeom prst="rect">
-            <a:avLst/>
-          </a:prstGeom>
-          <a:noFill/>
-        </p:spPr>
-        <p:txBody>
-          <a:bodyPr wrap="square" lIns="45720" rIns="45720" tIns="18288" bIns="18288" anchor="ctr">
-            <a:spAutoFit/>
-          </a:bodyPr>
-          <a:lstStyle/>
-          <a:p>
-            <a:pPr algn="ctr"/>
-            <a:r>
-              <a:rPr sz="2800" b="1" i="0">
-                <a:solidFill>
-                  <a:srgbClr val="FFFFFF"/>
-                </a:solidFill>
-                <a:latin typeface="Calibri"/>
-              </a:rPr>
-              <a:t>1</a:t>
-            </a:r>
-          </a:p>
-        </p:txBody>
-      </p:sp>
-      <p:sp>
-        <p:nvSpPr>
-          <p:cNvPr id="6" name="Rounded Rectangle 5"/>
-          <p:cNvSpPr/>
-          <p:nvPr/>
-        </p:nvSpPr>
-        <p:spPr>
-          <a:xfrm>
-            <a:off x="2011680" y="1440180"/>
-            <a:ext cx="9144000" cy="777240"/>
-          </a:xfrm>
-          <a:prstGeom prst="roundRect">
-            <a:avLst>
-              <a:gd name="adj" fmla="val 8000"/>
-            </a:avLst>
-          </a:prstGeom>
-          <a:solidFill>
-            <a:srgbClr val="FBFBFD"/>
-          </a:solidFill>
-          <a:ln w="19050">
-            <a:solidFill>
-              <a:srgbClr val="00A0B0"/>
-            </a:solidFill>
-          </a:ln>
-        </p:spPr>
-        <p:style>
-          <a:lnRef idx="1">
-            <a:schemeClr val="accent1"/>
-          </a:lnRef>
-          <a:fillRef idx="3">
-            <a:schemeClr val="accent1"/>
-          </a:fillRef>
-          <a:effectRef idx="2">
-            <a:schemeClr val="accent1"/>
-          </a:effectRef>
-          <a:fontRef idx="minor">
-            <a:schemeClr val="lt1"/>
-          </a:fontRef>
-        </p:style>
-        <p:txBody>
-          <a:bodyPr rtlCol="0" anchor="ctr"/>
-          <a:lstStyle/>
-          <a:p>
-            <a:pPr algn="ctr"/>
-          </a:p>
-        </p:txBody>
-      </p:sp>
-      <p:sp>
-        <p:nvSpPr>
-          <p:cNvPr id="7" name="TextBox 6"/>
-          <p:cNvSpPr txBox="1"/>
-          <p:nvPr/>
-        </p:nvSpPr>
-        <p:spPr>
-          <a:xfrm>
-            <a:off x="2286000" y="1440180"/>
-            <a:ext cx="8686800" cy="777240"/>
-          </a:xfrm>
-          <a:prstGeom prst="rect">
-            <a:avLst/>
-          </a:prstGeom>
-          <a:noFill/>
-        </p:spPr>
-        <p:txBody>
-          <a:bodyPr wrap="square" lIns="45720" rIns="45720" tIns="18288" bIns="18288" anchor="ctr">
-            <a:spAutoFit/>
-          </a:bodyPr>
-          <a:lstStyle/>
-          <a:p>
-            <a:pPr algn="l"/>
-            <a:r>
-              <a:rPr sz="1800" b="0" i="0">
-                <a:solidFill>
-                  <a:srgbClr val="1A1A2E"/>
-                </a:solidFill>
-                <a:latin typeface="Calibri"/>
-              </a:rPr>
-              <a:t>Authn ≠ Authz — sono due cose diverse</a:t>
-            </a:r>
-          </a:p>
-        </p:txBody>
-      </p:sp>
-      <p:sp>
-        <p:nvSpPr>
-          <p:cNvPr id="8" name="Oval 7"/>
-          <p:cNvSpPr/>
-          <p:nvPr/>
-        </p:nvSpPr>
-        <p:spPr>
-          <a:xfrm>
-            <a:off x="914400" y="2354580"/>
-            <a:ext cx="777240" cy="777240"/>
-          </a:xfrm>
-          <a:prstGeom prst="ellipse">
-            <a:avLst/>
-          </a:prstGeom>
-          <a:solidFill>
-            <a:srgbClr val="00A0B0"/>
-          </a:solidFill>
-          <a:ln>
-            <a:noFill/>
-          </a:ln>
-        </p:spPr>
-        <p:style>
-          <a:lnRef idx="1">
-            <a:schemeClr val="accent1"/>
-          </a:lnRef>
-          <a:fillRef idx="3">
-            <a:schemeClr val="accent1"/>
-          </a:fillRef>
-          <a:effectRef idx="2">
-            <a:schemeClr val="accent1"/>
-          </a:effectRef>
-          <a:fontRef idx="minor">
-            <a:schemeClr val="lt1"/>
-          </a:fontRef>
-        </p:style>
-        <p:txBody>
-          <a:bodyPr rtlCol="0" anchor="ctr"/>
-          <a:lstStyle/>
-          <a:p>
-            <a:pPr algn="ctr"/>
-          </a:p>
-        </p:txBody>
-      </p:sp>
-      <p:sp>
-        <p:nvSpPr>
-          <p:cNvPr id="9" name="TextBox 8"/>
-          <p:cNvSpPr txBox="1"/>
-          <p:nvPr/>
-        </p:nvSpPr>
-        <p:spPr>
-          <a:xfrm>
-            <a:off x="914400" y="2354580"/>
-            <a:ext cx="777240" cy="777240"/>
-          </a:xfrm>
-          <a:prstGeom prst="rect">
-            <a:avLst/>
-          </a:prstGeom>
-          <a:noFill/>
-        </p:spPr>
-        <p:txBody>
-          <a:bodyPr wrap="square" lIns="45720" rIns="45720" tIns="18288" bIns="18288" anchor="ctr">
-            <a:spAutoFit/>
-          </a:bodyPr>
-          <a:lstStyle/>
-          <a:p>
-            <a:pPr algn="ctr"/>
-            <a:r>
-              <a:rPr sz="2800" b="1" i="0">
-                <a:solidFill>
-                  <a:srgbClr val="FFFFFF"/>
-                </a:solidFill>
-                <a:latin typeface="Calibri"/>
-              </a:rPr>
-              <a:t>2</a:t>
-            </a:r>
-          </a:p>
-        </p:txBody>
-      </p:sp>
-      <p:sp>
-        <p:nvSpPr>
-          <p:cNvPr id="10" name="Rounded Rectangle 9"/>
-          <p:cNvSpPr/>
-          <p:nvPr/>
-        </p:nvSpPr>
-        <p:spPr>
-          <a:xfrm>
-            <a:off x="2011680" y="2354580"/>
-            <a:ext cx="9144000" cy="777240"/>
-          </a:xfrm>
-          <a:prstGeom prst="roundRect">
-            <a:avLst>
-              <a:gd name="adj" fmla="val 8000"/>
-            </a:avLst>
-          </a:prstGeom>
-          <a:solidFill>
-            <a:srgbClr val="FBFBFD"/>
-          </a:solidFill>
-          <a:ln w="19050">
-            <a:solidFill>
-              <a:srgbClr val="00A0B0"/>
-            </a:solidFill>
-          </a:ln>
-        </p:spPr>
-        <p:style>
-          <a:lnRef idx="1">
-            <a:schemeClr val="accent1"/>
-          </a:lnRef>
-          <a:fillRef idx="3">
-            <a:schemeClr val="accent1"/>
-          </a:fillRef>
-          <a:effectRef idx="2">
-            <a:schemeClr val="accent1"/>
-          </a:effectRef>
-          <a:fontRef idx="minor">
-            <a:schemeClr val="lt1"/>
-          </a:fontRef>
-        </p:style>
-        <p:txBody>
-          <a:bodyPr rtlCol="0" anchor="ctr"/>
-          <a:lstStyle/>
-          <a:p>
-            <a:pPr algn="ctr"/>
-          </a:p>
-        </p:txBody>
-      </p:sp>
-      <p:sp>
-        <p:nvSpPr>
-          <p:cNvPr id="11" name="TextBox 10"/>
-          <p:cNvSpPr txBox="1"/>
-          <p:nvPr/>
-        </p:nvSpPr>
-        <p:spPr>
-          <a:xfrm>
-            <a:off x="2286000" y="2354580"/>
-            <a:ext cx="8686800" cy="777240"/>
-          </a:xfrm>
-          <a:prstGeom prst="rect">
-            <a:avLst/>
-          </a:prstGeom>
-          <a:noFill/>
-        </p:spPr>
-        <p:txBody>
-          <a:bodyPr wrap="square" lIns="45720" rIns="45720" tIns="18288" bIns="18288" anchor="ctr">
-            <a:spAutoFit/>
-          </a:bodyPr>
-          <a:lstStyle/>
-          <a:p>
-            <a:pPr algn="l"/>
-            <a:r>
-              <a:rPr sz="1800" b="0" i="0">
-                <a:solidFill>
-                  <a:srgbClr val="1A1A2E"/>
-                </a:solidFill>
-                <a:latin typeface="Calibri"/>
-              </a:rPr>
-              <a:t>IDOR: caso reale italiano, 100k€ di multa</a:t>
-            </a:r>
-          </a:p>
-        </p:txBody>
-      </p:sp>
-      <p:sp>
-        <p:nvSpPr>
-          <p:cNvPr id="12" name="Oval 11"/>
-          <p:cNvSpPr/>
-          <p:nvPr/>
-        </p:nvSpPr>
-        <p:spPr>
-          <a:xfrm>
-            <a:off x="914400" y="3268980"/>
-            <a:ext cx="777240" cy="777240"/>
-          </a:xfrm>
-          <a:prstGeom prst="ellipse">
-            <a:avLst/>
-          </a:prstGeom>
-          <a:solidFill>
-            <a:srgbClr val="00A0B0"/>
-          </a:solidFill>
-          <a:ln>
-            <a:noFill/>
-          </a:ln>
-        </p:spPr>
-        <p:style>
-          <a:lnRef idx="1">
-            <a:schemeClr val="accent1"/>
-          </a:lnRef>
-          <a:fillRef idx="3">
-            <a:schemeClr val="accent1"/>
-          </a:fillRef>
-          <a:effectRef idx="2">
-            <a:schemeClr val="accent1"/>
-          </a:effectRef>
-          <a:fontRef idx="minor">
-            <a:schemeClr val="lt1"/>
-          </a:fontRef>
-        </p:style>
-        <p:txBody>
-          <a:bodyPr rtlCol="0" anchor="ctr"/>
-          <a:lstStyle/>
-          <a:p>
-            <a:pPr algn="ctr"/>
-          </a:p>
-        </p:txBody>
-      </p:sp>
-      <p:sp>
-        <p:nvSpPr>
-          <p:cNvPr id="13" name="TextBox 12"/>
-          <p:cNvSpPr txBox="1"/>
-          <p:nvPr/>
-        </p:nvSpPr>
-        <p:spPr>
-          <a:xfrm>
-            <a:off x="914400" y="3268980"/>
-            <a:ext cx="777240" cy="777240"/>
-          </a:xfrm>
-          <a:prstGeom prst="rect">
-            <a:avLst/>
-          </a:prstGeom>
-          <a:noFill/>
-        </p:spPr>
-        <p:txBody>
-          <a:bodyPr wrap="square" lIns="45720" rIns="45720" tIns="18288" bIns="18288" anchor="ctr">
-            <a:spAutoFit/>
-          </a:bodyPr>
-          <a:lstStyle/>
-          <a:p>
-            <a:pPr algn="ctr"/>
-            <a:r>
-              <a:rPr sz="2800" b="1" i="0">
-                <a:solidFill>
-                  <a:srgbClr val="FFFFFF"/>
-                </a:solidFill>
-                <a:latin typeface="Calibri"/>
-              </a:rPr>
-              <a:t>3</a:t>
-            </a:r>
-          </a:p>
-        </p:txBody>
-      </p:sp>
-      <p:sp>
-        <p:nvSpPr>
-          <p:cNvPr id="14" name="Rounded Rectangle 13"/>
-          <p:cNvSpPr/>
-          <p:nvPr/>
-        </p:nvSpPr>
-        <p:spPr>
-          <a:xfrm>
-            <a:off x="2011680" y="3268980"/>
-            <a:ext cx="9144000" cy="777240"/>
-          </a:xfrm>
-          <a:prstGeom prst="roundRect">
-            <a:avLst>
-              <a:gd name="adj" fmla="val 8000"/>
-            </a:avLst>
-          </a:prstGeom>
-          <a:solidFill>
-            <a:srgbClr val="FBFBFD"/>
-          </a:solidFill>
-          <a:ln w="19050">
-            <a:solidFill>
-              <a:srgbClr val="00A0B0"/>
-            </a:solidFill>
-          </a:ln>
-        </p:spPr>
-        <p:style>
-          <a:lnRef idx="1">
-            <a:schemeClr val="accent1"/>
-          </a:lnRef>
-          <a:fillRef idx="3">
-            <a:schemeClr val="accent1"/>
-          </a:fillRef>
-          <a:effectRef idx="2">
-            <a:schemeClr val="accent1"/>
-          </a:effectRef>
-          <a:fontRef idx="minor">
-            <a:schemeClr val="lt1"/>
-          </a:fontRef>
-        </p:style>
-        <p:txBody>
-          <a:bodyPr rtlCol="0" anchor="ctr"/>
-          <a:lstStyle/>
-          <a:p>
-            <a:pPr algn="ctr"/>
-          </a:p>
-        </p:txBody>
-      </p:sp>
-      <p:sp>
-        <p:nvSpPr>
-          <p:cNvPr id="15" name="TextBox 14"/>
-          <p:cNvSpPr txBox="1"/>
-          <p:nvPr/>
-        </p:nvSpPr>
-        <p:spPr>
-          <a:xfrm>
-            <a:off x="2286000" y="3268980"/>
-            <a:ext cx="8686800" cy="777240"/>
-          </a:xfrm>
-          <a:prstGeom prst="rect">
-            <a:avLst/>
-          </a:prstGeom>
-          <a:noFill/>
-        </p:spPr>
-        <p:txBody>
-          <a:bodyPr wrap="square" lIns="45720" rIns="45720" tIns="18288" bIns="18288" anchor="ctr">
-            <a:spAutoFit/>
-          </a:bodyPr>
-          <a:lstStyle/>
-          <a:p>
-            <a:pPr algn="l"/>
-            <a:r>
-              <a:rPr sz="1800" b="0" i="0">
-                <a:solidFill>
-                  <a:srgbClr val="1A1A2E"/>
-                </a:solidFill>
-                <a:latin typeface="Calibri"/>
-              </a:rPr>
-              <a:t>401 = non autenticato, 403 = non autorizzato</a:t>
-            </a:r>
-          </a:p>
-        </p:txBody>
-      </p:sp>
-      <p:sp>
-        <p:nvSpPr>
-          <p:cNvPr id="16" name="Oval 15"/>
-          <p:cNvSpPr/>
-          <p:nvPr/>
-        </p:nvSpPr>
-        <p:spPr>
-          <a:xfrm>
-            <a:off x="914400" y="4183380"/>
-            <a:ext cx="777240" cy="777240"/>
-          </a:xfrm>
-          <a:prstGeom prst="ellipse">
-            <a:avLst/>
-          </a:prstGeom>
-          <a:solidFill>
-            <a:srgbClr val="00A0B0"/>
-          </a:solidFill>
-          <a:ln>
-            <a:noFill/>
-          </a:ln>
-        </p:spPr>
-        <p:style>
-          <a:lnRef idx="1">
-            <a:schemeClr val="accent1"/>
-          </a:lnRef>
-          <a:fillRef idx="3">
-            <a:schemeClr val="accent1"/>
-          </a:fillRef>
-          <a:effectRef idx="2">
-            <a:schemeClr val="accent1"/>
-          </a:effectRef>
-          <a:fontRef idx="minor">
-            <a:schemeClr val="lt1"/>
-          </a:fontRef>
-        </p:style>
-        <p:txBody>
-          <a:bodyPr rtlCol="0" anchor="ctr"/>
-          <a:lstStyle/>
-          <a:p>
-            <a:pPr algn="ctr"/>
-          </a:p>
-        </p:txBody>
-      </p:sp>
-      <p:sp>
-        <p:nvSpPr>
-          <p:cNvPr id="17" name="TextBox 16"/>
-          <p:cNvSpPr txBox="1"/>
-          <p:nvPr/>
-        </p:nvSpPr>
-        <p:spPr>
-          <a:xfrm>
-            <a:off x="914400" y="4183380"/>
-            <a:ext cx="777240" cy="777240"/>
-          </a:xfrm>
-          <a:prstGeom prst="rect">
-            <a:avLst/>
-          </a:prstGeom>
-          <a:noFill/>
-        </p:spPr>
-        <p:txBody>
-          <a:bodyPr wrap="square" lIns="45720" rIns="45720" tIns="18288" bIns="18288" anchor="ctr">
-            <a:spAutoFit/>
-          </a:bodyPr>
-          <a:lstStyle/>
-          <a:p>
-            <a:pPr algn="ctr"/>
-            <a:r>
-              <a:rPr sz="2800" b="1" i="0">
-                <a:solidFill>
-                  <a:srgbClr val="FFFFFF"/>
-                </a:solidFill>
-                <a:latin typeface="Calibri"/>
-              </a:rPr>
-              <a:t>4</a:t>
-            </a:r>
-          </a:p>
-        </p:txBody>
-      </p:sp>
-      <p:sp>
-        <p:nvSpPr>
-          <p:cNvPr id="18" name="Rounded Rectangle 17"/>
-          <p:cNvSpPr/>
-          <p:nvPr/>
-        </p:nvSpPr>
-        <p:spPr>
-          <a:xfrm>
-            <a:off x="2011680" y="4183380"/>
-            <a:ext cx="9144000" cy="777240"/>
-          </a:xfrm>
-          <a:prstGeom prst="roundRect">
-            <a:avLst>
-              <a:gd name="adj" fmla="val 8000"/>
-            </a:avLst>
-          </a:prstGeom>
-          <a:solidFill>
-            <a:srgbClr val="FBFBFD"/>
-          </a:solidFill>
-          <a:ln w="19050">
-            <a:solidFill>
-              <a:srgbClr val="00A0B0"/>
-            </a:solidFill>
-          </a:ln>
-        </p:spPr>
-        <p:style>
-          <a:lnRef idx="1">
-            <a:schemeClr val="accent1"/>
-          </a:lnRef>
-          <a:fillRef idx="3">
-            <a:schemeClr val="accent1"/>
-          </a:fillRef>
-          <a:effectRef idx="2">
-            <a:schemeClr val="accent1"/>
-          </a:effectRef>
-          <a:fontRef idx="minor">
-            <a:schemeClr val="lt1"/>
-          </a:fontRef>
-        </p:style>
-        <p:txBody>
-          <a:bodyPr rtlCol="0" anchor="ctr"/>
-          <a:lstStyle/>
-          <a:p>
-            <a:pPr algn="ctr"/>
-          </a:p>
-        </p:txBody>
-      </p:sp>
-      <p:sp>
-        <p:nvSpPr>
-          <p:cNvPr id="19" name="TextBox 18"/>
-          <p:cNvSpPr txBox="1"/>
-          <p:nvPr/>
-        </p:nvSpPr>
-        <p:spPr>
-          <a:xfrm>
-            <a:off x="2286000" y="4183380"/>
-            <a:ext cx="8686800" cy="777240"/>
-          </a:xfrm>
-          <a:prstGeom prst="rect">
-            <a:avLst/>
-          </a:prstGeom>
-          <a:noFill/>
-        </p:spPr>
-        <p:txBody>
-          <a:bodyPr wrap="square" lIns="45720" rIns="45720" tIns="18288" bIns="18288" anchor="ctr">
-            <a:spAutoFit/>
-          </a:bodyPr>
-          <a:lstStyle/>
-          <a:p>
-            <a:pPr algn="l"/>
-            <a:r>
-              <a:rPr sz="1800" b="0" i="0">
-                <a:solidFill>
-                  <a:srgbClr val="1A1A2E"/>
-                </a:solidFill>
-                <a:latin typeface="Calibri"/>
-              </a:rPr>
-              <a:t>Mai MD5/SHA per password — usa bcrypt o Argon2id</a:t>
-            </a:r>
-          </a:p>
-        </p:txBody>
-      </p:sp>
-      <p:sp>
-        <p:nvSpPr>
-          <p:cNvPr id="20" name="Oval 19"/>
-          <p:cNvSpPr/>
-          <p:nvPr/>
-        </p:nvSpPr>
-        <p:spPr>
-          <a:xfrm>
-            <a:off x="914400" y="5097780"/>
-            <a:ext cx="777240" cy="777240"/>
-          </a:xfrm>
-          <a:prstGeom prst="ellipse">
-            <a:avLst/>
-          </a:prstGeom>
-          <a:solidFill>
-            <a:srgbClr val="00A0B0"/>
-          </a:solidFill>
-          <a:ln>
-            <a:noFill/>
-          </a:ln>
-        </p:spPr>
-        <p:style>
-          <a:lnRef idx="1">
-            <a:schemeClr val="accent1"/>
-          </a:lnRef>
-          <a:fillRef idx="3">
-            <a:schemeClr val="accent1"/>
-          </a:fillRef>
-          <a:effectRef idx="2">
-            <a:schemeClr val="accent1"/>
-          </a:effectRef>
-          <a:fontRef idx="minor">
-            <a:schemeClr val="lt1"/>
-          </a:fontRef>
-        </p:style>
-        <p:txBody>
-          <a:bodyPr rtlCol="0" anchor="ctr"/>
-          <a:lstStyle/>
-          <a:p>
-            <a:pPr algn="ctr"/>
-          </a:p>
-        </p:txBody>
-      </p:sp>
-      <p:sp>
-        <p:nvSpPr>
-          <p:cNvPr id="21" name="TextBox 20"/>
-          <p:cNvSpPr txBox="1"/>
-          <p:nvPr/>
-        </p:nvSpPr>
-        <p:spPr>
-          <a:xfrm>
-            <a:off x="914400" y="5097780"/>
-            <a:ext cx="777240" cy="777240"/>
-          </a:xfrm>
-          <a:prstGeom prst="rect">
-            <a:avLst/>
-          </a:prstGeom>
-          <a:noFill/>
-        </p:spPr>
-        <p:txBody>
-          <a:bodyPr wrap="square" lIns="45720" rIns="45720" tIns="18288" bIns="18288" anchor="ctr">
-            <a:spAutoFit/>
-          </a:bodyPr>
-          <a:lstStyle/>
-          <a:p>
-            <a:pPr algn="ctr"/>
-            <a:r>
-              <a:rPr sz="2800" b="1" i="0">
-                <a:solidFill>
-                  <a:srgbClr val="FFFFFF"/>
-                </a:solidFill>
-                <a:latin typeface="Calibri"/>
-              </a:rPr>
-              <a:t>5</a:t>
-            </a:r>
-          </a:p>
-        </p:txBody>
-      </p:sp>
-      <p:sp>
-        <p:nvSpPr>
-          <p:cNvPr id="22" name="Rounded Rectangle 21"/>
-          <p:cNvSpPr/>
-          <p:nvPr/>
-        </p:nvSpPr>
-        <p:spPr>
-          <a:xfrm>
-            <a:off x="2011680" y="5097780"/>
-            <a:ext cx="9144000" cy="777240"/>
-          </a:xfrm>
-          <a:prstGeom prst="roundRect">
-            <a:avLst>
-              <a:gd name="adj" fmla="val 8000"/>
-            </a:avLst>
-          </a:prstGeom>
-          <a:solidFill>
-            <a:srgbClr val="FBFBFD"/>
-          </a:solidFill>
-          <a:ln w="19050">
-            <a:solidFill>
-              <a:srgbClr val="00A0B0"/>
-            </a:solidFill>
-          </a:ln>
-        </p:spPr>
-        <p:style>
-          <a:lnRef idx="1">
-            <a:schemeClr val="accent1"/>
-          </a:lnRef>
-          <a:fillRef idx="3">
-            <a:schemeClr val="accent1"/>
-          </a:fillRef>
-          <a:effectRef idx="2">
-            <a:schemeClr val="accent1"/>
-          </a:effectRef>
-          <a:fontRef idx="minor">
-            <a:schemeClr val="lt1"/>
-          </a:fontRef>
-        </p:style>
-        <p:txBody>
-          <a:bodyPr rtlCol="0" anchor="ctr"/>
-          <a:lstStyle/>
-          <a:p>
-            <a:pPr algn="ctr"/>
-          </a:p>
-        </p:txBody>
-      </p:sp>
-      <p:sp>
-        <p:nvSpPr>
-          <p:cNvPr id="23" name="TextBox 22"/>
-          <p:cNvSpPr txBox="1"/>
-          <p:nvPr/>
-        </p:nvSpPr>
-        <p:spPr>
-          <a:xfrm>
-            <a:off x="2286000" y="5097780"/>
-            <a:ext cx="8686800" cy="777240"/>
-          </a:xfrm>
-          <a:prstGeom prst="rect">
-            <a:avLst/>
-          </a:prstGeom>
-          <a:noFill/>
-        </p:spPr>
-        <p:txBody>
-          <a:bodyPr wrap="square" lIns="45720" rIns="45720" tIns="18288" bIns="18288" anchor="ctr">
-            <a:spAutoFit/>
-          </a:bodyPr>
-          <a:lstStyle/>
-          <a:p>
-            <a:pPr algn="l"/>
-            <a:r>
-              <a:rPr sz="1800" b="0" i="0">
-                <a:solidFill>
-                  <a:srgbClr val="1A1A2E"/>
-                </a:solidFill>
-                <a:latin typeface="Calibri"/>
-              </a:rPr>
-              <a:t>Apri il DB con DB Browser: il visivo è dirimente</a:t>
-            </a:r>
-          </a:p>
-        </p:txBody>
-      </p:sp>
-      <p:cxnSp>
-        <p:nvCxnSpPr>
-          <p:cNvPr id="24" name="Connector 23"/>
-          <p:cNvCxnSpPr/>
-          <p:nvPr/>
-        </p:nvCxnSpPr>
-        <p:spPr>
-          <a:xfrm>
-            <a:off x="457200" y="6446520"/>
-            <a:ext cx="11274552" cy="0"/>
-          </a:xfrm>
-          <a:prstGeom prst="line">
-            <a:avLst/>
-          </a:prstGeom>
-          <a:ln w="19050">
-            <a:solidFill>
-              <a:srgbClr val="00A0B0"/>
-            </a:solidFill>
-          </a:ln>
-        </p:spPr>
-        <p:style>
-          <a:lnRef idx="2">
-            <a:schemeClr val="accent1"/>
-          </a:lnRef>
-          <a:fillRef idx="0">
-            <a:schemeClr val="accent1"/>
-          </a:fillRef>
-          <a:effectRef idx="1">
-            <a:schemeClr val="accent1"/>
-          </a:effectRef>
-          <a:fontRef idx="minor">
-            <a:schemeClr val="tx1"/>
-          </a:fontRef>
-        </p:style>
-      </p:cxnSp>
-      <p:sp>
-        <p:nvSpPr>
-          <p:cNvPr id="25" name="TextBox 24"/>
-          <p:cNvSpPr txBox="1"/>
-          <p:nvPr/>
-        </p:nvSpPr>
-        <p:spPr>
-          <a:xfrm>
-            <a:off x="457200" y="6473952"/>
-            <a:ext cx="7315200" cy="292608"/>
-          </a:xfrm>
-          <a:prstGeom prst="rect">
-            <a:avLst/>
-          </a:prstGeom>
-          <a:noFill/>
-        </p:spPr>
-        <p:txBody>
-          <a:bodyPr wrap="square" lIns="45720" rIns="45720" tIns="18288" bIns="18288" anchor="t">
-            <a:spAutoFit/>
-          </a:bodyPr>
-          <a:lstStyle/>
-          <a:p>
-            <a:pPr algn="l"/>
-            <a:r>
-              <a:rPr sz="1000" b="0" i="0">
-                <a:solidFill>
-                  <a:srgbClr val="6B7280"/>
-                </a:solidFill>
-                <a:latin typeface="Calibri"/>
-              </a:rPr>
-              <a:t>Secure Coding · Corso IFTS STEM · A. Manneschi · 2024/2025</a:t>
-            </a:r>
-          </a:p>
-        </p:txBody>
-      </p:sp>
-      <p:sp>
-        <p:nvSpPr>
-          <p:cNvPr id="26" name="TextBox 25"/>
-          <p:cNvSpPr txBox="1"/>
-          <p:nvPr/>
-        </p:nvSpPr>
-        <p:spPr>
-          <a:xfrm>
-            <a:off x="10515600" y="6473952"/>
-            <a:ext cx="1188720" cy="292608"/>
-          </a:xfrm>
-          <a:prstGeom prst="rect">
-            <a:avLst/>
-          </a:prstGeom>
-          <a:noFill/>
-        </p:spPr>
-        <p:txBody>
-          <a:bodyPr wrap="square" lIns="45720" rIns="45720" tIns="18288" bIns="18288" anchor="t">
-            <a:spAutoFit/>
-          </a:bodyPr>
-          <a:lstStyle/>
-          <a:p>
-            <a:pPr algn="r"/>
-            <a:r>
-              <a:rPr sz="1000" b="1" i="0">
-                <a:solidFill>
-                  <a:srgbClr val="6B7280"/>
-                </a:solidFill>
-                <a:latin typeface="Calibri"/>
-              </a:rPr>
-              <a:t>L4  ·  12/14</a:t>
+              <a:t>L4  ·  12/15</a:t>
             </a:r>
           </a:p>
         </p:txBody>
@@ -5418,13 +4894,13 @@
         <p:spPr>
           <a:xfrm>
             <a:off x="0" y="0"/>
-            <a:ext cx="4114800" cy="6858000"/>
+            <a:ext cx="12191695" cy="777240"/>
           </a:xfrm>
           <a:prstGeom prst="rect">
             <a:avLst/>
           </a:prstGeom>
           <a:solidFill>
-            <a:srgbClr val="081B33"/>
+            <a:srgbClr val="0F2D52"/>
           </a:solidFill>
           <a:ln>
             <a:noFill/>
@@ -5454,59 +4930,51 @@
       </p:sp>
       <p:sp>
         <p:nvSpPr>
-          <p:cNvPr id="3" name="Rectangle 2"/>
+          <p:cNvPr id="3" name="TextBox 2"/>
+          <p:cNvSpPr txBox="1"/>
+          <p:nvPr/>
+        </p:nvSpPr>
+        <p:spPr>
+          <a:xfrm>
+            <a:off x="457200" y="164592"/>
+            <a:ext cx="10972800" cy="502920"/>
+          </a:xfrm>
+          <a:prstGeom prst="rect">
+            <a:avLst/>
+          </a:prstGeom>
+          <a:noFill/>
+        </p:spPr>
+        <p:txBody>
+          <a:bodyPr wrap="square" lIns="45720" rIns="45720" tIns="18288" bIns="18288" anchor="ctr">
+            <a:spAutoFit/>
+          </a:bodyPr>
+          <a:lstStyle/>
+          <a:p>
+            <a:pPr algn="l"/>
+            <a:r>
+              <a:rPr sz="2400" b="1" i="0">
+                <a:solidFill>
+                  <a:srgbClr val="FFFFFF"/>
+                </a:solidFill>
+                <a:latin typeface="Calibri"/>
+              </a:rPr>
+              <a:t>📌  Cosa portare a casa</a:t>
+            </a:r>
+          </a:p>
+        </p:txBody>
+      </p:sp>
+      <p:sp>
+        <p:nvSpPr>
+          <p:cNvPr id="4" name="Oval 3"/>
           <p:cNvSpPr/>
           <p:nvPr/>
         </p:nvSpPr>
         <p:spPr>
           <a:xfrm>
-            <a:off x="4114800" y="0"/>
-            <a:ext cx="8046720" cy="6858000"/>
-          </a:xfrm>
-          <a:prstGeom prst="rect">
-            <a:avLst/>
-          </a:prstGeom>
-          <a:solidFill>
-            <a:srgbClr val="F1F4F8"/>
-          </a:solidFill>
-          <a:ln>
-            <a:noFill/>
-          </a:ln>
-        </p:spPr>
-        <p:style>
-          <a:lnRef idx="1">
-            <a:schemeClr val="accent1"/>
-          </a:lnRef>
-          <a:fillRef idx="3">
-            <a:schemeClr val="accent1"/>
-          </a:fillRef>
-          <a:effectRef idx="2">
-            <a:schemeClr val="accent1"/>
-          </a:effectRef>
-          <a:fontRef idx="minor">
-            <a:schemeClr val="lt1"/>
-          </a:fontRef>
-        </p:style>
-        <p:txBody>
-          <a:bodyPr rtlCol="0" anchor="ctr"/>
-          <a:lstStyle/>
-          <a:p>
-            <a:pPr algn="ctr"/>
-          </a:p>
-        </p:txBody>
-      </p:sp>
-      <p:sp>
-        <p:nvSpPr>
-          <p:cNvPr id="4" name="Rectangle 3"/>
-          <p:cNvSpPr/>
-          <p:nvPr/>
-        </p:nvSpPr>
-        <p:spPr>
-          <a:xfrm>
-            <a:off x="4114800" y="0"/>
-            <a:ext cx="137160" cy="6858000"/>
-          </a:xfrm>
-          <a:prstGeom prst="rect">
+            <a:off x="914400" y="1440180"/>
+            <a:ext cx="777240" cy="777240"/>
+          </a:xfrm>
+          <a:prstGeom prst="ellipse">
             <a:avLst/>
           </a:prstGeom>
           <a:solidFill>
@@ -5546,8 +5014,8 @@
         </p:nvSpPr>
         <p:spPr>
           <a:xfrm>
-            <a:off x="274320" y="2103120"/>
-            <a:ext cx="3657600" cy="2286000"/>
+            <a:off x="914400" y="1440180"/>
+            <a:ext cx="777240" cy="777240"/>
           </a:xfrm>
           <a:prstGeom prst="rect">
             <a:avLst/>
@@ -5555,34 +5023,81 @@
           <a:noFill/>
         </p:spPr>
         <p:txBody>
-          <a:bodyPr wrap="square" lIns="45720" rIns="45720" tIns="18288" bIns="18288" anchor="t">
+          <a:bodyPr wrap="square" lIns="45720" rIns="45720" tIns="18288" bIns="18288" anchor="ctr">
             <a:spAutoFit/>
           </a:bodyPr>
           <a:lstStyle/>
           <a:p>
             <a:pPr algn="ctr"/>
             <a:r>
-              <a:rPr sz="17000" b="1" i="0">
-                <a:solidFill>
-                  <a:srgbClr val="00A0B0"/>
-                </a:solidFill>
-                <a:latin typeface="Calibri"/>
-              </a:rPr>
-              <a:t>03</a:t>
-            </a:r>
-          </a:p>
-        </p:txBody>
-      </p:sp>
-      <p:sp>
-        <p:nvSpPr>
-          <p:cNvPr id="6" name="TextBox 5"/>
+              <a:rPr sz="2800" b="1" i="0">
+                <a:solidFill>
+                  <a:srgbClr val="FFFFFF"/>
+                </a:solidFill>
+                <a:latin typeface="Calibri"/>
+              </a:rPr>
+              <a:t>1</a:t>
+            </a:r>
+          </a:p>
+        </p:txBody>
+      </p:sp>
+      <p:sp>
+        <p:nvSpPr>
+          <p:cNvPr id="6" name="Rounded Rectangle 5"/>
+          <p:cNvSpPr/>
+          <p:nvPr/>
+        </p:nvSpPr>
+        <p:spPr>
+          <a:xfrm>
+            <a:off x="2011680" y="1440180"/>
+            <a:ext cx="9144000" cy="777240"/>
+          </a:xfrm>
+          <a:prstGeom prst="roundRect">
+            <a:avLst>
+              <a:gd name="adj" fmla="val 8000"/>
+            </a:avLst>
+          </a:prstGeom>
+          <a:solidFill>
+            <a:srgbClr val="FBFBFD"/>
+          </a:solidFill>
+          <a:ln w="19050">
+            <a:solidFill>
+              <a:srgbClr val="00A0B0"/>
+            </a:solidFill>
+          </a:ln>
+        </p:spPr>
+        <p:style>
+          <a:lnRef idx="1">
+            <a:schemeClr val="accent1"/>
+          </a:lnRef>
+          <a:fillRef idx="3">
+            <a:schemeClr val="accent1"/>
+          </a:fillRef>
+          <a:effectRef idx="2">
+            <a:schemeClr val="accent1"/>
+          </a:effectRef>
+          <a:fontRef idx="minor">
+            <a:schemeClr val="lt1"/>
+          </a:fontRef>
+        </p:style>
+        <p:txBody>
+          <a:bodyPr rtlCol="0" anchor="ctr"/>
+          <a:lstStyle/>
+          <a:p>
+            <a:pPr algn="ctr"/>
+          </a:p>
+        </p:txBody>
+      </p:sp>
+      <p:sp>
+        <p:nvSpPr>
+          <p:cNvPr id="7" name="TextBox 6"/>
           <p:cNvSpPr txBox="1"/>
           <p:nvPr/>
         </p:nvSpPr>
         <p:spPr>
           <a:xfrm>
-            <a:off x="274320" y="4572000"/>
-            <a:ext cx="3657600" cy="457200"/>
+            <a:off x="2286000" y="1440180"/>
+            <a:ext cx="8686800" cy="777240"/>
           </a:xfrm>
           <a:prstGeom prst="rect">
             <a:avLst/>
@@ -5590,34 +5105,77 @@
           <a:noFill/>
         </p:spPr>
         <p:txBody>
-          <a:bodyPr wrap="square" lIns="45720" rIns="45720" tIns="18288" bIns="18288" anchor="t">
+          <a:bodyPr wrap="square" lIns="45720" rIns="45720" tIns="18288" bIns="18288" anchor="ctr">
             <a:spAutoFit/>
           </a:bodyPr>
           <a:lstStyle/>
           <a:p>
+            <a:pPr algn="l"/>
+            <a:r>
+              <a:rPr sz="1800" b="0" i="0">
+                <a:solidFill>
+                  <a:srgbClr val="1A1A2E"/>
+                </a:solidFill>
+                <a:latin typeface="Calibri"/>
+              </a:rPr>
+              <a:t>Authn ≠ Authz — sono due cose diverse</a:t>
+            </a:r>
+          </a:p>
+        </p:txBody>
+      </p:sp>
+      <p:sp>
+        <p:nvSpPr>
+          <p:cNvPr id="8" name="Oval 7"/>
+          <p:cNvSpPr/>
+          <p:nvPr/>
+        </p:nvSpPr>
+        <p:spPr>
+          <a:xfrm>
+            <a:off x="914400" y="2354580"/>
+            <a:ext cx="777240" cy="777240"/>
+          </a:xfrm>
+          <a:prstGeom prst="ellipse">
+            <a:avLst/>
+          </a:prstGeom>
+          <a:solidFill>
+            <a:srgbClr val="00A0B0"/>
+          </a:solidFill>
+          <a:ln>
+            <a:noFill/>
+          </a:ln>
+        </p:spPr>
+        <p:style>
+          <a:lnRef idx="1">
+            <a:schemeClr val="accent1"/>
+          </a:lnRef>
+          <a:fillRef idx="3">
+            <a:schemeClr val="accent1"/>
+          </a:fillRef>
+          <a:effectRef idx="2">
+            <a:schemeClr val="accent1"/>
+          </a:effectRef>
+          <a:fontRef idx="minor">
+            <a:schemeClr val="lt1"/>
+          </a:fontRef>
+        </p:style>
+        <p:txBody>
+          <a:bodyPr rtlCol="0" anchor="ctr"/>
+          <a:lstStyle/>
+          <a:p>
             <a:pPr algn="ctr"/>
-            <a:r>
-              <a:rPr sz="2000" b="1" i="0">
-                <a:solidFill>
-                  <a:srgbClr val="6FD8E0"/>
-                </a:solidFill>
-                <a:latin typeface="Calibri"/>
-              </a:rPr>
-              <a:t>PARTE</a:t>
-            </a:r>
-          </a:p>
-        </p:txBody>
-      </p:sp>
-      <p:sp>
-        <p:nvSpPr>
-          <p:cNvPr id="7" name="TextBox 6"/>
+          </a:p>
+        </p:txBody>
+      </p:sp>
+      <p:sp>
+        <p:nvSpPr>
+          <p:cNvPr id="9" name="TextBox 8"/>
           <p:cNvSpPr txBox="1"/>
           <p:nvPr/>
         </p:nvSpPr>
         <p:spPr>
           <a:xfrm>
-            <a:off x="4572000" y="2286000"/>
-            <a:ext cx="7315200" cy="1645920"/>
+            <a:off x="914400" y="2354580"/>
+            <a:ext cx="777240" cy="777240"/>
           </a:xfrm>
           <a:prstGeom prst="rect">
             <a:avLst/>
@@ -5625,34 +5183,81 @@
           <a:noFill/>
         </p:spPr>
         <p:txBody>
-          <a:bodyPr wrap="square" lIns="45720" rIns="45720" tIns="18288" bIns="18288" anchor="t">
+          <a:bodyPr wrap="square" lIns="45720" rIns="45720" tIns="18288" bIns="18288" anchor="ctr">
             <a:spAutoFit/>
           </a:bodyPr>
           <a:lstStyle/>
           <a:p>
-            <a:pPr algn="l"/>
-            <a:r>
-              <a:rPr sz="4400" b="1" i="0">
-                <a:solidFill>
-                  <a:srgbClr val="0F2D52"/>
-                </a:solidFill>
-                <a:latin typeface="Calibri"/>
-              </a:rPr>
-              <a:t>Laboratorio</a:t>
-            </a:r>
-          </a:p>
-        </p:txBody>
-      </p:sp>
-      <p:sp>
-        <p:nvSpPr>
-          <p:cNvPr id="8" name="TextBox 7"/>
+            <a:pPr algn="ctr"/>
+            <a:r>
+              <a:rPr sz="2800" b="1" i="0">
+                <a:solidFill>
+                  <a:srgbClr val="FFFFFF"/>
+                </a:solidFill>
+                <a:latin typeface="Calibri"/>
+              </a:rPr>
+              <a:t>2</a:t>
+            </a:r>
+          </a:p>
+        </p:txBody>
+      </p:sp>
+      <p:sp>
+        <p:nvSpPr>
+          <p:cNvPr id="10" name="Rounded Rectangle 9"/>
+          <p:cNvSpPr/>
+          <p:nvPr/>
+        </p:nvSpPr>
+        <p:spPr>
+          <a:xfrm>
+            <a:off x="2011680" y="2354580"/>
+            <a:ext cx="9144000" cy="777240"/>
+          </a:xfrm>
+          <a:prstGeom prst="roundRect">
+            <a:avLst>
+              <a:gd name="adj" fmla="val 8000"/>
+            </a:avLst>
+          </a:prstGeom>
+          <a:solidFill>
+            <a:srgbClr val="FBFBFD"/>
+          </a:solidFill>
+          <a:ln w="19050">
+            <a:solidFill>
+              <a:srgbClr val="00A0B0"/>
+            </a:solidFill>
+          </a:ln>
+        </p:spPr>
+        <p:style>
+          <a:lnRef idx="1">
+            <a:schemeClr val="accent1"/>
+          </a:lnRef>
+          <a:fillRef idx="3">
+            <a:schemeClr val="accent1"/>
+          </a:fillRef>
+          <a:effectRef idx="2">
+            <a:schemeClr val="accent1"/>
+          </a:effectRef>
+          <a:fontRef idx="minor">
+            <a:schemeClr val="lt1"/>
+          </a:fontRef>
+        </p:style>
+        <p:txBody>
+          <a:bodyPr rtlCol="0" anchor="ctr"/>
+          <a:lstStyle/>
+          <a:p>
+            <a:pPr algn="ctr"/>
+          </a:p>
+        </p:txBody>
+      </p:sp>
+      <p:sp>
+        <p:nvSpPr>
+          <p:cNvPr id="11" name="TextBox 10"/>
           <p:cNvSpPr txBox="1"/>
           <p:nvPr/>
         </p:nvSpPr>
         <p:spPr>
           <a:xfrm>
-            <a:off x="4572000" y="3931920"/>
-            <a:ext cx="7315200" cy="1828800"/>
+            <a:off x="2286000" y="2354580"/>
+            <a:ext cx="8686800" cy="777240"/>
           </a:xfrm>
           <a:prstGeom prst="rect">
             <a:avLst/>
@@ -5660,27 +5265,507 @@
           <a:noFill/>
         </p:spPr>
         <p:txBody>
-          <a:bodyPr wrap="square" lIns="45720" rIns="45720" tIns="18288" bIns="18288" anchor="t">
+          <a:bodyPr wrap="square" lIns="45720" rIns="45720" tIns="18288" bIns="18288" anchor="ctr">
             <a:spAutoFit/>
           </a:bodyPr>
           <a:lstStyle/>
           <a:p>
             <a:pPr algn="l"/>
             <a:r>
-              <a:rPr sz="1800" b="0" i="1">
-                <a:solidFill>
-                  <a:srgbClr val="6B7280"/>
-                </a:solidFill>
-                <a:latin typeface="Calibri"/>
-              </a:rPr>
-              <a:t>Aggiungere ownership check e migrare a bcrypt</a:t>
+              <a:rPr sz="1800" b="0" i="0">
+                <a:solidFill>
+                  <a:srgbClr val="1A1A2E"/>
+                </a:solidFill>
+                <a:latin typeface="Calibri"/>
+              </a:rPr>
+              <a:t>IDOR: caso reale italiano, 100k€ di multa</a:t>
+            </a:r>
+          </a:p>
+        </p:txBody>
+      </p:sp>
+      <p:sp>
+        <p:nvSpPr>
+          <p:cNvPr id="12" name="Oval 11"/>
+          <p:cNvSpPr/>
+          <p:nvPr/>
+        </p:nvSpPr>
+        <p:spPr>
+          <a:xfrm>
+            <a:off x="914400" y="3268980"/>
+            <a:ext cx="777240" cy="777240"/>
+          </a:xfrm>
+          <a:prstGeom prst="ellipse">
+            <a:avLst/>
+          </a:prstGeom>
+          <a:solidFill>
+            <a:srgbClr val="00A0B0"/>
+          </a:solidFill>
+          <a:ln>
+            <a:noFill/>
+          </a:ln>
+        </p:spPr>
+        <p:style>
+          <a:lnRef idx="1">
+            <a:schemeClr val="accent1"/>
+          </a:lnRef>
+          <a:fillRef idx="3">
+            <a:schemeClr val="accent1"/>
+          </a:fillRef>
+          <a:effectRef idx="2">
+            <a:schemeClr val="accent1"/>
+          </a:effectRef>
+          <a:fontRef idx="minor">
+            <a:schemeClr val="lt1"/>
+          </a:fontRef>
+        </p:style>
+        <p:txBody>
+          <a:bodyPr rtlCol="0" anchor="ctr"/>
+          <a:lstStyle/>
+          <a:p>
+            <a:pPr algn="ctr"/>
+          </a:p>
+        </p:txBody>
+      </p:sp>
+      <p:sp>
+        <p:nvSpPr>
+          <p:cNvPr id="13" name="TextBox 12"/>
+          <p:cNvSpPr txBox="1"/>
+          <p:nvPr/>
+        </p:nvSpPr>
+        <p:spPr>
+          <a:xfrm>
+            <a:off x="914400" y="3268980"/>
+            <a:ext cx="777240" cy="777240"/>
+          </a:xfrm>
+          <a:prstGeom prst="rect">
+            <a:avLst/>
+          </a:prstGeom>
+          <a:noFill/>
+        </p:spPr>
+        <p:txBody>
+          <a:bodyPr wrap="square" lIns="45720" rIns="45720" tIns="18288" bIns="18288" anchor="ctr">
+            <a:spAutoFit/>
+          </a:bodyPr>
+          <a:lstStyle/>
+          <a:p>
+            <a:pPr algn="ctr"/>
+            <a:r>
+              <a:rPr sz="2800" b="1" i="0">
+                <a:solidFill>
+                  <a:srgbClr val="FFFFFF"/>
+                </a:solidFill>
+                <a:latin typeface="Calibri"/>
+              </a:rPr>
+              <a:t>3</a:t>
+            </a:r>
+          </a:p>
+        </p:txBody>
+      </p:sp>
+      <p:sp>
+        <p:nvSpPr>
+          <p:cNvPr id="14" name="Rounded Rectangle 13"/>
+          <p:cNvSpPr/>
+          <p:nvPr/>
+        </p:nvSpPr>
+        <p:spPr>
+          <a:xfrm>
+            <a:off x="2011680" y="3268980"/>
+            <a:ext cx="9144000" cy="777240"/>
+          </a:xfrm>
+          <a:prstGeom prst="roundRect">
+            <a:avLst>
+              <a:gd name="adj" fmla="val 8000"/>
+            </a:avLst>
+          </a:prstGeom>
+          <a:solidFill>
+            <a:srgbClr val="FBFBFD"/>
+          </a:solidFill>
+          <a:ln w="19050">
+            <a:solidFill>
+              <a:srgbClr val="00A0B0"/>
+            </a:solidFill>
+          </a:ln>
+        </p:spPr>
+        <p:style>
+          <a:lnRef idx="1">
+            <a:schemeClr val="accent1"/>
+          </a:lnRef>
+          <a:fillRef idx="3">
+            <a:schemeClr val="accent1"/>
+          </a:fillRef>
+          <a:effectRef idx="2">
+            <a:schemeClr val="accent1"/>
+          </a:effectRef>
+          <a:fontRef idx="minor">
+            <a:schemeClr val="lt1"/>
+          </a:fontRef>
+        </p:style>
+        <p:txBody>
+          <a:bodyPr rtlCol="0" anchor="ctr"/>
+          <a:lstStyle/>
+          <a:p>
+            <a:pPr algn="ctr"/>
+          </a:p>
+        </p:txBody>
+      </p:sp>
+      <p:sp>
+        <p:nvSpPr>
+          <p:cNvPr id="15" name="TextBox 14"/>
+          <p:cNvSpPr txBox="1"/>
+          <p:nvPr/>
+        </p:nvSpPr>
+        <p:spPr>
+          <a:xfrm>
+            <a:off x="2286000" y="3268980"/>
+            <a:ext cx="8686800" cy="777240"/>
+          </a:xfrm>
+          <a:prstGeom prst="rect">
+            <a:avLst/>
+          </a:prstGeom>
+          <a:noFill/>
+        </p:spPr>
+        <p:txBody>
+          <a:bodyPr wrap="square" lIns="45720" rIns="45720" tIns="18288" bIns="18288" anchor="ctr">
+            <a:spAutoFit/>
+          </a:bodyPr>
+          <a:lstStyle/>
+          <a:p>
+            <a:pPr algn="l"/>
+            <a:r>
+              <a:rPr sz="1800" b="0" i="0">
+                <a:solidFill>
+                  <a:srgbClr val="1A1A2E"/>
+                </a:solidFill>
+                <a:latin typeface="Calibri"/>
+              </a:rPr>
+              <a:t>401 = non autenticato, 403 = non autorizzato</a:t>
+            </a:r>
+          </a:p>
+        </p:txBody>
+      </p:sp>
+      <p:sp>
+        <p:nvSpPr>
+          <p:cNvPr id="16" name="Oval 15"/>
+          <p:cNvSpPr/>
+          <p:nvPr/>
+        </p:nvSpPr>
+        <p:spPr>
+          <a:xfrm>
+            <a:off x="914400" y="4183380"/>
+            <a:ext cx="777240" cy="777240"/>
+          </a:xfrm>
+          <a:prstGeom prst="ellipse">
+            <a:avLst/>
+          </a:prstGeom>
+          <a:solidFill>
+            <a:srgbClr val="00A0B0"/>
+          </a:solidFill>
+          <a:ln>
+            <a:noFill/>
+          </a:ln>
+        </p:spPr>
+        <p:style>
+          <a:lnRef idx="1">
+            <a:schemeClr val="accent1"/>
+          </a:lnRef>
+          <a:fillRef idx="3">
+            <a:schemeClr val="accent1"/>
+          </a:fillRef>
+          <a:effectRef idx="2">
+            <a:schemeClr val="accent1"/>
+          </a:effectRef>
+          <a:fontRef idx="minor">
+            <a:schemeClr val="lt1"/>
+          </a:fontRef>
+        </p:style>
+        <p:txBody>
+          <a:bodyPr rtlCol="0" anchor="ctr"/>
+          <a:lstStyle/>
+          <a:p>
+            <a:pPr algn="ctr"/>
+          </a:p>
+        </p:txBody>
+      </p:sp>
+      <p:sp>
+        <p:nvSpPr>
+          <p:cNvPr id="17" name="TextBox 16"/>
+          <p:cNvSpPr txBox="1"/>
+          <p:nvPr/>
+        </p:nvSpPr>
+        <p:spPr>
+          <a:xfrm>
+            <a:off x="914400" y="4183380"/>
+            <a:ext cx="777240" cy="777240"/>
+          </a:xfrm>
+          <a:prstGeom prst="rect">
+            <a:avLst/>
+          </a:prstGeom>
+          <a:noFill/>
+        </p:spPr>
+        <p:txBody>
+          <a:bodyPr wrap="square" lIns="45720" rIns="45720" tIns="18288" bIns="18288" anchor="ctr">
+            <a:spAutoFit/>
+          </a:bodyPr>
+          <a:lstStyle/>
+          <a:p>
+            <a:pPr algn="ctr"/>
+            <a:r>
+              <a:rPr sz="2800" b="1" i="0">
+                <a:solidFill>
+                  <a:srgbClr val="FFFFFF"/>
+                </a:solidFill>
+                <a:latin typeface="Calibri"/>
+              </a:rPr>
+              <a:t>4</a:t>
+            </a:r>
+          </a:p>
+        </p:txBody>
+      </p:sp>
+      <p:sp>
+        <p:nvSpPr>
+          <p:cNvPr id="18" name="Rounded Rectangle 17"/>
+          <p:cNvSpPr/>
+          <p:nvPr/>
+        </p:nvSpPr>
+        <p:spPr>
+          <a:xfrm>
+            <a:off x="2011680" y="4183380"/>
+            <a:ext cx="9144000" cy="777240"/>
+          </a:xfrm>
+          <a:prstGeom prst="roundRect">
+            <a:avLst>
+              <a:gd name="adj" fmla="val 8000"/>
+            </a:avLst>
+          </a:prstGeom>
+          <a:solidFill>
+            <a:srgbClr val="FBFBFD"/>
+          </a:solidFill>
+          <a:ln w="19050">
+            <a:solidFill>
+              <a:srgbClr val="00A0B0"/>
+            </a:solidFill>
+          </a:ln>
+        </p:spPr>
+        <p:style>
+          <a:lnRef idx="1">
+            <a:schemeClr val="accent1"/>
+          </a:lnRef>
+          <a:fillRef idx="3">
+            <a:schemeClr val="accent1"/>
+          </a:fillRef>
+          <a:effectRef idx="2">
+            <a:schemeClr val="accent1"/>
+          </a:effectRef>
+          <a:fontRef idx="minor">
+            <a:schemeClr val="lt1"/>
+          </a:fontRef>
+        </p:style>
+        <p:txBody>
+          <a:bodyPr rtlCol="0" anchor="ctr"/>
+          <a:lstStyle/>
+          <a:p>
+            <a:pPr algn="ctr"/>
+          </a:p>
+        </p:txBody>
+      </p:sp>
+      <p:sp>
+        <p:nvSpPr>
+          <p:cNvPr id="19" name="TextBox 18"/>
+          <p:cNvSpPr txBox="1"/>
+          <p:nvPr/>
+        </p:nvSpPr>
+        <p:spPr>
+          <a:xfrm>
+            <a:off x="2286000" y="4183380"/>
+            <a:ext cx="8686800" cy="777240"/>
+          </a:xfrm>
+          <a:prstGeom prst="rect">
+            <a:avLst/>
+          </a:prstGeom>
+          <a:noFill/>
+        </p:spPr>
+        <p:txBody>
+          <a:bodyPr wrap="square" lIns="45720" rIns="45720" tIns="18288" bIns="18288" anchor="ctr">
+            <a:spAutoFit/>
+          </a:bodyPr>
+          <a:lstStyle/>
+          <a:p>
+            <a:pPr algn="l"/>
+            <a:r>
+              <a:rPr sz="1800" b="0" i="0">
+                <a:solidFill>
+                  <a:srgbClr val="1A1A2E"/>
+                </a:solidFill>
+                <a:latin typeface="Calibri"/>
+              </a:rPr>
+              <a:t>Mai MD5/SHA per password — usa bcrypt o Argon2id</a:t>
+            </a:r>
+          </a:p>
+        </p:txBody>
+      </p:sp>
+      <p:sp>
+        <p:nvSpPr>
+          <p:cNvPr id="20" name="Oval 19"/>
+          <p:cNvSpPr/>
+          <p:nvPr/>
+        </p:nvSpPr>
+        <p:spPr>
+          <a:xfrm>
+            <a:off x="914400" y="5097780"/>
+            <a:ext cx="777240" cy="777240"/>
+          </a:xfrm>
+          <a:prstGeom prst="ellipse">
+            <a:avLst/>
+          </a:prstGeom>
+          <a:solidFill>
+            <a:srgbClr val="00A0B0"/>
+          </a:solidFill>
+          <a:ln>
+            <a:noFill/>
+          </a:ln>
+        </p:spPr>
+        <p:style>
+          <a:lnRef idx="1">
+            <a:schemeClr val="accent1"/>
+          </a:lnRef>
+          <a:fillRef idx="3">
+            <a:schemeClr val="accent1"/>
+          </a:fillRef>
+          <a:effectRef idx="2">
+            <a:schemeClr val="accent1"/>
+          </a:effectRef>
+          <a:fontRef idx="minor">
+            <a:schemeClr val="lt1"/>
+          </a:fontRef>
+        </p:style>
+        <p:txBody>
+          <a:bodyPr rtlCol="0" anchor="ctr"/>
+          <a:lstStyle/>
+          <a:p>
+            <a:pPr algn="ctr"/>
+          </a:p>
+        </p:txBody>
+      </p:sp>
+      <p:sp>
+        <p:nvSpPr>
+          <p:cNvPr id="21" name="TextBox 20"/>
+          <p:cNvSpPr txBox="1"/>
+          <p:nvPr/>
+        </p:nvSpPr>
+        <p:spPr>
+          <a:xfrm>
+            <a:off x="914400" y="5097780"/>
+            <a:ext cx="777240" cy="777240"/>
+          </a:xfrm>
+          <a:prstGeom prst="rect">
+            <a:avLst/>
+          </a:prstGeom>
+          <a:noFill/>
+        </p:spPr>
+        <p:txBody>
+          <a:bodyPr wrap="square" lIns="45720" rIns="45720" tIns="18288" bIns="18288" anchor="ctr">
+            <a:spAutoFit/>
+          </a:bodyPr>
+          <a:lstStyle/>
+          <a:p>
+            <a:pPr algn="ctr"/>
+            <a:r>
+              <a:rPr sz="2800" b="1" i="0">
+                <a:solidFill>
+                  <a:srgbClr val="FFFFFF"/>
+                </a:solidFill>
+                <a:latin typeface="Calibri"/>
+              </a:rPr>
+              <a:t>5</a:t>
+            </a:r>
+          </a:p>
+        </p:txBody>
+      </p:sp>
+      <p:sp>
+        <p:nvSpPr>
+          <p:cNvPr id="22" name="Rounded Rectangle 21"/>
+          <p:cNvSpPr/>
+          <p:nvPr/>
+        </p:nvSpPr>
+        <p:spPr>
+          <a:xfrm>
+            <a:off x="2011680" y="5097780"/>
+            <a:ext cx="9144000" cy="777240"/>
+          </a:xfrm>
+          <a:prstGeom prst="roundRect">
+            <a:avLst>
+              <a:gd name="adj" fmla="val 8000"/>
+            </a:avLst>
+          </a:prstGeom>
+          <a:solidFill>
+            <a:srgbClr val="FBFBFD"/>
+          </a:solidFill>
+          <a:ln w="19050">
+            <a:solidFill>
+              <a:srgbClr val="00A0B0"/>
+            </a:solidFill>
+          </a:ln>
+        </p:spPr>
+        <p:style>
+          <a:lnRef idx="1">
+            <a:schemeClr val="accent1"/>
+          </a:lnRef>
+          <a:fillRef idx="3">
+            <a:schemeClr val="accent1"/>
+          </a:fillRef>
+          <a:effectRef idx="2">
+            <a:schemeClr val="accent1"/>
+          </a:effectRef>
+          <a:fontRef idx="minor">
+            <a:schemeClr val="lt1"/>
+          </a:fontRef>
+        </p:style>
+        <p:txBody>
+          <a:bodyPr rtlCol="0" anchor="ctr"/>
+          <a:lstStyle/>
+          <a:p>
+            <a:pPr algn="ctr"/>
+          </a:p>
+        </p:txBody>
+      </p:sp>
+      <p:sp>
+        <p:nvSpPr>
+          <p:cNvPr id="23" name="TextBox 22"/>
+          <p:cNvSpPr txBox="1"/>
+          <p:nvPr/>
+        </p:nvSpPr>
+        <p:spPr>
+          <a:xfrm>
+            <a:off x="2286000" y="5097780"/>
+            <a:ext cx="8686800" cy="777240"/>
+          </a:xfrm>
+          <a:prstGeom prst="rect">
+            <a:avLst/>
+          </a:prstGeom>
+          <a:noFill/>
+        </p:spPr>
+        <p:txBody>
+          <a:bodyPr wrap="square" lIns="45720" rIns="45720" tIns="18288" bIns="18288" anchor="ctr">
+            <a:spAutoFit/>
+          </a:bodyPr>
+          <a:lstStyle/>
+          <a:p>
+            <a:pPr algn="l"/>
+            <a:r>
+              <a:rPr sz="1800" b="0" i="0">
+                <a:solidFill>
+                  <a:srgbClr val="1A1A2E"/>
+                </a:solidFill>
+                <a:latin typeface="Calibri"/>
+              </a:rPr>
+              <a:t>Apri il DB con DB Browser: il visivo è dirimente</a:t>
             </a:r>
           </a:p>
         </p:txBody>
       </p:sp>
       <p:cxnSp>
         <p:nvCxnSpPr>
-          <p:cNvPr id="9" name="Connector 8"/>
+          <p:cNvPr id="24" name="Connector 23"/>
           <p:cNvCxnSpPr/>
           <p:nvPr/>
         </p:nvCxnSpPr>
@@ -5715,7 +5800,7 @@
       </p:cxnSp>
       <p:sp>
         <p:nvSpPr>
-          <p:cNvPr id="10" name="TextBox 9"/>
+          <p:cNvPr id="25" name="TextBox 24"/>
           <p:cNvSpPr txBox="1"/>
           <p:nvPr/>
         </p:nvSpPr>
@@ -5750,7 +5835,7 @@
       </p:sp>
       <p:sp>
         <p:nvSpPr>
-          <p:cNvPr id="11" name="TextBox 10"/>
+          <p:cNvPr id="26" name="TextBox 25"/>
           <p:cNvSpPr txBox="1"/>
           <p:nvPr/>
         </p:nvSpPr>
@@ -5778,7 +5863,7 @@
                 </a:solidFill>
                 <a:latin typeface="Calibri"/>
               </a:rPr>
-              <a:t>L4  ·  13/14</a:t>
+              <a:t>L4  ·  13/15</a:t>
             </a:r>
           </a:p>
         </p:txBody>
@@ -5810,7 +5895,7 @@
         <p:spPr>
           <a:xfrm>
             <a:off x="0" y="0"/>
-            <a:ext cx="12191695" cy="6858000"/>
+            <a:ext cx="4114800" cy="6858000"/>
           </a:xfrm>
           <a:prstGeom prst="rect">
             <a:avLst/>
@@ -5846,6 +5931,398 @@
       </p:sp>
       <p:sp>
         <p:nvSpPr>
+          <p:cNvPr id="3" name="Rectangle 2"/>
+          <p:cNvSpPr/>
+          <p:nvPr/>
+        </p:nvSpPr>
+        <p:spPr>
+          <a:xfrm>
+            <a:off x="4114800" y="0"/>
+            <a:ext cx="8046720" cy="6858000"/>
+          </a:xfrm>
+          <a:prstGeom prst="rect">
+            <a:avLst/>
+          </a:prstGeom>
+          <a:solidFill>
+            <a:srgbClr val="F1F4F8"/>
+          </a:solidFill>
+          <a:ln>
+            <a:noFill/>
+          </a:ln>
+        </p:spPr>
+        <p:style>
+          <a:lnRef idx="1">
+            <a:schemeClr val="accent1"/>
+          </a:lnRef>
+          <a:fillRef idx="3">
+            <a:schemeClr val="accent1"/>
+          </a:fillRef>
+          <a:effectRef idx="2">
+            <a:schemeClr val="accent1"/>
+          </a:effectRef>
+          <a:fontRef idx="minor">
+            <a:schemeClr val="lt1"/>
+          </a:fontRef>
+        </p:style>
+        <p:txBody>
+          <a:bodyPr rtlCol="0" anchor="ctr"/>
+          <a:lstStyle/>
+          <a:p>
+            <a:pPr algn="ctr"/>
+          </a:p>
+        </p:txBody>
+      </p:sp>
+      <p:sp>
+        <p:nvSpPr>
+          <p:cNvPr id="4" name="Rectangle 3"/>
+          <p:cNvSpPr/>
+          <p:nvPr/>
+        </p:nvSpPr>
+        <p:spPr>
+          <a:xfrm>
+            <a:off x="4114800" y="0"/>
+            <a:ext cx="137160" cy="6858000"/>
+          </a:xfrm>
+          <a:prstGeom prst="rect">
+            <a:avLst/>
+          </a:prstGeom>
+          <a:solidFill>
+            <a:srgbClr val="00A0B0"/>
+          </a:solidFill>
+          <a:ln>
+            <a:noFill/>
+          </a:ln>
+        </p:spPr>
+        <p:style>
+          <a:lnRef idx="1">
+            <a:schemeClr val="accent1"/>
+          </a:lnRef>
+          <a:fillRef idx="3">
+            <a:schemeClr val="accent1"/>
+          </a:fillRef>
+          <a:effectRef idx="2">
+            <a:schemeClr val="accent1"/>
+          </a:effectRef>
+          <a:fontRef idx="minor">
+            <a:schemeClr val="lt1"/>
+          </a:fontRef>
+        </p:style>
+        <p:txBody>
+          <a:bodyPr rtlCol="0" anchor="ctr"/>
+          <a:lstStyle/>
+          <a:p>
+            <a:pPr algn="ctr"/>
+          </a:p>
+        </p:txBody>
+      </p:sp>
+      <p:sp>
+        <p:nvSpPr>
+          <p:cNvPr id="5" name="TextBox 4"/>
+          <p:cNvSpPr txBox="1"/>
+          <p:nvPr/>
+        </p:nvSpPr>
+        <p:spPr>
+          <a:xfrm>
+            <a:off x="274320" y="2103120"/>
+            <a:ext cx="3657600" cy="2286000"/>
+          </a:xfrm>
+          <a:prstGeom prst="rect">
+            <a:avLst/>
+          </a:prstGeom>
+          <a:noFill/>
+        </p:spPr>
+        <p:txBody>
+          <a:bodyPr wrap="square" lIns="45720" rIns="45720" tIns="18288" bIns="18288" anchor="t">
+            <a:spAutoFit/>
+          </a:bodyPr>
+          <a:lstStyle/>
+          <a:p>
+            <a:pPr algn="ctr"/>
+            <a:r>
+              <a:rPr sz="17000" b="1" i="0">
+                <a:solidFill>
+                  <a:srgbClr val="00A0B0"/>
+                </a:solidFill>
+                <a:latin typeface="Calibri"/>
+              </a:rPr>
+              <a:t>03</a:t>
+            </a:r>
+          </a:p>
+        </p:txBody>
+      </p:sp>
+      <p:sp>
+        <p:nvSpPr>
+          <p:cNvPr id="6" name="TextBox 5"/>
+          <p:cNvSpPr txBox="1"/>
+          <p:nvPr/>
+        </p:nvSpPr>
+        <p:spPr>
+          <a:xfrm>
+            <a:off x="274320" y="4572000"/>
+            <a:ext cx="3657600" cy="457200"/>
+          </a:xfrm>
+          <a:prstGeom prst="rect">
+            <a:avLst/>
+          </a:prstGeom>
+          <a:noFill/>
+        </p:spPr>
+        <p:txBody>
+          <a:bodyPr wrap="square" lIns="45720" rIns="45720" tIns="18288" bIns="18288" anchor="t">
+            <a:spAutoFit/>
+          </a:bodyPr>
+          <a:lstStyle/>
+          <a:p>
+            <a:pPr algn="ctr"/>
+            <a:r>
+              <a:rPr sz="2000" b="1" i="0">
+                <a:solidFill>
+                  <a:srgbClr val="6FD8E0"/>
+                </a:solidFill>
+                <a:latin typeface="Calibri"/>
+              </a:rPr>
+              <a:t>PARTE</a:t>
+            </a:r>
+          </a:p>
+        </p:txBody>
+      </p:sp>
+      <p:sp>
+        <p:nvSpPr>
+          <p:cNvPr id="7" name="TextBox 6"/>
+          <p:cNvSpPr txBox="1"/>
+          <p:nvPr/>
+        </p:nvSpPr>
+        <p:spPr>
+          <a:xfrm>
+            <a:off x="4572000" y="2286000"/>
+            <a:ext cx="7315200" cy="1645920"/>
+          </a:xfrm>
+          <a:prstGeom prst="rect">
+            <a:avLst/>
+          </a:prstGeom>
+          <a:noFill/>
+        </p:spPr>
+        <p:txBody>
+          <a:bodyPr wrap="square" lIns="45720" rIns="45720" tIns="18288" bIns="18288" anchor="t">
+            <a:spAutoFit/>
+          </a:bodyPr>
+          <a:lstStyle/>
+          <a:p>
+            <a:pPr algn="l"/>
+            <a:r>
+              <a:rPr sz="4400" b="1" i="0">
+                <a:solidFill>
+                  <a:srgbClr val="0F2D52"/>
+                </a:solidFill>
+                <a:latin typeface="Calibri"/>
+              </a:rPr>
+              <a:t>Laboratorio</a:t>
+            </a:r>
+          </a:p>
+        </p:txBody>
+      </p:sp>
+      <p:sp>
+        <p:nvSpPr>
+          <p:cNvPr id="8" name="TextBox 7"/>
+          <p:cNvSpPr txBox="1"/>
+          <p:nvPr/>
+        </p:nvSpPr>
+        <p:spPr>
+          <a:xfrm>
+            <a:off x="4572000" y="3931920"/>
+            <a:ext cx="7315200" cy="1828800"/>
+          </a:xfrm>
+          <a:prstGeom prst="rect">
+            <a:avLst/>
+          </a:prstGeom>
+          <a:noFill/>
+        </p:spPr>
+        <p:txBody>
+          <a:bodyPr wrap="square" lIns="45720" rIns="45720" tIns="18288" bIns="18288" anchor="t">
+            <a:spAutoFit/>
+          </a:bodyPr>
+          <a:lstStyle/>
+          <a:p>
+            <a:pPr algn="l"/>
+            <a:r>
+              <a:rPr sz="1800" b="0" i="1">
+                <a:solidFill>
+                  <a:srgbClr val="6B7280"/>
+                </a:solidFill>
+                <a:latin typeface="Calibri"/>
+              </a:rPr>
+              <a:t>Aggiungere ownership check e migrare a bcrypt</a:t>
+            </a:r>
+          </a:p>
+        </p:txBody>
+      </p:sp>
+      <p:cxnSp>
+        <p:nvCxnSpPr>
+          <p:cNvPr id="9" name="Connector 8"/>
+          <p:cNvCxnSpPr/>
+          <p:nvPr/>
+        </p:nvCxnSpPr>
+        <p:spPr>
+          <a:xfrm>
+            <a:off x="457200" y="6446520"/>
+            <a:ext cx="11274552" cy="0"/>
+          </a:xfrm>
+          <a:prstGeom prst="line">
+            <a:avLst/>
+          </a:prstGeom>
+          <a:ln w="19050">
+            <a:solidFill>
+              <a:srgbClr val="00A0B0"/>
+            </a:solidFill>
+          </a:ln>
+        </p:spPr>
+        <p:style>
+          <a:lnRef idx="2">
+            <a:schemeClr val="accent1"/>
+          </a:lnRef>
+          <a:fillRef idx="0">
+            <a:schemeClr val="accent1"/>
+          </a:fillRef>
+          <a:effectRef idx="1">
+            <a:schemeClr val="accent1"/>
+          </a:effectRef>
+          <a:fontRef idx="minor">
+            <a:schemeClr val="tx1"/>
+          </a:fontRef>
+        </p:style>
+      </p:cxnSp>
+      <p:sp>
+        <p:nvSpPr>
+          <p:cNvPr id="10" name="TextBox 9"/>
+          <p:cNvSpPr txBox="1"/>
+          <p:nvPr/>
+        </p:nvSpPr>
+        <p:spPr>
+          <a:xfrm>
+            <a:off x="457200" y="6473952"/>
+            <a:ext cx="7315200" cy="292608"/>
+          </a:xfrm>
+          <a:prstGeom prst="rect">
+            <a:avLst/>
+          </a:prstGeom>
+          <a:noFill/>
+        </p:spPr>
+        <p:txBody>
+          <a:bodyPr wrap="square" lIns="45720" rIns="45720" tIns="18288" bIns="18288" anchor="t">
+            <a:spAutoFit/>
+          </a:bodyPr>
+          <a:lstStyle/>
+          <a:p>
+            <a:pPr algn="l"/>
+            <a:r>
+              <a:rPr sz="1000" b="0" i="0">
+                <a:solidFill>
+                  <a:srgbClr val="6B7280"/>
+                </a:solidFill>
+                <a:latin typeface="Calibri"/>
+              </a:rPr>
+              <a:t>Secure Coding · Corso IFTS STEM · A. Manneschi · 2024/2025</a:t>
+            </a:r>
+          </a:p>
+        </p:txBody>
+      </p:sp>
+      <p:sp>
+        <p:nvSpPr>
+          <p:cNvPr id="11" name="TextBox 10"/>
+          <p:cNvSpPr txBox="1"/>
+          <p:nvPr/>
+        </p:nvSpPr>
+        <p:spPr>
+          <a:xfrm>
+            <a:off x="10515600" y="6473952"/>
+            <a:ext cx="1188720" cy="292608"/>
+          </a:xfrm>
+          <a:prstGeom prst="rect">
+            <a:avLst/>
+          </a:prstGeom>
+          <a:noFill/>
+        </p:spPr>
+        <p:txBody>
+          <a:bodyPr wrap="square" lIns="45720" rIns="45720" tIns="18288" bIns="18288" anchor="t">
+            <a:spAutoFit/>
+          </a:bodyPr>
+          <a:lstStyle/>
+          <a:p>
+            <a:pPr algn="r"/>
+            <a:r>
+              <a:rPr sz="1000" b="1" i="0">
+                <a:solidFill>
+                  <a:srgbClr val="6B7280"/>
+                </a:solidFill>
+                <a:latin typeface="Calibri"/>
+              </a:rPr>
+              <a:t>L4  ·  14/15</a:t>
+            </a:r>
+          </a:p>
+        </p:txBody>
+      </p:sp>
+    </p:spTree>
+  </p:cSld>
+  <p:clrMapOvr>
+    <a:masterClrMapping/>
+  </p:clrMapOvr>
+</p:sld>
+</file>
+
+<file path=ppt/slides/slide15.xml><?xml version="1.0" encoding="utf-8"?>
+<p:sld xmlns:a="http://schemas.openxmlformats.org/drawingml/2006/main" xmlns:p="http://schemas.openxmlformats.org/presentationml/2006/main" xmlns:r="http://schemas.openxmlformats.org/officeDocument/2006/relationships">
+  <p:cSld>
+    <p:spTree>
+      <p:nvGrpSpPr>
+        <p:cNvPr id="1" name=""/>
+        <p:cNvGrpSpPr/>
+        <p:nvPr/>
+      </p:nvGrpSpPr>
+      <p:grpSpPr/>
+      <p:sp>
+        <p:nvSpPr>
+          <p:cNvPr id="2" name="Rectangle 1"/>
+          <p:cNvSpPr/>
+          <p:nvPr/>
+        </p:nvSpPr>
+        <p:spPr>
+          <a:xfrm>
+            <a:off x="0" y="0"/>
+            <a:ext cx="12191695" cy="6858000"/>
+          </a:xfrm>
+          <a:prstGeom prst="rect">
+            <a:avLst/>
+          </a:prstGeom>
+          <a:solidFill>
+            <a:srgbClr val="081B33"/>
+          </a:solidFill>
+          <a:ln>
+            <a:noFill/>
+          </a:ln>
+        </p:spPr>
+        <p:style>
+          <a:lnRef idx="1">
+            <a:schemeClr val="accent1"/>
+          </a:lnRef>
+          <a:fillRef idx="3">
+            <a:schemeClr val="accent1"/>
+          </a:fillRef>
+          <a:effectRef idx="2">
+            <a:schemeClr val="accent1"/>
+          </a:effectRef>
+          <a:fontRef idx="minor">
+            <a:schemeClr val="lt1"/>
+          </a:fontRef>
+        </p:style>
+        <p:txBody>
+          <a:bodyPr rtlCol="0" anchor="ctr"/>
+          <a:lstStyle/>
+          <a:p>
+            <a:pPr algn="ctr"/>
+          </a:p>
+        </p:txBody>
+      </p:sp>
+      <p:sp>
+        <p:nvSpPr>
           <p:cNvPr id="3" name="Oval 2"/>
           <p:cNvSpPr/>
           <p:nvPr/>
@@ -6258,7 +6735,7 @@
                 </a:solidFill>
                 <a:latin typeface="Calibri"/>
               </a:rPr>
-              <a:t>L4  ·  14/14</a:t>
+              <a:t>L4  ·  15/15</a:t>
             </a:r>
           </a:p>
         </p:txBody>
@@ -7094,7 +7571,7 @@
                 </a:solidFill>
                 <a:latin typeface="Calibri"/>
               </a:rPr>
-              <a:t>L4  ·  2/14</a:t>
+              <a:t>L4  ·  2/15</a:t>
             </a:r>
           </a:p>
         </p:txBody>
@@ -7987,7 +8464,7 @@
                 </a:solidFill>
                 <a:latin typeface="Calibri"/>
               </a:rPr>
-              <a:t>L4  ·  3/14</a:t>
+              <a:t>L4  ·  3/15</a:t>
             </a:r>
           </a:p>
         </p:txBody>
@@ -8379,7 +8856,7 @@
                 </a:solidFill>
                 <a:latin typeface="Calibri"/>
               </a:rPr>
-              <a:t>L4  ·  4/14</a:t>
+              <a:t>L4  ·  4/15</a:t>
             </a:r>
           </a:p>
         </p:txBody>
@@ -8475,45 +8952,21 @@
                 </a:solidFill>
                 <a:latin typeface="Calibri"/>
               </a:rPr>
-              <a:t>Soluzione: ownership check</a:t>
-            </a:r>
-          </a:p>
-        </p:txBody>
-      </p:sp>
-      <p:pic>
-        <p:nvPicPr>
-          <p:cNvPr id="4" name="Picture 3" descr="cap4_idor_safe.png"/>
-          <p:cNvPicPr>
-            <a:picLocks noChangeAspect="1"/>
-          </p:cNvPicPr>
-          <p:nvPr/>
-        </p:nvPicPr>
-        <p:blipFill>
-          <a:blip r:embed="rId2"/>
-          <a:stretch>
-            <a:fillRect/>
-          </a:stretch>
-        </p:blipFill>
-        <p:spPr>
-          <a:xfrm>
-            <a:off x="640080" y="1097280"/>
-            <a:ext cx="10881360" cy="4572000"/>
-          </a:xfrm>
-          <a:prstGeom prst="rect">
-            <a:avLst/>
-          </a:prstGeom>
-        </p:spPr>
-      </p:pic>
-      <p:sp>
-        <p:nvSpPr>
-          <p:cNvPr id="5" name="TextBox 4"/>
+              <a:t>⚖  Caso reale italiano — 100.000€ di multa</a:t>
+            </a:r>
+          </a:p>
+        </p:txBody>
+      </p:sp>
+      <p:sp>
+        <p:nvSpPr>
+          <p:cNvPr id="4" name="TextBox 3"/>
           <p:cNvSpPr txBox="1"/>
           <p:nvPr/>
         </p:nvSpPr>
         <p:spPr>
           <a:xfrm>
-            <a:off x="457200" y="5852160"/>
-            <a:ext cx="11247120" cy="365760"/>
+            <a:off x="457200" y="914400"/>
+            <a:ext cx="11247120" cy="457200"/>
           </a:xfrm>
           <a:prstGeom prst="rect">
             <a:avLst/>
@@ -8526,15 +8979,290 @@
           </a:bodyPr>
           <a:lstStyle/>
           <a:p>
-            <a:pPr algn="ctr"/>
-            <a:r>
-              <a:rPr sz="1300" b="0" i="1">
-                <a:solidFill>
-                  <a:srgbClr val="6B7280"/>
-                </a:solidFill>
-                <a:latin typeface="Calibri"/>
-              </a:rPr>
-              <a:t>filter_by(owner_id=...) è la riga che evita una multa da 100k€</a:t>
+            <a:pPr algn="l"/>
+            <a:r>
+              <a:rPr sz="1500" b="0" i="1">
+                <a:solidFill>
+                  <a:srgbClr val="00A0B0"/>
+                </a:solidFill>
+                <a:latin typeface="Calibri"/>
+              </a:rPr>
+              <a:t>Provvedimento Garante: dati personali esposti senza ownership check</a:t>
+            </a:r>
+          </a:p>
+        </p:txBody>
+      </p:sp>
+      <p:sp>
+        <p:nvSpPr>
+          <p:cNvPr id="5" name="TextBox 4"/>
+          <p:cNvSpPr txBox="1"/>
+          <p:nvPr/>
+        </p:nvSpPr>
+        <p:spPr>
+          <a:xfrm>
+            <a:off x="640080" y="1554480"/>
+            <a:ext cx="10972800" cy="5029200"/>
+          </a:xfrm>
+          <a:prstGeom prst="rect">
+            <a:avLst/>
+          </a:prstGeom>
+          <a:noFill/>
+        </p:spPr>
+        <p:txBody>
+          <a:bodyPr wrap="square">
+            <a:spAutoFit/>
+          </a:bodyPr>
+          <a:lstStyle/>
+          <a:p>
+            <a:pPr>
+              <a:lnSpc>
+                <a:spcPct val="150000"/>
+              </a:lnSpc>
+              <a:spcAft>
+                <a:spcPts val="400"/>
+              </a:spcAft>
+            </a:pPr>
+            <a:r>
+              <a:rPr sz="2000" b="1">
+                <a:solidFill>
+                  <a:srgbClr val="00A0B0"/>
+                </a:solidFill>
+                <a:latin typeface="Calibri"/>
+              </a:rPr>
+              <a:t>▸  </a:t>
+            </a:r>
+            <a:r>
+              <a:rPr sz="2000">
+                <a:solidFill>
+                  <a:srgbClr val="1A1A2E"/>
+                </a:solidFill>
+                <a:latin typeface="Calibri"/>
+              </a:rPr>
+              <a:t>2022, e-commerce italiano</a:t>
+            </a:r>
+          </a:p>
+          <a:p>
+            <a:pPr>
+              <a:lnSpc>
+                <a:spcPct val="150000"/>
+              </a:lnSpc>
+              <a:spcAft>
+                <a:spcPts val="400"/>
+              </a:spcAft>
+            </a:pPr>
+            <a:r>
+              <a:rPr sz="2000" b="1">
+                <a:solidFill>
+                  <a:srgbClr val="00A0B0"/>
+                </a:solidFill>
+                <a:latin typeface="Calibri"/>
+              </a:rPr>
+              <a:t>▸  </a:t>
+            </a:r>
+            <a:r>
+              <a:rPr sz="2000">
+                <a:solidFill>
+                  <a:srgbClr val="1A1A2E"/>
+                </a:solidFill>
+                <a:latin typeface="Calibri"/>
+              </a:rPr>
+              <a:t>URL /ordine/&lt;id&gt; non protetti</a:t>
+            </a:r>
+          </a:p>
+          <a:p>
+            <a:pPr>
+              <a:lnSpc>
+                <a:spcPct val="150000"/>
+              </a:lnSpc>
+              <a:spcAft>
+                <a:spcPts val="400"/>
+              </a:spcAft>
+            </a:pPr>
+            <a:r>
+              <a:rPr sz="2000" b="1">
+                <a:solidFill>
+                  <a:srgbClr val="00A0B0"/>
+                </a:solidFill>
+                <a:latin typeface="Calibri"/>
+              </a:rPr>
+              <a:t>▸  </a:t>
+            </a:r>
+            <a:r>
+              <a:rPr sz="2000">
+                <a:solidFill>
+                  <a:srgbClr val="1A1A2E"/>
+                </a:solidFill>
+                <a:latin typeface="Calibri"/>
+              </a:rPr>
+              <a:t>Cambiando l'ID nell'URL si vedevano ordini di altri clienti</a:t>
+            </a:r>
+          </a:p>
+          <a:p>
+            <a:pPr>
+              <a:lnSpc>
+                <a:spcPct val="150000"/>
+              </a:lnSpc>
+              <a:spcAft>
+                <a:spcPts val="400"/>
+              </a:spcAft>
+            </a:pPr>
+            <a:r>
+              <a:rPr sz="2000" b="1">
+                <a:solidFill>
+                  <a:srgbClr val="00A0B0"/>
+                </a:solidFill>
+                <a:latin typeface="Calibri"/>
+              </a:rPr>
+              <a:t>▸  </a:t>
+            </a:r>
+            <a:r>
+              <a:rPr sz="2000">
+                <a:solidFill>
+                  <a:srgbClr val="1A1A2E"/>
+                </a:solidFill>
+                <a:latin typeface="Calibri"/>
+              </a:rPr>
+              <a:t>  con indirizzi, prodotti, importi, IBAN</a:t>
+            </a:r>
+          </a:p>
+          <a:p>
+            <a:pPr>
+              <a:lnSpc>
+                <a:spcPct val="150000"/>
+              </a:lnSpc>
+              <a:spcAft>
+                <a:spcPts val="400"/>
+              </a:spcAft>
+            </a:pPr>
+            <a:r>
+              <a:rPr sz="2000" b="1">
+                <a:solidFill>
+                  <a:srgbClr val="00A0B0"/>
+                </a:solidFill>
+                <a:latin typeface="Calibri"/>
+              </a:rPr>
+              <a:t>▸  </a:t>
+            </a:r>
+            <a:r>
+              <a:rPr sz="2000">
+                <a:solidFill>
+                  <a:srgbClr val="1A1A2E"/>
+                </a:solidFill>
+                <a:latin typeface="Calibri"/>
+              </a:rPr>
+              <a:t/>
+            </a:r>
+          </a:p>
+          <a:p>
+            <a:pPr>
+              <a:lnSpc>
+                <a:spcPct val="150000"/>
+              </a:lnSpc>
+              <a:spcAft>
+                <a:spcPts val="400"/>
+              </a:spcAft>
+            </a:pPr>
+            <a:r>
+              <a:rPr sz="2000" b="1">
+                <a:solidFill>
+                  <a:srgbClr val="00A0B0"/>
+                </a:solidFill>
+                <a:latin typeface="Calibri"/>
+              </a:rPr>
+              <a:t>▸  </a:t>
+            </a:r>
+            <a:r>
+              <a:rPr sz="2000">
+                <a:solidFill>
+                  <a:srgbClr val="1A1A2E"/>
+                </a:solidFill>
+                <a:latin typeface="Calibri"/>
+              </a:rPr>
+              <a:t>Sanzione Garante Privacy: ~100.000€</a:t>
+            </a:r>
+          </a:p>
+          <a:p>
+            <a:pPr>
+              <a:lnSpc>
+                <a:spcPct val="150000"/>
+              </a:lnSpc>
+              <a:spcAft>
+                <a:spcPts val="400"/>
+              </a:spcAft>
+            </a:pPr>
+            <a:r>
+              <a:rPr sz="2000" b="1">
+                <a:solidFill>
+                  <a:srgbClr val="00A0B0"/>
+                </a:solidFill>
+                <a:latin typeface="Calibri"/>
+              </a:rPr>
+              <a:t>▸  </a:t>
+            </a:r>
+            <a:r>
+              <a:rPr sz="2000">
+                <a:solidFill>
+                  <a:srgbClr val="1A1A2E"/>
+                </a:solidFill>
+                <a:latin typeface="Calibri"/>
+              </a:rPr>
+              <a:t>GDPR Art. 25 (Privacy by Design) + Art. 32 (sicurezza)</a:t>
+            </a:r>
+          </a:p>
+          <a:p>
+            <a:pPr>
+              <a:lnSpc>
+                <a:spcPct val="150000"/>
+              </a:lnSpc>
+              <a:spcAft>
+                <a:spcPts val="400"/>
+              </a:spcAft>
+            </a:pPr>
+            <a:r>
+              <a:rPr sz="2000" b="1">
+                <a:solidFill>
+                  <a:srgbClr val="00A0B0"/>
+                </a:solidFill>
+                <a:latin typeface="Calibri"/>
+              </a:rPr>
+              <a:t>▸  </a:t>
+            </a:r>
+            <a:r>
+              <a:rPr sz="2000">
+                <a:solidFill>
+                  <a:srgbClr val="1A1A2E"/>
+                </a:solidFill>
+                <a:latin typeface="Calibri"/>
+              </a:rPr>
+              <a:t/>
+            </a:r>
+          </a:p>
+          <a:p>
+            <a:pPr>
+              <a:lnSpc>
+                <a:spcPct val="150000"/>
+              </a:lnSpc>
+              <a:spcAft>
+                <a:spcPts val="400"/>
+              </a:spcAft>
+            </a:pPr>
+            <a:r>
+              <a:rPr sz="2000" b="1">
+                <a:solidFill>
+                  <a:srgbClr val="00A0B0"/>
+                </a:solidFill>
+                <a:latin typeface="Calibri"/>
+              </a:rPr>
+              <a:t>▸  </a:t>
+            </a:r>
+            <a:r>
+              <a:rPr sz="2000">
+                <a:solidFill>
+                  <a:srgbClr val="1A1A2E"/>
+                </a:solidFill>
+                <a:latin typeface="Calibri"/>
+              </a:rPr>
+              <a:t>Una sola riga di codice in più avrebbe evitato tutto questo</a:t>
             </a:r>
           </a:p>
         </p:txBody>
@@ -8639,7 +9367,7 @@
                 </a:solidFill>
                 <a:latin typeface="Calibri"/>
               </a:rPr>
-              <a:t>L4  ·  5/14</a:t>
+              <a:t>L4  ·  5/15</a:t>
             </a:r>
           </a:p>
         </p:txBody>
@@ -8653,6 +9381,266 @@
 </file>
 
 <file path=ppt/slides/slide6.xml><?xml version="1.0" encoding="utf-8"?>
+<p:sld xmlns:a="http://schemas.openxmlformats.org/drawingml/2006/main" xmlns:p="http://schemas.openxmlformats.org/presentationml/2006/main" xmlns:r="http://schemas.openxmlformats.org/officeDocument/2006/relationships">
+  <p:cSld>
+    <p:spTree>
+      <p:nvGrpSpPr>
+        <p:cNvPr id="1" name=""/>
+        <p:cNvGrpSpPr/>
+        <p:nvPr/>
+      </p:nvGrpSpPr>
+      <p:grpSpPr/>
+      <p:sp>
+        <p:nvSpPr>
+          <p:cNvPr id="2" name="Rectangle 1"/>
+          <p:cNvSpPr/>
+          <p:nvPr/>
+        </p:nvSpPr>
+        <p:spPr>
+          <a:xfrm>
+            <a:off x="0" y="0"/>
+            <a:ext cx="12191695" cy="777240"/>
+          </a:xfrm>
+          <a:prstGeom prst="rect">
+            <a:avLst/>
+          </a:prstGeom>
+          <a:solidFill>
+            <a:srgbClr val="0F2D52"/>
+          </a:solidFill>
+          <a:ln>
+            <a:noFill/>
+          </a:ln>
+        </p:spPr>
+        <p:style>
+          <a:lnRef idx="1">
+            <a:schemeClr val="accent1"/>
+          </a:lnRef>
+          <a:fillRef idx="3">
+            <a:schemeClr val="accent1"/>
+          </a:fillRef>
+          <a:effectRef idx="2">
+            <a:schemeClr val="accent1"/>
+          </a:effectRef>
+          <a:fontRef idx="minor">
+            <a:schemeClr val="lt1"/>
+          </a:fontRef>
+        </p:style>
+        <p:txBody>
+          <a:bodyPr rtlCol="0" anchor="ctr"/>
+          <a:lstStyle/>
+          <a:p>
+            <a:pPr algn="ctr"/>
+          </a:p>
+        </p:txBody>
+      </p:sp>
+      <p:sp>
+        <p:nvSpPr>
+          <p:cNvPr id="3" name="TextBox 2"/>
+          <p:cNvSpPr txBox="1"/>
+          <p:nvPr/>
+        </p:nvSpPr>
+        <p:spPr>
+          <a:xfrm>
+            <a:off x="457200" y="164592"/>
+            <a:ext cx="10972800" cy="502920"/>
+          </a:xfrm>
+          <a:prstGeom prst="rect">
+            <a:avLst/>
+          </a:prstGeom>
+          <a:noFill/>
+        </p:spPr>
+        <p:txBody>
+          <a:bodyPr wrap="square" lIns="45720" rIns="45720" tIns="18288" bIns="18288" anchor="ctr">
+            <a:spAutoFit/>
+          </a:bodyPr>
+          <a:lstStyle/>
+          <a:p>
+            <a:pPr algn="l"/>
+            <a:r>
+              <a:rPr sz="2400" b="1" i="0">
+                <a:solidFill>
+                  <a:srgbClr val="FFFFFF"/>
+                </a:solidFill>
+                <a:latin typeface="Calibri"/>
+              </a:rPr>
+              <a:t>Soluzione: ownership check</a:t>
+            </a:r>
+          </a:p>
+        </p:txBody>
+      </p:sp>
+      <p:pic>
+        <p:nvPicPr>
+          <p:cNvPr id="4" name="Picture 3" descr="cap4_idor_safe.png"/>
+          <p:cNvPicPr>
+            <a:picLocks noChangeAspect="1"/>
+          </p:cNvPicPr>
+          <p:nvPr/>
+        </p:nvPicPr>
+        <p:blipFill>
+          <a:blip r:embed="rId2"/>
+          <a:stretch>
+            <a:fillRect/>
+          </a:stretch>
+        </p:blipFill>
+        <p:spPr>
+          <a:xfrm>
+            <a:off x="640080" y="1097280"/>
+            <a:ext cx="10881360" cy="4572000"/>
+          </a:xfrm>
+          <a:prstGeom prst="rect">
+            <a:avLst/>
+          </a:prstGeom>
+        </p:spPr>
+      </p:pic>
+      <p:sp>
+        <p:nvSpPr>
+          <p:cNvPr id="5" name="TextBox 4"/>
+          <p:cNvSpPr txBox="1"/>
+          <p:nvPr/>
+        </p:nvSpPr>
+        <p:spPr>
+          <a:xfrm>
+            <a:off x="457200" y="5852160"/>
+            <a:ext cx="11247120" cy="365760"/>
+          </a:xfrm>
+          <a:prstGeom prst="rect">
+            <a:avLst/>
+          </a:prstGeom>
+          <a:noFill/>
+        </p:spPr>
+        <p:txBody>
+          <a:bodyPr wrap="square" lIns="45720" rIns="45720" tIns="18288" bIns="18288" anchor="t">
+            <a:spAutoFit/>
+          </a:bodyPr>
+          <a:lstStyle/>
+          <a:p>
+            <a:pPr algn="ctr"/>
+            <a:r>
+              <a:rPr sz="1300" b="0" i="1">
+                <a:solidFill>
+                  <a:srgbClr val="6B7280"/>
+                </a:solidFill>
+                <a:latin typeface="Calibri"/>
+              </a:rPr>
+              <a:t>filter_by(owner_id=...) è la riga che evita una multa da 100k€</a:t>
+            </a:r>
+          </a:p>
+        </p:txBody>
+      </p:sp>
+      <p:cxnSp>
+        <p:nvCxnSpPr>
+          <p:cNvPr id="6" name="Connector 5"/>
+          <p:cNvCxnSpPr/>
+          <p:nvPr/>
+        </p:nvCxnSpPr>
+        <p:spPr>
+          <a:xfrm>
+            <a:off x="457200" y="6446520"/>
+            <a:ext cx="11274552" cy="0"/>
+          </a:xfrm>
+          <a:prstGeom prst="line">
+            <a:avLst/>
+          </a:prstGeom>
+          <a:ln w="19050">
+            <a:solidFill>
+              <a:srgbClr val="00A0B0"/>
+            </a:solidFill>
+          </a:ln>
+        </p:spPr>
+        <p:style>
+          <a:lnRef idx="2">
+            <a:schemeClr val="accent1"/>
+          </a:lnRef>
+          <a:fillRef idx="0">
+            <a:schemeClr val="accent1"/>
+          </a:fillRef>
+          <a:effectRef idx="1">
+            <a:schemeClr val="accent1"/>
+          </a:effectRef>
+          <a:fontRef idx="minor">
+            <a:schemeClr val="tx1"/>
+          </a:fontRef>
+        </p:style>
+      </p:cxnSp>
+      <p:sp>
+        <p:nvSpPr>
+          <p:cNvPr id="7" name="TextBox 6"/>
+          <p:cNvSpPr txBox="1"/>
+          <p:nvPr/>
+        </p:nvSpPr>
+        <p:spPr>
+          <a:xfrm>
+            <a:off x="457200" y="6473952"/>
+            <a:ext cx="7315200" cy="292608"/>
+          </a:xfrm>
+          <a:prstGeom prst="rect">
+            <a:avLst/>
+          </a:prstGeom>
+          <a:noFill/>
+        </p:spPr>
+        <p:txBody>
+          <a:bodyPr wrap="square" lIns="45720" rIns="45720" tIns="18288" bIns="18288" anchor="t">
+            <a:spAutoFit/>
+          </a:bodyPr>
+          <a:lstStyle/>
+          <a:p>
+            <a:pPr algn="l"/>
+            <a:r>
+              <a:rPr sz="1000" b="0" i="0">
+                <a:solidFill>
+                  <a:srgbClr val="6B7280"/>
+                </a:solidFill>
+                <a:latin typeface="Calibri"/>
+              </a:rPr>
+              <a:t>Secure Coding · Corso IFTS STEM · A. Manneschi · 2024/2025</a:t>
+            </a:r>
+          </a:p>
+        </p:txBody>
+      </p:sp>
+      <p:sp>
+        <p:nvSpPr>
+          <p:cNvPr id="8" name="TextBox 7"/>
+          <p:cNvSpPr txBox="1"/>
+          <p:nvPr/>
+        </p:nvSpPr>
+        <p:spPr>
+          <a:xfrm>
+            <a:off x="10515600" y="6473952"/>
+            <a:ext cx="1188720" cy="292608"/>
+          </a:xfrm>
+          <a:prstGeom prst="rect">
+            <a:avLst/>
+          </a:prstGeom>
+          <a:noFill/>
+        </p:spPr>
+        <p:txBody>
+          <a:bodyPr wrap="square" lIns="45720" rIns="45720" tIns="18288" bIns="18288" anchor="t">
+            <a:spAutoFit/>
+          </a:bodyPr>
+          <a:lstStyle/>
+          <a:p>
+            <a:pPr algn="r"/>
+            <a:r>
+              <a:rPr sz="1000" b="1" i="0">
+                <a:solidFill>
+                  <a:srgbClr val="6B7280"/>
+                </a:solidFill>
+                <a:latin typeface="Calibri"/>
+              </a:rPr>
+              <a:t>L4  ·  6/15</a:t>
+            </a:r>
+          </a:p>
+        </p:txBody>
+      </p:sp>
+    </p:spTree>
+  </p:cSld>
+  <p:clrMapOvr>
+    <a:masterClrMapping/>
+  </p:clrMapOvr>
+</p:sld>
+</file>
+
+<file path=ppt/slides/slide7.xml><?xml version="1.0" encoding="utf-8"?>
 <p:sld xmlns:a="http://schemas.openxmlformats.org/drawingml/2006/main" xmlns:p="http://schemas.openxmlformats.org/presentationml/2006/main" xmlns:r="http://schemas.openxmlformats.org/officeDocument/2006/relationships">
   <p:cSld>
     <p:spTree>
@@ -9142,399 +10130,7 @@
                 </a:solidFill>
                 <a:latin typeface="Calibri"/>
               </a:rPr>
-              <a:t>L4  ·  6/14</a:t>
-            </a:r>
-          </a:p>
-        </p:txBody>
-      </p:sp>
-    </p:spTree>
-  </p:cSld>
-  <p:clrMapOvr>
-    <a:masterClrMapping/>
-  </p:clrMapOvr>
-</p:sld>
-</file>
-
-<file path=ppt/slides/slide7.xml><?xml version="1.0" encoding="utf-8"?>
-<p:sld xmlns:a="http://schemas.openxmlformats.org/drawingml/2006/main" xmlns:p="http://schemas.openxmlformats.org/presentationml/2006/main" xmlns:r="http://schemas.openxmlformats.org/officeDocument/2006/relationships">
-  <p:cSld>
-    <p:spTree>
-      <p:nvGrpSpPr>
-        <p:cNvPr id="1" name=""/>
-        <p:cNvGrpSpPr/>
-        <p:nvPr/>
-      </p:nvGrpSpPr>
-      <p:grpSpPr/>
-      <p:sp>
-        <p:nvSpPr>
-          <p:cNvPr id="2" name="Rectangle 1"/>
-          <p:cNvSpPr/>
-          <p:nvPr/>
-        </p:nvSpPr>
-        <p:spPr>
-          <a:xfrm>
-            <a:off x="0" y="0"/>
-            <a:ext cx="4114800" cy="6858000"/>
-          </a:xfrm>
-          <a:prstGeom prst="rect">
-            <a:avLst/>
-          </a:prstGeom>
-          <a:solidFill>
-            <a:srgbClr val="081B33"/>
-          </a:solidFill>
-          <a:ln>
-            <a:noFill/>
-          </a:ln>
-        </p:spPr>
-        <p:style>
-          <a:lnRef idx="1">
-            <a:schemeClr val="accent1"/>
-          </a:lnRef>
-          <a:fillRef idx="3">
-            <a:schemeClr val="accent1"/>
-          </a:fillRef>
-          <a:effectRef idx="2">
-            <a:schemeClr val="accent1"/>
-          </a:effectRef>
-          <a:fontRef idx="minor">
-            <a:schemeClr val="lt1"/>
-          </a:fontRef>
-        </p:style>
-        <p:txBody>
-          <a:bodyPr rtlCol="0" anchor="ctr"/>
-          <a:lstStyle/>
-          <a:p>
-            <a:pPr algn="ctr"/>
-          </a:p>
-        </p:txBody>
-      </p:sp>
-      <p:sp>
-        <p:nvSpPr>
-          <p:cNvPr id="3" name="Rectangle 2"/>
-          <p:cNvSpPr/>
-          <p:nvPr/>
-        </p:nvSpPr>
-        <p:spPr>
-          <a:xfrm>
-            <a:off x="4114800" y="0"/>
-            <a:ext cx="8046720" cy="6858000"/>
-          </a:xfrm>
-          <a:prstGeom prst="rect">
-            <a:avLst/>
-          </a:prstGeom>
-          <a:solidFill>
-            <a:srgbClr val="F1F4F8"/>
-          </a:solidFill>
-          <a:ln>
-            <a:noFill/>
-          </a:ln>
-        </p:spPr>
-        <p:style>
-          <a:lnRef idx="1">
-            <a:schemeClr val="accent1"/>
-          </a:lnRef>
-          <a:fillRef idx="3">
-            <a:schemeClr val="accent1"/>
-          </a:fillRef>
-          <a:effectRef idx="2">
-            <a:schemeClr val="accent1"/>
-          </a:effectRef>
-          <a:fontRef idx="minor">
-            <a:schemeClr val="lt1"/>
-          </a:fontRef>
-        </p:style>
-        <p:txBody>
-          <a:bodyPr rtlCol="0" anchor="ctr"/>
-          <a:lstStyle/>
-          <a:p>
-            <a:pPr algn="ctr"/>
-          </a:p>
-        </p:txBody>
-      </p:sp>
-      <p:sp>
-        <p:nvSpPr>
-          <p:cNvPr id="4" name="Rectangle 3"/>
-          <p:cNvSpPr/>
-          <p:nvPr/>
-        </p:nvSpPr>
-        <p:spPr>
-          <a:xfrm>
-            <a:off x="4114800" y="0"/>
-            <a:ext cx="137160" cy="6858000"/>
-          </a:xfrm>
-          <a:prstGeom prst="rect">
-            <a:avLst/>
-          </a:prstGeom>
-          <a:solidFill>
-            <a:srgbClr val="00A0B0"/>
-          </a:solidFill>
-          <a:ln>
-            <a:noFill/>
-          </a:ln>
-        </p:spPr>
-        <p:style>
-          <a:lnRef idx="1">
-            <a:schemeClr val="accent1"/>
-          </a:lnRef>
-          <a:fillRef idx="3">
-            <a:schemeClr val="accent1"/>
-          </a:fillRef>
-          <a:effectRef idx="2">
-            <a:schemeClr val="accent1"/>
-          </a:effectRef>
-          <a:fontRef idx="minor">
-            <a:schemeClr val="lt1"/>
-          </a:fontRef>
-        </p:style>
-        <p:txBody>
-          <a:bodyPr rtlCol="0" anchor="ctr"/>
-          <a:lstStyle/>
-          <a:p>
-            <a:pPr algn="ctr"/>
-          </a:p>
-        </p:txBody>
-      </p:sp>
-      <p:sp>
-        <p:nvSpPr>
-          <p:cNvPr id="5" name="TextBox 4"/>
-          <p:cNvSpPr txBox="1"/>
-          <p:nvPr/>
-        </p:nvSpPr>
-        <p:spPr>
-          <a:xfrm>
-            <a:off x="274320" y="2103120"/>
-            <a:ext cx="3657600" cy="2286000"/>
-          </a:xfrm>
-          <a:prstGeom prst="rect">
-            <a:avLst/>
-          </a:prstGeom>
-          <a:noFill/>
-        </p:spPr>
-        <p:txBody>
-          <a:bodyPr wrap="square" lIns="45720" rIns="45720" tIns="18288" bIns="18288" anchor="t">
-            <a:spAutoFit/>
-          </a:bodyPr>
-          <a:lstStyle/>
-          <a:p>
-            <a:pPr algn="ctr"/>
-            <a:r>
-              <a:rPr sz="17000" b="1" i="0">
-                <a:solidFill>
-                  <a:srgbClr val="00A0B0"/>
-                </a:solidFill>
-                <a:latin typeface="Calibri"/>
-              </a:rPr>
-              <a:t>02</a:t>
-            </a:r>
-          </a:p>
-        </p:txBody>
-      </p:sp>
-      <p:sp>
-        <p:nvSpPr>
-          <p:cNvPr id="6" name="TextBox 5"/>
-          <p:cNvSpPr txBox="1"/>
-          <p:nvPr/>
-        </p:nvSpPr>
-        <p:spPr>
-          <a:xfrm>
-            <a:off x="274320" y="4572000"/>
-            <a:ext cx="3657600" cy="457200"/>
-          </a:xfrm>
-          <a:prstGeom prst="rect">
-            <a:avLst/>
-          </a:prstGeom>
-          <a:noFill/>
-        </p:spPr>
-        <p:txBody>
-          <a:bodyPr wrap="square" lIns="45720" rIns="45720" tIns="18288" bIns="18288" anchor="t">
-            <a:spAutoFit/>
-          </a:bodyPr>
-          <a:lstStyle/>
-          <a:p>
-            <a:pPr algn="ctr"/>
-            <a:r>
-              <a:rPr sz="2000" b="1" i="0">
-                <a:solidFill>
-                  <a:srgbClr val="6FD8E0"/>
-                </a:solidFill>
-                <a:latin typeface="Calibri"/>
-              </a:rPr>
-              <a:t>PARTE</a:t>
-            </a:r>
-          </a:p>
-        </p:txBody>
-      </p:sp>
-      <p:sp>
-        <p:nvSpPr>
-          <p:cNvPr id="7" name="TextBox 6"/>
-          <p:cNvSpPr txBox="1"/>
-          <p:nvPr/>
-        </p:nvSpPr>
-        <p:spPr>
-          <a:xfrm>
-            <a:off x="4572000" y="2286000"/>
-            <a:ext cx="7315200" cy="1645920"/>
-          </a:xfrm>
-          <a:prstGeom prst="rect">
-            <a:avLst/>
-          </a:prstGeom>
-          <a:noFill/>
-        </p:spPr>
-        <p:txBody>
-          <a:bodyPr wrap="square" lIns="45720" rIns="45720" tIns="18288" bIns="18288" anchor="t">
-            <a:spAutoFit/>
-          </a:bodyPr>
-          <a:lstStyle/>
-          <a:p>
-            <a:pPr algn="l"/>
-            <a:r>
-              <a:rPr sz="4400" b="1" i="0">
-                <a:solidFill>
-                  <a:srgbClr val="0F2D52"/>
-                </a:solidFill>
-                <a:latin typeface="Calibri"/>
-              </a:rPr>
-              <a:t>Password hashing</a:t>
-            </a:r>
-          </a:p>
-        </p:txBody>
-      </p:sp>
-      <p:sp>
-        <p:nvSpPr>
-          <p:cNvPr id="8" name="TextBox 7"/>
-          <p:cNvSpPr txBox="1"/>
-          <p:nvPr/>
-        </p:nvSpPr>
-        <p:spPr>
-          <a:xfrm>
-            <a:off x="4572000" y="3931920"/>
-            <a:ext cx="7315200" cy="1828800"/>
-          </a:xfrm>
-          <a:prstGeom prst="rect">
-            <a:avLst/>
-          </a:prstGeom>
-          <a:noFill/>
-        </p:spPr>
-        <p:txBody>
-          <a:bodyPr wrap="square" lIns="45720" rIns="45720" tIns="18288" bIns="18288" anchor="t">
-            <a:spAutoFit/>
-          </a:bodyPr>
-          <a:lstStyle/>
-          <a:p>
-            <a:pPr algn="l"/>
-            <a:r>
-              <a:rPr sz="1800" b="0" i="1">
-                <a:solidFill>
-                  <a:srgbClr val="6B7280"/>
-                </a:solidFill>
-                <a:latin typeface="Calibri"/>
-              </a:rPr>
-              <a:t>Encoding ≠ Hashing ≠ Encryption — la differenza fondamentale</a:t>
-            </a:r>
-          </a:p>
-        </p:txBody>
-      </p:sp>
-      <p:cxnSp>
-        <p:nvCxnSpPr>
-          <p:cNvPr id="9" name="Connector 8"/>
-          <p:cNvCxnSpPr/>
-          <p:nvPr/>
-        </p:nvCxnSpPr>
-        <p:spPr>
-          <a:xfrm>
-            <a:off x="457200" y="6446520"/>
-            <a:ext cx="11274552" cy="0"/>
-          </a:xfrm>
-          <a:prstGeom prst="line">
-            <a:avLst/>
-          </a:prstGeom>
-          <a:ln w="19050">
-            <a:solidFill>
-              <a:srgbClr val="00A0B0"/>
-            </a:solidFill>
-          </a:ln>
-        </p:spPr>
-        <p:style>
-          <a:lnRef idx="2">
-            <a:schemeClr val="accent1"/>
-          </a:lnRef>
-          <a:fillRef idx="0">
-            <a:schemeClr val="accent1"/>
-          </a:fillRef>
-          <a:effectRef idx="1">
-            <a:schemeClr val="accent1"/>
-          </a:effectRef>
-          <a:fontRef idx="minor">
-            <a:schemeClr val="tx1"/>
-          </a:fontRef>
-        </p:style>
-      </p:cxnSp>
-      <p:sp>
-        <p:nvSpPr>
-          <p:cNvPr id="10" name="TextBox 9"/>
-          <p:cNvSpPr txBox="1"/>
-          <p:nvPr/>
-        </p:nvSpPr>
-        <p:spPr>
-          <a:xfrm>
-            <a:off x="457200" y="6473952"/>
-            <a:ext cx="7315200" cy="292608"/>
-          </a:xfrm>
-          <a:prstGeom prst="rect">
-            <a:avLst/>
-          </a:prstGeom>
-          <a:noFill/>
-        </p:spPr>
-        <p:txBody>
-          <a:bodyPr wrap="square" lIns="45720" rIns="45720" tIns="18288" bIns="18288" anchor="t">
-            <a:spAutoFit/>
-          </a:bodyPr>
-          <a:lstStyle/>
-          <a:p>
-            <a:pPr algn="l"/>
-            <a:r>
-              <a:rPr sz="1000" b="0" i="0">
-                <a:solidFill>
-                  <a:srgbClr val="6B7280"/>
-                </a:solidFill>
-                <a:latin typeface="Calibri"/>
-              </a:rPr>
-              <a:t>Secure Coding · Corso IFTS STEM · A. Manneschi · 2024/2025</a:t>
-            </a:r>
-          </a:p>
-        </p:txBody>
-      </p:sp>
-      <p:sp>
-        <p:nvSpPr>
-          <p:cNvPr id="11" name="TextBox 10"/>
-          <p:cNvSpPr txBox="1"/>
-          <p:nvPr/>
-        </p:nvSpPr>
-        <p:spPr>
-          <a:xfrm>
-            <a:off x="10515600" y="6473952"/>
-            <a:ext cx="1188720" cy="292608"/>
-          </a:xfrm>
-          <a:prstGeom prst="rect">
-            <a:avLst/>
-          </a:prstGeom>
-          <a:noFill/>
-        </p:spPr>
-        <p:txBody>
-          <a:bodyPr wrap="square" lIns="45720" rIns="45720" tIns="18288" bIns="18288" anchor="t">
-            <a:spAutoFit/>
-          </a:bodyPr>
-          <a:lstStyle/>
-          <a:p>
-            <a:pPr algn="r"/>
-            <a:r>
-              <a:rPr sz="1000" b="1" i="0">
-                <a:solidFill>
-                  <a:srgbClr val="6B7280"/>
-                </a:solidFill>
-                <a:latin typeface="Calibri"/>
-              </a:rPr>
-              <a:t>L4  ·  7/14</a:t>
+              <a:t>L4  ·  7/15</a:t>
             </a:r>
           </a:p>
         </p:txBody>
@@ -9566,13 +10162,13 @@
         <p:spPr>
           <a:xfrm>
             <a:off x="0" y="0"/>
-            <a:ext cx="12191695" cy="777240"/>
+            <a:ext cx="4114800" cy="6858000"/>
           </a:xfrm>
           <a:prstGeom prst="rect">
             <a:avLst/>
           </a:prstGeom>
           <a:solidFill>
-            <a:srgbClr val="0F2D52"/>
+            <a:srgbClr val="081B33"/>
           </a:solidFill>
           <a:ln>
             <a:noFill/>
@@ -9602,57 +10198,20 @@
       </p:sp>
       <p:sp>
         <p:nvSpPr>
-          <p:cNvPr id="3" name="TextBox 2"/>
-          <p:cNvSpPr txBox="1"/>
-          <p:nvPr/>
-        </p:nvSpPr>
-        <p:spPr>
-          <a:xfrm>
-            <a:off x="457200" y="164592"/>
-            <a:ext cx="10972800" cy="502920"/>
-          </a:xfrm>
-          <a:prstGeom prst="rect">
-            <a:avLst/>
-          </a:prstGeom>
-          <a:noFill/>
-        </p:spPr>
-        <p:txBody>
-          <a:bodyPr wrap="square" lIns="45720" rIns="45720" tIns="18288" bIns="18288" anchor="ctr">
-            <a:spAutoFit/>
-          </a:bodyPr>
-          <a:lstStyle/>
-          <a:p>
-            <a:pPr algn="l"/>
-            <a:r>
-              <a:rPr sz="2400" b="1" i="0">
-                <a:solidFill>
-                  <a:srgbClr val="FFFFFF"/>
-                </a:solidFill>
-                <a:latin typeface="Calibri"/>
-              </a:rPr>
-              <a:t>Tre operazioni DIVERSE</a:t>
-            </a:r>
-          </a:p>
-        </p:txBody>
-      </p:sp>
-      <p:sp>
-        <p:nvSpPr>
-          <p:cNvPr id="4" name="Rounded Rectangle 3"/>
+          <p:cNvPr id="3" name="Rectangle 2"/>
           <p:cNvSpPr/>
           <p:nvPr/>
         </p:nvSpPr>
         <p:spPr>
           <a:xfrm>
-            <a:off x="457200" y="1051560"/>
-            <a:ext cx="5486400" cy="640080"/>
-          </a:xfrm>
-          <a:prstGeom prst="roundRect">
-            <a:avLst>
-              <a:gd name="adj" fmla="val 8000"/>
-            </a:avLst>
+            <a:off x="4114800" y="0"/>
+            <a:ext cx="8046720" cy="6858000"/>
+          </a:xfrm>
+          <a:prstGeom prst="rect">
+            <a:avLst/>
           </a:prstGeom>
           <a:solidFill>
-            <a:srgbClr val="E63946"/>
+            <a:srgbClr val="F1F4F8"/>
           </a:solidFill>
           <a:ln>
             <a:noFill/>
@@ -9682,62 +10241,23 @@
       </p:sp>
       <p:sp>
         <p:nvSpPr>
-          <p:cNvPr id="5" name="TextBox 4"/>
-          <p:cNvSpPr txBox="1"/>
-          <p:nvPr/>
-        </p:nvSpPr>
-        <p:spPr>
-          <a:xfrm>
-            <a:off x="457200" y="1051560"/>
-            <a:ext cx="5486400" cy="640080"/>
-          </a:xfrm>
-          <a:prstGeom prst="rect">
-            <a:avLst/>
-          </a:prstGeom>
-          <a:noFill/>
-        </p:spPr>
-        <p:txBody>
-          <a:bodyPr wrap="square" lIns="45720" rIns="45720" tIns="18288" bIns="18288" anchor="ctr">
-            <a:spAutoFit/>
-          </a:bodyPr>
-          <a:lstStyle/>
-          <a:p>
-            <a:pPr algn="ctr"/>
-            <a:r>
-              <a:rPr sz="1800" b="1" i="0">
-                <a:solidFill>
-                  <a:srgbClr val="FFFFFF"/>
-                </a:solidFill>
-                <a:latin typeface="Calibri"/>
-              </a:rPr>
-              <a:t>❌ NO per password</a:t>
-            </a:r>
-          </a:p>
-        </p:txBody>
-      </p:sp>
-      <p:sp>
-        <p:nvSpPr>
-          <p:cNvPr id="6" name="Rounded Rectangle 5"/>
+          <p:cNvPr id="4" name="Rectangle 3"/>
           <p:cNvSpPr/>
           <p:nvPr/>
         </p:nvSpPr>
         <p:spPr>
           <a:xfrm>
-            <a:off x="457200" y="1737360"/>
-            <a:ext cx="5486400" cy="4572000"/>
-          </a:xfrm>
-          <a:prstGeom prst="roundRect">
-            <a:avLst>
-              <a:gd name="adj" fmla="val 8000"/>
-            </a:avLst>
+            <a:off x="4114800" y="0"/>
+            <a:ext cx="137160" cy="6858000"/>
+          </a:xfrm>
+          <a:prstGeom prst="rect">
+            <a:avLst/>
           </a:prstGeom>
           <a:solidFill>
-            <a:srgbClr val="FBFBFD"/>
+            <a:srgbClr val="00A0B0"/>
           </a:solidFill>
-          <a:ln w="25400">
-            <a:solidFill>
-              <a:srgbClr val="E63946"/>
-            </a:solidFill>
+          <a:ln>
+            <a:noFill/>
           </a:ln>
         </p:spPr>
         <p:style>
@@ -9764,14 +10284,84 @@
       </p:sp>
       <p:sp>
         <p:nvSpPr>
+          <p:cNvPr id="5" name="TextBox 4"/>
+          <p:cNvSpPr txBox="1"/>
+          <p:nvPr/>
+        </p:nvSpPr>
+        <p:spPr>
+          <a:xfrm>
+            <a:off x="274320" y="2103120"/>
+            <a:ext cx="3657600" cy="2286000"/>
+          </a:xfrm>
+          <a:prstGeom prst="rect">
+            <a:avLst/>
+          </a:prstGeom>
+          <a:noFill/>
+        </p:spPr>
+        <p:txBody>
+          <a:bodyPr wrap="square" lIns="45720" rIns="45720" tIns="18288" bIns="18288" anchor="t">
+            <a:spAutoFit/>
+          </a:bodyPr>
+          <a:lstStyle/>
+          <a:p>
+            <a:pPr algn="ctr"/>
+            <a:r>
+              <a:rPr sz="17000" b="1" i="0">
+                <a:solidFill>
+                  <a:srgbClr val="00A0B0"/>
+                </a:solidFill>
+                <a:latin typeface="Calibri"/>
+              </a:rPr>
+              <a:t>02</a:t>
+            </a:r>
+          </a:p>
+        </p:txBody>
+      </p:sp>
+      <p:sp>
+        <p:nvSpPr>
+          <p:cNvPr id="6" name="TextBox 5"/>
+          <p:cNvSpPr txBox="1"/>
+          <p:nvPr/>
+        </p:nvSpPr>
+        <p:spPr>
+          <a:xfrm>
+            <a:off x="274320" y="4572000"/>
+            <a:ext cx="3657600" cy="457200"/>
+          </a:xfrm>
+          <a:prstGeom prst="rect">
+            <a:avLst/>
+          </a:prstGeom>
+          <a:noFill/>
+        </p:spPr>
+        <p:txBody>
+          <a:bodyPr wrap="square" lIns="45720" rIns="45720" tIns="18288" bIns="18288" anchor="t">
+            <a:spAutoFit/>
+          </a:bodyPr>
+          <a:lstStyle/>
+          <a:p>
+            <a:pPr algn="ctr"/>
+            <a:r>
+              <a:rPr sz="2000" b="1" i="0">
+                <a:solidFill>
+                  <a:srgbClr val="6FD8E0"/>
+                </a:solidFill>
+                <a:latin typeface="Calibri"/>
+              </a:rPr>
+              <a:t>PARTE</a:t>
+            </a:r>
+          </a:p>
+        </p:txBody>
+      </p:sp>
+      <p:sp>
+        <p:nvSpPr>
           <p:cNvPr id="7" name="TextBox 6"/>
           <p:cNvSpPr txBox="1"/>
           <p:nvPr/>
         </p:nvSpPr>
         <p:spPr>
           <a:xfrm>
-            <a:off x="640080" y="1874519"/>
-            <a:ext cx="5120640" cy="4572000"/>
+            <a:off x="4572000" y="2286000"/>
+            <a:ext cx="7315200" cy="1645920"/>
           </a:xfrm>
           <a:prstGeom prst="rect">
             <a:avLst/>
@@ -9779,263 +10369,34 @@
           <a:noFill/>
         </p:spPr>
         <p:txBody>
-          <a:bodyPr wrap="square">
+          <a:bodyPr wrap="square" lIns="45720" rIns="45720" tIns="18288" bIns="18288" anchor="t">
             <a:spAutoFit/>
           </a:bodyPr>
           <a:lstStyle/>
           <a:p>
-            <a:pPr>
-              <a:lnSpc>
-                <a:spcPct val="150000"/>
-              </a:lnSpc>
-              <a:spcAft>
-                <a:spcPts val="400"/>
-              </a:spcAft>
-            </a:pPr>
-            <a:r>
-              <a:rPr sz="1500" b="1">
-                <a:solidFill>
-                  <a:srgbClr val="E63946"/>
-                </a:solidFill>
-                <a:latin typeface="Calibri"/>
-              </a:rPr>
-              <a:t>▸  </a:t>
-            </a:r>
-            <a:r>
-              <a:rPr sz="1500">
-                <a:solidFill>
-                  <a:srgbClr val="1A1A2E"/>
-                </a:solidFill>
-                <a:latin typeface="Calibri"/>
-              </a:rPr>
-              <a:t>ENCODING (Base64)</a:t>
-            </a:r>
-          </a:p>
-          <a:p>
-            <a:pPr>
-              <a:lnSpc>
-                <a:spcPct val="150000"/>
-              </a:lnSpc>
-              <a:spcAft>
-                <a:spcPts val="400"/>
-              </a:spcAft>
-            </a:pPr>
-            <a:r>
-              <a:rPr sz="1500" b="1">
-                <a:solidFill>
-                  <a:srgbClr val="E63946"/>
-                </a:solidFill>
-                <a:latin typeface="Calibri"/>
-              </a:rPr>
-              <a:t>▸  </a:t>
-            </a:r>
-            <a:r>
-              <a:rPr sz="1500">
-                <a:solidFill>
-                  <a:srgbClr val="1A1A2E"/>
-                </a:solidFill>
-                <a:latin typeface="Calibri"/>
-              </a:rPr>
-              <a:t>  Reversibile, banale</a:t>
-            </a:r>
-          </a:p>
-          <a:p>
-            <a:pPr>
-              <a:lnSpc>
-                <a:spcPct val="150000"/>
-              </a:lnSpc>
-              <a:spcAft>
-                <a:spcPts val="400"/>
-              </a:spcAft>
-            </a:pPr>
-            <a:r>
-              <a:rPr sz="1500" b="1">
-                <a:solidFill>
-                  <a:srgbClr val="E63946"/>
-                </a:solidFill>
-                <a:latin typeface="Calibri"/>
-              </a:rPr>
-              <a:t>▸  </a:t>
-            </a:r>
-            <a:r>
-              <a:rPr sz="1500">
-                <a:solidFill>
-                  <a:srgbClr val="1A1A2E"/>
-                </a:solidFill>
-                <a:latin typeface="Calibri"/>
-              </a:rPr>
-              <a:t>  Serve per trasporto</a:t>
-            </a:r>
-          </a:p>
-          <a:p>
-            <a:pPr>
-              <a:lnSpc>
-                <a:spcPct val="150000"/>
-              </a:lnSpc>
-              <a:spcAft>
-                <a:spcPts val="400"/>
-              </a:spcAft>
-            </a:pPr>
-            <a:r>
-              <a:rPr sz="1500" b="1">
-                <a:solidFill>
-                  <a:srgbClr val="E63946"/>
-                </a:solidFill>
-                <a:latin typeface="Calibri"/>
-              </a:rPr>
-              <a:t>▸  </a:t>
-            </a:r>
-            <a:r>
-              <a:rPr sz="1500">
-                <a:solidFill>
-                  <a:srgbClr val="1A1A2E"/>
-                </a:solidFill>
-                <a:latin typeface="Calibri"/>
-              </a:rPr>
-              <a:t/>
-            </a:r>
-          </a:p>
-          <a:p>
-            <a:pPr>
-              <a:lnSpc>
-                <a:spcPct val="150000"/>
-              </a:lnSpc>
-              <a:spcAft>
-                <a:spcPts val="400"/>
-              </a:spcAft>
-            </a:pPr>
-            <a:r>
-              <a:rPr sz="1500" b="1">
-                <a:solidFill>
-                  <a:srgbClr val="E63946"/>
-                </a:solidFill>
-                <a:latin typeface="Calibri"/>
-              </a:rPr>
-              <a:t>▸  </a:t>
-            </a:r>
-            <a:r>
-              <a:rPr sz="1500">
-                <a:solidFill>
-                  <a:srgbClr val="1A1A2E"/>
-                </a:solidFill>
-                <a:latin typeface="Calibri"/>
-              </a:rPr>
-              <a:t>ENCRYPTION (AES)</a:t>
-            </a:r>
-          </a:p>
-          <a:p>
-            <a:pPr>
-              <a:lnSpc>
-                <a:spcPct val="150000"/>
-              </a:lnSpc>
-              <a:spcAft>
-                <a:spcPts val="400"/>
-              </a:spcAft>
-            </a:pPr>
-            <a:r>
-              <a:rPr sz="1500" b="1">
-                <a:solidFill>
-                  <a:srgbClr val="E63946"/>
-                </a:solidFill>
-                <a:latin typeface="Calibri"/>
-              </a:rPr>
-              <a:t>▸  </a:t>
-            </a:r>
-            <a:r>
-              <a:rPr sz="1500">
-                <a:solidFill>
-                  <a:srgbClr val="1A1A2E"/>
-                </a:solidFill>
-                <a:latin typeface="Calibri"/>
-              </a:rPr>
-              <a:t>  Reversibile con chiave</a:t>
-            </a:r>
-          </a:p>
-          <a:p>
-            <a:pPr>
-              <a:lnSpc>
-                <a:spcPct val="150000"/>
-              </a:lnSpc>
-              <a:spcAft>
-                <a:spcPts val="400"/>
-              </a:spcAft>
-            </a:pPr>
-            <a:r>
-              <a:rPr sz="1500" b="1">
-                <a:solidFill>
-                  <a:srgbClr val="E63946"/>
-                </a:solidFill>
-                <a:latin typeface="Calibri"/>
-              </a:rPr>
-              <a:t>▸  </a:t>
-            </a:r>
-            <a:r>
-              <a:rPr sz="1500">
-                <a:solidFill>
-                  <a:srgbClr val="1A1A2E"/>
-                </a:solidFill>
-                <a:latin typeface="Calibri"/>
-              </a:rPr>
-              <a:t>  Se rubano chiave: disastro</a:t>
-            </a:r>
-          </a:p>
-        </p:txBody>
-      </p:sp>
-      <p:sp>
-        <p:nvSpPr>
-          <p:cNvPr id="8" name="Rounded Rectangle 7"/>
-          <p:cNvSpPr/>
-          <p:nvPr/>
-        </p:nvSpPr>
-        <p:spPr>
-          <a:xfrm>
-            <a:off x="6217920" y="1051560"/>
-            <a:ext cx="5486400" cy="640080"/>
-          </a:xfrm>
-          <a:prstGeom prst="roundRect">
-            <a:avLst>
-              <a:gd name="adj" fmla="val 8000"/>
-            </a:avLst>
-          </a:prstGeom>
-          <a:solidFill>
-            <a:srgbClr val="06A77D"/>
-          </a:solidFill>
-          <a:ln>
-            <a:noFill/>
-          </a:ln>
-        </p:spPr>
-        <p:style>
-          <a:lnRef idx="1">
-            <a:schemeClr val="accent1"/>
-          </a:lnRef>
-          <a:fillRef idx="3">
-            <a:schemeClr val="accent1"/>
-          </a:fillRef>
-          <a:effectRef idx="2">
-            <a:schemeClr val="accent1"/>
-          </a:effectRef>
-          <a:fontRef idx="minor">
-            <a:schemeClr val="lt1"/>
-          </a:fontRef>
-        </p:style>
-        <p:txBody>
-          <a:bodyPr rtlCol="0" anchor="ctr"/>
-          <a:lstStyle/>
-          <a:p>
-            <a:pPr algn="ctr"/>
-          </a:p>
-        </p:txBody>
-      </p:sp>
-      <p:sp>
-        <p:nvSpPr>
-          <p:cNvPr id="9" name="TextBox 8"/>
+            <a:pPr algn="l"/>
+            <a:r>
+              <a:rPr sz="4400" b="1" i="0">
+                <a:solidFill>
+                  <a:srgbClr val="0F2D52"/>
+                </a:solidFill>
+                <a:latin typeface="Calibri"/>
+              </a:rPr>
+              <a:t>Password hashing</a:t>
+            </a:r>
+          </a:p>
+        </p:txBody>
+      </p:sp>
+      <p:sp>
+        <p:nvSpPr>
+          <p:cNvPr id="8" name="TextBox 7"/>
           <p:cNvSpPr txBox="1"/>
           <p:nvPr/>
         </p:nvSpPr>
         <p:spPr>
           <a:xfrm>
-            <a:off x="6217920" y="1051560"/>
-            <a:ext cx="5486400" cy="640080"/>
+            <a:off x="4572000" y="3931920"/>
+            <a:ext cx="7315200" cy="1828800"/>
           </a:xfrm>
           <a:prstGeom prst="rect">
             <a:avLst/>
@@ -10043,321 +10404,27 @@
           <a:noFill/>
         </p:spPr>
         <p:txBody>
-          <a:bodyPr wrap="square" lIns="45720" rIns="45720" tIns="18288" bIns="18288" anchor="ctr">
+          <a:bodyPr wrap="square" lIns="45720" rIns="45720" tIns="18288" bIns="18288" anchor="t">
             <a:spAutoFit/>
           </a:bodyPr>
           <a:lstStyle/>
           <a:p>
-            <a:pPr algn="ctr"/>
-            <a:r>
-              <a:rPr sz="1800" b="1" i="0">
-                <a:solidFill>
-                  <a:srgbClr val="FFFFFF"/>
-                </a:solidFill>
-                <a:latin typeface="Calibri"/>
-              </a:rPr>
-              <a:t>✅ SÌ per password</a:t>
-            </a:r>
-          </a:p>
-        </p:txBody>
-      </p:sp>
-      <p:sp>
-        <p:nvSpPr>
-          <p:cNvPr id="10" name="Rounded Rectangle 9"/>
-          <p:cNvSpPr/>
-          <p:nvPr/>
-        </p:nvSpPr>
-        <p:spPr>
-          <a:xfrm>
-            <a:off x="6217920" y="1737360"/>
-            <a:ext cx="5486400" cy="4572000"/>
-          </a:xfrm>
-          <a:prstGeom prst="roundRect">
-            <a:avLst>
-              <a:gd name="adj" fmla="val 8000"/>
-            </a:avLst>
-          </a:prstGeom>
-          <a:solidFill>
-            <a:srgbClr val="FBFBFD"/>
-          </a:solidFill>
-          <a:ln w="25400">
-            <a:solidFill>
-              <a:srgbClr val="06A77D"/>
-            </a:solidFill>
-          </a:ln>
-        </p:spPr>
-        <p:style>
-          <a:lnRef idx="1">
-            <a:schemeClr val="accent1"/>
-          </a:lnRef>
-          <a:fillRef idx="3">
-            <a:schemeClr val="accent1"/>
-          </a:fillRef>
-          <a:effectRef idx="2">
-            <a:schemeClr val="accent1"/>
-          </a:effectRef>
-          <a:fontRef idx="minor">
-            <a:schemeClr val="lt1"/>
-          </a:fontRef>
-        </p:style>
-        <p:txBody>
-          <a:bodyPr rtlCol="0" anchor="ctr"/>
-          <a:lstStyle/>
-          <a:p>
-            <a:pPr algn="ctr"/>
-          </a:p>
-        </p:txBody>
-      </p:sp>
-      <p:sp>
-        <p:nvSpPr>
-          <p:cNvPr id="11" name="TextBox 10"/>
-          <p:cNvSpPr txBox="1"/>
-          <p:nvPr/>
-        </p:nvSpPr>
-        <p:spPr>
-          <a:xfrm>
-            <a:off x="6400800" y="1874519"/>
-            <a:ext cx="5120640" cy="4572000"/>
-          </a:xfrm>
-          <a:prstGeom prst="rect">
-            <a:avLst/>
-          </a:prstGeom>
-          <a:noFill/>
-        </p:spPr>
-        <p:txBody>
-          <a:bodyPr wrap="square">
-            <a:spAutoFit/>
-          </a:bodyPr>
-          <a:lstStyle/>
-          <a:p>
-            <a:pPr>
-              <a:lnSpc>
-                <a:spcPct val="150000"/>
-              </a:lnSpc>
-              <a:spcAft>
-                <a:spcPts val="400"/>
-              </a:spcAft>
-            </a:pPr>
-            <a:r>
-              <a:rPr sz="1500" b="1">
-                <a:solidFill>
-                  <a:srgbClr val="06A77D"/>
-                </a:solidFill>
-                <a:latin typeface="Calibri"/>
-              </a:rPr>
-              <a:t>▸  </a:t>
-            </a:r>
-            <a:r>
-              <a:rPr sz="1500">
-                <a:solidFill>
-                  <a:srgbClr val="1A1A2E"/>
-                </a:solidFill>
-                <a:latin typeface="Calibri"/>
-              </a:rPr>
-              <a:t>HASHING (bcrypt, Argon2id)</a:t>
-            </a:r>
-          </a:p>
-          <a:p>
-            <a:pPr>
-              <a:lnSpc>
-                <a:spcPct val="150000"/>
-              </a:lnSpc>
-              <a:spcAft>
-                <a:spcPts val="400"/>
-              </a:spcAft>
-            </a:pPr>
-            <a:r>
-              <a:rPr sz="1500" b="1">
-                <a:solidFill>
-                  <a:srgbClr val="06A77D"/>
-                </a:solidFill>
-                <a:latin typeface="Calibri"/>
-              </a:rPr>
-              <a:t>▸  </a:t>
-            </a:r>
-            <a:r>
-              <a:rPr sz="1500">
-                <a:solidFill>
-                  <a:srgbClr val="1A1A2E"/>
-                </a:solidFill>
-                <a:latin typeface="Calibri"/>
-              </a:rPr>
-              <a:t>  NON reversibile</a:t>
-            </a:r>
-          </a:p>
-          <a:p>
-            <a:pPr>
-              <a:lnSpc>
-                <a:spcPct val="150000"/>
-              </a:lnSpc>
-              <a:spcAft>
-                <a:spcPts val="400"/>
-              </a:spcAft>
-            </a:pPr>
-            <a:r>
-              <a:rPr sz="1500" b="1">
-                <a:solidFill>
-                  <a:srgbClr val="06A77D"/>
-                </a:solidFill>
-                <a:latin typeface="Calibri"/>
-              </a:rPr>
-              <a:t>▸  </a:t>
-            </a:r>
-            <a:r>
-              <a:rPr sz="1500">
-                <a:solidFill>
-                  <a:srgbClr val="1A1A2E"/>
-                </a:solidFill>
-                <a:latin typeface="Calibri"/>
-              </a:rPr>
-              <a:t>  Salt automatico</a:t>
-            </a:r>
-          </a:p>
-          <a:p>
-            <a:pPr>
-              <a:lnSpc>
-                <a:spcPct val="150000"/>
-              </a:lnSpc>
-              <a:spcAft>
-                <a:spcPts val="400"/>
-              </a:spcAft>
-            </a:pPr>
-            <a:r>
-              <a:rPr sz="1500" b="1">
-                <a:solidFill>
-                  <a:srgbClr val="06A77D"/>
-                </a:solidFill>
-                <a:latin typeface="Calibri"/>
-              </a:rPr>
-              <a:t>▸  </a:t>
-            </a:r>
-            <a:r>
-              <a:rPr sz="1500">
-                <a:solidFill>
-                  <a:srgbClr val="1A1A2E"/>
-                </a:solidFill>
-                <a:latin typeface="Calibri"/>
-              </a:rPr>
-              <a:t>  Work factor lento</a:t>
-            </a:r>
-          </a:p>
-          <a:p>
-            <a:pPr>
-              <a:lnSpc>
-                <a:spcPct val="150000"/>
-              </a:lnSpc>
-              <a:spcAft>
-                <a:spcPts val="400"/>
-              </a:spcAft>
-            </a:pPr>
-            <a:r>
-              <a:rPr sz="1500" b="1">
-                <a:solidFill>
-                  <a:srgbClr val="06A77D"/>
-                </a:solidFill>
-                <a:latin typeface="Calibri"/>
-              </a:rPr>
-              <a:t>▸  </a:t>
-            </a:r>
-            <a:r>
-              <a:rPr sz="1500">
-                <a:solidFill>
-                  <a:srgbClr val="1A1A2E"/>
-                </a:solidFill>
-                <a:latin typeface="Calibri"/>
-              </a:rPr>
-              <a:t/>
-            </a:r>
-          </a:p>
-          <a:p>
-            <a:pPr>
-              <a:lnSpc>
-                <a:spcPct val="150000"/>
-              </a:lnSpc>
-              <a:spcAft>
-                <a:spcPts val="400"/>
-              </a:spcAft>
-            </a:pPr>
-            <a:r>
-              <a:rPr sz="1500" b="1">
-                <a:solidFill>
-                  <a:srgbClr val="06A77D"/>
-                </a:solidFill>
-                <a:latin typeface="Calibri"/>
-              </a:rPr>
-              <a:t>▸  </a:t>
-            </a:r>
-            <a:r>
-              <a:rPr sz="1500">
-                <a:solidFill>
-                  <a:srgbClr val="1A1A2E"/>
-                </a:solidFill>
-                <a:latin typeface="Calibri"/>
-              </a:rPr>
-              <a:t>  bcrypt cost=12 ≈ 250ms</a:t>
-            </a:r>
-          </a:p>
-          <a:p>
-            <a:pPr>
-              <a:lnSpc>
-                <a:spcPct val="150000"/>
-              </a:lnSpc>
-              <a:spcAft>
-                <a:spcPts val="400"/>
-              </a:spcAft>
-            </a:pPr>
-            <a:r>
-              <a:rPr sz="1500" b="1">
-                <a:solidFill>
-                  <a:srgbClr val="06A77D"/>
-                </a:solidFill>
-                <a:latin typeface="Calibri"/>
-              </a:rPr>
-              <a:t>▸  </a:t>
-            </a:r>
-            <a:r>
-              <a:rPr sz="1500">
-                <a:solidFill>
-                  <a:srgbClr val="1A1A2E"/>
-                </a:solidFill>
-                <a:latin typeface="Calibri"/>
-              </a:rPr>
-              <a:t>  Utente: impercettibile</a:t>
-            </a:r>
-          </a:p>
-          <a:p>
-            <a:pPr>
-              <a:lnSpc>
-                <a:spcPct val="150000"/>
-              </a:lnSpc>
-              <a:spcAft>
-                <a:spcPts val="400"/>
-              </a:spcAft>
-            </a:pPr>
-            <a:r>
-              <a:rPr sz="1500" b="1">
-                <a:solidFill>
-                  <a:srgbClr val="06A77D"/>
-                </a:solidFill>
-                <a:latin typeface="Calibri"/>
-              </a:rPr>
-              <a:t>▸  </a:t>
-            </a:r>
-            <a:r>
-              <a:rPr sz="1500">
-                <a:solidFill>
-                  <a:srgbClr val="1A1A2E"/>
-                </a:solidFill>
-                <a:latin typeface="Calibri"/>
-              </a:rPr>
-              <a:t>  Attaccante: devastante</a:t>
+            <a:pPr algn="l"/>
+            <a:r>
+              <a:rPr sz="1800" b="0" i="1">
+                <a:solidFill>
+                  <a:srgbClr val="6B7280"/>
+                </a:solidFill>
+                <a:latin typeface="Calibri"/>
+              </a:rPr>
+              <a:t>Encoding ≠ Hashing ≠ Encryption — la differenza fondamentale</a:t>
             </a:r>
           </a:p>
         </p:txBody>
       </p:sp>
       <p:cxnSp>
         <p:nvCxnSpPr>
-          <p:cNvPr id="12" name="Connector 11"/>
+          <p:cNvPr id="9" name="Connector 8"/>
           <p:cNvCxnSpPr/>
           <p:nvPr/>
         </p:nvCxnSpPr>
@@ -10392,7 +10459,7 @@
       </p:cxnSp>
       <p:sp>
         <p:nvSpPr>
-          <p:cNvPr id="13" name="TextBox 12"/>
+          <p:cNvPr id="10" name="TextBox 9"/>
           <p:cNvSpPr txBox="1"/>
           <p:nvPr/>
         </p:nvSpPr>
@@ -10427,7 +10494,7 @@
       </p:sp>
       <p:sp>
         <p:nvSpPr>
-          <p:cNvPr id="14" name="TextBox 13"/>
+          <p:cNvPr id="11" name="TextBox 10"/>
           <p:cNvSpPr txBox="1"/>
           <p:nvPr/>
         </p:nvSpPr>
@@ -10455,7 +10522,7 @@
                 </a:solidFill>
                 <a:latin typeface="Calibri"/>
               </a:rPr>
-              <a:t>L4  ·  8/14</a:t>
+              <a:t>L4  ·  8/15</a:t>
             </a:r>
           </a:p>
         </p:txBody>
@@ -10551,21 +10618,148 @@
                 </a:solidFill>
                 <a:latin typeface="Calibri"/>
               </a:rPr>
-              <a:t>⏱  Perché MD5/SHA-256 NON vanno</a:t>
-            </a:r>
-          </a:p>
-        </p:txBody>
-      </p:sp>
-      <p:sp>
-        <p:nvSpPr>
-          <p:cNvPr id="4" name="TextBox 3"/>
+              <a:t>Tre operazioni DIVERSE</a:t>
+            </a:r>
+          </a:p>
+        </p:txBody>
+      </p:sp>
+      <p:sp>
+        <p:nvSpPr>
+          <p:cNvPr id="4" name="Rounded Rectangle 3"/>
+          <p:cNvSpPr/>
+          <p:nvPr/>
+        </p:nvSpPr>
+        <p:spPr>
+          <a:xfrm>
+            <a:off x="457200" y="1051560"/>
+            <a:ext cx="5486400" cy="640080"/>
+          </a:xfrm>
+          <a:prstGeom prst="roundRect">
+            <a:avLst>
+              <a:gd name="adj" fmla="val 8000"/>
+            </a:avLst>
+          </a:prstGeom>
+          <a:solidFill>
+            <a:srgbClr val="E63946"/>
+          </a:solidFill>
+          <a:ln>
+            <a:noFill/>
+          </a:ln>
+        </p:spPr>
+        <p:style>
+          <a:lnRef idx="1">
+            <a:schemeClr val="accent1"/>
+          </a:lnRef>
+          <a:fillRef idx="3">
+            <a:schemeClr val="accent1"/>
+          </a:fillRef>
+          <a:effectRef idx="2">
+            <a:schemeClr val="accent1"/>
+          </a:effectRef>
+          <a:fontRef idx="minor">
+            <a:schemeClr val="lt1"/>
+          </a:fontRef>
+        </p:style>
+        <p:txBody>
+          <a:bodyPr rtlCol="0" anchor="ctr"/>
+          <a:lstStyle/>
+          <a:p>
+            <a:pPr algn="ctr"/>
+          </a:p>
+        </p:txBody>
+      </p:sp>
+      <p:sp>
+        <p:nvSpPr>
+          <p:cNvPr id="5" name="TextBox 4"/>
           <p:cNvSpPr txBox="1"/>
           <p:nvPr/>
         </p:nvSpPr>
         <p:spPr>
           <a:xfrm>
-            <a:off x="640080" y="1097280"/>
-            <a:ext cx="10972800" cy="5029200"/>
+            <a:off x="457200" y="1051560"/>
+            <a:ext cx="5486400" cy="640080"/>
+          </a:xfrm>
+          <a:prstGeom prst="rect">
+            <a:avLst/>
+          </a:prstGeom>
+          <a:noFill/>
+        </p:spPr>
+        <p:txBody>
+          <a:bodyPr wrap="square" lIns="45720" rIns="45720" tIns="18288" bIns="18288" anchor="ctr">
+            <a:spAutoFit/>
+          </a:bodyPr>
+          <a:lstStyle/>
+          <a:p>
+            <a:pPr algn="ctr"/>
+            <a:r>
+              <a:rPr sz="1800" b="1" i="0">
+                <a:solidFill>
+                  <a:srgbClr val="FFFFFF"/>
+                </a:solidFill>
+                <a:latin typeface="Calibri"/>
+              </a:rPr>
+              <a:t>❌ NO per password</a:t>
+            </a:r>
+          </a:p>
+        </p:txBody>
+      </p:sp>
+      <p:sp>
+        <p:nvSpPr>
+          <p:cNvPr id="6" name="Rounded Rectangle 5"/>
+          <p:cNvSpPr/>
+          <p:nvPr/>
+        </p:nvSpPr>
+        <p:spPr>
+          <a:xfrm>
+            <a:off x="457200" y="1737360"/>
+            <a:ext cx="5486400" cy="4572000"/>
+          </a:xfrm>
+          <a:prstGeom prst="roundRect">
+            <a:avLst>
+              <a:gd name="adj" fmla="val 8000"/>
+            </a:avLst>
+          </a:prstGeom>
+          <a:solidFill>
+            <a:srgbClr val="FBFBFD"/>
+          </a:solidFill>
+          <a:ln w="25400">
+            <a:solidFill>
+              <a:srgbClr val="E63946"/>
+            </a:solidFill>
+          </a:ln>
+        </p:spPr>
+        <p:style>
+          <a:lnRef idx="1">
+            <a:schemeClr val="accent1"/>
+          </a:lnRef>
+          <a:fillRef idx="3">
+            <a:schemeClr val="accent1"/>
+          </a:fillRef>
+          <a:effectRef idx="2">
+            <a:schemeClr val="accent1"/>
+          </a:effectRef>
+          <a:fontRef idx="minor">
+            <a:schemeClr val="lt1"/>
+          </a:fontRef>
+        </p:style>
+        <p:txBody>
+          <a:bodyPr rtlCol="0" anchor="ctr"/>
+          <a:lstStyle/>
+          <a:p>
+            <a:pPr algn="ctr"/>
+          </a:p>
+        </p:txBody>
+      </p:sp>
+      <p:sp>
+        <p:nvSpPr>
+          <p:cNvPr id="7" name="TextBox 6"/>
+          <p:cNvSpPr txBox="1"/>
+          <p:nvPr/>
+        </p:nvSpPr>
+        <p:spPr>
+          <a:xfrm>
+            <a:off x="640080" y="1874519"/>
+            <a:ext cx="5120640" cy="4572000"/>
           </a:xfrm>
           <a:prstGeom prst="rect">
             <a:avLst/>
@@ -10587,22 +10781,22 @@
               </a:spcAft>
             </a:pPr>
             <a:r>
-              <a:rPr sz="2000" b="1">
-                <a:solidFill>
-                  <a:srgbClr val="00A0B0"/>
+              <a:rPr sz="1500" b="1">
+                <a:solidFill>
+                  <a:srgbClr val="E63946"/>
                 </a:solidFill>
                 <a:latin typeface="Calibri"/>
               </a:rPr>
               <a:t>▸  </a:t>
             </a:r>
             <a:r>
-              <a:rPr sz="2000">
+              <a:rPr sz="1500">
                 <a:solidFill>
                   <a:srgbClr val="1A1A2E"/>
                 </a:solidFill>
                 <a:latin typeface="Calibri"/>
               </a:rPr>
-              <a:t>Velocità: SHA-256 su GPU = miliardi/secondo</a:t>
+              <a:t>ENCODING (Base64)</a:t>
             </a:r>
           </a:p>
           <a:p>
@@ -10615,22 +10809,22 @@
               </a:spcAft>
             </a:pPr>
             <a:r>
-              <a:rPr sz="2000" b="1">
-                <a:solidFill>
-                  <a:srgbClr val="00A0B0"/>
+              <a:rPr sz="1500" b="1">
+                <a:solidFill>
+                  <a:srgbClr val="E63946"/>
                 </a:solidFill>
                 <a:latin typeface="Calibri"/>
               </a:rPr>
               <a:t>▸  </a:t>
             </a:r>
             <a:r>
-              <a:rPr sz="2000">
+              <a:rPr sz="1500">
                 <a:solidFill>
                   <a:srgbClr val="1A1A2E"/>
                 </a:solidFill>
                 <a:latin typeface="Calibri"/>
               </a:rPr>
-              <a:t>  Rubato il DB, brute force in poche ore</a:t>
+              <a:t>  Reversibile, banale</a:t>
             </a:r>
           </a:p>
           <a:p>
@@ -10643,22 +10837,22 @@
               </a:spcAft>
             </a:pPr>
             <a:r>
-              <a:rPr sz="2000" b="1">
-                <a:solidFill>
-                  <a:srgbClr val="00A0B0"/>
+              <a:rPr sz="1500" b="1">
+                <a:solidFill>
+                  <a:srgbClr val="E63946"/>
                 </a:solidFill>
                 <a:latin typeface="Calibri"/>
               </a:rPr>
               <a:t>▸  </a:t>
             </a:r>
             <a:r>
-              <a:rPr sz="2000">
+              <a:rPr sz="1500">
                 <a:solidFill>
                   <a:srgbClr val="1A1A2E"/>
                 </a:solidFill>
                 <a:latin typeface="Calibri"/>
               </a:rPr>
-              <a:t/>
+              <a:t>  Serve per trasporto</a:t>
             </a:r>
           </a:p>
           <a:p>
@@ -10671,22 +10865,22 @@
               </a:spcAft>
             </a:pPr>
             <a:r>
-              <a:rPr sz="2000" b="1">
-                <a:solidFill>
-                  <a:srgbClr val="00A0B0"/>
+              <a:rPr sz="1500" b="1">
+                <a:solidFill>
+                  <a:srgbClr val="E63946"/>
                 </a:solidFill>
                 <a:latin typeface="Calibri"/>
               </a:rPr>
               <a:t>▸  </a:t>
             </a:r>
             <a:r>
-              <a:rPr sz="2000">
+              <a:rPr sz="1500">
                 <a:solidFill>
                   <a:srgbClr val="1A1A2E"/>
                 </a:solidFill>
                 <a:latin typeface="Calibri"/>
               </a:rPr>
-              <a:t>Rainbow tables: senza salt, password identiche → hash identici</a:t>
+              <a:t/>
             </a:r>
           </a:p>
           <a:p>
@@ -10699,22 +10893,22 @@
               </a:spcAft>
             </a:pPr>
             <a:r>
-              <a:rPr sz="2000" b="1">
-                <a:solidFill>
-                  <a:srgbClr val="00A0B0"/>
+              <a:rPr sz="1500" b="1">
+                <a:solidFill>
+                  <a:srgbClr val="E63946"/>
                 </a:solidFill>
                 <a:latin typeface="Calibri"/>
               </a:rPr>
               <a:t>▸  </a:t>
             </a:r>
             <a:r>
-              <a:rPr sz="2000">
+              <a:rPr sz="1500">
                 <a:solidFill>
                   <a:srgbClr val="1A1A2E"/>
                 </a:solidFill>
                 <a:latin typeface="Calibri"/>
               </a:rPr>
-              <a:t>  Tabelle pre-calcolate di password comuni</a:t>
+              <a:t>ENCRYPTION (AES)</a:t>
             </a:r>
           </a:p>
           <a:p>
@@ -10727,22 +10921,22 @@
               </a:spcAft>
             </a:pPr>
             <a:r>
-              <a:rPr sz="2000" b="1">
-                <a:solidFill>
-                  <a:srgbClr val="00A0B0"/>
+              <a:rPr sz="1500" b="1">
+                <a:solidFill>
+                  <a:srgbClr val="E63946"/>
                 </a:solidFill>
                 <a:latin typeface="Calibri"/>
               </a:rPr>
               <a:t>▸  </a:t>
             </a:r>
             <a:r>
-              <a:rPr sz="2000">
+              <a:rPr sz="1500">
                 <a:solidFill>
                   <a:srgbClr val="1A1A2E"/>
                 </a:solidFill>
                 <a:latin typeface="Calibri"/>
               </a:rPr>
-              <a:t/>
+              <a:t>  Reversibile con chiave</a:t>
             </a:r>
           </a:p>
           <a:p>
@@ -10755,24 +10949,174 @@
               </a:spcAft>
             </a:pPr>
             <a:r>
-              <a:rPr sz="2000" b="1">
-                <a:solidFill>
-                  <a:srgbClr val="00A0B0"/>
+              <a:rPr sz="1500" b="1">
+                <a:solidFill>
+                  <a:srgbClr val="E63946"/>
                 </a:solidFill>
                 <a:latin typeface="Calibri"/>
               </a:rPr>
               <a:t>▸  </a:t>
             </a:r>
             <a:r>
-              <a:rPr sz="2000">
+              <a:rPr sz="1500">
                 <a:solidFill>
                   <a:srgbClr val="1A1A2E"/>
                 </a:solidFill>
                 <a:latin typeface="Calibri"/>
               </a:rPr>
-              <a:t>MD5 e SHA-1: collisioni note. Morti definitivamente.</a:t>
-            </a:r>
-          </a:p>
+              <a:t>  Se rubano chiave: disastro</a:t>
+            </a:r>
+          </a:p>
+        </p:txBody>
+      </p:sp>
+      <p:sp>
+        <p:nvSpPr>
+          <p:cNvPr id="8" name="Rounded Rectangle 7"/>
+          <p:cNvSpPr/>
+          <p:nvPr/>
+        </p:nvSpPr>
+        <p:spPr>
+          <a:xfrm>
+            <a:off x="6217920" y="1051560"/>
+            <a:ext cx="5486400" cy="640080"/>
+          </a:xfrm>
+          <a:prstGeom prst="roundRect">
+            <a:avLst>
+              <a:gd name="adj" fmla="val 8000"/>
+            </a:avLst>
+          </a:prstGeom>
+          <a:solidFill>
+            <a:srgbClr val="06A77D"/>
+          </a:solidFill>
+          <a:ln>
+            <a:noFill/>
+          </a:ln>
+        </p:spPr>
+        <p:style>
+          <a:lnRef idx="1">
+            <a:schemeClr val="accent1"/>
+          </a:lnRef>
+          <a:fillRef idx="3">
+            <a:schemeClr val="accent1"/>
+          </a:fillRef>
+          <a:effectRef idx="2">
+            <a:schemeClr val="accent1"/>
+          </a:effectRef>
+          <a:fontRef idx="minor">
+            <a:schemeClr val="lt1"/>
+          </a:fontRef>
+        </p:style>
+        <p:txBody>
+          <a:bodyPr rtlCol="0" anchor="ctr"/>
+          <a:lstStyle/>
+          <a:p>
+            <a:pPr algn="ctr"/>
+          </a:p>
+        </p:txBody>
+      </p:sp>
+      <p:sp>
+        <p:nvSpPr>
+          <p:cNvPr id="9" name="TextBox 8"/>
+          <p:cNvSpPr txBox="1"/>
+          <p:nvPr/>
+        </p:nvSpPr>
+        <p:spPr>
+          <a:xfrm>
+            <a:off x="6217920" y="1051560"/>
+            <a:ext cx="5486400" cy="640080"/>
+          </a:xfrm>
+          <a:prstGeom prst="rect">
+            <a:avLst/>
+          </a:prstGeom>
+          <a:noFill/>
+        </p:spPr>
+        <p:txBody>
+          <a:bodyPr wrap="square" lIns="45720" rIns="45720" tIns="18288" bIns="18288" anchor="ctr">
+            <a:spAutoFit/>
+          </a:bodyPr>
+          <a:lstStyle/>
+          <a:p>
+            <a:pPr algn="ctr"/>
+            <a:r>
+              <a:rPr sz="1800" b="1" i="0">
+                <a:solidFill>
+                  <a:srgbClr val="FFFFFF"/>
+                </a:solidFill>
+                <a:latin typeface="Calibri"/>
+              </a:rPr>
+              <a:t>✅ SÌ per password</a:t>
+            </a:r>
+          </a:p>
+        </p:txBody>
+      </p:sp>
+      <p:sp>
+        <p:nvSpPr>
+          <p:cNvPr id="10" name="Rounded Rectangle 9"/>
+          <p:cNvSpPr/>
+          <p:nvPr/>
+        </p:nvSpPr>
+        <p:spPr>
+          <a:xfrm>
+            <a:off x="6217920" y="1737360"/>
+            <a:ext cx="5486400" cy="4572000"/>
+          </a:xfrm>
+          <a:prstGeom prst="roundRect">
+            <a:avLst>
+              <a:gd name="adj" fmla="val 8000"/>
+            </a:avLst>
+          </a:prstGeom>
+          <a:solidFill>
+            <a:srgbClr val="FBFBFD"/>
+          </a:solidFill>
+          <a:ln w="25400">
+            <a:solidFill>
+              <a:srgbClr val="06A77D"/>
+            </a:solidFill>
+          </a:ln>
+        </p:spPr>
+        <p:style>
+          <a:lnRef idx="1">
+            <a:schemeClr val="accent1"/>
+          </a:lnRef>
+          <a:fillRef idx="3">
+            <a:schemeClr val="accent1"/>
+          </a:fillRef>
+          <a:effectRef idx="2">
+            <a:schemeClr val="accent1"/>
+          </a:effectRef>
+          <a:fontRef idx="minor">
+            <a:schemeClr val="lt1"/>
+          </a:fontRef>
+        </p:style>
+        <p:txBody>
+          <a:bodyPr rtlCol="0" anchor="ctr"/>
+          <a:lstStyle/>
+          <a:p>
+            <a:pPr algn="ctr"/>
+          </a:p>
+        </p:txBody>
+      </p:sp>
+      <p:sp>
+        <p:nvSpPr>
+          <p:cNvPr id="11" name="TextBox 10"/>
+          <p:cNvSpPr txBox="1"/>
+          <p:nvPr/>
+        </p:nvSpPr>
+        <p:spPr>
+          <a:xfrm>
+            <a:off x="6400800" y="1874519"/>
+            <a:ext cx="5120640" cy="4572000"/>
+          </a:xfrm>
+          <a:prstGeom prst="rect">
+            <a:avLst/>
+          </a:prstGeom>
+          <a:noFill/>
+        </p:spPr>
+        <p:txBody>
+          <a:bodyPr wrap="square">
+            <a:spAutoFit/>
+          </a:bodyPr>
+          <a:lstStyle/>
           <a:p>
             <a:pPr>
               <a:lnSpc>
@@ -10783,22 +11127,22 @@
               </a:spcAft>
             </a:pPr>
             <a:r>
-              <a:rPr sz="2000" b="1">
-                <a:solidFill>
-                  <a:srgbClr val="00A0B0"/>
+              <a:rPr sz="1500" b="1">
+                <a:solidFill>
+                  <a:srgbClr val="06A77D"/>
                 </a:solidFill>
                 <a:latin typeface="Calibri"/>
               </a:rPr>
               <a:t>▸  </a:t>
             </a:r>
             <a:r>
-              <a:rPr sz="2000">
+              <a:rPr sz="1500">
                 <a:solidFill>
                   <a:srgbClr val="1A1A2E"/>
                 </a:solidFill>
                 <a:latin typeface="Calibri"/>
               </a:rPr>
-              <a:t/>
+              <a:t>HASHING (bcrypt, Argon2id)</a:t>
             </a:r>
           </a:p>
           <a:p>
@@ -10811,29 +11155,197 @@
               </a:spcAft>
             </a:pPr>
             <a:r>
-              <a:rPr sz="2000" b="1">
-                <a:solidFill>
-                  <a:srgbClr val="00A0B0"/>
+              <a:rPr sz="1500" b="1">
+                <a:solidFill>
+                  <a:srgbClr val="06A77D"/>
                 </a:solidFill>
                 <a:latin typeface="Calibri"/>
               </a:rPr>
               <a:t>▸  </a:t>
             </a:r>
             <a:r>
-              <a:rPr sz="2000">
+              <a:rPr sz="1500">
                 <a:solidFill>
                   <a:srgbClr val="1A1A2E"/>
                 </a:solidFill>
                 <a:latin typeface="Calibri"/>
               </a:rPr>
-              <a:t>bcrypt e Argon2id sono progettati apposta per essere LENTI</a:t>
+              <a:t>  NON reversibile</a:t>
+            </a:r>
+          </a:p>
+          <a:p>
+            <a:pPr>
+              <a:lnSpc>
+                <a:spcPct val="150000"/>
+              </a:lnSpc>
+              <a:spcAft>
+                <a:spcPts val="400"/>
+              </a:spcAft>
+            </a:pPr>
+            <a:r>
+              <a:rPr sz="1500" b="1">
+                <a:solidFill>
+                  <a:srgbClr val="06A77D"/>
+                </a:solidFill>
+                <a:latin typeface="Calibri"/>
+              </a:rPr>
+              <a:t>▸  </a:t>
+            </a:r>
+            <a:r>
+              <a:rPr sz="1500">
+                <a:solidFill>
+                  <a:srgbClr val="1A1A2E"/>
+                </a:solidFill>
+                <a:latin typeface="Calibri"/>
+              </a:rPr>
+              <a:t>  Salt automatico</a:t>
+            </a:r>
+          </a:p>
+          <a:p>
+            <a:pPr>
+              <a:lnSpc>
+                <a:spcPct val="150000"/>
+              </a:lnSpc>
+              <a:spcAft>
+                <a:spcPts val="400"/>
+              </a:spcAft>
+            </a:pPr>
+            <a:r>
+              <a:rPr sz="1500" b="1">
+                <a:solidFill>
+                  <a:srgbClr val="06A77D"/>
+                </a:solidFill>
+                <a:latin typeface="Calibri"/>
+              </a:rPr>
+              <a:t>▸  </a:t>
+            </a:r>
+            <a:r>
+              <a:rPr sz="1500">
+                <a:solidFill>
+                  <a:srgbClr val="1A1A2E"/>
+                </a:solidFill>
+                <a:latin typeface="Calibri"/>
+              </a:rPr>
+              <a:t>  Work factor lento</a:t>
+            </a:r>
+          </a:p>
+          <a:p>
+            <a:pPr>
+              <a:lnSpc>
+                <a:spcPct val="150000"/>
+              </a:lnSpc>
+              <a:spcAft>
+                <a:spcPts val="400"/>
+              </a:spcAft>
+            </a:pPr>
+            <a:r>
+              <a:rPr sz="1500" b="1">
+                <a:solidFill>
+                  <a:srgbClr val="06A77D"/>
+                </a:solidFill>
+                <a:latin typeface="Calibri"/>
+              </a:rPr>
+              <a:t>▸  </a:t>
+            </a:r>
+            <a:r>
+              <a:rPr sz="1500">
+                <a:solidFill>
+                  <a:srgbClr val="1A1A2E"/>
+                </a:solidFill>
+                <a:latin typeface="Calibri"/>
+              </a:rPr>
+              <a:t/>
+            </a:r>
+          </a:p>
+          <a:p>
+            <a:pPr>
+              <a:lnSpc>
+                <a:spcPct val="150000"/>
+              </a:lnSpc>
+              <a:spcAft>
+                <a:spcPts val="400"/>
+              </a:spcAft>
+            </a:pPr>
+            <a:r>
+              <a:rPr sz="1500" b="1">
+                <a:solidFill>
+                  <a:srgbClr val="06A77D"/>
+                </a:solidFill>
+                <a:latin typeface="Calibri"/>
+              </a:rPr>
+              <a:t>▸  </a:t>
+            </a:r>
+            <a:r>
+              <a:rPr sz="1500">
+                <a:solidFill>
+                  <a:srgbClr val="1A1A2E"/>
+                </a:solidFill>
+                <a:latin typeface="Calibri"/>
+              </a:rPr>
+              <a:t>  bcrypt cost=12 ≈ 250ms</a:t>
+            </a:r>
+          </a:p>
+          <a:p>
+            <a:pPr>
+              <a:lnSpc>
+                <a:spcPct val="150000"/>
+              </a:lnSpc>
+              <a:spcAft>
+                <a:spcPts val="400"/>
+              </a:spcAft>
+            </a:pPr>
+            <a:r>
+              <a:rPr sz="1500" b="1">
+                <a:solidFill>
+                  <a:srgbClr val="06A77D"/>
+                </a:solidFill>
+                <a:latin typeface="Calibri"/>
+              </a:rPr>
+              <a:t>▸  </a:t>
+            </a:r>
+            <a:r>
+              <a:rPr sz="1500">
+                <a:solidFill>
+                  <a:srgbClr val="1A1A2E"/>
+                </a:solidFill>
+                <a:latin typeface="Calibri"/>
+              </a:rPr>
+              <a:t>  Utente: impercettibile</a:t>
+            </a:r>
+          </a:p>
+          <a:p>
+            <a:pPr>
+              <a:lnSpc>
+                <a:spcPct val="150000"/>
+              </a:lnSpc>
+              <a:spcAft>
+                <a:spcPts val="400"/>
+              </a:spcAft>
+            </a:pPr>
+            <a:r>
+              <a:rPr sz="1500" b="1">
+                <a:solidFill>
+                  <a:srgbClr val="06A77D"/>
+                </a:solidFill>
+                <a:latin typeface="Calibri"/>
+              </a:rPr>
+              <a:t>▸  </a:t>
+            </a:r>
+            <a:r>
+              <a:rPr sz="1500">
+                <a:solidFill>
+                  <a:srgbClr val="1A1A2E"/>
+                </a:solidFill>
+                <a:latin typeface="Calibri"/>
+              </a:rPr>
+              <a:t>  Attaccante: devastante</a:t>
             </a:r>
           </a:p>
         </p:txBody>
       </p:sp>
       <p:cxnSp>
         <p:nvCxnSpPr>
-          <p:cNvPr id="5" name="Connector 4"/>
+          <p:cNvPr id="12" name="Connector 11"/>
           <p:cNvCxnSpPr/>
           <p:nvPr/>
         </p:nvCxnSpPr>
@@ -10868,7 +11380,7 @@
       </p:cxnSp>
       <p:sp>
         <p:nvSpPr>
-          <p:cNvPr id="6" name="TextBox 5"/>
+          <p:cNvPr id="13" name="TextBox 12"/>
           <p:cNvSpPr txBox="1"/>
           <p:nvPr/>
         </p:nvSpPr>
@@ -10903,7 +11415,7 @@
       </p:sp>
       <p:sp>
         <p:nvSpPr>
-          <p:cNvPr id="7" name="TextBox 6"/>
+          <p:cNvPr id="14" name="TextBox 13"/>
           <p:cNvSpPr txBox="1"/>
           <p:nvPr/>
         </p:nvSpPr>
@@ -10931,7 +11443,7 @@
                 </a:solidFill>
                 <a:latin typeface="Calibri"/>
               </a:rPr>
-              <a:t>L4  ·  9/14</a:t>
+              <a:t>L4  ·  9/15</a:t>
             </a:r>
           </a:p>
         </p:txBody>
